--- a/docs/pptx/carbo/jx-carbo-linsubhr-ratio-hosp2.pptx
+++ b/docs/pptx/carbo/jx-carbo-linsubhr-ratio-hosp2.pptx
@@ -2271,7 +2271,7 @@
           </p:nvSpPr>
           <p:spPr>
             <a:xfrm>
-              <a:off x="817517" y="5114368"/>
+              <a:off x="817517" y="5142518"/>
               <a:ext cx="7799693" cy="0"/>
             </a:xfrm>
             <a:custGeom>
@@ -2314,7 +2314,7 @@
           </p:nvSpPr>
           <p:spPr>
             <a:xfrm>
-              <a:off x="817517" y="4244691"/>
+              <a:off x="817517" y="4313054"/>
               <a:ext cx="7799693" cy="0"/>
             </a:xfrm>
             <a:custGeom>
@@ -2357,7 +2357,7 @@
           </p:nvSpPr>
           <p:spPr>
             <a:xfrm>
-              <a:off x="817517" y="3375014"/>
+              <a:off x="817517" y="3483591"/>
               <a:ext cx="7799693" cy="0"/>
             </a:xfrm>
             <a:custGeom>
@@ -2400,7 +2400,7 @@
           </p:nvSpPr>
           <p:spPr>
             <a:xfrm>
-              <a:off x="817517" y="2505337"/>
+              <a:off x="817517" y="2654127"/>
               <a:ext cx="7799693" cy="0"/>
             </a:xfrm>
             <a:custGeom>
@@ -2443,15 +2443,15 @@
           </p:nvSpPr>
           <p:spPr>
             <a:xfrm>
-              <a:off x="1615213" y="1896563"/>
-              <a:ext cx="0" cy="3826579"/>
+              <a:off x="1615213" y="2073503"/>
+              <a:ext cx="0" cy="3649639"/>
             </a:xfrm>
             <a:custGeom>
               <a:avLst/>
               <a:pathLst>
-                <a:path w="0" h="3826579">
+                <a:path w="0" h="3649639">
                   <a:moveTo>
-                    <a:pt x="0" y="3826579"/>
+                    <a:pt x="0" y="3649639"/>
                   </a:moveTo>
                   <a:lnTo>
                     <a:pt x="0" y="0"/>
@@ -2486,15 +2486,15 @@
           </p:nvSpPr>
           <p:spPr>
             <a:xfrm>
-              <a:off x="3387871" y="1896563"/>
-              <a:ext cx="0" cy="3826579"/>
+              <a:off x="3387871" y="2073503"/>
+              <a:ext cx="0" cy="3649639"/>
             </a:xfrm>
             <a:custGeom>
               <a:avLst/>
               <a:pathLst>
-                <a:path w="0" h="3826579">
+                <a:path w="0" h="3649639">
                   <a:moveTo>
-                    <a:pt x="0" y="3826579"/>
+                    <a:pt x="0" y="3649639"/>
                   </a:moveTo>
                   <a:lnTo>
                     <a:pt x="0" y="0"/>
@@ -2529,15 +2529,15 @@
           </p:nvSpPr>
           <p:spPr>
             <a:xfrm>
-              <a:off x="5160528" y="1896563"/>
-              <a:ext cx="0" cy="3826579"/>
+              <a:off x="5160528" y="2073503"/>
+              <a:ext cx="0" cy="3649639"/>
             </a:xfrm>
             <a:custGeom>
               <a:avLst/>
               <a:pathLst>
-                <a:path w="0" h="3826579">
+                <a:path w="0" h="3649639">
                   <a:moveTo>
-                    <a:pt x="0" y="3826579"/>
+                    <a:pt x="0" y="3649639"/>
                   </a:moveTo>
                   <a:lnTo>
                     <a:pt x="0" y="0"/>
@@ -2572,15 +2572,15 @@
           </p:nvSpPr>
           <p:spPr>
             <a:xfrm>
-              <a:off x="6933186" y="1896563"/>
-              <a:ext cx="0" cy="3826579"/>
+              <a:off x="6933186" y="2073503"/>
+              <a:ext cx="0" cy="3649639"/>
             </a:xfrm>
             <a:custGeom>
               <a:avLst/>
               <a:pathLst>
-                <a:path w="0" h="3826579">
+                <a:path w="0" h="3649639">
                   <a:moveTo>
-                    <a:pt x="0" y="3826579"/>
+                    <a:pt x="0" y="3649639"/>
                   </a:moveTo>
                   <a:lnTo>
                     <a:pt x="0" y="0"/>
@@ -2615,7 +2615,7 @@
           </p:nvSpPr>
           <p:spPr>
             <a:xfrm>
-              <a:off x="817517" y="5549207"/>
+              <a:off x="817517" y="5557249"/>
               <a:ext cx="7799693" cy="0"/>
             </a:xfrm>
             <a:custGeom>
@@ -2658,7 +2658,7 @@
           </p:nvSpPr>
           <p:spPr>
             <a:xfrm>
-              <a:off x="817517" y="4679530"/>
+              <a:off x="817517" y="4727786"/>
               <a:ext cx="7799693" cy="0"/>
             </a:xfrm>
             <a:custGeom>
@@ -2701,7 +2701,7 @@
           </p:nvSpPr>
           <p:spPr>
             <a:xfrm>
-              <a:off x="817517" y="3809853"/>
+              <a:off x="817517" y="3898322"/>
               <a:ext cx="7799693" cy="0"/>
             </a:xfrm>
             <a:custGeom>
@@ -2744,7 +2744,7 @@
           </p:nvSpPr>
           <p:spPr>
             <a:xfrm>
-              <a:off x="817517" y="2940175"/>
+              <a:off x="817517" y="3068859"/>
               <a:ext cx="7799693" cy="0"/>
             </a:xfrm>
             <a:custGeom>
@@ -2787,7 +2787,7 @@
           </p:nvSpPr>
           <p:spPr>
             <a:xfrm>
-              <a:off x="817517" y="2070498"/>
+              <a:off x="817517" y="2239395"/>
               <a:ext cx="7799693" cy="0"/>
             </a:xfrm>
             <a:custGeom>
@@ -2830,15 +2830,15 @@
           </p:nvSpPr>
           <p:spPr>
             <a:xfrm>
-              <a:off x="2501542" y="1896563"/>
-              <a:ext cx="0" cy="3826579"/>
+              <a:off x="2501542" y="2073503"/>
+              <a:ext cx="0" cy="3649639"/>
             </a:xfrm>
             <a:custGeom>
               <a:avLst/>
               <a:pathLst>
-                <a:path w="0" h="3826579">
+                <a:path w="0" h="3649639">
                   <a:moveTo>
-                    <a:pt x="0" y="3826579"/>
+                    <a:pt x="0" y="3649639"/>
                   </a:moveTo>
                   <a:lnTo>
                     <a:pt x="0" y="0"/>
@@ -2873,15 +2873,15 @@
           </p:nvSpPr>
           <p:spPr>
             <a:xfrm>
-              <a:off x="4274200" y="1896563"/>
-              <a:ext cx="0" cy="3826579"/>
+              <a:off x="4274200" y="2073503"/>
+              <a:ext cx="0" cy="3649639"/>
             </a:xfrm>
             <a:custGeom>
               <a:avLst/>
               <a:pathLst>
-                <a:path w="0" h="3826579">
+                <a:path w="0" h="3649639">
                   <a:moveTo>
-                    <a:pt x="0" y="3826579"/>
+                    <a:pt x="0" y="3649639"/>
                   </a:moveTo>
                   <a:lnTo>
                     <a:pt x="0" y="0"/>
@@ -2916,15 +2916,15 @@
           </p:nvSpPr>
           <p:spPr>
             <a:xfrm>
-              <a:off x="6046857" y="1896563"/>
-              <a:ext cx="0" cy="3826579"/>
+              <a:off x="6046857" y="2073503"/>
+              <a:ext cx="0" cy="3649639"/>
             </a:xfrm>
             <a:custGeom>
               <a:avLst/>
               <a:pathLst>
-                <a:path w="0" h="3826579">
+                <a:path w="0" h="3649639">
                   <a:moveTo>
-                    <a:pt x="0" y="3826579"/>
+                    <a:pt x="0" y="3649639"/>
                   </a:moveTo>
                   <a:lnTo>
                     <a:pt x="0" y="0"/>
@@ -2959,15 +2959,15 @@
           </p:nvSpPr>
           <p:spPr>
             <a:xfrm>
-              <a:off x="7819515" y="1896563"/>
-              <a:ext cx="0" cy="3826579"/>
+              <a:off x="7819515" y="2073503"/>
+              <a:ext cx="0" cy="3649639"/>
             </a:xfrm>
             <a:custGeom>
               <a:avLst/>
               <a:pathLst>
-                <a:path w="0" h="3826579">
+                <a:path w="0" h="3649639">
                   <a:moveTo>
-                    <a:pt x="0" y="3826579"/>
+                    <a:pt x="0" y="3649639"/>
                   </a:moveTo>
                   <a:lnTo>
                     <a:pt x="0" y="0"/>
@@ -3002,549 +3002,549 @@
           </p:nvSpPr>
           <p:spPr>
             <a:xfrm>
-              <a:off x="817517" y="1896563"/>
-              <a:ext cx="7403783" cy="3596116"/>
+              <a:off x="817517" y="2073503"/>
+              <a:ext cx="7403783" cy="3429833"/>
             </a:xfrm>
             <a:custGeom>
               <a:avLst/>
               <a:pathLst>
-                <a:path w="7403783" h="3596116">
+                <a:path w="7403783" h="3429833">
                   <a:moveTo>
                     <a:pt x="1308729" y="0"/>
                   </a:moveTo>
                   <a:lnTo>
-                    <a:pt x="1349811" y="102402"/>
-                  </a:lnTo>
-                  <a:lnTo>
-                    <a:pt x="1426444" y="283664"/>
-                  </a:lnTo>
-                  <a:lnTo>
-                    <a:pt x="1503076" y="455671"/>
-                  </a:lnTo>
-                  <a:lnTo>
-                    <a:pt x="1579709" y="618897"/>
-                  </a:lnTo>
-                  <a:lnTo>
-                    <a:pt x="1656342" y="773788"/>
-                  </a:lnTo>
-                  <a:lnTo>
-                    <a:pt x="1732974" y="920772"/>
-                  </a:lnTo>
-                  <a:lnTo>
-                    <a:pt x="1809607" y="1060251"/>
-                  </a:lnTo>
-                  <a:lnTo>
-                    <a:pt x="1886239" y="1192609"/>
-                  </a:lnTo>
-                  <a:lnTo>
-                    <a:pt x="1962872" y="1318209"/>
-                  </a:lnTo>
-                  <a:lnTo>
-                    <a:pt x="2039504" y="1437397"/>
-                  </a:lnTo>
-                  <a:lnTo>
-                    <a:pt x="2116137" y="1550499"/>
-                  </a:lnTo>
-                  <a:lnTo>
-                    <a:pt x="2192769" y="1657826"/>
-                  </a:lnTo>
-                  <a:lnTo>
-                    <a:pt x="2269402" y="1759674"/>
-                  </a:lnTo>
-                  <a:lnTo>
-                    <a:pt x="2346034" y="1856322"/>
-                  </a:lnTo>
-                  <a:lnTo>
-                    <a:pt x="2422667" y="1948036"/>
-                  </a:lnTo>
-                  <a:lnTo>
-                    <a:pt x="2499300" y="2035067"/>
-                  </a:lnTo>
-                  <a:lnTo>
-                    <a:pt x="2575932" y="2117654"/>
-                  </a:lnTo>
-                  <a:lnTo>
-                    <a:pt x="2652565" y="2196025"/>
-                  </a:lnTo>
-                  <a:lnTo>
-                    <a:pt x="2729197" y="2270394"/>
-                  </a:lnTo>
-                  <a:lnTo>
-                    <a:pt x="2805830" y="2340967"/>
-                  </a:lnTo>
-                  <a:lnTo>
-                    <a:pt x="2882462" y="2407936"/>
-                  </a:lnTo>
-                  <a:lnTo>
-                    <a:pt x="2959095" y="2471486"/>
-                  </a:lnTo>
-                  <a:lnTo>
-                    <a:pt x="3035727" y="2531792"/>
-                  </a:lnTo>
-                  <a:lnTo>
-                    <a:pt x="3112360" y="2589018"/>
-                  </a:lnTo>
-                  <a:lnTo>
-                    <a:pt x="3188993" y="2643323"/>
-                  </a:lnTo>
-                  <a:lnTo>
-                    <a:pt x="3265625" y="2694855"/>
-                  </a:lnTo>
-                  <a:lnTo>
-                    <a:pt x="3342258" y="2743756"/>
-                  </a:lnTo>
-                  <a:lnTo>
-                    <a:pt x="3418890" y="2784348"/>
-                  </a:lnTo>
-                  <a:lnTo>
-                    <a:pt x="3495523" y="2793018"/>
-                  </a:lnTo>
-                  <a:lnTo>
-                    <a:pt x="3572155" y="2801602"/>
-                  </a:lnTo>
-                  <a:lnTo>
-                    <a:pt x="3648788" y="2810099"/>
-                  </a:lnTo>
-                  <a:lnTo>
-                    <a:pt x="3725420" y="2818512"/>
-                  </a:lnTo>
-                  <a:lnTo>
-                    <a:pt x="3802053" y="2826840"/>
-                  </a:lnTo>
-                  <a:lnTo>
-                    <a:pt x="3878685" y="2835086"/>
-                  </a:lnTo>
-                  <a:lnTo>
-                    <a:pt x="3955318" y="2843249"/>
-                  </a:lnTo>
-                  <a:lnTo>
-                    <a:pt x="4031951" y="2851331"/>
-                  </a:lnTo>
-                  <a:lnTo>
-                    <a:pt x="4108583" y="2859332"/>
-                  </a:lnTo>
-                  <a:lnTo>
-                    <a:pt x="4185216" y="2867253"/>
-                  </a:lnTo>
-                  <a:lnTo>
-                    <a:pt x="4261848" y="2875095"/>
-                  </a:lnTo>
-                  <a:lnTo>
-                    <a:pt x="4338481" y="2882859"/>
-                  </a:lnTo>
-                  <a:lnTo>
-                    <a:pt x="4415113" y="2890545"/>
-                  </a:lnTo>
-                  <a:lnTo>
-                    <a:pt x="4491746" y="2898155"/>
-                  </a:lnTo>
-                  <a:lnTo>
-                    <a:pt x="4568378" y="2905688"/>
-                  </a:lnTo>
-                  <a:lnTo>
-                    <a:pt x="4645011" y="2913146"/>
-                  </a:lnTo>
-                  <a:lnTo>
-                    <a:pt x="4721644" y="2920530"/>
-                  </a:lnTo>
-                  <a:lnTo>
-                    <a:pt x="4798276" y="2927840"/>
-                  </a:lnTo>
-                  <a:lnTo>
-                    <a:pt x="4874909" y="2935077"/>
-                  </a:lnTo>
-                  <a:lnTo>
-                    <a:pt x="4951541" y="2942242"/>
-                  </a:lnTo>
-                  <a:lnTo>
-                    <a:pt x="5028174" y="2949335"/>
-                  </a:lnTo>
-                  <a:lnTo>
-                    <a:pt x="5104806" y="2956358"/>
-                  </a:lnTo>
-                  <a:lnTo>
-                    <a:pt x="5181439" y="2963310"/>
-                  </a:lnTo>
-                  <a:lnTo>
-                    <a:pt x="5258071" y="2970193"/>
-                  </a:lnTo>
-                  <a:lnTo>
-                    <a:pt x="5334704" y="2977007"/>
-                  </a:lnTo>
-                  <a:lnTo>
-                    <a:pt x="5411336" y="2983753"/>
-                  </a:lnTo>
-                  <a:lnTo>
-                    <a:pt x="5487969" y="2990432"/>
-                  </a:lnTo>
-                  <a:lnTo>
-                    <a:pt x="5564602" y="2997044"/>
-                  </a:lnTo>
-                  <a:lnTo>
-                    <a:pt x="5641234" y="3003590"/>
-                  </a:lnTo>
-                  <a:lnTo>
-                    <a:pt x="5717867" y="3010071"/>
-                  </a:lnTo>
-                  <a:lnTo>
-                    <a:pt x="5794499" y="3016487"/>
-                  </a:lnTo>
-                  <a:lnTo>
-                    <a:pt x="5871132" y="3022839"/>
-                  </a:lnTo>
-                  <a:lnTo>
-                    <a:pt x="5947764" y="3029127"/>
-                  </a:lnTo>
-                  <a:lnTo>
-                    <a:pt x="6024397" y="3035353"/>
-                  </a:lnTo>
-                  <a:lnTo>
-                    <a:pt x="6101029" y="3041517"/>
-                  </a:lnTo>
-                  <a:lnTo>
-                    <a:pt x="6177662" y="3047619"/>
-                  </a:lnTo>
-                  <a:lnTo>
-                    <a:pt x="6254294" y="3053660"/>
-                  </a:lnTo>
-                  <a:lnTo>
-                    <a:pt x="6330927" y="3059641"/>
-                  </a:lnTo>
-                  <a:lnTo>
-                    <a:pt x="6407560" y="3065562"/>
-                  </a:lnTo>
-                  <a:lnTo>
-                    <a:pt x="6484192" y="3071424"/>
-                  </a:lnTo>
-                  <a:lnTo>
-                    <a:pt x="6560825" y="3077227"/>
-                  </a:lnTo>
-                  <a:lnTo>
-                    <a:pt x="6637457" y="3082973"/>
-                  </a:lnTo>
-                  <a:lnTo>
-                    <a:pt x="6714090" y="3088661"/>
-                  </a:lnTo>
-                  <a:lnTo>
-                    <a:pt x="6790722" y="3094292"/>
-                  </a:lnTo>
-                  <a:lnTo>
-                    <a:pt x="6867355" y="3099867"/>
-                  </a:lnTo>
-                  <a:lnTo>
-                    <a:pt x="6943987" y="3105386"/>
-                  </a:lnTo>
-                  <a:lnTo>
-                    <a:pt x="7020620" y="3110851"/>
-                  </a:lnTo>
-                  <a:lnTo>
-                    <a:pt x="7097253" y="3116260"/>
-                  </a:lnTo>
-                  <a:lnTo>
-                    <a:pt x="7173885" y="3121616"/>
-                  </a:lnTo>
-                  <a:lnTo>
-                    <a:pt x="7250518" y="3126918"/>
-                  </a:lnTo>
-                  <a:lnTo>
-                    <a:pt x="7327150" y="3132168"/>
-                  </a:lnTo>
-                  <a:lnTo>
-                    <a:pt x="7403783" y="3137365"/>
-                  </a:lnTo>
-                  <a:lnTo>
-                    <a:pt x="7403783" y="3596116"/>
-                  </a:lnTo>
-                  <a:lnTo>
-                    <a:pt x="7327150" y="3593075"/>
-                  </a:lnTo>
-                  <a:lnTo>
-                    <a:pt x="7250518" y="3589870"/>
-                  </a:lnTo>
-                  <a:lnTo>
-                    <a:pt x="7173885" y="3586493"/>
-                  </a:lnTo>
-                  <a:lnTo>
-                    <a:pt x="7097253" y="3582934"/>
-                  </a:lnTo>
-                  <a:lnTo>
-                    <a:pt x="7020620" y="3579183"/>
-                  </a:lnTo>
-                  <a:lnTo>
-                    <a:pt x="6943987" y="3575231"/>
-                  </a:lnTo>
-                  <a:lnTo>
-                    <a:pt x="6867355" y="3571066"/>
-                  </a:lnTo>
-                  <a:lnTo>
-                    <a:pt x="6790722" y="3566676"/>
-                  </a:lnTo>
-                  <a:lnTo>
-                    <a:pt x="6714090" y="3562051"/>
-                  </a:lnTo>
-                  <a:lnTo>
-                    <a:pt x="6637457" y="3557177"/>
-                  </a:lnTo>
-                  <a:lnTo>
-                    <a:pt x="6560825" y="3552041"/>
-                  </a:lnTo>
-                  <a:lnTo>
-                    <a:pt x="6484192" y="3546628"/>
-                  </a:lnTo>
-                  <a:lnTo>
-                    <a:pt x="6407560" y="3540924"/>
-                  </a:lnTo>
-                  <a:lnTo>
-                    <a:pt x="6330927" y="3534913"/>
-                  </a:lnTo>
-                  <a:lnTo>
-                    <a:pt x="6254294" y="3528579"/>
-                  </a:lnTo>
-                  <a:lnTo>
-                    <a:pt x="6177662" y="3521904"/>
-                  </a:lnTo>
-                  <a:lnTo>
-                    <a:pt x="6101029" y="3514869"/>
-                  </a:lnTo>
-                  <a:lnTo>
-                    <a:pt x="6024397" y="3507457"/>
-                  </a:lnTo>
-                  <a:lnTo>
-                    <a:pt x="5947764" y="3499645"/>
-                  </a:lnTo>
-                  <a:lnTo>
-                    <a:pt x="5871132" y="3491413"/>
-                  </a:lnTo>
-                  <a:lnTo>
-                    <a:pt x="5794499" y="3482739"/>
-                  </a:lnTo>
-                  <a:lnTo>
-                    <a:pt x="5717867" y="3473597"/>
-                  </a:lnTo>
-                  <a:lnTo>
-                    <a:pt x="5641234" y="3463964"/>
-                  </a:lnTo>
-                  <a:lnTo>
-                    <a:pt x="5564602" y="3453813"/>
-                  </a:lnTo>
-                  <a:lnTo>
-                    <a:pt x="5487969" y="3443115"/>
-                  </a:lnTo>
-                  <a:lnTo>
-                    <a:pt x="5411336" y="3431841"/>
-                  </a:lnTo>
-                  <a:lnTo>
-                    <a:pt x="5334704" y="3419962"/>
-                  </a:lnTo>
-                  <a:lnTo>
-                    <a:pt x="5258071" y="3407443"/>
-                  </a:lnTo>
-                  <a:lnTo>
-                    <a:pt x="5181439" y="3394250"/>
-                  </a:lnTo>
-                  <a:lnTo>
-                    <a:pt x="5104806" y="3380348"/>
-                  </a:lnTo>
-                  <a:lnTo>
-                    <a:pt x="5028174" y="3365697"/>
-                  </a:lnTo>
-                  <a:lnTo>
-                    <a:pt x="4951541" y="3350259"/>
-                  </a:lnTo>
-                  <a:lnTo>
-                    <a:pt x="4874909" y="3333989"/>
-                  </a:lnTo>
-                  <a:lnTo>
-                    <a:pt x="4798276" y="3316845"/>
-                  </a:lnTo>
-                  <a:lnTo>
-                    <a:pt x="4721644" y="3298778"/>
-                  </a:lnTo>
-                  <a:lnTo>
-                    <a:pt x="4645011" y="3279738"/>
-                  </a:lnTo>
-                  <a:lnTo>
-                    <a:pt x="4568378" y="3259675"/>
-                  </a:lnTo>
-                  <a:lnTo>
-                    <a:pt x="4491746" y="3238532"/>
-                  </a:lnTo>
-                  <a:lnTo>
-                    <a:pt x="4415113" y="3216251"/>
-                  </a:lnTo>
-                  <a:lnTo>
-                    <a:pt x="4338481" y="3192772"/>
-                  </a:lnTo>
-                  <a:lnTo>
-                    <a:pt x="4261848" y="3168030"/>
-                  </a:lnTo>
-                  <a:lnTo>
-                    <a:pt x="4185216" y="3141956"/>
-                  </a:lnTo>
-                  <a:lnTo>
-                    <a:pt x="4108583" y="3114479"/>
-                  </a:lnTo>
-                  <a:lnTo>
-                    <a:pt x="4031951" y="3085524"/>
-                  </a:lnTo>
-                  <a:lnTo>
-                    <a:pt x="3955318" y="3055011"/>
-                  </a:lnTo>
-                  <a:lnTo>
-                    <a:pt x="3878685" y="3022857"/>
-                  </a:lnTo>
-                  <a:lnTo>
-                    <a:pt x="3802053" y="2988972"/>
-                  </a:lnTo>
-                  <a:lnTo>
-                    <a:pt x="3725420" y="2953265"/>
-                  </a:lnTo>
-                  <a:lnTo>
-                    <a:pt x="3648788" y="2915636"/>
-                  </a:lnTo>
-                  <a:lnTo>
-                    <a:pt x="3572155" y="2875982"/>
-                  </a:lnTo>
-                  <a:lnTo>
-                    <a:pt x="3495523" y="2834196"/>
-                  </a:lnTo>
-                  <a:lnTo>
-                    <a:pt x="3418890" y="2790160"/>
-                  </a:lnTo>
-                  <a:lnTo>
-                    <a:pt x="3342258" y="2775591"/>
-                  </a:lnTo>
-                  <a:lnTo>
-                    <a:pt x="3265625" y="2766746"/>
-                  </a:lnTo>
-                  <a:lnTo>
-                    <a:pt x="3188993" y="2757811"/>
-                  </a:lnTo>
-                  <a:lnTo>
-                    <a:pt x="3112360" y="2748786"/>
-                  </a:lnTo>
-                  <a:lnTo>
-                    <a:pt x="3035727" y="2739670"/>
-                  </a:lnTo>
-                  <a:lnTo>
-                    <a:pt x="2959095" y="2730462"/>
-                  </a:lnTo>
-                  <a:lnTo>
-                    <a:pt x="2882462" y="2721161"/>
-                  </a:lnTo>
-                  <a:lnTo>
-                    <a:pt x="2805830" y="2711767"/>
-                  </a:lnTo>
-                  <a:lnTo>
-                    <a:pt x="2729197" y="2702277"/>
-                  </a:lnTo>
-                  <a:lnTo>
-                    <a:pt x="2652565" y="2692692"/>
-                  </a:lnTo>
-                  <a:lnTo>
-                    <a:pt x="2575932" y="2683011"/>
-                  </a:lnTo>
-                  <a:lnTo>
-                    <a:pt x="2499300" y="2673231"/>
-                  </a:lnTo>
-                  <a:lnTo>
-                    <a:pt x="2422667" y="2663354"/>
-                  </a:lnTo>
-                  <a:lnTo>
-                    <a:pt x="2346034" y="2653376"/>
-                  </a:lnTo>
-                  <a:lnTo>
-                    <a:pt x="2269402" y="2643298"/>
-                  </a:lnTo>
-                  <a:lnTo>
-                    <a:pt x="2192769" y="2633118"/>
-                  </a:lnTo>
-                  <a:lnTo>
-                    <a:pt x="2116137" y="2622835"/>
-                  </a:lnTo>
-                  <a:lnTo>
-                    <a:pt x="2039504" y="2612449"/>
-                  </a:lnTo>
-                  <a:lnTo>
-                    <a:pt x="1962872" y="2601958"/>
-                  </a:lnTo>
-                  <a:lnTo>
-                    <a:pt x="1886239" y="2591361"/>
-                  </a:lnTo>
-                  <a:lnTo>
-                    <a:pt x="1809607" y="2580658"/>
-                  </a:lnTo>
-                  <a:lnTo>
-                    <a:pt x="1732974" y="2569846"/>
-                  </a:lnTo>
-                  <a:lnTo>
-                    <a:pt x="1656342" y="2558926"/>
-                  </a:lnTo>
-                  <a:lnTo>
-                    <a:pt x="1579709" y="2547895"/>
-                  </a:lnTo>
-                  <a:lnTo>
-                    <a:pt x="1503076" y="2536753"/>
-                  </a:lnTo>
-                  <a:lnTo>
-                    <a:pt x="1426444" y="2525498"/>
-                  </a:lnTo>
-                  <a:lnTo>
-                    <a:pt x="1349811" y="2514130"/>
-                  </a:lnTo>
-                  <a:lnTo>
-                    <a:pt x="1273179" y="2502648"/>
-                  </a:lnTo>
-                  <a:lnTo>
-                    <a:pt x="1196546" y="2491049"/>
-                  </a:lnTo>
-                  <a:lnTo>
-                    <a:pt x="1119914" y="2479334"/>
-                  </a:lnTo>
-                  <a:lnTo>
-                    <a:pt x="1043281" y="2467501"/>
-                  </a:lnTo>
-                  <a:lnTo>
-                    <a:pt x="966649" y="2455548"/>
-                  </a:lnTo>
-                  <a:lnTo>
-                    <a:pt x="890016" y="2443474"/>
-                  </a:lnTo>
-                  <a:lnTo>
-                    <a:pt x="813384" y="2431279"/>
-                  </a:lnTo>
-                  <a:lnTo>
-                    <a:pt x="736751" y="2418961"/>
-                  </a:lnTo>
-                  <a:lnTo>
-                    <a:pt x="660118" y="2406519"/>
-                  </a:lnTo>
-                  <a:lnTo>
-                    <a:pt x="583486" y="2393951"/>
-                  </a:lnTo>
-                  <a:lnTo>
-                    <a:pt x="506853" y="2381256"/>
-                  </a:lnTo>
-                  <a:lnTo>
-                    <a:pt x="430221" y="2368433"/>
-                  </a:lnTo>
-                  <a:lnTo>
-                    <a:pt x="353588" y="2355481"/>
-                  </a:lnTo>
-                  <a:lnTo>
-                    <a:pt x="276956" y="2342399"/>
-                  </a:lnTo>
-                  <a:lnTo>
-                    <a:pt x="200323" y="2329184"/>
-                  </a:lnTo>
-                  <a:lnTo>
-                    <a:pt x="123691" y="2315836"/>
-                  </a:lnTo>
-                  <a:lnTo>
-                    <a:pt x="47058" y="2302354"/>
-                  </a:lnTo>
-                  <a:lnTo>
-                    <a:pt x="0" y="2293991"/>
+                    <a:pt x="1349811" y="97667"/>
+                  </a:lnTo>
+                  <a:lnTo>
+                    <a:pt x="1426444" y="270547"/>
+                  </a:lnTo>
+                  <a:lnTo>
+                    <a:pt x="1503076" y="434601"/>
+                  </a:lnTo>
+                  <a:lnTo>
+                    <a:pt x="1579709" y="590279"/>
+                  </a:lnTo>
+                  <a:lnTo>
+                    <a:pt x="1656342" y="738009"/>
+                  </a:lnTo>
+                  <a:lnTo>
+                    <a:pt x="1732974" y="878196"/>
+                  </a:lnTo>
+                  <a:lnTo>
+                    <a:pt x="1809607" y="1011225"/>
+                  </a:lnTo>
+                  <a:lnTo>
+                    <a:pt x="1886239" y="1137463"/>
+                  </a:lnTo>
+                  <a:lnTo>
+                    <a:pt x="1962872" y="1257256"/>
+                  </a:lnTo>
+                  <a:lnTo>
+                    <a:pt x="2039504" y="1370932"/>
+                  </a:lnTo>
+                  <a:lnTo>
+                    <a:pt x="2116137" y="1478804"/>
+                  </a:lnTo>
+                  <a:lnTo>
+                    <a:pt x="2192769" y="1581169"/>
+                  </a:lnTo>
+                  <a:lnTo>
+                    <a:pt x="2269402" y="1678308"/>
+                  </a:lnTo>
+                  <a:lnTo>
+                    <a:pt x="2346034" y="1770487"/>
+                  </a:lnTo>
+                  <a:lnTo>
+                    <a:pt x="2422667" y="1857959"/>
+                  </a:lnTo>
+                  <a:lnTo>
+                    <a:pt x="2499300" y="1940966"/>
+                  </a:lnTo>
+                  <a:lnTo>
+                    <a:pt x="2575932" y="2019734"/>
+                  </a:lnTo>
+                  <a:lnTo>
+                    <a:pt x="2652565" y="2094481"/>
+                  </a:lnTo>
+                  <a:lnTo>
+                    <a:pt x="2729197" y="2165412"/>
+                  </a:lnTo>
+                  <a:lnTo>
+                    <a:pt x="2805830" y="2232721"/>
+                  </a:lnTo>
+                  <a:lnTo>
+                    <a:pt x="2882462" y="2296594"/>
+                  </a:lnTo>
+                  <a:lnTo>
+                    <a:pt x="2959095" y="2357205"/>
+                  </a:lnTo>
+                  <a:lnTo>
+                    <a:pt x="3035727" y="2414722"/>
+                  </a:lnTo>
+                  <a:lnTo>
+                    <a:pt x="3112360" y="2469303"/>
+                  </a:lnTo>
+                  <a:lnTo>
+                    <a:pt x="3188993" y="2521096"/>
+                  </a:lnTo>
+                  <a:lnTo>
+                    <a:pt x="3265625" y="2570246"/>
+                  </a:lnTo>
+                  <a:lnTo>
+                    <a:pt x="3342258" y="2616886"/>
+                  </a:lnTo>
+                  <a:lnTo>
+                    <a:pt x="3418890" y="2655601"/>
+                  </a:lnTo>
+                  <a:lnTo>
+                    <a:pt x="3495523" y="2663870"/>
+                  </a:lnTo>
+                  <a:lnTo>
+                    <a:pt x="3572155" y="2672056"/>
+                  </a:lnTo>
+                  <a:lnTo>
+                    <a:pt x="3648788" y="2680161"/>
+                  </a:lnTo>
+                  <a:lnTo>
+                    <a:pt x="3725420" y="2688185"/>
+                  </a:lnTo>
+                  <a:lnTo>
+                    <a:pt x="3802053" y="2696128"/>
+                  </a:lnTo>
+                  <a:lnTo>
+                    <a:pt x="3878685" y="2703993"/>
+                  </a:lnTo>
+                  <a:lnTo>
+                    <a:pt x="3955318" y="2711778"/>
+                  </a:lnTo>
+                  <a:lnTo>
+                    <a:pt x="4031951" y="2719486"/>
+                  </a:lnTo>
+                  <a:lnTo>
+                    <a:pt x="4108583" y="2727117"/>
+                  </a:lnTo>
+                  <a:lnTo>
+                    <a:pt x="4185216" y="2734672"/>
+                  </a:lnTo>
+                  <a:lnTo>
+                    <a:pt x="4261848" y="2742152"/>
+                  </a:lnTo>
+                  <a:lnTo>
+                    <a:pt x="4338481" y="2749556"/>
+                  </a:lnTo>
+                  <a:lnTo>
+                    <a:pt x="4415113" y="2756887"/>
+                  </a:lnTo>
+                  <a:lnTo>
+                    <a:pt x="4491746" y="2764145"/>
+                  </a:lnTo>
+                  <a:lnTo>
+                    <a:pt x="4568378" y="2771330"/>
+                  </a:lnTo>
+                  <a:lnTo>
+                    <a:pt x="4645011" y="2778443"/>
+                  </a:lnTo>
+                  <a:lnTo>
+                    <a:pt x="4721644" y="2785486"/>
+                  </a:lnTo>
+                  <a:lnTo>
+                    <a:pt x="4798276" y="2792458"/>
+                  </a:lnTo>
+                  <a:lnTo>
+                    <a:pt x="4874909" y="2799360"/>
+                  </a:lnTo>
+                  <a:lnTo>
+                    <a:pt x="4951541" y="2806194"/>
+                  </a:lnTo>
+                  <a:lnTo>
+                    <a:pt x="5028174" y="2812959"/>
+                  </a:lnTo>
+                  <a:lnTo>
+                    <a:pt x="5104806" y="2819657"/>
+                  </a:lnTo>
+                  <a:lnTo>
+                    <a:pt x="5181439" y="2826288"/>
+                  </a:lnTo>
+                  <a:lnTo>
+                    <a:pt x="5258071" y="2832852"/>
+                  </a:lnTo>
+                  <a:lnTo>
+                    <a:pt x="5334704" y="2839351"/>
+                  </a:lnTo>
+                  <a:lnTo>
+                    <a:pt x="5411336" y="2845786"/>
+                  </a:lnTo>
+                  <a:lnTo>
+                    <a:pt x="5487969" y="2852156"/>
+                  </a:lnTo>
+                  <a:lnTo>
+                    <a:pt x="5564602" y="2858462"/>
+                  </a:lnTo>
+                  <a:lnTo>
+                    <a:pt x="5641234" y="2864705"/>
+                  </a:lnTo>
+                  <a:lnTo>
+                    <a:pt x="5717867" y="2870886"/>
+                  </a:lnTo>
+                  <a:lnTo>
+                    <a:pt x="5794499" y="2877006"/>
+                  </a:lnTo>
+                  <a:lnTo>
+                    <a:pt x="5871132" y="2883064"/>
+                  </a:lnTo>
+                  <a:lnTo>
+                    <a:pt x="5947764" y="2889062"/>
+                  </a:lnTo>
+                  <a:lnTo>
+                    <a:pt x="6024397" y="2895000"/>
+                  </a:lnTo>
+                  <a:lnTo>
+                    <a:pt x="6101029" y="2900878"/>
+                  </a:lnTo>
+                  <a:lnTo>
+                    <a:pt x="6177662" y="2906698"/>
+                  </a:lnTo>
+                  <a:lnTo>
+                    <a:pt x="6254294" y="2912460"/>
+                  </a:lnTo>
+                  <a:lnTo>
+                    <a:pt x="6330927" y="2918164"/>
+                  </a:lnTo>
+                  <a:lnTo>
+                    <a:pt x="6407560" y="2923811"/>
+                  </a:lnTo>
+                  <a:lnTo>
+                    <a:pt x="6484192" y="2929402"/>
+                  </a:lnTo>
+                  <a:lnTo>
+                    <a:pt x="6560825" y="2934937"/>
+                  </a:lnTo>
+                  <a:lnTo>
+                    <a:pt x="6637457" y="2940417"/>
+                  </a:lnTo>
+                  <a:lnTo>
+                    <a:pt x="6714090" y="2945842"/>
+                  </a:lnTo>
+                  <a:lnTo>
+                    <a:pt x="6790722" y="2951213"/>
+                  </a:lnTo>
+                  <a:lnTo>
+                    <a:pt x="6867355" y="2956530"/>
+                  </a:lnTo>
+                  <a:lnTo>
+                    <a:pt x="6943987" y="2961795"/>
+                  </a:lnTo>
+                  <a:lnTo>
+                    <a:pt x="7020620" y="2967006"/>
+                  </a:lnTo>
+                  <a:lnTo>
+                    <a:pt x="7097253" y="2972166"/>
+                  </a:lnTo>
+                  <a:lnTo>
+                    <a:pt x="7173885" y="2977274"/>
+                  </a:lnTo>
+                  <a:lnTo>
+                    <a:pt x="7250518" y="2982331"/>
+                  </a:lnTo>
+                  <a:lnTo>
+                    <a:pt x="7327150" y="2987337"/>
+                  </a:lnTo>
+                  <a:lnTo>
+                    <a:pt x="7403783" y="2992294"/>
+                  </a:lnTo>
+                  <a:lnTo>
+                    <a:pt x="7403783" y="3429833"/>
+                  </a:lnTo>
+                  <a:lnTo>
+                    <a:pt x="7327150" y="3426933"/>
+                  </a:lnTo>
+                  <a:lnTo>
+                    <a:pt x="7250518" y="3423876"/>
+                  </a:lnTo>
+                  <a:lnTo>
+                    <a:pt x="7173885" y="3420655"/>
+                  </a:lnTo>
+                  <a:lnTo>
+                    <a:pt x="7097253" y="3417260"/>
+                  </a:lnTo>
+                  <a:lnTo>
+                    <a:pt x="7020620" y="3413683"/>
+                  </a:lnTo>
+                  <a:lnTo>
+                    <a:pt x="6943987" y="3409913"/>
+                  </a:lnTo>
+                  <a:lnTo>
+                    <a:pt x="6867355" y="3405941"/>
+                  </a:lnTo>
+                  <a:lnTo>
+                    <a:pt x="6790722" y="3401755"/>
+                  </a:lnTo>
+                  <a:lnTo>
+                    <a:pt x="6714090" y="3397343"/>
+                  </a:lnTo>
+                  <a:lnTo>
+                    <a:pt x="6637457" y="3392694"/>
+                  </a:lnTo>
+                  <a:lnTo>
+                    <a:pt x="6560825" y="3387796"/>
+                  </a:lnTo>
+                  <a:lnTo>
+                    <a:pt x="6484192" y="3382633"/>
+                  </a:lnTo>
+                  <a:lnTo>
+                    <a:pt x="6407560" y="3377193"/>
+                  </a:lnTo>
+                  <a:lnTo>
+                    <a:pt x="6330927" y="3371460"/>
+                  </a:lnTo>
+                  <a:lnTo>
+                    <a:pt x="6254294" y="3365419"/>
+                  </a:lnTo>
+                  <a:lnTo>
+                    <a:pt x="6177662" y="3359052"/>
+                  </a:lnTo>
+                  <a:lnTo>
+                    <a:pt x="6101029" y="3352343"/>
+                  </a:lnTo>
+                  <a:lnTo>
+                    <a:pt x="6024397" y="3345273"/>
+                  </a:lnTo>
+                  <a:lnTo>
+                    <a:pt x="5947764" y="3337823"/>
+                  </a:lnTo>
+                  <a:lnTo>
+                    <a:pt x="5871132" y="3329972"/>
+                  </a:lnTo>
+                  <a:lnTo>
+                    <a:pt x="5794499" y="3321698"/>
+                  </a:lnTo>
+                  <a:lnTo>
+                    <a:pt x="5717867" y="3312979"/>
+                  </a:lnTo>
+                  <a:lnTo>
+                    <a:pt x="5641234" y="3303792"/>
+                  </a:lnTo>
+                  <a:lnTo>
+                    <a:pt x="5564602" y="3294109"/>
+                  </a:lnTo>
+                  <a:lnTo>
+                    <a:pt x="5487969" y="3283906"/>
+                  </a:lnTo>
+                  <a:lnTo>
+                    <a:pt x="5411336" y="3273154"/>
+                  </a:lnTo>
+                  <a:lnTo>
+                    <a:pt x="5334704" y="3261824"/>
+                  </a:lnTo>
+                  <a:lnTo>
+                    <a:pt x="5258071" y="3249884"/>
+                  </a:lnTo>
+                  <a:lnTo>
+                    <a:pt x="5181439" y="3237301"/>
+                  </a:lnTo>
+                  <a:lnTo>
+                    <a:pt x="5104806" y="3224042"/>
+                  </a:lnTo>
+                  <a:lnTo>
+                    <a:pt x="5028174" y="3210069"/>
+                  </a:lnTo>
+                  <a:lnTo>
+                    <a:pt x="4951541" y="3195344"/>
+                  </a:lnTo>
+                  <a:lnTo>
+                    <a:pt x="4874909" y="3179827"/>
+                  </a:lnTo>
+                  <a:lnTo>
+                    <a:pt x="4798276" y="3163475"/>
+                  </a:lnTo>
+                  <a:lnTo>
+                    <a:pt x="4721644" y="3146243"/>
+                  </a:lnTo>
+                  <a:lnTo>
+                    <a:pt x="4645011" y="3128085"/>
+                  </a:lnTo>
+                  <a:lnTo>
+                    <a:pt x="4568378" y="3108949"/>
+                  </a:lnTo>
+                  <a:lnTo>
+                    <a:pt x="4491746" y="3088783"/>
+                  </a:lnTo>
+                  <a:lnTo>
+                    <a:pt x="4415113" y="3067533"/>
+                  </a:lnTo>
+                  <a:lnTo>
+                    <a:pt x="4338481" y="3045140"/>
+                  </a:lnTo>
+                  <a:lnTo>
+                    <a:pt x="4261848" y="3021541"/>
+                  </a:lnTo>
+                  <a:lnTo>
+                    <a:pt x="4185216" y="2996673"/>
+                  </a:lnTo>
+                  <a:lnTo>
+                    <a:pt x="4108583" y="2970467"/>
+                  </a:lnTo>
+                  <a:lnTo>
+                    <a:pt x="4031951" y="2942851"/>
+                  </a:lnTo>
+                  <a:lnTo>
+                    <a:pt x="3955318" y="2913749"/>
+                  </a:lnTo>
+                  <a:lnTo>
+                    <a:pt x="3878685" y="2883081"/>
+                  </a:lnTo>
+                  <a:lnTo>
+                    <a:pt x="3802053" y="2850763"/>
+                  </a:lnTo>
+                  <a:lnTo>
+                    <a:pt x="3725420" y="2816707"/>
+                  </a:lnTo>
+                  <a:lnTo>
+                    <a:pt x="3648788" y="2780818"/>
+                  </a:lnTo>
+                  <a:lnTo>
+                    <a:pt x="3572155" y="2742998"/>
+                  </a:lnTo>
+                  <a:lnTo>
+                    <a:pt x="3495523" y="2703143"/>
+                  </a:lnTo>
+                  <a:lnTo>
+                    <a:pt x="3418890" y="2661144"/>
+                  </a:lnTo>
+                  <a:lnTo>
+                    <a:pt x="3342258" y="2647249"/>
+                  </a:lnTo>
+                  <a:lnTo>
+                    <a:pt x="3265625" y="2638812"/>
+                  </a:lnTo>
+                  <a:lnTo>
+                    <a:pt x="3188993" y="2630291"/>
+                  </a:lnTo>
+                  <a:lnTo>
+                    <a:pt x="3112360" y="2621683"/>
+                  </a:lnTo>
+                  <a:lnTo>
+                    <a:pt x="3035727" y="2612989"/>
+                  </a:lnTo>
+                  <a:lnTo>
+                    <a:pt x="2959095" y="2604206"/>
+                  </a:lnTo>
+                  <a:lnTo>
+                    <a:pt x="2882462" y="2595336"/>
+                  </a:lnTo>
+                  <a:lnTo>
+                    <a:pt x="2805830" y="2586376"/>
+                  </a:lnTo>
+                  <a:lnTo>
+                    <a:pt x="2729197" y="2577325"/>
+                  </a:lnTo>
+                  <a:lnTo>
+                    <a:pt x="2652565" y="2568183"/>
+                  </a:lnTo>
+                  <a:lnTo>
+                    <a:pt x="2575932" y="2558949"/>
+                  </a:lnTo>
+                  <a:lnTo>
+                    <a:pt x="2499300" y="2549622"/>
+                  </a:lnTo>
+                  <a:lnTo>
+                    <a:pt x="2422667" y="2540201"/>
+                  </a:lnTo>
+                  <a:lnTo>
+                    <a:pt x="2346034" y="2530685"/>
+                  </a:lnTo>
+                  <a:lnTo>
+                    <a:pt x="2269402" y="2521073"/>
+                  </a:lnTo>
+                  <a:lnTo>
+                    <a:pt x="2192769" y="2511364"/>
+                  </a:lnTo>
+                  <a:lnTo>
+                    <a:pt x="2116137" y="2501556"/>
+                  </a:lnTo>
+                  <a:lnTo>
+                    <a:pt x="2039504" y="2491651"/>
+                  </a:lnTo>
+                  <a:lnTo>
+                    <a:pt x="1962872" y="2481645"/>
+                  </a:lnTo>
+                  <a:lnTo>
+                    <a:pt x="1886239" y="2471538"/>
+                  </a:lnTo>
+                  <a:lnTo>
+                    <a:pt x="1809607" y="2461329"/>
+                  </a:lnTo>
+                  <a:lnTo>
+                    <a:pt x="1732974" y="2451017"/>
+                  </a:lnTo>
+                  <a:lnTo>
+                    <a:pt x="1656342" y="2440602"/>
+                  </a:lnTo>
+                  <a:lnTo>
+                    <a:pt x="1579709" y="2430081"/>
+                  </a:lnTo>
+                  <a:lnTo>
+                    <a:pt x="1503076" y="2419454"/>
+                  </a:lnTo>
+                  <a:lnTo>
+                    <a:pt x="1426444" y="2408720"/>
+                  </a:lnTo>
+                  <a:lnTo>
+                    <a:pt x="1349811" y="2397878"/>
+                  </a:lnTo>
+                  <a:lnTo>
+                    <a:pt x="1273179" y="2386926"/>
+                  </a:lnTo>
+                  <a:lnTo>
+                    <a:pt x="1196546" y="2375864"/>
+                  </a:lnTo>
+                  <a:lnTo>
+                    <a:pt x="1119914" y="2364691"/>
+                  </a:lnTo>
+                  <a:lnTo>
+                    <a:pt x="1043281" y="2353404"/>
+                  </a:lnTo>
+                  <a:lnTo>
+                    <a:pt x="966649" y="2342004"/>
+                  </a:lnTo>
+                  <a:lnTo>
+                    <a:pt x="890016" y="2330489"/>
+                  </a:lnTo>
+                  <a:lnTo>
+                    <a:pt x="813384" y="2318858"/>
+                  </a:lnTo>
+                  <a:lnTo>
+                    <a:pt x="736751" y="2307109"/>
+                  </a:lnTo>
+                  <a:lnTo>
+                    <a:pt x="660118" y="2295242"/>
+                  </a:lnTo>
+                  <a:lnTo>
+                    <a:pt x="583486" y="2283255"/>
+                  </a:lnTo>
+                  <a:lnTo>
+                    <a:pt x="506853" y="2271148"/>
+                  </a:lnTo>
+                  <a:lnTo>
+                    <a:pt x="430221" y="2258918"/>
+                  </a:lnTo>
+                  <a:lnTo>
+                    <a:pt x="353588" y="2246565"/>
+                  </a:lnTo>
+                  <a:lnTo>
+                    <a:pt x="276956" y="2234087"/>
+                  </a:lnTo>
+                  <a:lnTo>
+                    <a:pt x="200323" y="2221483"/>
+                  </a:lnTo>
+                  <a:lnTo>
+                    <a:pt x="123691" y="2208753"/>
+                  </a:lnTo>
+                  <a:lnTo>
+                    <a:pt x="47058" y="2195894"/>
+                  </a:lnTo>
+                  <a:lnTo>
+                    <a:pt x="0" y="2187918"/>
                   </a:lnTo>
                   <a:close/>
                 </a:path>
@@ -3570,255 +3570,255 @@
           </p:nvSpPr>
           <p:spPr>
             <a:xfrm>
-              <a:off x="2126247" y="1896563"/>
-              <a:ext cx="6095053" cy="3137365"/>
+              <a:off x="2126247" y="2073503"/>
+              <a:ext cx="6095053" cy="2992294"/>
             </a:xfrm>
             <a:custGeom>
               <a:avLst/>
               <a:pathLst>
-                <a:path w="6095053" h="3137365">
+                <a:path w="6095053" h="2992294">
                   <a:moveTo>
                     <a:pt x="0" y="0"/>
                   </a:moveTo>
                   <a:lnTo>
-                    <a:pt x="41082" y="102402"/>
-                  </a:lnTo>
-                  <a:lnTo>
-                    <a:pt x="117715" y="283664"/>
-                  </a:lnTo>
-                  <a:lnTo>
-                    <a:pt x="194347" y="455671"/>
-                  </a:lnTo>
-                  <a:lnTo>
-                    <a:pt x="270980" y="618897"/>
-                  </a:lnTo>
-                  <a:lnTo>
-                    <a:pt x="347612" y="773788"/>
-                  </a:lnTo>
-                  <a:lnTo>
-                    <a:pt x="424245" y="920772"/>
-                  </a:lnTo>
-                  <a:lnTo>
-                    <a:pt x="500877" y="1060251"/>
-                  </a:lnTo>
-                  <a:lnTo>
-                    <a:pt x="577510" y="1192609"/>
-                  </a:lnTo>
-                  <a:lnTo>
-                    <a:pt x="654142" y="1318209"/>
-                  </a:lnTo>
-                  <a:lnTo>
-                    <a:pt x="730775" y="1437397"/>
-                  </a:lnTo>
-                  <a:lnTo>
-                    <a:pt x="807407" y="1550499"/>
-                  </a:lnTo>
-                  <a:lnTo>
-                    <a:pt x="884040" y="1657826"/>
-                  </a:lnTo>
-                  <a:lnTo>
-                    <a:pt x="960673" y="1759674"/>
-                  </a:lnTo>
-                  <a:lnTo>
-                    <a:pt x="1037305" y="1856322"/>
-                  </a:lnTo>
-                  <a:lnTo>
-                    <a:pt x="1113938" y="1948036"/>
-                  </a:lnTo>
-                  <a:lnTo>
-                    <a:pt x="1190570" y="2035067"/>
-                  </a:lnTo>
-                  <a:lnTo>
-                    <a:pt x="1267203" y="2117654"/>
-                  </a:lnTo>
-                  <a:lnTo>
-                    <a:pt x="1343835" y="2196025"/>
-                  </a:lnTo>
-                  <a:lnTo>
-                    <a:pt x="1420468" y="2270394"/>
-                  </a:lnTo>
-                  <a:lnTo>
-                    <a:pt x="1497100" y="2340967"/>
-                  </a:lnTo>
-                  <a:lnTo>
-                    <a:pt x="1573733" y="2407936"/>
-                  </a:lnTo>
-                  <a:lnTo>
-                    <a:pt x="1650366" y="2471486"/>
-                  </a:lnTo>
-                  <a:lnTo>
-                    <a:pt x="1726998" y="2531792"/>
-                  </a:lnTo>
-                  <a:lnTo>
-                    <a:pt x="1803631" y="2589018"/>
-                  </a:lnTo>
-                  <a:lnTo>
-                    <a:pt x="1880263" y="2643323"/>
-                  </a:lnTo>
-                  <a:lnTo>
-                    <a:pt x="1956896" y="2694855"/>
-                  </a:lnTo>
-                  <a:lnTo>
-                    <a:pt x="2033528" y="2743756"/>
-                  </a:lnTo>
-                  <a:lnTo>
-                    <a:pt x="2110161" y="2784348"/>
-                  </a:lnTo>
-                  <a:lnTo>
-                    <a:pt x="2186793" y="2793018"/>
-                  </a:lnTo>
-                  <a:lnTo>
-                    <a:pt x="2263426" y="2801602"/>
-                  </a:lnTo>
-                  <a:lnTo>
-                    <a:pt x="2340058" y="2810099"/>
-                  </a:lnTo>
-                  <a:lnTo>
-                    <a:pt x="2416691" y="2818512"/>
-                  </a:lnTo>
-                  <a:lnTo>
-                    <a:pt x="2493324" y="2826840"/>
-                  </a:lnTo>
-                  <a:lnTo>
-                    <a:pt x="2569956" y="2835086"/>
-                  </a:lnTo>
-                  <a:lnTo>
-                    <a:pt x="2646589" y="2843249"/>
-                  </a:lnTo>
-                  <a:lnTo>
-                    <a:pt x="2723221" y="2851331"/>
-                  </a:lnTo>
-                  <a:lnTo>
-                    <a:pt x="2799854" y="2859332"/>
-                  </a:lnTo>
-                  <a:lnTo>
-                    <a:pt x="2876486" y="2867253"/>
-                  </a:lnTo>
-                  <a:lnTo>
-                    <a:pt x="2953119" y="2875095"/>
-                  </a:lnTo>
-                  <a:lnTo>
-                    <a:pt x="3029751" y="2882859"/>
-                  </a:lnTo>
-                  <a:lnTo>
-                    <a:pt x="3106384" y="2890545"/>
-                  </a:lnTo>
-                  <a:lnTo>
-                    <a:pt x="3183016" y="2898155"/>
-                  </a:lnTo>
-                  <a:lnTo>
-                    <a:pt x="3259649" y="2905688"/>
-                  </a:lnTo>
-                  <a:lnTo>
-                    <a:pt x="3336282" y="2913146"/>
-                  </a:lnTo>
-                  <a:lnTo>
-                    <a:pt x="3412914" y="2920530"/>
-                  </a:lnTo>
-                  <a:lnTo>
-                    <a:pt x="3489547" y="2927840"/>
-                  </a:lnTo>
-                  <a:lnTo>
-                    <a:pt x="3566179" y="2935077"/>
-                  </a:lnTo>
-                  <a:lnTo>
-                    <a:pt x="3642812" y="2942242"/>
-                  </a:lnTo>
-                  <a:lnTo>
-                    <a:pt x="3719444" y="2949335"/>
-                  </a:lnTo>
-                  <a:lnTo>
-                    <a:pt x="3796077" y="2956358"/>
-                  </a:lnTo>
-                  <a:lnTo>
-                    <a:pt x="3872709" y="2963310"/>
-                  </a:lnTo>
-                  <a:lnTo>
-                    <a:pt x="3949342" y="2970193"/>
-                  </a:lnTo>
-                  <a:lnTo>
-                    <a:pt x="4025975" y="2977007"/>
-                  </a:lnTo>
-                  <a:lnTo>
-                    <a:pt x="4102607" y="2983753"/>
-                  </a:lnTo>
-                  <a:lnTo>
-                    <a:pt x="4179240" y="2990432"/>
-                  </a:lnTo>
-                  <a:lnTo>
-                    <a:pt x="4255872" y="2997044"/>
-                  </a:lnTo>
-                  <a:lnTo>
-                    <a:pt x="4332505" y="3003590"/>
-                  </a:lnTo>
-                  <a:lnTo>
-                    <a:pt x="4409137" y="3010071"/>
-                  </a:lnTo>
-                  <a:lnTo>
-                    <a:pt x="4485770" y="3016487"/>
-                  </a:lnTo>
-                  <a:lnTo>
-                    <a:pt x="4562402" y="3022839"/>
-                  </a:lnTo>
-                  <a:lnTo>
-                    <a:pt x="4639035" y="3029127"/>
-                  </a:lnTo>
-                  <a:lnTo>
-                    <a:pt x="4715667" y="3035353"/>
-                  </a:lnTo>
-                  <a:lnTo>
-                    <a:pt x="4792300" y="3041517"/>
-                  </a:lnTo>
-                  <a:lnTo>
-                    <a:pt x="4868933" y="3047619"/>
-                  </a:lnTo>
-                  <a:lnTo>
-                    <a:pt x="4945565" y="3053660"/>
-                  </a:lnTo>
-                  <a:lnTo>
-                    <a:pt x="5022198" y="3059641"/>
-                  </a:lnTo>
-                  <a:lnTo>
-                    <a:pt x="5098830" y="3065562"/>
-                  </a:lnTo>
-                  <a:lnTo>
-                    <a:pt x="5175463" y="3071424"/>
-                  </a:lnTo>
-                  <a:lnTo>
-                    <a:pt x="5252095" y="3077227"/>
-                  </a:lnTo>
-                  <a:lnTo>
-                    <a:pt x="5328728" y="3082973"/>
-                  </a:lnTo>
-                  <a:lnTo>
-                    <a:pt x="5405360" y="3088661"/>
-                  </a:lnTo>
-                  <a:lnTo>
-                    <a:pt x="5481993" y="3094292"/>
-                  </a:lnTo>
-                  <a:lnTo>
-                    <a:pt x="5558626" y="3099867"/>
-                  </a:lnTo>
-                  <a:lnTo>
-                    <a:pt x="5635258" y="3105386"/>
-                  </a:lnTo>
-                  <a:lnTo>
-                    <a:pt x="5711891" y="3110851"/>
-                  </a:lnTo>
-                  <a:lnTo>
-                    <a:pt x="5788523" y="3116260"/>
-                  </a:lnTo>
-                  <a:lnTo>
-                    <a:pt x="5865156" y="3121616"/>
-                  </a:lnTo>
-                  <a:lnTo>
-                    <a:pt x="5941788" y="3126918"/>
-                  </a:lnTo>
-                  <a:lnTo>
-                    <a:pt x="6018421" y="3132168"/>
-                  </a:lnTo>
-                  <a:lnTo>
-                    <a:pt x="6095053" y="3137365"/>
+                    <a:pt x="41082" y="97667"/>
+                  </a:lnTo>
+                  <a:lnTo>
+                    <a:pt x="117715" y="270547"/>
+                  </a:lnTo>
+                  <a:lnTo>
+                    <a:pt x="194347" y="434601"/>
+                  </a:lnTo>
+                  <a:lnTo>
+                    <a:pt x="270980" y="590279"/>
+                  </a:lnTo>
+                  <a:lnTo>
+                    <a:pt x="347612" y="738009"/>
+                  </a:lnTo>
+                  <a:lnTo>
+                    <a:pt x="424245" y="878196"/>
+                  </a:lnTo>
+                  <a:lnTo>
+                    <a:pt x="500877" y="1011225"/>
+                  </a:lnTo>
+                  <a:lnTo>
+                    <a:pt x="577510" y="1137463"/>
+                  </a:lnTo>
+                  <a:lnTo>
+                    <a:pt x="654142" y="1257256"/>
+                  </a:lnTo>
+                  <a:lnTo>
+                    <a:pt x="730775" y="1370932"/>
+                  </a:lnTo>
+                  <a:lnTo>
+                    <a:pt x="807407" y="1478804"/>
+                  </a:lnTo>
+                  <a:lnTo>
+                    <a:pt x="884040" y="1581169"/>
+                  </a:lnTo>
+                  <a:lnTo>
+                    <a:pt x="960673" y="1678308"/>
+                  </a:lnTo>
+                  <a:lnTo>
+                    <a:pt x="1037305" y="1770487"/>
+                  </a:lnTo>
+                  <a:lnTo>
+                    <a:pt x="1113938" y="1857959"/>
+                  </a:lnTo>
+                  <a:lnTo>
+                    <a:pt x="1190570" y="1940966"/>
+                  </a:lnTo>
+                  <a:lnTo>
+                    <a:pt x="1267203" y="2019734"/>
+                  </a:lnTo>
+                  <a:lnTo>
+                    <a:pt x="1343835" y="2094481"/>
+                  </a:lnTo>
+                  <a:lnTo>
+                    <a:pt x="1420468" y="2165412"/>
+                  </a:lnTo>
+                  <a:lnTo>
+                    <a:pt x="1497100" y="2232721"/>
+                  </a:lnTo>
+                  <a:lnTo>
+                    <a:pt x="1573733" y="2296594"/>
+                  </a:lnTo>
+                  <a:lnTo>
+                    <a:pt x="1650366" y="2357205"/>
+                  </a:lnTo>
+                  <a:lnTo>
+                    <a:pt x="1726998" y="2414722"/>
+                  </a:lnTo>
+                  <a:lnTo>
+                    <a:pt x="1803631" y="2469303"/>
+                  </a:lnTo>
+                  <a:lnTo>
+                    <a:pt x="1880263" y="2521096"/>
+                  </a:lnTo>
+                  <a:lnTo>
+                    <a:pt x="1956896" y="2570246"/>
+                  </a:lnTo>
+                  <a:lnTo>
+                    <a:pt x="2033528" y="2616886"/>
+                  </a:lnTo>
+                  <a:lnTo>
+                    <a:pt x="2110161" y="2655601"/>
+                  </a:lnTo>
+                  <a:lnTo>
+                    <a:pt x="2186793" y="2663870"/>
+                  </a:lnTo>
+                  <a:lnTo>
+                    <a:pt x="2263426" y="2672056"/>
+                  </a:lnTo>
+                  <a:lnTo>
+                    <a:pt x="2340058" y="2680161"/>
+                  </a:lnTo>
+                  <a:lnTo>
+                    <a:pt x="2416691" y="2688185"/>
+                  </a:lnTo>
+                  <a:lnTo>
+                    <a:pt x="2493324" y="2696128"/>
+                  </a:lnTo>
+                  <a:lnTo>
+                    <a:pt x="2569956" y="2703993"/>
+                  </a:lnTo>
+                  <a:lnTo>
+                    <a:pt x="2646589" y="2711778"/>
+                  </a:lnTo>
+                  <a:lnTo>
+                    <a:pt x="2723221" y="2719486"/>
+                  </a:lnTo>
+                  <a:lnTo>
+                    <a:pt x="2799854" y="2727117"/>
+                  </a:lnTo>
+                  <a:lnTo>
+                    <a:pt x="2876486" y="2734672"/>
+                  </a:lnTo>
+                  <a:lnTo>
+                    <a:pt x="2953119" y="2742152"/>
+                  </a:lnTo>
+                  <a:lnTo>
+                    <a:pt x="3029751" y="2749556"/>
+                  </a:lnTo>
+                  <a:lnTo>
+                    <a:pt x="3106384" y="2756887"/>
+                  </a:lnTo>
+                  <a:lnTo>
+                    <a:pt x="3183016" y="2764145"/>
+                  </a:lnTo>
+                  <a:lnTo>
+                    <a:pt x="3259649" y="2771330"/>
+                  </a:lnTo>
+                  <a:lnTo>
+                    <a:pt x="3336282" y="2778443"/>
+                  </a:lnTo>
+                  <a:lnTo>
+                    <a:pt x="3412914" y="2785486"/>
+                  </a:lnTo>
+                  <a:lnTo>
+                    <a:pt x="3489547" y="2792458"/>
+                  </a:lnTo>
+                  <a:lnTo>
+                    <a:pt x="3566179" y="2799360"/>
+                  </a:lnTo>
+                  <a:lnTo>
+                    <a:pt x="3642812" y="2806194"/>
+                  </a:lnTo>
+                  <a:lnTo>
+                    <a:pt x="3719444" y="2812959"/>
+                  </a:lnTo>
+                  <a:lnTo>
+                    <a:pt x="3796077" y="2819657"/>
+                  </a:lnTo>
+                  <a:lnTo>
+                    <a:pt x="3872709" y="2826288"/>
+                  </a:lnTo>
+                  <a:lnTo>
+                    <a:pt x="3949342" y="2832852"/>
+                  </a:lnTo>
+                  <a:lnTo>
+                    <a:pt x="4025975" y="2839351"/>
+                  </a:lnTo>
+                  <a:lnTo>
+                    <a:pt x="4102607" y="2845786"/>
+                  </a:lnTo>
+                  <a:lnTo>
+                    <a:pt x="4179240" y="2852156"/>
+                  </a:lnTo>
+                  <a:lnTo>
+                    <a:pt x="4255872" y="2858462"/>
+                  </a:lnTo>
+                  <a:lnTo>
+                    <a:pt x="4332505" y="2864705"/>
+                  </a:lnTo>
+                  <a:lnTo>
+                    <a:pt x="4409137" y="2870886"/>
+                  </a:lnTo>
+                  <a:lnTo>
+                    <a:pt x="4485770" y="2877006"/>
+                  </a:lnTo>
+                  <a:lnTo>
+                    <a:pt x="4562402" y="2883064"/>
+                  </a:lnTo>
+                  <a:lnTo>
+                    <a:pt x="4639035" y="2889062"/>
+                  </a:lnTo>
+                  <a:lnTo>
+                    <a:pt x="4715667" y="2895000"/>
+                  </a:lnTo>
+                  <a:lnTo>
+                    <a:pt x="4792300" y="2900878"/>
+                  </a:lnTo>
+                  <a:lnTo>
+                    <a:pt x="4868933" y="2906698"/>
+                  </a:lnTo>
+                  <a:lnTo>
+                    <a:pt x="4945565" y="2912460"/>
+                  </a:lnTo>
+                  <a:lnTo>
+                    <a:pt x="5022198" y="2918164"/>
+                  </a:lnTo>
+                  <a:lnTo>
+                    <a:pt x="5098830" y="2923811"/>
+                  </a:lnTo>
+                  <a:lnTo>
+                    <a:pt x="5175463" y="2929402"/>
+                  </a:lnTo>
+                  <a:lnTo>
+                    <a:pt x="5252095" y="2934937"/>
+                  </a:lnTo>
+                  <a:lnTo>
+                    <a:pt x="5328728" y="2940417"/>
+                  </a:lnTo>
+                  <a:lnTo>
+                    <a:pt x="5405360" y="2945842"/>
+                  </a:lnTo>
+                  <a:lnTo>
+                    <a:pt x="5481993" y="2951213"/>
+                  </a:lnTo>
+                  <a:lnTo>
+                    <a:pt x="5558626" y="2956530"/>
+                  </a:lnTo>
+                  <a:lnTo>
+                    <a:pt x="5635258" y="2961795"/>
+                  </a:lnTo>
+                  <a:lnTo>
+                    <a:pt x="5711891" y="2967006"/>
+                  </a:lnTo>
+                  <a:lnTo>
+                    <a:pt x="5788523" y="2972166"/>
+                  </a:lnTo>
+                  <a:lnTo>
+                    <a:pt x="5865156" y="2977274"/>
+                  </a:lnTo>
+                  <a:lnTo>
+                    <a:pt x="5941788" y="2982331"/>
+                  </a:lnTo>
+                  <a:lnTo>
+                    <a:pt x="6018421" y="2987337"/>
+                  </a:lnTo>
+                  <a:lnTo>
+                    <a:pt x="6095053" y="2992294"/>
                   </a:lnTo>
                 </a:path>
               </a:pathLst>
@@ -3838,303 +3838,303 @@
           </p:nvSpPr>
           <p:spPr>
             <a:xfrm>
-              <a:off x="817517" y="4190554"/>
-              <a:ext cx="7403783" cy="1302125"/>
+              <a:off x="817517" y="4261421"/>
+              <a:ext cx="7403783" cy="1241915"/>
             </a:xfrm>
             <a:custGeom>
               <a:avLst/>
               <a:pathLst>
-                <a:path w="7403783" h="1302125">
+                <a:path w="7403783" h="1241915">
                   <a:moveTo>
-                    <a:pt x="7403783" y="1302125"/>
+                    <a:pt x="7403783" y="1241915"/>
                   </a:moveTo>
                   <a:lnTo>
-                    <a:pt x="7327150" y="1299084"/>
-                  </a:lnTo>
-                  <a:lnTo>
-                    <a:pt x="7250518" y="1295879"/>
-                  </a:lnTo>
-                  <a:lnTo>
-                    <a:pt x="7173885" y="1292501"/>
-                  </a:lnTo>
-                  <a:lnTo>
-                    <a:pt x="7097253" y="1288942"/>
-                  </a:lnTo>
-                  <a:lnTo>
-                    <a:pt x="7020620" y="1285192"/>
-                  </a:lnTo>
-                  <a:lnTo>
-                    <a:pt x="6943987" y="1281239"/>
-                  </a:lnTo>
-                  <a:lnTo>
-                    <a:pt x="6867355" y="1277074"/>
-                  </a:lnTo>
-                  <a:lnTo>
-                    <a:pt x="6790722" y="1272685"/>
-                  </a:lnTo>
-                  <a:lnTo>
-                    <a:pt x="6714090" y="1268060"/>
-                  </a:lnTo>
-                  <a:lnTo>
-                    <a:pt x="6637457" y="1263186"/>
-                  </a:lnTo>
-                  <a:lnTo>
-                    <a:pt x="6560825" y="1258049"/>
-                  </a:lnTo>
-                  <a:lnTo>
-                    <a:pt x="6484192" y="1252636"/>
-                  </a:lnTo>
-                  <a:lnTo>
-                    <a:pt x="6407560" y="1246933"/>
-                  </a:lnTo>
-                  <a:lnTo>
-                    <a:pt x="6330927" y="1240922"/>
-                  </a:lnTo>
-                  <a:lnTo>
-                    <a:pt x="6254294" y="1234587"/>
-                  </a:lnTo>
-                  <a:lnTo>
-                    <a:pt x="6177662" y="1227912"/>
-                  </a:lnTo>
-                  <a:lnTo>
-                    <a:pt x="6101029" y="1220878"/>
-                  </a:lnTo>
-                  <a:lnTo>
-                    <a:pt x="6024397" y="1213465"/>
-                  </a:lnTo>
-                  <a:lnTo>
-                    <a:pt x="5947764" y="1205654"/>
-                  </a:lnTo>
-                  <a:lnTo>
-                    <a:pt x="5871132" y="1197422"/>
-                  </a:lnTo>
-                  <a:lnTo>
-                    <a:pt x="5794499" y="1188747"/>
-                  </a:lnTo>
-                  <a:lnTo>
-                    <a:pt x="5717867" y="1179606"/>
-                  </a:lnTo>
-                  <a:lnTo>
-                    <a:pt x="5641234" y="1169973"/>
-                  </a:lnTo>
-                  <a:lnTo>
-                    <a:pt x="5564602" y="1159821"/>
-                  </a:lnTo>
-                  <a:lnTo>
-                    <a:pt x="5487969" y="1149123"/>
-                  </a:lnTo>
-                  <a:lnTo>
-                    <a:pt x="5411336" y="1137850"/>
-                  </a:lnTo>
-                  <a:lnTo>
-                    <a:pt x="5334704" y="1125970"/>
-                  </a:lnTo>
-                  <a:lnTo>
-                    <a:pt x="5258071" y="1113451"/>
-                  </a:lnTo>
-                  <a:lnTo>
-                    <a:pt x="5181439" y="1100259"/>
-                  </a:lnTo>
-                  <a:lnTo>
-                    <a:pt x="5104806" y="1086356"/>
-                  </a:lnTo>
-                  <a:lnTo>
-                    <a:pt x="5028174" y="1071706"/>
-                  </a:lnTo>
-                  <a:lnTo>
-                    <a:pt x="4951541" y="1056267"/>
-                  </a:lnTo>
-                  <a:lnTo>
-                    <a:pt x="4874909" y="1039998"/>
-                  </a:lnTo>
-                  <a:lnTo>
-                    <a:pt x="4798276" y="1022853"/>
-                  </a:lnTo>
-                  <a:lnTo>
-                    <a:pt x="4721644" y="1004786"/>
-                  </a:lnTo>
-                  <a:lnTo>
-                    <a:pt x="4645011" y="985747"/>
-                  </a:lnTo>
-                  <a:lnTo>
-                    <a:pt x="4568378" y="965684"/>
-                  </a:lnTo>
-                  <a:lnTo>
-                    <a:pt x="4491746" y="944541"/>
-                  </a:lnTo>
-                  <a:lnTo>
-                    <a:pt x="4415113" y="922260"/>
-                  </a:lnTo>
-                  <a:lnTo>
-                    <a:pt x="4338481" y="898781"/>
-                  </a:lnTo>
-                  <a:lnTo>
-                    <a:pt x="4261848" y="874038"/>
-                  </a:lnTo>
-                  <a:lnTo>
-                    <a:pt x="4185216" y="847964"/>
-                  </a:lnTo>
-                  <a:lnTo>
-                    <a:pt x="4108583" y="820488"/>
-                  </a:lnTo>
-                  <a:lnTo>
-                    <a:pt x="4031951" y="791533"/>
-                  </a:lnTo>
-                  <a:lnTo>
-                    <a:pt x="3955318" y="761020"/>
-                  </a:lnTo>
-                  <a:lnTo>
-                    <a:pt x="3878685" y="728865"/>
-                  </a:lnTo>
-                  <a:lnTo>
-                    <a:pt x="3802053" y="694981"/>
-                  </a:lnTo>
-                  <a:lnTo>
-                    <a:pt x="3725420" y="659273"/>
-                  </a:lnTo>
-                  <a:lnTo>
-                    <a:pt x="3648788" y="621644"/>
-                  </a:lnTo>
-                  <a:lnTo>
-                    <a:pt x="3572155" y="581991"/>
-                  </a:lnTo>
-                  <a:lnTo>
-                    <a:pt x="3495523" y="540204"/>
-                  </a:lnTo>
-                  <a:lnTo>
-                    <a:pt x="3418890" y="496169"/>
-                  </a:lnTo>
-                  <a:lnTo>
-                    <a:pt x="3342258" y="481600"/>
-                  </a:lnTo>
-                  <a:lnTo>
-                    <a:pt x="3265625" y="472754"/>
-                  </a:lnTo>
-                  <a:lnTo>
-                    <a:pt x="3188993" y="463819"/>
-                  </a:lnTo>
-                  <a:lnTo>
-                    <a:pt x="3112360" y="454795"/>
-                  </a:lnTo>
-                  <a:lnTo>
-                    <a:pt x="3035727" y="445679"/>
-                  </a:lnTo>
-                  <a:lnTo>
-                    <a:pt x="2959095" y="436471"/>
-                  </a:lnTo>
-                  <a:lnTo>
-                    <a:pt x="2882462" y="427170"/>
-                  </a:lnTo>
-                  <a:lnTo>
-                    <a:pt x="2805830" y="417775"/>
-                  </a:lnTo>
-                  <a:lnTo>
-                    <a:pt x="2729197" y="408286"/>
-                  </a:lnTo>
-                  <a:lnTo>
-                    <a:pt x="2652565" y="398701"/>
-                  </a:lnTo>
-                  <a:lnTo>
-                    <a:pt x="2575932" y="389019"/>
-                  </a:lnTo>
-                  <a:lnTo>
-                    <a:pt x="2499300" y="379240"/>
-                  </a:lnTo>
-                  <a:lnTo>
-                    <a:pt x="2422667" y="369362"/>
-                  </a:lnTo>
-                  <a:lnTo>
-                    <a:pt x="2346034" y="359385"/>
-                  </a:lnTo>
-                  <a:lnTo>
-                    <a:pt x="2269402" y="349306"/>
-                  </a:lnTo>
-                  <a:lnTo>
-                    <a:pt x="2192769" y="339127"/>
-                  </a:lnTo>
-                  <a:lnTo>
-                    <a:pt x="2116137" y="328844"/>
-                  </a:lnTo>
-                  <a:lnTo>
-                    <a:pt x="2039504" y="318458"/>
-                  </a:lnTo>
-                  <a:lnTo>
-                    <a:pt x="1962872" y="307967"/>
-                  </a:lnTo>
-                  <a:lnTo>
-                    <a:pt x="1886239" y="297370"/>
-                  </a:lnTo>
-                  <a:lnTo>
-                    <a:pt x="1809607" y="286666"/>
-                  </a:lnTo>
-                  <a:lnTo>
-                    <a:pt x="1732974" y="275855"/>
-                  </a:lnTo>
-                  <a:lnTo>
-                    <a:pt x="1656342" y="264934"/>
-                  </a:lnTo>
-                  <a:lnTo>
-                    <a:pt x="1579709" y="253903"/>
-                  </a:lnTo>
-                  <a:lnTo>
-                    <a:pt x="1503076" y="242761"/>
-                  </a:lnTo>
-                  <a:lnTo>
-                    <a:pt x="1426444" y="231507"/>
-                  </a:lnTo>
-                  <a:lnTo>
-                    <a:pt x="1349811" y="220139"/>
-                  </a:lnTo>
-                  <a:lnTo>
-                    <a:pt x="1273179" y="208656"/>
-                  </a:lnTo>
-                  <a:lnTo>
-                    <a:pt x="1196546" y="197058"/>
-                  </a:lnTo>
-                  <a:lnTo>
-                    <a:pt x="1119914" y="185343"/>
-                  </a:lnTo>
-                  <a:lnTo>
-                    <a:pt x="1043281" y="173509"/>
-                  </a:lnTo>
-                  <a:lnTo>
-                    <a:pt x="966649" y="161556"/>
-                  </a:lnTo>
-                  <a:lnTo>
-                    <a:pt x="890016" y="149483"/>
-                  </a:lnTo>
-                  <a:lnTo>
-                    <a:pt x="813384" y="137288"/>
-                  </a:lnTo>
-                  <a:lnTo>
-                    <a:pt x="736751" y="124970"/>
-                  </a:lnTo>
-                  <a:lnTo>
-                    <a:pt x="660118" y="112527"/>
-                  </a:lnTo>
-                  <a:lnTo>
-                    <a:pt x="583486" y="99959"/>
-                  </a:lnTo>
-                  <a:lnTo>
-                    <a:pt x="506853" y="87265"/>
-                  </a:lnTo>
-                  <a:lnTo>
-                    <a:pt x="430221" y="74442"/>
-                  </a:lnTo>
-                  <a:lnTo>
-                    <a:pt x="353588" y="61490"/>
-                  </a:lnTo>
-                  <a:lnTo>
-                    <a:pt x="276956" y="48407"/>
-                  </a:lnTo>
-                  <a:lnTo>
-                    <a:pt x="200323" y="35193"/>
-                  </a:lnTo>
-                  <a:lnTo>
-                    <a:pt x="123691" y="21845"/>
-                  </a:lnTo>
-                  <a:lnTo>
-                    <a:pt x="47058" y="8362"/>
+                    <a:pt x="7327150" y="1239015"/>
+                  </a:lnTo>
+                  <a:lnTo>
+                    <a:pt x="7250518" y="1235958"/>
+                  </a:lnTo>
+                  <a:lnTo>
+                    <a:pt x="7173885" y="1232737"/>
+                  </a:lnTo>
+                  <a:lnTo>
+                    <a:pt x="7097253" y="1229342"/>
+                  </a:lnTo>
+                  <a:lnTo>
+                    <a:pt x="7020620" y="1225765"/>
+                  </a:lnTo>
+                  <a:lnTo>
+                    <a:pt x="6943987" y="1221995"/>
+                  </a:lnTo>
+                  <a:lnTo>
+                    <a:pt x="6867355" y="1218023"/>
+                  </a:lnTo>
+                  <a:lnTo>
+                    <a:pt x="6790722" y="1213837"/>
+                  </a:lnTo>
+                  <a:lnTo>
+                    <a:pt x="6714090" y="1209425"/>
+                  </a:lnTo>
+                  <a:lnTo>
+                    <a:pt x="6637457" y="1204776"/>
+                  </a:lnTo>
+                  <a:lnTo>
+                    <a:pt x="6560825" y="1199877"/>
+                  </a:lnTo>
+                  <a:lnTo>
+                    <a:pt x="6484192" y="1194715"/>
+                  </a:lnTo>
+                  <a:lnTo>
+                    <a:pt x="6407560" y="1189275"/>
+                  </a:lnTo>
+                  <a:lnTo>
+                    <a:pt x="6330927" y="1183542"/>
+                  </a:lnTo>
+                  <a:lnTo>
+                    <a:pt x="6254294" y="1177500"/>
+                  </a:lnTo>
+                  <a:lnTo>
+                    <a:pt x="6177662" y="1171134"/>
+                  </a:lnTo>
+                  <a:lnTo>
+                    <a:pt x="6101029" y="1164425"/>
+                  </a:lnTo>
+                  <a:lnTo>
+                    <a:pt x="6024397" y="1157355"/>
+                  </a:lnTo>
+                  <a:lnTo>
+                    <a:pt x="5947764" y="1149905"/>
+                  </a:lnTo>
+                  <a:lnTo>
+                    <a:pt x="5871132" y="1142054"/>
+                  </a:lnTo>
+                  <a:lnTo>
+                    <a:pt x="5794499" y="1133780"/>
+                  </a:lnTo>
+                  <a:lnTo>
+                    <a:pt x="5717867" y="1125061"/>
+                  </a:lnTo>
+                  <a:lnTo>
+                    <a:pt x="5641234" y="1115874"/>
+                  </a:lnTo>
+                  <a:lnTo>
+                    <a:pt x="5564602" y="1106191"/>
+                  </a:lnTo>
+                  <a:lnTo>
+                    <a:pt x="5487969" y="1095988"/>
+                  </a:lnTo>
+                  <a:lnTo>
+                    <a:pt x="5411336" y="1085236"/>
+                  </a:lnTo>
+                  <a:lnTo>
+                    <a:pt x="5334704" y="1073906"/>
+                  </a:lnTo>
+                  <a:lnTo>
+                    <a:pt x="5258071" y="1061966"/>
+                  </a:lnTo>
+                  <a:lnTo>
+                    <a:pt x="5181439" y="1049383"/>
+                  </a:lnTo>
+                  <a:lnTo>
+                    <a:pt x="5104806" y="1036124"/>
+                  </a:lnTo>
+                  <a:lnTo>
+                    <a:pt x="5028174" y="1022151"/>
+                  </a:lnTo>
+                  <a:lnTo>
+                    <a:pt x="4951541" y="1007426"/>
+                  </a:lnTo>
+                  <a:lnTo>
+                    <a:pt x="4874909" y="991909"/>
+                  </a:lnTo>
+                  <a:lnTo>
+                    <a:pt x="4798276" y="975557"/>
+                  </a:lnTo>
+                  <a:lnTo>
+                    <a:pt x="4721644" y="958325"/>
+                  </a:lnTo>
+                  <a:lnTo>
+                    <a:pt x="4645011" y="940167"/>
+                  </a:lnTo>
+                  <a:lnTo>
+                    <a:pt x="4568378" y="921031"/>
+                  </a:lnTo>
+                  <a:lnTo>
+                    <a:pt x="4491746" y="900865"/>
+                  </a:lnTo>
+                  <a:lnTo>
+                    <a:pt x="4415113" y="879615"/>
+                  </a:lnTo>
+                  <a:lnTo>
+                    <a:pt x="4338481" y="857222"/>
+                  </a:lnTo>
+                  <a:lnTo>
+                    <a:pt x="4261848" y="833623"/>
+                  </a:lnTo>
+                  <a:lnTo>
+                    <a:pt x="4185216" y="808755"/>
+                  </a:lnTo>
+                  <a:lnTo>
+                    <a:pt x="4108583" y="782549"/>
+                  </a:lnTo>
+                  <a:lnTo>
+                    <a:pt x="4031951" y="754933"/>
+                  </a:lnTo>
+                  <a:lnTo>
+                    <a:pt x="3955318" y="725831"/>
+                  </a:lnTo>
+                  <a:lnTo>
+                    <a:pt x="3878685" y="695163"/>
+                  </a:lnTo>
+                  <a:lnTo>
+                    <a:pt x="3802053" y="662845"/>
+                  </a:lnTo>
+                  <a:lnTo>
+                    <a:pt x="3725420" y="628789"/>
+                  </a:lnTo>
+                  <a:lnTo>
+                    <a:pt x="3648788" y="592900"/>
+                  </a:lnTo>
+                  <a:lnTo>
+                    <a:pt x="3572155" y="555080"/>
+                  </a:lnTo>
+                  <a:lnTo>
+                    <a:pt x="3495523" y="515225"/>
+                  </a:lnTo>
+                  <a:lnTo>
+                    <a:pt x="3418890" y="473226"/>
+                  </a:lnTo>
+                  <a:lnTo>
+                    <a:pt x="3342258" y="459331"/>
+                  </a:lnTo>
+                  <a:lnTo>
+                    <a:pt x="3265625" y="450894"/>
+                  </a:lnTo>
+                  <a:lnTo>
+                    <a:pt x="3188993" y="442373"/>
+                  </a:lnTo>
+                  <a:lnTo>
+                    <a:pt x="3112360" y="433765"/>
+                  </a:lnTo>
+                  <a:lnTo>
+                    <a:pt x="3035727" y="425071"/>
+                  </a:lnTo>
+                  <a:lnTo>
+                    <a:pt x="2959095" y="416288"/>
+                  </a:lnTo>
+                  <a:lnTo>
+                    <a:pt x="2882462" y="407418"/>
+                  </a:lnTo>
+                  <a:lnTo>
+                    <a:pt x="2805830" y="398458"/>
+                  </a:lnTo>
+                  <a:lnTo>
+                    <a:pt x="2729197" y="389407"/>
+                  </a:lnTo>
+                  <a:lnTo>
+                    <a:pt x="2652565" y="380265"/>
+                  </a:lnTo>
+                  <a:lnTo>
+                    <a:pt x="2575932" y="371031"/>
+                  </a:lnTo>
+                  <a:lnTo>
+                    <a:pt x="2499300" y="361704"/>
+                  </a:lnTo>
+                  <a:lnTo>
+                    <a:pt x="2422667" y="352283"/>
+                  </a:lnTo>
+                  <a:lnTo>
+                    <a:pt x="2346034" y="342767"/>
+                  </a:lnTo>
+                  <a:lnTo>
+                    <a:pt x="2269402" y="333155"/>
+                  </a:lnTo>
+                  <a:lnTo>
+                    <a:pt x="2192769" y="323445"/>
+                  </a:lnTo>
+                  <a:lnTo>
+                    <a:pt x="2116137" y="313638"/>
+                  </a:lnTo>
+                  <a:lnTo>
+                    <a:pt x="2039504" y="303732"/>
+                  </a:lnTo>
+                  <a:lnTo>
+                    <a:pt x="1962872" y="293727"/>
+                  </a:lnTo>
+                  <a:lnTo>
+                    <a:pt x="1886239" y="283620"/>
+                  </a:lnTo>
+                  <a:lnTo>
+                    <a:pt x="1809607" y="273411"/>
+                  </a:lnTo>
+                  <a:lnTo>
+                    <a:pt x="1732974" y="263099"/>
+                  </a:lnTo>
+                  <a:lnTo>
+                    <a:pt x="1656342" y="252684"/>
+                  </a:lnTo>
+                  <a:lnTo>
+                    <a:pt x="1579709" y="242163"/>
+                  </a:lnTo>
+                  <a:lnTo>
+                    <a:pt x="1503076" y="231536"/>
+                  </a:lnTo>
+                  <a:lnTo>
+                    <a:pt x="1426444" y="220802"/>
+                  </a:lnTo>
+                  <a:lnTo>
+                    <a:pt x="1349811" y="209960"/>
+                  </a:lnTo>
+                  <a:lnTo>
+                    <a:pt x="1273179" y="199008"/>
+                  </a:lnTo>
+                  <a:lnTo>
+                    <a:pt x="1196546" y="187946"/>
+                  </a:lnTo>
+                  <a:lnTo>
+                    <a:pt x="1119914" y="176773"/>
+                  </a:lnTo>
+                  <a:lnTo>
+                    <a:pt x="1043281" y="165486"/>
+                  </a:lnTo>
+                  <a:lnTo>
+                    <a:pt x="966649" y="154086"/>
+                  </a:lnTo>
+                  <a:lnTo>
+                    <a:pt x="890016" y="142571"/>
+                  </a:lnTo>
+                  <a:lnTo>
+                    <a:pt x="813384" y="130940"/>
+                  </a:lnTo>
+                  <a:lnTo>
+                    <a:pt x="736751" y="119191"/>
+                  </a:lnTo>
+                  <a:lnTo>
+                    <a:pt x="660118" y="107324"/>
+                  </a:lnTo>
+                  <a:lnTo>
+                    <a:pt x="583486" y="95337"/>
+                  </a:lnTo>
+                  <a:lnTo>
+                    <a:pt x="506853" y="83230"/>
+                  </a:lnTo>
+                  <a:lnTo>
+                    <a:pt x="430221" y="71000"/>
+                  </a:lnTo>
+                  <a:lnTo>
+                    <a:pt x="353588" y="58647"/>
+                  </a:lnTo>
+                  <a:lnTo>
+                    <a:pt x="276956" y="46169"/>
+                  </a:lnTo>
+                  <a:lnTo>
+                    <a:pt x="200323" y="33565"/>
+                  </a:lnTo>
+                  <a:lnTo>
+                    <a:pt x="123691" y="20835"/>
+                  </a:lnTo>
+                  <a:lnTo>
+                    <a:pt x="47058" y="7976"/>
                   </a:lnTo>
                   <a:lnTo>
                     <a:pt x="0" y="0"/>
@@ -4157,306 +4157,306 @@
           </p:nvSpPr>
           <p:spPr>
             <a:xfrm>
-              <a:off x="817517" y="2064432"/>
-              <a:ext cx="7403783" cy="3314108"/>
+              <a:off x="817517" y="2233609"/>
+              <a:ext cx="7403783" cy="3160864"/>
             </a:xfrm>
             <a:custGeom>
               <a:avLst/>
               <a:pathLst>
-                <a:path w="7403783" h="3314108">
+                <a:path w="7403783" h="3160864">
                   <a:moveTo>
                     <a:pt x="0" y="0"/>
                   </a:moveTo>
                   <a:lnTo>
-                    <a:pt x="47058" y="66567"/>
-                  </a:lnTo>
-                  <a:lnTo>
-                    <a:pt x="123691" y="171636"/>
-                  </a:lnTo>
-                  <a:lnTo>
-                    <a:pt x="200323" y="273475"/>
-                  </a:lnTo>
-                  <a:lnTo>
-                    <a:pt x="276956" y="372184"/>
-                  </a:lnTo>
-                  <a:lnTo>
-                    <a:pt x="353588" y="467859"/>
-                  </a:lnTo>
-                  <a:lnTo>
-                    <a:pt x="430221" y="560594"/>
-                  </a:lnTo>
-                  <a:lnTo>
-                    <a:pt x="506853" y="650477"/>
-                  </a:lnTo>
-                  <a:lnTo>
-                    <a:pt x="583486" y="737598"/>
-                  </a:lnTo>
-                  <a:lnTo>
-                    <a:pt x="660118" y="822041"/>
-                  </a:lnTo>
-                  <a:lnTo>
-                    <a:pt x="736751" y="903889"/>
-                  </a:lnTo>
-                  <a:lnTo>
-                    <a:pt x="813384" y="983220"/>
-                  </a:lnTo>
-                  <a:lnTo>
-                    <a:pt x="890016" y="1060113"/>
-                  </a:lnTo>
-                  <a:lnTo>
-                    <a:pt x="966649" y="1134642"/>
-                  </a:lnTo>
-                  <a:lnTo>
-                    <a:pt x="1043281" y="1206881"/>
-                  </a:lnTo>
-                  <a:lnTo>
-                    <a:pt x="1119914" y="1276899"/>
-                  </a:lnTo>
-                  <a:lnTo>
-                    <a:pt x="1196546" y="1344765"/>
-                  </a:lnTo>
-                  <a:lnTo>
-                    <a:pt x="1273179" y="1410545"/>
-                  </a:lnTo>
-                  <a:lnTo>
-                    <a:pt x="1349811" y="1474303"/>
-                  </a:lnTo>
-                  <a:lnTo>
-                    <a:pt x="1426444" y="1536101"/>
-                  </a:lnTo>
-                  <a:lnTo>
-                    <a:pt x="1503076" y="1595999"/>
-                  </a:lnTo>
-                  <a:lnTo>
-                    <a:pt x="1579709" y="1654057"/>
-                  </a:lnTo>
-                  <a:lnTo>
-                    <a:pt x="1656342" y="1710329"/>
-                  </a:lnTo>
-                  <a:lnTo>
-                    <a:pt x="1732974" y="1764872"/>
-                  </a:lnTo>
-                  <a:lnTo>
-                    <a:pt x="1809607" y="1817739"/>
-                  </a:lnTo>
-                  <a:lnTo>
-                    <a:pt x="1886239" y="1868980"/>
-                  </a:lnTo>
-                  <a:lnTo>
-                    <a:pt x="1962872" y="1918647"/>
-                  </a:lnTo>
-                  <a:lnTo>
-                    <a:pt x="2039504" y="1966786"/>
-                  </a:lnTo>
-                  <a:lnTo>
-                    <a:pt x="2116137" y="2013447"/>
-                  </a:lnTo>
-                  <a:lnTo>
-                    <a:pt x="2192769" y="2058672"/>
-                  </a:lnTo>
-                  <a:lnTo>
-                    <a:pt x="2269402" y="2102508"/>
-                  </a:lnTo>
-                  <a:lnTo>
-                    <a:pt x="2346034" y="2144996"/>
-                  </a:lnTo>
-                  <a:lnTo>
-                    <a:pt x="2422667" y="2186178"/>
-                  </a:lnTo>
-                  <a:lnTo>
-                    <a:pt x="2499300" y="2226095"/>
-                  </a:lnTo>
-                  <a:lnTo>
-                    <a:pt x="2575932" y="2264784"/>
-                  </a:lnTo>
-                  <a:lnTo>
-                    <a:pt x="2652565" y="2302284"/>
-                  </a:lnTo>
-                  <a:lnTo>
-                    <a:pt x="2729197" y="2338632"/>
-                  </a:lnTo>
-                  <a:lnTo>
-                    <a:pt x="2805830" y="2373862"/>
-                  </a:lnTo>
-                  <a:lnTo>
-                    <a:pt x="2882462" y="2408009"/>
-                  </a:lnTo>
-                  <a:lnTo>
-                    <a:pt x="2959095" y="2441107"/>
-                  </a:lnTo>
-                  <a:lnTo>
-                    <a:pt x="3035727" y="2473187"/>
-                  </a:lnTo>
-                  <a:lnTo>
-                    <a:pt x="3112360" y="2504282"/>
-                  </a:lnTo>
-                  <a:lnTo>
-                    <a:pt x="3188993" y="2534420"/>
-                  </a:lnTo>
-                  <a:lnTo>
-                    <a:pt x="3265625" y="2563632"/>
-                  </a:lnTo>
-                  <a:lnTo>
-                    <a:pt x="3342258" y="2591946"/>
-                  </a:lnTo>
-                  <a:lnTo>
-                    <a:pt x="3418890" y="2619390"/>
-                  </a:lnTo>
-                  <a:lnTo>
-                    <a:pt x="3495523" y="2645990"/>
-                  </a:lnTo>
-                  <a:lnTo>
-                    <a:pt x="3572155" y="2671773"/>
-                  </a:lnTo>
-                  <a:lnTo>
-                    <a:pt x="3648788" y="2696763"/>
-                  </a:lnTo>
-                  <a:lnTo>
-                    <a:pt x="3725420" y="2720985"/>
-                  </a:lnTo>
-                  <a:lnTo>
-                    <a:pt x="3802053" y="2744462"/>
-                  </a:lnTo>
-                  <a:lnTo>
-                    <a:pt x="3878685" y="2767218"/>
-                  </a:lnTo>
-                  <a:lnTo>
-                    <a:pt x="3955318" y="2789275"/>
-                  </a:lnTo>
-                  <a:lnTo>
-                    <a:pt x="4031951" y="2810653"/>
-                  </a:lnTo>
-                  <a:lnTo>
-                    <a:pt x="4108583" y="2831374"/>
-                  </a:lnTo>
-                  <a:lnTo>
-                    <a:pt x="4185216" y="2851458"/>
-                  </a:lnTo>
-                  <a:lnTo>
-                    <a:pt x="4261848" y="2870925"/>
-                  </a:lnTo>
-                  <a:lnTo>
-                    <a:pt x="4338481" y="2889794"/>
-                  </a:lnTo>
-                  <a:lnTo>
-                    <a:pt x="4415113" y="2908082"/>
-                  </a:lnTo>
-                  <a:lnTo>
-                    <a:pt x="4491746" y="2925809"/>
-                  </a:lnTo>
-                  <a:lnTo>
-                    <a:pt x="4568378" y="2942990"/>
-                  </a:lnTo>
-                  <a:lnTo>
-                    <a:pt x="4645011" y="2959644"/>
-                  </a:lnTo>
-                  <a:lnTo>
-                    <a:pt x="4721644" y="2975785"/>
-                  </a:lnTo>
-                  <a:lnTo>
-                    <a:pt x="4798276" y="2991431"/>
-                  </a:lnTo>
-                  <a:lnTo>
-                    <a:pt x="4874909" y="3006595"/>
-                  </a:lnTo>
-                  <a:lnTo>
-                    <a:pt x="4951541" y="3021293"/>
-                  </a:lnTo>
-                  <a:lnTo>
-                    <a:pt x="5028174" y="3035540"/>
-                  </a:lnTo>
-                  <a:lnTo>
-                    <a:pt x="5104806" y="3049348"/>
-                  </a:lnTo>
-                  <a:lnTo>
-                    <a:pt x="5181439" y="3062733"/>
-                  </a:lnTo>
-                  <a:lnTo>
-                    <a:pt x="5258071" y="3075705"/>
-                  </a:lnTo>
-                  <a:lnTo>
-                    <a:pt x="5334704" y="3088279"/>
-                  </a:lnTo>
-                  <a:lnTo>
-                    <a:pt x="5411336" y="3100467"/>
-                  </a:lnTo>
-                  <a:lnTo>
-                    <a:pt x="5487969" y="3112280"/>
-                  </a:lnTo>
-                  <a:lnTo>
-                    <a:pt x="5564602" y="3123729"/>
-                  </a:lnTo>
-                  <a:lnTo>
-                    <a:pt x="5641234" y="3134827"/>
-                  </a:lnTo>
-                  <a:lnTo>
-                    <a:pt x="5717867" y="3145584"/>
-                  </a:lnTo>
-                  <a:lnTo>
-                    <a:pt x="5794499" y="3156010"/>
-                  </a:lnTo>
-                  <a:lnTo>
-                    <a:pt x="5871132" y="3166116"/>
-                  </a:lnTo>
-                  <a:lnTo>
-                    <a:pt x="5947764" y="3175911"/>
-                  </a:lnTo>
-                  <a:lnTo>
-                    <a:pt x="6024397" y="3185404"/>
-                  </a:lnTo>
-                  <a:lnTo>
-                    <a:pt x="6101029" y="3194606"/>
-                  </a:lnTo>
-                  <a:lnTo>
-                    <a:pt x="6177662" y="3203526"/>
-                  </a:lnTo>
-                  <a:lnTo>
-                    <a:pt x="6254294" y="3212171"/>
-                  </a:lnTo>
-                  <a:lnTo>
-                    <a:pt x="6330927" y="3220550"/>
-                  </a:lnTo>
-                  <a:lnTo>
-                    <a:pt x="6407560" y="3228672"/>
-                  </a:lnTo>
-                  <a:lnTo>
-                    <a:pt x="6484192" y="3236544"/>
-                  </a:lnTo>
-                  <a:lnTo>
-                    <a:pt x="6560825" y="3244174"/>
-                  </a:lnTo>
-                  <a:lnTo>
-                    <a:pt x="6637457" y="3251570"/>
-                  </a:lnTo>
-                  <a:lnTo>
-                    <a:pt x="6714090" y="3258738"/>
-                  </a:lnTo>
-                  <a:lnTo>
-                    <a:pt x="6790722" y="3265686"/>
-                  </a:lnTo>
-                  <a:lnTo>
-                    <a:pt x="6867355" y="3272420"/>
-                  </a:lnTo>
-                  <a:lnTo>
-                    <a:pt x="6943987" y="3278947"/>
-                  </a:lnTo>
-                  <a:lnTo>
-                    <a:pt x="7020620" y="3285274"/>
-                  </a:lnTo>
-                  <a:lnTo>
-                    <a:pt x="7097253" y="3291406"/>
-                  </a:lnTo>
-                  <a:lnTo>
-                    <a:pt x="7173885" y="3297350"/>
-                  </a:lnTo>
-                  <a:lnTo>
-                    <a:pt x="7250518" y="3303111"/>
-                  </a:lnTo>
-                  <a:lnTo>
-                    <a:pt x="7327150" y="3308695"/>
-                  </a:lnTo>
-                  <a:lnTo>
-                    <a:pt x="7403783" y="3314108"/>
+                    <a:pt x="47058" y="63488"/>
+                  </a:lnTo>
+                  <a:lnTo>
+                    <a:pt x="123691" y="163699"/>
+                  </a:lnTo>
+                  <a:lnTo>
+                    <a:pt x="200323" y="260830"/>
+                  </a:lnTo>
+                  <a:lnTo>
+                    <a:pt x="276956" y="354975"/>
+                  </a:lnTo>
+                  <a:lnTo>
+                    <a:pt x="353588" y="446226"/>
+                  </a:lnTo>
+                  <a:lnTo>
+                    <a:pt x="430221" y="534672"/>
+                  </a:lnTo>
+                  <a:lnTo>
+                    <a:pt x="506853" y="620400"/>
+                  </a:lnTo>
+                  <a:lnTo>
+                    <a:pt x="583486" y="703492"/>
+                  </a:lnTo>
+                  <a:lnTo>
+                    <a:pt x="660118" y="784030"/>
+                  </a:lnTo>
+                  <a:lnTo>
+                    <a:pt x="736751" y="862093"/>
+                  </a:lnTo>
+                  <a:lnTo>
+                    <a:pt x="813384" y="937756"/>
+                  </a:lnTo>
+                  <a:lnTo>
+                    <a:pt x="890016" y="1011094"/>
+                  </a:lnTo>
+                  <a:lnTo>
+                    <a:pt x="966649" y="1082177"/>
+                  </a:lnTo>
+                  <a:lnTo>
+                    <a:pt x="1043281" y="1151075"/>
+                  </a:lnTo>
+                  <a:lnTo>
+                    <a:pt x="1119914" y="1217856"/>
+                  </a:lnTo>
+                  <a:lnTo>
+                    <a:pt x="1196546" y="1282584"/>
+                  </a:lnTo>
+                  <a:lnTo>
+                    <a:pt x="1273179" y="1345322"/>
+                  </a:lnTo>
+                  <a:lnTo>
+                    <a:pt x="1349811" y="1406131"/>
+                  </a:lnTo>
+                  <a:lnTo>
+                    <a:pt x="1426444" y="1465072"/>
+                  </a:lnTo>
+                  <a:lnTo>
+                    <a:pt x="1503076" y="1522201"/>
+                  </a:lnTo>
+                  <a:lnTo>
+                    <a:pt x="1579709" y="1577574"/>
+                  </a:lnTo>
+                  <a:lnTo>
+                    <a:pt x="1656342" y="1631244"/>
+                  </a:lnTo>
+                  <a:lnTo>
+                    <a:pt x="1732974" y="1683265"/>
+                  </a:lnTo>
+                  <a:lnTo>
+                    <a:pt x="1809607" y="1733687"/>
+                  </a:lnTo>
+                  <a:lnTo>
+                    <a:pt x="1886239" y="1782559"/>
+                  </a:lnTo>
+                  <a:lnTo>
+                    <a:pt x="1962872" y="1829929"/>
+                  </a:lnTo>
+                  <a:lnTo>
+                    <a:pt x="2039504" y="1875843"/>
+                  </a:lnTo>
+                  <a:lnTo>
+                    <a:pt x="2116137" y="1920345"/>
+                  </a:lnTo>
+                  <a:lnTo>
+                    <a:pt x="2192769" y="1963480"/>
+                  </a:lnTo>
+                  <a:lnTo>
+                    <a:pt x="2269402" y="2005289"/>
+                  </a:lnTo>
+                  <a:lnTo>
+                    <a:pt x="2346034" y="2045812"/>
+                  </a:lnTo>
+                  <a:lnTo>
+                    <a:pt x="2422667" y="2085090"/>
+                  </a:lnTo>
+                  <a:lnTo>
+                    <a:pt x="2499300" y="2123161"/>
+                  </a:lnTo>
+                  <a:lnTo>
+                    <a:pt x="2575932" y="2160061"/>
+                  </a:lnTo>
+                  <a:lnTo>
+                    <a:pt x="2652565" y="2195828"/>
+                  </a:lnTo>
+                  <a:lnTo>
+                    <a:pt x="2729197" y="2230494"/>
+                  </a:lnTo>
+                  <a:lnTo>
+                    <a:pt x="2805830" y="2264096"/>
+                  </a:lnTo>
+                  <a:lnTo>
+                    <a:pt x="2882462" y="2296664"/>
+                  </a:lnTo>
+                  <a:lnTo>
+                    <a:pt x="2959095" y="2328231"/>
+                  </a:lnTo>
+                  <a:lnTo>
+                    <a:pt x="3035727" y="2358828"/>
+                  </a:lnTo>
+                  <a:lnTo>
+                    <a:pt x="3112360" y="2388485"/>
+                  </a:lnTo>
+                  <a:lnTo>
+                    <a:pt x="3188993" y="2417229"/>
+                  </a:lnTo>
+                  <a:lnTo>
+                    <a:pt x="3265625" y="2445091"/>
+                  </a:lnTo>
+                  <a:lnTo>
+                    <a:pt x="3342258" y="2472096"/>
+                  </a:lnTo>
+                  <a:lnTo>
+                    <a:pt x="3418890" y="2498270"/>
+                  </a:lnTo>
+                  <a:lnTo>
+                    <a:pt x="3495523" y="2523641"/>
+                  </a:lnTo>
+                  <a:lnTo>
+                    <a:pt x="3572155" y="2548231"/>
+                  </a:lnTo>
+                  <a:lnTo>
+                    <a:pt x="3648788" y="2572066"/>
+                  </a:lnTo>
+                  <a:lnTo>
+                    <a:pt x="3725420" y="2595168"/>
+                  </a:lnTo>
+                  <a:lnTo>
+                    <a:pt x="3802053" y="2617560"/>
+                  </a:lnTo>
+                  <a:lnTo>
+                    <a:pt x="3878685" y="2639263"/>
+                  </a:lnTo>
+                  <a:lnTo>
+                    <a:pt x="3955318" y="2660299"/>
+                  </a:lnTo>
+                  <a:lnTo>
+                    <a:pt x="4031951" y="2680689"/>
+                  </a:lnTo>
+                  <a:lnTo>
+                    <a:pt x="4108583" y="2700452"/>
+                  </a:lnTo>
+                  <a:lnTo>
+                    <a:pt x="4185216" y="2719608"/>
+                  </a:lnTo>
+                  <a:lnTo>
+                    <a:pt x="4261848" y="2738175"/>
+                  </a:lnTo>
+                  <a:lnTo>
+                    <a:pt x="4338481" y="2756171"/>
+                  </a:lnTo>
+                  <a:lnTo>
+                    <a:pt x="4415113" y="2773614"/>
+                  </a:lnTo>
+                  <a:lnTo>
+                    <a:pt x="4491746" y="2790520"/>
+                  </a:lnTo>
+                  <a:lnTo>
+                    <a:pt x="4568378" y="2806907"/>
+                  </a:lnTo>
+                  <a:lnTo>
+                    <a:pt x="4645011" y="2822791"/>
+                  </a:lnTo>
+                  <a:lnTo>
+                    <a:pt x="4721644" y="2838186"/>
+                  </a:lnTo>
+                  <a:lnTo>
+                    <a:pt x="4798276" y="2853108"/>
+                  </a:lnTo>
+                  <a:lnTo>
+                    <a:pt x="4874909" y="2867571"/>
+                  </a:lnTo>
+                  <a:lnTo>
+                    <a:pt x="4951541" y="2881590"/>
+                  </a:lnTo>
+                  <a:lnTo>
+                    <a:pt x="5028174" y="2895178"/>
+                  </a:lnTo>
+                  <a:lnTo>
+                    <a:pt x="5104806" y="2908348"/>
+                  </a:lnTo>
+                  <a:lnTo>
+                    <a:pt x="5181439" y="2921113"/>
+                  </a:lnTo>
+                  <a:lnTo>
+                    <a:pt x="5258071" y="2933486"/>
+                  </a:lnTo>
+                  <a:lnTo>
+                    <a:pt x="5334704" y="2945478"/>
+                  </a:lnTo>
+                  <a:lnTo>
+                    <a:pt x="5411336" y="2957102"/>
+                  </a:lnTo>
+                  <a:lnTo>
+                    <a:pt x="5487969" y="2968369"/>
+                  </a:lnTo>
+                  <a:lnTo>
+                    <a:pt x="5564602" y="2979289"/>
+                  </a:lnTo>
+                  <a:lnTo>
+                    <a:pt x="5641234" y="2989874"/>
+                  </a:lnTo>
+                  <a:lnTo>
+                    <a:pt x="5717867" y="3000133"/>
+                  </a:lnTo>
+                  <a:lnTo>
+                    <a:pt x="5794499" y="3010077"/>
+                  </a:lnTo>
+                  <a:lnTo>
+                    <a:pt x="5871132" y="3019716"/>
+                  </a:lnTo>
+                  <a:lnTo>
+                    <a:pt x="5947764" y="3029058"/>
+                  </a:lnTo>
+                  <a:lnTo>
+                    <a:pt x="6024397" y="3038112"/>
+                  </a:lnTo>
+                  <a:lnTo>
+                    <a:pt x="6101029" y="3046889"/>
+                  </a:lnTo>
+                  <a:lnTo>
+                    <a:pt x="6177662" y="3055396"/>
+                  </a:lnTo>
+                  <a:lnTo>
+                    <a:pt x="6254294" y="3063641"/>
+                  </a:lnTo>
+                  <a:lnTo>
+                    <a:pt x="6330927" y="3071633"/>
+                  </a:lnTo>
+                  <a:lnTo>
+                    <a:pt x="6407560" y="3079379"/>
+                  </a:lnTo>
+                  <a:lnTo>
+                    <a:pt x="6484192" y="3086887"/>
+                  </a:lnTo>
+                  <a:lnTo>
+                    <a:pt x="6560825" y="3094165"/>
+                  </a:lnTo>
+                  <a:lnTo>
+                    <a:pt x="6637457" y="3101218"/>
+                  </a:lnTo>
+                  <a:lnTo>
+                    <a:pt x="6714090" y="3108055"/>
+                  </a:lnTo>
+                  <a:lnTo>
+                    <a:pt x="6790722" y="3114682"/>
+                  </a:lnTo>
+                  <a:lnTo>
+                    <a:pt x="6867355" y="3121105"/>
+                  </a:lnTo>
+                  <a:lnTo>
+                    <a:pt x="6943987" y="3127330"/>
+                  </a:lnTo>
+                  <a:lnTo>
+                    <a:pt x="7020620" y="3133364"/>
+                  </a:lnTo>
+                  <a:lnTo>
+                    <a:pt x="7097253" y="3139213"/>
+                  </a:lnTo>
+                  <a:lnTo>
+                    <a:pt x="7173885" y="3144882"/>
+                  </a:lnTo>
+                  <a:lnTo>
+                    <a:pt x="7250518" y="3150377"/>
+                  </a:lnTo>
+                  <a:lnTo>
+                    <a:pt x="7327150" y="3155702"/>
+                  </a:lnTo>
+                  <a:lnTo>
+                    <a:pt x="7403783" y="3160864"/>
                   </a:lnTo>
                 </a:path>
               </a:pathLst>
@@ -4485,7 +4485,7 @@
           </p:nvSpPr>
           <p:spPr>
             <a:xfrm>
-              <a:off x="817517" y="4679530"/>
+              <a:off x="817517" y="4727786"/>
               <a:ext cx="7799693" cy="0"/>
             </a:xfrm>
             <a:custGeom>
@@ -4528,15 +4528,15 @@
           </p:nvSpPr>
           <p:spPr>
             <a:xfrm>
-              <a:off x="4224261" y="1896563"/>
-              <a:ext cx="0" cy="3826579"/>
+              <a:off x="4224261" y="2073503"/>
+              <a:ext cx="0" cy="3649639"/>
             </a:xfrm>
             <a:custGeom>
               <a:avLst/>
               <a:pathLst>
-                <a:path w="0" h="3826579">
+                <a:path w="0" h="3649639">
                   <a:moveTo>
-                    <a:pt x="0" y="3826579"/>
+                    <a:pt x="0" y="3649639"/>
                   </a:moveTo>
                   <a:lnTo>
                     <a:pt x="0" y="0"/>
@@ -4571,7 +4571,7 @@
           </p:nvSpPr>
           <p:spPr>
             <a:xfrm>
-              <a:off x="692708" y="5509156"/>
+              <a:off x="692708" y="5517199"/>
               <a:ext cx="62179" cy="80101"/>
             </a:xfrm>
             <a:prstGeom prst="rect">
@@ -4617,7 +4617,7 @@
           </p:nvSpPr>
           <p:spPr>
             <a:xfrm>
-              <a:off x="692708" y="4639479"/>
+              <a:off x="692708" y="4687735"/>
               <a:ext cx="62179" cy="80101"/>
             </a:xfrm>
             <a:prstGeom prst="rect">
@@ -4663,7 +4663,7 @@
           </p:nvSpPr>
           <p:spPr>
             <a:xfrm>
-              <a:off x="692708" y="3769802"/>
+              <a:off x="692708" y="3858272"/>
               <a:ext cx="62179" cy="80101"/>
             </a:xfrm>
             <a:prstGeom prst="rect">
@@ -4709,7 +4709,7 @@
           </p:nvSpPr>
           <p:spPr>
             <a:xfrm>
-              <a:off x="692708" y="2900125"/>
+              <a:off x="692708" y="3028808"/>
               <a:ext cx="62179" cy="80101"/>
             </a:xfrm>
             <a:prstGeom prst="rect">
@@ -4755,7 +4755,7 @@
           </p:nvSpPr>
           <p:spPr>
             <a:xfrm>
-              <a:off x="692708" y="2030448"/>
+              <a:off x="692708" y="2199345"/>
               <a:ext cx="62179" cy="80101"/>
             </a:xfrm>
             <a:prstGeom prst="rect">
@@ -5031,7 +5031,7 @@
           </p:nvSpPr>
           <p:spPr>
             <a:xfrm rot="-5400000">
-              <a:off x="68446" y="3759743"/>
+              <a:off x="68446" y="3848213"/>
               <a:ext cx="1016904" cy="100218"/>
             </a:xfrm>
             <a:prstGeom prst="rect">
@@ -5072,6 +5072,52 @@
         <p:sp>
           <p:nvSpPr>
             <p:cNvPr id="38" name="tx38"/>
+            <p:cNvSpPr/>
+            <p:nvPr/>
+          </p:nvSpPr>
+          <p:spPr>
+            <a:xfrm>
+              <a:off x="817517" y="1896563"/>
+              <a:ext cx="5626211" cy="82021"/>
+            </a:xfrm>
+            <a:prstGeom prst="rect">
+              <a:avLst/>
+            </a:prstGeom>
+            <a:noFill/>
+          </p:spPr>
+          <p:txBody>
+            <a:bodyPr lIns="0" rIns="0" tIns="0" bIns="0" anchorCtr="1" anchor="ctr" wrap="none"/>
+            <a:lstStyle/>
+            <a:p>
+              <a:pPr algn="l" marL="0" marR="0" indent="0">
+                <a:lnSpc>
+                  <a:spcPts val="900"/>
+                </a:lnSpc>
+                <a:spcBef>
+                  <a:spcPts val="0"/>
+                </a:spcBef>
+                <a:spcAft>
+                  <a:spcPts val="0"/>
+                </a:spcAft>
+              </a:pPr>
+              <a:r>
+                <a:rPr sz="900">
+                  <a:solidFill>
+                    <a:srgbClr val="404040">
+                      <a:alpha val="100000"/>
+                    </a:srgbClr>
+                  </a:solidFill>
+                  <a:latin typeface="Helvetica"/>
+                  <a:cs typeface="Helvetica"/>
+                </a:rPr>
+                <a:t>subHR per 0.1 ratio decline: 1.43 (1.12-1.83)  |  per IQR decline (Δ = 0.30): 2.95 (1.42-6.13)  |  IQR: [0.85, 1.15]</a:t>
+              </a:r>
+            </a:p>
+          </p:txBody>
+        </p:sp>
+        <p:sp>
+          <p:nvSpPr>
+            <p:cNvPr id="39" name="tx39"/>
             <p:cNvSpPr/>
             <p:nvPr/>
           </p:nvSpPr>

--- a/docs/pptx/carbo/jx-carbo-linsubhr-ratio-hosp2.pptx
+++ b/docs/pptx/carbo/jx-carbo-linsubhr-ratio-hosp2.pptx
@@ -5078,7 +5078,7 @@
           <p:spPr>
             <a:xfrm>
               <a:off x="817517" y="1896563"/>
-              <a:ext cx="5626211" cy="82021"/>
+              <a:ext cx="6169365" cy="82021"/>
             </a:xfrm>
             <a:prstGeom prst="rect">
               <a:avLst/>
@@ -5110,7 +5110,7 @@
                   <a:latin typeface="Helvetica"/>
                   <a:cs typeface="Helvetica"/>
                 </a:rPr>
-                <a:t>subHR per 0.1 ratio decline: 1.43 (1.12-1.83)  |  per IQR decline (Δ = 0.30): 2.95 (1.42-6.13)  |  IQR: [0.85, 1.15]</a:t>
+                <a:t>subHR per 0.1 ratio decline: 1.43 (1.12-1.83), p = 0.004  |  per IQR decline (Δ = 0.30): 2.95 (1.42-6.13)  |  IQR: [0.85, 1.15]</a:t>
               </a:r>
             </a:p>
           </p:txBody>

--- a/docs/pptx/carbo/jx-carbo-linsubhr-ratio-hosp2.pptx
+++ b/docs/pptx/carbo/jx-carbo-linsubhr-ratio-hosp2.pptx
@@ -2443,7 +2443,7 @@
           </p:nvSpPr>
           <p:spPr>
             <a:xfrm>
-              <a:off x="1615213" y="2073503"/>
+              <a:off x="1467192" y="2073503"/>
               <a:ext cx="0" cy="3649639"/>
             </a:xfrm>
             <a:custGeom>
@@ -2486,7 +2486,7 @@
           </p:nvSpPr>
           <p:spPr>
             <a:xfrm>
-              <a:off x="3387871" y="2073503"/>
+              <a:off x="3538150" y="2073503"/>
               <a:ext cx="0" cy="3649639"/>
             </a:xfrm>
             <a:custGeom>
@@ -2529,7 +2529,7 @@
           </p:nvSpPr>
           <p:spPr>
             <a:xfrm>
-              <a:off x="5160528" y="2073503"/>
+              <a:off x="5609107" y="2073503"/>
               <a:ext cx="0" cy="3649639"/>
             </a:xfrm>
             <a:custGeom>
@@ -2572,7 +2572,7 @@
           </p:nvSpPr>
           <p:spPr>
             <a:xfrm>
-              <a:off x="6933186" y="2073503"/>
+              <a:off x="7680065" y="2073503"/>
               <a:ext cx="0" cy="3649639"/>
             </a:xfrm>
             <a:custGeom>
@@ -2830,7 +2830,7 @@
           </p:nvSpPr>
           <p:spPr>
             <a:xfrm>
-              <a:off x="2501542" y="2073503"/>
+              <a:off x="2502671" y="2073503"/>
               <a:ext cx="0" cy="3649639"/>
             </a:xfrm>
             <a:custGeom>
@@ -2873,7 +2873,7 @@
           </p:nvSpPr>
           <p:spPr>
             <a:xfrm>
-              <a:off x="4274200" y="2073503"/>
+              <a:off x="4573628" y="2073503"/>
               <a:ext cx="0" cy="3649639"/>
             </a:xfrm>
             <a:custGeom>
@@ -2916,7 +2916,7 @@
           </p:nvSpPr>
           <p:spPr>
             <a:xfrm>
-              <a:off x="6046857" y="2073503"/>
+              <a:off x="6644586" y="2073503"/>
               <a:ext cx="0" cy="3649639"/>
             </a:xfrm>
             <a:custGeom>
@@ -2953,598 +2953,561 @@
         </p:sp>
         <p:sp>
           <p:nvSpPr>
-            <p:cNvPr id="20" name="pl20"/>
+            <p:cNvPr id="20" name="pg20"/>
             <p:cNvSpPr/>
             <p:nvPr/>
           </p:nvSpPr>
           <p:spPr>
             <a:xfrm>
-              <a:off x="7819515" y="2073503"/>
-              <a:ext cx="0" cy="3649639"/>
+              <a:off x="1172049" y="2073503"/>
+              <a:ext cx="7090630" cy="3429833"/>
             </a:xfrm>
             <a:custGeom>
               <a:avLst/>
               <a:pathLst>
-                <a:path w="0" h="3649639">
+                <a:path w="7090630" h="3429833">
                   <a:moveTo>
-                    <a:pt x="0" y="3649639"/>
+                    <a:pt x="1394053" y="0"/>
                   </a:moveTo>
                   <a:lnTo>
-                    <a:pt x="0" y="0"/>
-                  </a:lnTo>
-                  <a:lnTo>
-                    <a:pt x="0" y="0"/>
-                  </a:lnTo>
-                </a:path>
-              </a:pathLst>
-            </a:custGeom>
-            <a:ln w="13550" cap="flat">
-              <a:solidFill>
-                <a:srgbClr val="EBEBEB">
-                  <a:alpha val="100000"/>
-                </a:srgbClr>
-              </a:solidFill>
-              <a:prstDash val="solid"/>
-              <a:round/>
-            </a:ln>
-          </p:spPr>
-          <p:txBody>
-            <a:bodyPr/>
-            <a:lstStyle/>
-            <a:p/>
-          </p:txBody>
-        </p:sp>
-        <p:sp>
-          <p:nvSpPr>
-            <p:cNvPr id="21" name="pg21"/>
-            <p:cNvSpPr/>
-            <p:nvPr/>
-          </p:nvSpPr>
-          <p:spPr>
-            <a:xfrm>
-              <a:off x="817517" y="2073503"/>
-              <a:ext cx="7403783" cy="3429833"/>
-            </a:xfrm>
-            <a:custGeom>
-              <a:avLst/>
-              <a:pathLst>
-                <a:path w="7403783" h="3429833">
-                  <a:moveTo>
-                    <a:pt x="1308729" y="0"/>
-                  </a:moveTo>
-                  <a:lnTo>
-                    <a:pt x="1349811" y="97667"/>
-                  </a:lnTo>
-                  <a:lnTo>
-                    <a:pt x="1426444" y="270547"/>
-                  </a:lnTo>
-                  <a:lnTo>
-                    <a:pt x="1503076" y="434601"/>
-                  </a:lnTo>
-                  <a:lnTo>
-                    <a:pt x="1579709" y="590279"/>
-                  </a:lnTo>
-                  <a:lnTo>
-                    <a:pt x="1656342" y="738009"/>
-                  </a:lnTo>
-                  <a:lnTo>
-                    <a:pt x="1732974" y="878196"/>
-                  </a:lnTo>
-                  <a:lnTo>
-                    <a:pt x="1809607" y="1011225"/>
-                  </a:lnTo>
-                  <a:lnTo>
-                    <a:pt x="1886239" y="1137463"/>
-                  </a:lnTo>
-                  <a:lnTo>
-                    <a:pt x="1962872" y="1257256"/>
-                  </a:lnTo>
-                  <a:lnTo>
-                    <a:pt x="2039504" y="1370932"/>
-                  </a:lnTo>
-                  <a:lnTo>
-                    <a:pt x="2116137" y="1478804"/>
-                  </a:lnTo>
-                  <a:lnTo>
-                    <a:pt x="2192769" y="1581169"/>
-                  </a:lnTo>
-                  <a:lnTo>
-                    <a:pt x="2269402" y="1678308"/>
-                  </a:lnTo>
-                  <a:lnTo>
-                    <a:pt x="2346034" y="1770487"/>
-                  </a:lnTo>
-                  <a:lnTo>
-                    <a:pt x="2422667" y="1857959"/>
-                  </a:lnTo>
-                  <a:lnTo>
-                    <a:pt x="2499300" y="1940966"/>
-                  </a:lnTo>
-                  <a:lnTo>
-                    <a:pt x="2575932" y="2019734"/>
-                  </a:lnTo>
-                  <a:lnTo>
-                    <a:pt x="2652565" y="2094481"/>
-                  </a:lnTo>
-                  <a:lnTo>
-                    <a:pt x="2729197" y="2165412"/>
-                  </a:lnTo>
-                  <a:lnTo>
-                    <a:pt x="2805830" y="2232721"/>
-                  </a:lnTo>
-                  <a:lnTo>
-                    <a:pt x="2882462" y="2296594"/>
-                  </a:lnTo>
-                  <a:lnTo>
-                    <a:pt x="2959095" y="2357205"/>
-                  </a:lnTo>
-                  <a:lnTo>
-                    <a:pt x="3035727" y="2414722"/>
-                  </a:lnTo>
-                  <a:lnTo>
-                    <a:pt x="3112360" y="2469303"/>
-                  </a:lnTo>
-                  <a:lnTo>
-                    <a:pt x="3188993" y="2521096"/>
-                  </a:lnTo>
-                  <a:lnTo>
-                    <a:pt x="3265625" y="2570246"/>
-                  </a:lnTo>
-                  <a:lnTo>
-                    <a:pt x="3342258" y="2616886"/>
-                  </a:lnTo>
-                  <a:lnTo>
-                    <a:pt x="3418890" y="2655601"/>
-                  </a:lnTo>
-                  <a:lnTo>
-                    <a:pt x="3495523" y="2663870"/>
-                  </a:lnTo>
-                  <a:lnTo>
-                    <a:pt x="3572155" y="2672056"/>
-                  </a:lnTo>
-                  <a:lnTo>
-                    <a:pt x="3648788" y="2680161"/>
-                  </a:lnTo>
-                  <a:lnTo>
-                    <a:pt x="3725420" y="2688185"/>
-                  </a:lnTo>
-                  <a:lnTo>
-                    <a:pt x="3802053" y="2696128"/>
-                  </a:lnTo>
-                  <a:lnTo>
-                    <a:pt x="3878685" y="2703993"/>
-                  </a:lnTo>
-                  <a:lnTo>
-                    <a:pt x="3955318" y="2711778"/>
-                  </a:lnTo>
-                  <a:lnTo>
-                    <a:pt x="4031951" y="2719486"/>
-                  </a:lnTo>
-                  <a:lnTo>
-                    <a:pt x="4108583" y="2727117"/>
-                  </a:lnTo>
-                  <a:lnTo>
-                    <a:pt x="4185216" y="2734672"/>
-                  </a:lnTo>
-                  <a:lnTo>
-                    <a:pt x="4261848" y="2742152"/>
-                  </a:lnTo>
-                  <a:lnTo>
-                    <a:pt x="4338481" y="2749556"/>
-                  </a:lnTo>
-                  <a:lnTo>
-                    <a:pt x="4415113" y="2756887"/>
-                  </a:lnTo>
-                  <a:lnTo>
-                    <a:pt x="4491746" y="2764145"/>
-                  </a:lnTo>
-                  <a:lnTo>
-                    <a:pt x="4568378" y="2771330"/>
-                  </a:lnTo>
-                  <a:lnTo>
-                    <a:pt x="4645011" y="2778443"/>
-                  </a:lnTo>
-                  <a:lnTo>
-                    <a:pt x="4721644" y="2785486"/>
-                  </a:lnTo>
-                  <a:lnTo>
-                    <a:pt x="4798276" y="2792458"/>
-                  </a:lnTo>
-                  <a:lnTo>
-                    <a:pt x="4874909" y="2799360"/>
-                  </a:lnTo>
-                  <a:lnTo>
-                    <a:pt x="4951541" y="2806194"/>
-                  </a:lnTo>
-                  <a:lnTo>
-                    <a:pt x="5028174" y="2812959"/>
-                  </a:lnTo>
-                  <a:lnTo>
-                    <a:pt x="5104806" y="2819657"/>
-                  </a:lnTo>
-                  <a:lnTo>
-                    <a:pt x="5181439" y="2826288"/>
-                  </a:lnTo>
-                  <a:lnTo>
-                    <a:pt x="5258071" y="2832852"/>
-                  </a:lnTo>
-                  <a:lnTo>
-                    <a:pt x="5334704" y="2839351"/>
-                  </a:lnTo>
-                  <a:lnTo>
-                    <a:pt x="5411336" y="2845786"/>
-                  </a:lnTo>
-                  <a:lnTo>
-                    <a:pt x="5487969" y="2852156"/>
-                  </a:lnTo>
-                  <a:lnTo>
-                    <a:pt x="5564602" y="2858462"/>
-                  </a:lnTo>
-                  <a:lnTo>
-                    <a:pt x="5641234" y="2864705"/>
-                  </a:lnTo>
-                  <a:lnTo>
-                    <a:pt x="5717867" y="2870886"/>
-                  </a:lnTo>
-                  <a:lnTo>
-                    <a:pt x="5794499" y="2877006"/>
-                  </a:lnTo>
-                  <a:lnTo>
-                    <a:pt x="5871132" y="2883064"/>
-                  </a:lnTo>
-                  <a:lnTo>
-                    <a:pt x="5947764" y="2889062"/>
-                  </a:lnTo>
-                  <a:lnTo>
-                    <a:pt x="6024397" y="2895000"/>
-                  </a:lnTo>
-                  <a:lnTo>
-                    <a:pt x="6101029" y="2900878"/>
-                  </a:lnTo>
-                  <a:lnTo>
-                    <a:pt x="6177662" y="2906698"/>
-                  </a:lnTo>
-                  <a:lnTo>
-                    <a:pt x="6254294" y="2912460"/>
-                  </a:lnTo>
-                  <a:lnTo>
-                    <a:pt x="6330927" y="2918164"/>
-                  </a:lnTo>
-                  <a:lnTo>
-                    <a:pt x="6407560" y="2923811"/>
-                  </a:lnTo>
-                  <a:lnTo>
-                    <a:pt x="6484192" y="2929402"/>
-                  </a:lnTo>
-                  <a:lnTo>
-                    <a:pt x="6560825" y="2934937"/>
-                  </a:lnTo>
-                  <a:lnTo>
-                    <a:pt x="6637457" y="2940417"/>
-                  </a:lnTo>
-                  <a:lnTo>
-                    <a:pt x="6714090" y="2945842"/>
-                  </a:lnTo>
-                  <a:lnTo>
-                    <a:pt x="6790722" y="2951213"/>
-                  </a:lnTo>
-                  <a:lnTo>
-                    <a:pt x="6867355" y="2956530"/>
-                  </a:lnTo>
-                  <a:lnTo>
-                    <a:pt x="6943987" y="2961795"/>
-                  </a:lnTo>
-                  <a:lnTo>
-                    <a:pt x="7020620" y="2967006"/>
-                  </a:lnTo>
-                  <a:lnTo>
-                    <a:pt x="7097253" y="2972166"/>
-                  </a:lnTo>
-                  <a:lnTo>
-                    <a:pt x="7173885" y="2977274"/>
-                  </a:lnTo>
-                  <a:lnTo>
-                    <a:pt x="7250518" y="2982331"/>
-                  </a:lnTo>
-                  <a:lnTo>
-                    <a:pt x="7327150" y="2987337"/>
-                  </a:lnTo>
-                  <a:lnTo>
-                    <a:pt x="7403783" y="2992294"/>
-                  </a:lnTo>
-                  <a:lnTo>
-                    <a:pt x="7403783" y="3429833"/>
-                  </a:lnTo>
-                  <a:lnTo>
-                    <a:pt x="7327150" y="3426933"/>
-                  </a:lnTo>
-                  <a:lnTo>
-                    <a:pt x="7250518" y="3423876"/>
-                  </a:lnTo>
-                  <a:lnTo>
-                    <a:pt x="7173885" y="3420655"/>
-                  </a:lnTo>
-                  <a:lnTo>
-                    <a:pt x="7097253" y="3417260"/>
-                  </a:lnTo>
-                  <a:lnTo>
-                    <a:pt x="7020620" y="3413683"/>
-                  </a:lnTo>
-                  <a:lnTo>
-                    <a:pt x="6943987" y="3409913"/>
-                  </a:lnTo>
-                  <a:lnTo>
-                    <a:pt x="6867355" y="3405941"/>
-                  </a:lnTo>
-                  <a:lnTo>
-                    <a:pt x="6790722" y="3401755"/>
-                  </a:lnTo>
-                  <a:lnTo>
-                    <a:pt x="6714090" y="3397343"/>
-                  </a:lnTo>
-                  <a:lnTo>
-                    <a:pt x="6637457" y="3392694"/>
-                  </a:lnTo>
-                  <a:lnTo>
-                    <a:pt x="6560825" y="3387796"/>
-                  </a:lnTo>
-                  <a:lnTo>
-                    <a:pt x="6484192" y="3382633"/>
-                  </a:lnTo>
-                  <a:lnTo>
-                    <a:pt x="6407560" y="3377193"/>
-                  </a:lnTo>
-                  <a:lnTo>
-                    <a:pt x="6330927" y="3371460"/>
-                  </a:lnTo>
-                  <a:lnTo>
-                    <a:pt x="6254294" y="3365419"/>
-                  </a:lnTo>
-                  <a:lnTo>
-                    <a:pt x="6177662" y="3359052"/>
-                  </a:lnTo>
-                  <a:lnTo>
-                    <a:pt x="6101029" y="3352343"/>
-                  </a:lnTo>
-                  <a:lnTo>
-                    <a:pt x="6024397" y="3345273"/>
-                  </a:lnTo>
-                  <a:lnTo>
-                    <a:pt x="5947764" y="3337823"/>
-                  </a:lnTo>
-                  <a:lnTo>
-                    <a:pt x="5871132" y="3329972"/>
-                  </a:lnTo>
-                  <a:lnTo>
-                    <a:pt x="5794499" y="3321698"/>
-                  </a:lnTo>
-                  <a:lnTo>
-                    <a:pt x="5717867" y="3312979"/>
-                  </a:lnTo>
-                  <a:lnTo>
-                    <a:pt x="5641234" y="3303792"/>
-                  </a:lnTo>
-                  <a:lnTo>
-                    <a:pt x="5564602" y="3294109"/>
-                  </a:lnTo>
-                  <a:lnTo>
-                    <a:pt x="5487969" y="3283906"/>
-                  </a:lnTo>
-                  <a:lnTo>
-                    <a:pt x="5411336" y="3273154"/>
-                  </a:lnTo>
-                  <a:lnTo>
-                    <a:pt x="5334704" y="3261824"/>
-                  </a:lnTo>
-                  <a:lnTo>
-                    <a:pt x="5258071" y="3249884"/>
-                  </a:lnTo>
-                  <a:lnTo>
-                    <a:pt x="5181439" y="3237301"/>
-                  </a:lnTo>
-                  <a:lnTo>
-                    <a:pt x="5104806" y="3224042"/>
-                  </a:lnTo>
-                  <a:lnTo>
-                    <a:pt x="5028174" y="3210069"/>
-                  </a:lnTo>
-                  <a:lnTo>
-                    <a:pt x="4951541" y="3195344"/>
-                  </a:lnTo>
-                  <a:lnTo>
-                    <a:pt x="4874909" y="3179827"/>
-                  </a:lnTo>
-                  <a:lnTo>
-                    <a:pt x="4798276" y="3163475"/>
-                  </a:lnTo>
-                  <a:lnTo>
-                    <a:pt x="4721644" y="3146243"/>
-                  </a:lnTo>
-                  <a:lnTo>
-                    <a:pt x="4645011" y="3128085"/>
-                  </a:lnTo>
-                  <a:lnTo>
-                    <a:pt x="4568378" y="3108949"/>
-                  </a:lnTo>
-                  <a:lnTo>
-                    <a:pt x="4491746" y="3088783"/>
-                  </a:lnTo>
-                  <a:lnTo>
-                    <a:pt x="4415113" y="3067533"/>
-                  </a:lnTo>
-                  <a:lnTo>
-                    <a:pt x="4338481" y="3045140"/>
-                  </a:lnTo>
-                  <a:lnTo>
-                    <a:pt x="4261848" y="3021541"/>
-                  </a:lnTo>
-                  <a:lnTo>
-                    <a:pt x="4185216" y="2996673"/>
-                  </a:lnTo>
-                  <a:lnTo>
-                    <a:pt x="4108583" y="2970467"/>
-                  </a:lnTo>
-                  <a:lnTo>
-                    <a:pt x="4031951" y="2942851"/>
-                  </a:lnTo>
-                  <a:lnTo>
-                    <a:pt x="3955318" y="2913749"/>
-                  </a:lnTo>
-                  <a:lnTo>
-                    <a:pt x="3878685" y="2883081"/>
-                  </a:lnTo>
-                  <a:lnTo>
-                    <a:pt x="3802053" y="2850763"/>
-                  </a:lnTo>
-                  <a:lnTo>
-                    <a:pt x="3725420" y="2816707"/>
-                  </a:lnTo>
-                  <a:lnTo>
-                    <a:pt x="3648788" y="2780818"/>
-                  </a:lnTo>
-                  <a:lnTo>
-                    <a:pt x="3572155" y="2742998"/>
-                  </a:lnTo>
-                  <a:lnTo>
-                    <a:pt x="3495523" y="2703143"/>
-                  </a:lnTo>
-                  <a:lnTo>
-                    <a:pt x="3418890" y="2661144"/>
-                  </a:lnTo>
-                  <a:lnTo>
-                    <a:pt x="3342258" y="2647249"/>
-                  </a:lnTo>
-                  <a:lnTo>
-                    <a:pt x="3265625" y="2638812"/>
-                  </a:lnTo>
-                  <a:lnTo>
-                    <a:pt x="3188993" y="2630291"/>
-                  </a:lnTo>
-                  <a:lnTo>
-                    <a:pt x="3112360" y="2621683"/>
-                  </a:lnTo>
-                  <a:lnTo>
-                    <a:pt x="3035727" y="2612989"/>
-                  </a:lnTo>
-                  <a:lnTo>
-                    <a:pt x="2959095" y="2604206"/>
-                  </a:lnTo>
-                  <a:lnTo>
-                    <a:pt x="2882462" y="2595336"/>
-                  </a:lnTo>
-                  <a:lnTo>
-                    <a:pt x="2805830" y="2586376"/>
-                  </a:lnTo>
-                  <a:lnTo>
-                    <a:pt x="2729197" y="2577325"/>
-                  </a:lnTo>
-                  <a:lnTo>
-                    <a:pt x="2652565" y="2568183"/>
-                  </a:lnTo>
-                  <a:lnTo>
-                    <a:pt x="2575932" y="2558949"/>
-                  </a:lnTo>
-                  <a:lnTo>
-                    <a:pt x="2499300" y="2549622"/>
-                  </a:lnTo>
-                  <a:lnTo>
-                    <a:pt x="2422667" y="2540201"/>
-                  </a:lnTo>
-                  <a:lnTo>
-                    <a:pt x="2346034" y="2530685"/>
-                  </a:lnTo>
-                  <a:lnTo>
-                    <a:pt x="2269402" y="2521073"/>
-                  </a:lnTo>
-                  <a:lnTo>
-                    <a:pt x="2192769" y="2511364"/>
-                  </a:lnTo>
-                  <a:lnTo>
-                    <a:pt x="2116137" y="2501556"/>
-                  </a:lnTo>
-                  <a:lnTo>
-                    <a:pt x="2039504" y="2491651"/>
-                  </a:lnTo>
-                  <a:lnTo>
-                    <a:pt x="1962872" y="2481645"/>
-                  </a:lnTo>
-                  <a:lnTo>
-                    <a:pt x="1886239" y="2471538"/>
-                  </a:lnTo>
-                  <a:lnTo>
-                    <a:pt x="1809607" y="2461329"/>
-                  </a:lnTo>
-                  <a:lnTo>
-                    <a:pt x="1732974" y="2451017"/>
-                  </a:lnTo>
-                  <a:lnTo>
-                    <a:pt x="1656342" y="2440602"/>
-                  </a:lnTo>
-                  <a:lnTo>
-                    <a:pt x="1579709" y="2430081"/>
-                  </a:lnTo>
-                  <a:lnTo>
-                    <a:pt x="1503076" y="2419454"/>
-                  </a:lnTo>
-                  <a:lnTo>
-                    <a:pt x="1426444" y="2408720"/>
-                  </a:lnTo>
-                  <a:lnTo>
-                    <a:pt x="1349811" y="2397878"/>
-                  </a:lnTo>
-                  <a:lnTo>
-                    <a:pt x="1273179" y="2386926"/>
-                  </a:lnTo>
-                  <a:lnTo>
-                    <a:pt x="1196546" y="2375864"/>
-                  </a:lnTo>
-                  <a:lnTo>
-                    <a:pt x="1119914" y="2364691"/>
-                  </a:lnTo>
-                  <a:lnTo>
-                    <a:pt x="1043281" y="2353404"/>
-                  </a:lnTo>
-                  <a:lnTo>
-                    <a:pt x="966649" y="2342004"/>
-                  </a:lnTo>
-                  <a:lnTo>
-                    <a:pt x="890016" y="2330489"/>
-                  </a:lnTo>
-                  <a:lnTo>
-                    <a:pt x="813384" y="2318858"/>
-                  </a:lnTo>
-                  <a:lnTo>
-                    <a:pt x="736751" y="2307109"/>
-                  </a:lnTo>
-                  <a:lnTo>
-                    <a:pt x="660118" y="2295242"/>
-                  </a:lnTo>
-                  <a:lnTo>
-                    <a:pt x="583486" y="2283255"/>
-                  </a:lnTo>
-                  <a:lnTo>
-                    <a:pt x="506853" y="2271148"/>
-                  </a:lnTo>
-                  <a:lnTo>
-                    <a:pt x="430221" y="2258918"/>
-                  </a:lnTo>
-                  <a:lnTo>
-                    <a:pt x="353588" y="2246565"/>
-                  </a:lnTo>
-                  <a:lnTo>
-                    <a:pt x="276956" y="2234087"/>
-                  </a:lnTo>
-                  <a:lnTo>
-                    <a:pt x="200323" y="2221483"/>
-                  </a:lnTo>
-                  <a:lnTo>
-                    <a:pt x="123691" y="2208753"/>
-                  </a:lnTo>
-                  <a:lnTo>
-                    <a:pt x="47058" y="2195894"/>
-                  </a:lnTo>
-                  <a:lnTo>
-                    <a:pt x="0" y="2187918"/>
+                    <a:pt x="1432450" y="97667"/>
+                  </a:lnTo>
+                  <a:lnTo>
+                    <a:pt x="1504073" y="270547"/>
+                  </a:lnTo>
+                  <a:lnTo>
+                    <a:pt x="1575695" y="434601"/>
+                  </a:lnTo>
+                  <a:lnTo>
+                    <a:pt x="1647318" y="590279"/>
+                  </a:lnTo>
+                  <a:lnTo>
+                    <a:pt x="1718940" y="738009"/>
+                  </a:lnTo>
+                  <a:lnTo>
+                    <a:pt x="1790563" y="878196"/>
+                  </a:lnTo>
+                  <a:lnTo>
+                    <a:pt x="1862185" y="1011225"/>
+                  </a:lnTo>
+                  <a:lnTo>
+                    <a:pt x="1933808" y="1137463"/>
+                  </a:lnTo>
+                  <a:lnTo>
+                    <a:pt x="2005430" y="1257256"/>
+                  </a:lnTo>
+                  <a:lnTo>
+                    <a:pt x="2077053" y="1370932"/>
+                  </a:lnTo>
+                  <a:lnTo>
+                    <a:pt x="2148675" y="1478804"/>
+                  </a:lnTo>
+                  <a:lnTo>
+                    <a:pt x="2220298" y="1581169"/>
+                  </a:lnTo>
+                  <a:lnTo>
+                    <a:pt x="2291920" y="1678308"/>
+                  </a:lnTo>
+                  <a:lnTo>
+                    <a:pt x="2363543" y="1770487"/>
+                  </a:lnTo>
+                  <a:lnTo>
+                    <a:pt x="2435165" y="1857959"/>
+                  </a:lnTo>
+                  <a:lnTo>
+                    <a:pt x="2506788" y="1940966"/>
+                  </a:lnTo>
+                  <a:lnTo>
+                    <a:pt x="2578410" y="2019734"/>
+                  </a:lnTo>
+                  <a:lnTo>
+                    <a:pt x="2650033" y="2094481"/>
+                  </a:lnTo>
+                  <a:lnTo>
+                    <a:pt x="2721655" y="2165412"/>
+                  </a:lnTo>
+                  <a:lnTo>
+                    <a:pt x="2793278" y="2232721"/>
+                  </a:lnTo>
+                  <a:lnTo>
+                    <a:pt x="2864901" y="2296594"/>
+                  </a:lnTo>
+                  <a:lnTo>
+                    <a:pt x="2936523" y="2357205"/>
+                  </a:lnTo>
+                  <a:lnTo>
+                    <a:pt x="3008146" y="2414722"/>
+                  </a:lnTo>
+                  <a:lnTo>
+                    <a:pt x="3079768" y="2469303"/>
+                  </a:lnTo>
+                  <a:lnTo>
+                    <a:pt x="3151391" y="2521096"/>
+                  </a:lnTo>
+                  <a:lnTo>
+                    <a:pt x="3223013" y="2570246"/>
+                  </a:lnTo>
+                  <a:lnTo>
+                    <a:pt x="3294636" y="2616886"/>
+                  </a:lnTo>
+                  <a:lnTo>
+                    <a:pt x="3366258" y="2655601"/>
+                  </a:lnTo>
+                  <a:lnTo>
+                    <a:pt x="3437881" y="2663870"/>
+                  </a:lnTo>
+                  <a:lnTo>
+                    <a:pt x="3509503" y="2672056"/>
+                  </a:lnTo>
+                  <a:lnTo>
+                    <a:pt x="3581126" y="2680161"/>
+                  </a:lnTo>
+                  <a:lnTo>
+                    <a:pt x="3652748" y="2688185"/>
+                  </a:lnTo>
+                  <a:lnTo>
+                    <a:pt x="3724371" y="2696128"/>
+                  </a:lnTo>
+                  <a:lnTo>
+                    <a:pt x="3795993" y="2703993"/>
+                  </a:lnTo>
+                  <a:lnTo>
+                    <a:pt x="3867616" y="2711778"/>
+                  </a:lnTo>
+                  <a:lnTo>
+                    <a:pt x="3939238" y="2719486"/>
+                  </a:lnTo>
+                  <a:lnTo>
+                    <a:pt x="4010861" y="2727117"/>
+                  </a:lnTo>
+                  <a:lnTo>
+                    <a:pt x="4082483" y="2734672"/>
+                  </a:lnTo>
+                  <a:lnTo>
+                    <a:pt x="4154106" y="2742152"/>
+                  </a:lnTo>
+                  <a:lnTo>
+                    <a:pt x="4225729" y="2749556"/>
+                  </a:lnTo>
+                  <a:lnTo>
+                    <a:pt x="4297351" y="2756887"/>
+                  </a:lnTo>
+                  <a:lnTo>
+                    <a:pt x="4368974" y="2764145"/>
+                  </a:lnTo>
+                  <a:lnTo>
+                    <a:pt x="4440596" y="2771330"/>
+                  </a:lnTo>
+                  <a:lnTo>
+                    <a:pt x="4512219" y="2778443"/>
+                  </a:lnTo>
+                  <a:lnTo>
+                    <a:pt x="4583841" y="2785486"/>
+                  </a:lnTo>
+                  <a:lnTo>
+                    <a:pt x="4655464" y="2792458"/>
+                  </a:lnTo>
+                  <a:lnTo>
+                    <a:pt x="4727086" y="2799360"/>
+                  </a:lnTo>
+                  <a:lnTo>
+                    <a:pt x="4798709" y="2806194"/>
+                  </a:lnTo>
+                  <a:lnTo>
+                    <a:pt x="4870331" y="2812959"/>
+                  </a:lnTo>
+                  <a:lnTo>
+                    <a:pt x="4941954" y="2819657"/>
+                  </a:lnTo>
+                  <a:lnTo>
+                    <a:pt x="5013576" y="2826288"/>
+                  </a:lnTo>
+                  <a:lnTo>
+                    <a:pt x="5085199" y="2832852"/>
+                  </a:lnTo>
+                  <a:lnTo>
+                    <a:pt x="5156821" y="2839351"/>
+                  </a:lnTo>
+                  <a:lnTo>
+                    <a:pt x="5228444" y="2845786"/>
+                  </a:lnTo>
+                  <a:lnTo>
+                    <a:pt x="5300066" y="2852156"/>
+                  </a:lnTo>
+                  <a:lnTo>
+                    <a:pt x="5371689" y="2858462"/>
+                  </a:lnTo>
+                  <a:lnTo>
+                    <a:pt x="5443311" y="2864705"/>
+                  </a:lnTo>
+                  <a:lnTo>
+                    <a:pt x="5514934" y="2870886"/>
+                  </a:lnTo>
+                  <a:lnTo>
+                    <a:pt x="5586557" y="2877006"/>
+                  </a:lnTo>
+                  <a:lnTo>
+                    <a:pt x="5658179" y="2883064"/>
+                  </a:lnTo>
+                  <a:lnTo>
+                    <a:pt x="5729802" y="2889062"/>
+                  </a:lnTo>
+                  <a:lnTo>
+                    <a:pt x="5801424" y="2895000"/>
+                  </a:lnTo>
+                  <a:lnTo>
+                    <a:pt x="5873047" y="2900878"/>
+                  </a:lnTo>
+                  <a:lnTo>
+                    <a:pt x="5944669" y="2906698"/>
+                  </a:lnTo>
+                  <a:lnTo>
+                    <a:pt x="6016292" y="2912460"/>
+                  </a:lnTo>
+                  <a:lnTo>
+                    <a:pt x="6087914" y="2918164"/>
+                  </a:lnTo>
+                  <a:lnTo>
+                    <a:pt x="6159537" y="2923811"/>
+                  </a:lnTo>
+                  <a:lnTo>
+                    <a:pt x="6231159" y="2929402"/>
+                  </a:lnTo>
+                  <a:lnTo>
+                    <a:pt x="6302782" y="2934937"/>
+                  </a:lnTo>
+                  <a:lnTo>
+                    <a:pt x="6374404" y="2940417"/>
+                  </a:lnTo>
+                  <a:lnTo>
+                    <a:pt x="6446027" y="2945842"/>
+                  </a:lnTo>
+                  <a:lnTo>
+                    <a:pt x="6517649" y="2951213"/>
+                  </a:lnTo>
+                  <a:lnTo>
+                    <a:pt x="6589272" y="2956530"/>
+                  </a:lnTo>
+                  <a:lnTo>
+                    <a:pt x="6660894" y="2961795"/>
+                  </a:lnTo>
+                  <a:lnTo>
+                    <a:pt x="6732517" y="2967006"/>
+                  </a:lnTo>
+                  <a:lnTo>
+                    <a:pt x="6804139" y="2972166"/>
+                  </a:lnTo>
+                  <a:lnTo>
+                    <a:pt x="6875762" y="2977274"/>
+                  </a:lnTo>
+                  <a:lnTo>
+                    <a:pt x="6947385" y="2982331"/>
+                  </a:lnTo>
+                  <a:lnTo>
+                    <a:pt x="7019007" y="2987337"/>
+                  </a:lnTo>
+                  <a:lnTo>
+                    <a:pt x="7090630" y="2992294"/>
+                  </a:lnTo>
+                  <a:lnTo>
+                    <a:pt x="7090630" y="3429833"/>
+                  </a:lnTo>
+                  <a:lnTo>
+                    <a:pt x="7019007" y="3426933"/>
+                  </a:lnTo>
+                  <a:lnTo>
+                    <a:pt x="6947385" y="3423876"/>
+                  </a:lnTo>
+                  <a:lnTo>
+                    <a:pt x="6875762" y="3420655"/>
+                  </a:lnTo>
+                  <a:lnTo>
+                    <a:pt x="6804139" y="3417260"/>
+                  </a:lnTo>
+                  <a:lnTo>
+                    <a:pt x="6732517" y="3413683"/>
+                  </a:lnTo>
+                  <a:lnTo>
+                    <a:pt x="6660894" y="3409913"/>
+                  </a:lnTo>
+                  <a:lnTo>
+                    <a:pt x="6589272" y="3405941"/>
+                  </a:lnTo>
+                  <a:lnTo>
+                    <a:pt x="6517649" y="3401755"/>
+                  </a:lnTo>
+                  <a:lnTo>
+                    <a:pt x="6446027" y="3397343"/>
+                  </a:lnTo>
+                  <a:lnTo>
+                    <a:pt x="6374404" y="3392694"/>
+                  </a:lnTo>
+                  <a:lnTo>
+                    <a:pt x="6302782" y="3387796"/>
+                  </a:lnTo>
+                  <a:lnTo>
+                    <a:pt x="6231159" y="3382633"/>
+                  </a:lnTo>
+                  <a:lnTo>
+                    <a:pt x="6159537" y="3377193"/>
+                  </a:lnTo>
+                  <a:lnTo>
+                    <a:pt x="6087914" y="3371460"/>
+                  </a:lnTo>
+                  <a:lnTo>
+                    <a:pt x="6016292" y="3365419"/>
+                  </a:lnTo>
+                  <a:lnTo>
+                    <a:pt x="5944669" y="3359052"/>
+                  </a:lnTo>
+                  <a:lnTo>
+                    <a:pt x="5873047" y="3352343"/>
+                  </a:lnTo>
+                  <a:lnTo>
+                    <a:pt x="5801424" y="3345273"/>
+                  </a:lnTo>
+                  <a:lnTo>
+                    <a:pt x="5729802" y="3337823"/>
+                  </a:lnTo>
+                  <a:lnTo>
+                    <a:pt x="5658179" y="3329972"/>
+                  </a:lnTo>
+                  <a:lnTo>
+                    <a:pt x="5586557" y="3321698"/>
+                  </a:lnTo>
+                  <a:lnTo>
+                    <a:pt x="5514934" y="3312979"/>
+                  </a:lnTo>
+                  <a:lnTo>
+                    <a:pt x="5443311" y="3303792"/>
+                  </a:lnTo>
+                  <a:lnTo>
+                    <a:pt x="5371689" y="3294109"/>
+                  </a:lnTo>
+                  <a:lnTo>
+                    <a:pt x="5300066" y="3283906"/>
+                  </a:lnTo>
+                  <a:lnTo>
+                    <a:pt x="5228444" y="3273154"/>
+                  </a:lnTo>
+                  <a:lnTo>
+                    <a:pt x="5156821" y="3261824"/>
+                  </a:lnTo>
+                  <a:lnTo>
+                    <a:pt x="5085199" y="3249884"/>
+                  </a:lnTo>
+                  <a:lnTo>
+                    <a:pt x="5013576" y="3237301"/>
+                  </a:lnTo>
+                  <a:lnTo>
+                    <a:pt x="4941954" y="3224042"/>
+                  </a:lnTo>
+                  <a:lnTo>
+                    <a:pt x="4870331" y="3210069"/>
+                  </a:lnTo>
+                  <a:lnTo>
+                    <a:pt x="4798709" y="3195344"/>
+                  </a:lnTo>
+                  <a:lnTo>
+                    <a:pt x="4727086" y="3179827"/>
+                  </a:lnTo>
+                  <a:lnTo>
+                    <a:pt x="4655464" y="3163475"/>
+                  </a:lnTo>
+                  <a:lnTo>
+                    <a:pt x="4583841" y="3146243"/>
+                  </a:lnTo>
+                  <a:lnTo>
+                    <a:pt x="4512219" y="3128085"/>
+                  </a:lnTo>
+                  <a:lnTo>
+                    <a:pt x="4440596" y="3108949"/>
+                  </a:lnTo>
+                  <a:lnTo>
+                    <a:pt x="4368974" y="3088783"/>
+                  </a:lnTo>
+                  <a:lnTo>
+                    <a:pt x="4297351" y="3067533"/>
+                  </a:lnTo>
+                  <a:lnTo>
+                    <a:pt x="4225729" y="3045140"/>
+                  </a:lnTo>
+                  <a:lnTo>
+                    <a:pt x="4154106" y="3021541"/>
+                  </a:lnTo>
+                  <a:lnTo>
+                    <a:pt x="4082483" y="2996673"/>
+                  </a:lnTo>
+                  <a:lnTo>
+                    <a:pt x="4010861" y="2970467"/>
+                  </a:lnTo>
+                  <a:lnTo>
+                    <a:pt x="3939238" y="2942851"/>
+                  </a:lnTo>
+                  <a:lnTo>
+                    <a:pt x="3867616" y="2913749"/>
+                  </a:lnTo>
+                  <a:lnTo>
+                    <a:pt x="3795993" y="2883081"/>
+                  </a:lnTo>
+                  <a:lnTo>
+                    <a:pt x="3724371" y="2850763"/>
+                  </a:lnTo>
+                  <a:lnTo>
+                    <a:pt x="3652748" y="2816707"/>
+                  </a:lnTo>
+                  <a:lnTo>
+                    <a:pt x="3581126" y="2780818"/>
+                  </a:lnTo>
+                  <a:lnTo>
+                    <a:pt x="3509503" y="2742998"/>
+                  </a:lnTo>
+                  <a:lnTo>
+                    <a:pt x="3437881" y="2703143"/>
+                  </a:lnTo>
+                  <a:lnTo>
+                    <a:pt x="3366258" y="2661144"/>
+                  </a:lnTo>
+                  <a:lnTo>
+                    <a:pt x="3294636" y="2647249"/>
+                  </a:lnTo>
+                  <a:lnTo>
+                    <a:pt x="3223013" y="2638812"/>
+                  </a:lnTo>
+                  <a:lnTo>
+                    <a:pt x="3151391" y="2630291"/>
+                  </a:lnTo>
+                  <a:lnTo>
+                    <a:pt x="3079768" y="2621683"/>
+                  </a:lnTo>
+                  <a:lnTo>
+                    <a:pt x="3008146" y="2612989"/>
+                  </a:lnTo>
+                  <a:lnTo>
+                    <a:pt x="2936523" y="2604206"/>
+                  </a:lnTo>
+                  <a:lnTo>
+                    <a:pt x="2864901" y="2595336"/>
+                  </a:lnTo>
+                  <a:lnTo>
+                    <a:pt x="2793278" y="2586376"/>
+                  </a:lnTo>
+                  <a:lnTo>
+                    <a:pt x="2721655" y="2577325"/>
+                  </a:lnTo>
+                  <a:lnTo>
+                    <a:pt x="2650033" y="2568183"/>
+                  </a:lnTo>
+                  <a:lnTo>
+                    <a:pt x="2578410" y="2558949"/>
+                  </a:lnTo>
+                  <a:lnTo>
+                    <a:pt x="2506788" y="2549622"/>
+                  </a:lnTo>
+                  <a:lnTo>
+                    <a:pt x="2435165" y="2540201"/>
+                  </a:lnTo>
+                  <a:lnTo>
+                    <a:pt x="2363543" y="2530685"/>
+                  </a:lnTo>
+                  <a:lnTo>
+                    <a:pt x="2291920" y="2521073"/>
+                  </a:lnTo>
+                  <a:lnTo>
+                    <a:pt x="2220298" y="2511364"/>
+                  </a:lnTo>
+                  <a:lnTo>
+                    <a:pt x="2148675" y="2501556"/>
+                  </a:lnTo>
+                  <a:lnTo>
+                    <a:pt x="2077053" y="2491651"/>
+                  </a:lnTo>
+                  <a:lnTo>
+                    <a:pt x="2005430" y="2481645"/>
+                  </a:lnTo>
+                  <a:lnTo>
+                    <a:pt x="1933808" y="2471538"/>
+                  </a:lnTo>
+                  <a:lnTo>
+                    <a:pt x="1862185" y="2461329"/>
+                  </a:lnTo>
+                  <a:lnTo>
+                    <a:pt x="1790563" y="2451017"/>
+                  </a:lnTo>
+                  <a:lnTo>
+                    <a:pt x="1718940" y="2440602"/>
+                  </a:lnTo>
+                  <a:lnTo>
+                    <a:pt x="1647318" y="2430081"/>
+                  </a:lnTo>
+                  <a:lnTo>
+                    <a:pt x="1575695" y="2419454"/>
+                  </a:lnTo>
+                  <a:lnTo>
+                    <a:pt x="1504073" y="2408720"/>
+                  </a:lnTo>
+                  <a:lnTo>
+                    <a:pt x="1432450" y="2397878"/>
+                  </a:lnTo>
+                  <a:lnTo>
+                    <a:pt x="1360827" y="2386926"/>
+                  </a:lnTo>
+                  <a:lnTo>
+                    <a:pt x="1289205" y="2375864"/>
+                  </a:lnTo>
+                  <a:lnTo>
+                    <a:pt x="1217582" y="2364691"/>
+                  </a:lnTo>
+                  <a:lnTo>
+                    <a:pt x="1145960" y="2353404"/>
+                  </a:lnTo>
+                  <a:lnTo>
+                    <a:pt x="1074337" y="2342004"/>
+                  </a:lnTo>
+                  <a:lnTo>
+                    <a:pt x="1002715" y="2330489"/>
+                  </a:lnTo>
+                  <a:lnTo>
+                    <a:pt x="931092" y="2318858"/>
+                  </a:lnTo>
+                  <a:lnTo>
+                    <a:pt x="859470" y="2307109"/>
+                  </a:lnTo>
+                  <a:lnTo>
+                    <a:pt x="787847" y="2295242"/>
+                  </a:lnTo>
+                  <a:lnTo>
+                    <a:pt x="716225" y="2283255"/>
+                  </a:lnTo>
+                  <a:lnTo>
+                    <a:pt x="644602" y="2271148"/>
+                  </a:lnTo>
+                  <a:lnTo>
+                    <a:pt x="572980" y="2258918"/>
+                  </a:lnTo>
+                  <a:lnTo>
+                    <a:pt x="501357" y="2246565"/>
+                  </a:lnTo>
+                  <a:lnTo>
+                    <a:pt x="429735" y="2234087"/>
+                  </a:lnTo>
+                  <a:lnTo>
+                    <a:pt x="358112" y="2221483"/>
+                  </a:lnTo>
+                  <a:lnTo>
+                    <a:pt x="286490" y="2208753"/>
+                  </a:lnTo>
+                  <a:lnTo>
+                    <a:pt x="214867" y="2195894"/>
+                  </a:lnTo>
+                  <a:lnTo>
+                    <a:pt x="143245" y="2182905"/>
+                  </a:lnTo>
+                  <a:lnTo>
+                    <a:pt x="71622" y="2169785"/>
+                  </a:lnTo>
+                  <a:lnTo>
+                    <a:pt x="0" y="2156533"/>
                   </a:lnTo>
                   <a:close/>
                 </a:path>
@@ -3564,261 +3527,586 @@
         </p:sp>
         <p:sp>
           <p:nvSpPr>
+            <p:cNvPr id="21" name="pl21"/>
+            <p:cNvSpPr/>
+            <p:nvPr/>
+          </p:nvSpPr>
+          <p:spPr>
+            <a:xfrm>
+              <a:off x="2566103" y="2073503"/>
+              <a:ext cx="5696576" cy="2992294"/>
+            </a:xfrm>
+            <a:custGeom>
+              <a:avLst/>
+              <a:pathLst>
+                <a:path w="5696576" h="2992294">
+                  <a:moveTo>
+                    <a:pt x="0" y="0"/>
+                  </a:moveTo>
+                  <a:lnTo>
+                    <a:pt x="38396" y="97667"/>
+                  </a:lnTo>
+                  <a:lnTo>
+                    <a:pt x="110019" y="270547"/>
+                  </a:lnTo>
+                  <a:lnTo>
+                    <a:pt x="181641" y="434601"/>
+                  </a:lnTo>
+                  <a:lnTo>
+                    <a:pt x="253264" y="590279"/>
+                  </a:lnTo>
+                  <a:lnTo>
+                    <a:pt x="324886" y="738009"/>
+                  </a:lnTo>
+                  <a:lnTo>
+                    <a:pt x="396509" y="878196"/>
+                  </a:lnTo>
+                  <a:lnTo>
+                    <a:pt x="468131" y="1011225"/>
+                  </a:lnTo>
+                  <a:lnTo>
+                    <a:pt x="539754" y="1137463"/>
+                  </a:lnTo>
+                  <a:lnTo>
+                    <a:pt x="611376" y="1257256"/>
+                  </a:lnTo>
+                  <a:lnTo>
+                    <a:pt x="682999" y="1370932"/>
+                  </a:lnTo>
+                  <a:lnTo>
+                    <a:pt x="754621" y="1478804"/>
+                  </a:lnTo>
+                  <a:lnTo>
+                    <a:pt x="826244" y="1581169"/>
+                  </a:lnTo>
+                  <a:lnTo>
+                    <a:pt x="897866" y="1678308"/>
+                  </a:lnTo>
+                  <a:lnTo>
+                    <a:pt x="969489" y="1770487"/>
+                  </a:lnTo>
+                  <a:lnTo>
+                    <a:pt x="1041111" y="1857959"/>
+                  </a:lnTo>
+                  <a:lnTo>
+                    <a:pt x="1112734" y="1940966"/>
+                  </a:lnTo>
+                  <a:lnTo>
+                    <a:pt x="1184357" y="2019734"/>
+                  </a:lnTo>
+                  <a:lnTo>
+                    <a:pt x="1255979" y="2094481"/>
+                  </a:lnTo>
+                  <a:lnTo>
+                    <a:pt x="1327602" y="2165412"/>
+                  </a:lnTo>
+                  <a:lnTo>
+                    <a:pt x="1399224" y="2232721"/>
+                  </a:lnTo>
+                  <a:lnTo>
+                    <a:pt x="1470847" y="2296594"/>
+                  </a:lnTo>
+                  <a:lnTo>
+                    <a:pt x="1542469" y="2357205"/>
+                  </a:lnTo>
+                  <a:lnTo>
+                    <a:pt x="1614092" y="2414722"/>
+                  </a:lnTo>
+                  <a:lnTo>
+                    <a:pt x="1685714" y="2469303"/>
+                  </a:lnTo>
+                  <a:lnTo>
+                    <a:pt x="1757337" y="2521096"/>
+                  </a:lnTo>
+                  <a:lnTo>
+                    <a:pt x="1828959" y="2570246"/>
+                  </a:lnTo>
+                  <a:lnTo>
+                    <a:pt x="1900582" y="2616886"/>
+                  </a:lnTo>
+                  <a:lnTo>
+                    <a:pt x="1972204" y="2655601"/>
+                  </a:lnTo>
+                  <a:lnTo>
+                    <a:pt x="2043827" y="2663870"/>
+                  </a:lnTo>
+                  <a:lnTo>
+                    <a:pt x="2115449" y="2672056"/>
+                  </a:lnTo>
+                  <a:lnTo>
+                    <a:pt x="2187072" y="2680161"/>
+                  </a:lnTo>
+                  <a:lnTo>
+                    <a:pt x="2258694" y="2688185"/>
+                  </a:lnTo>
+                  <a:lnTo>
+                    <a:pt x="2330317" y="2696128"/>
+                  </a:lnTo>
+                  <a:lnTo>
+                    <a:pt x="2401939" y="2703993"/>
+                  </a:lnTo>
+                  <a:lnTo>
+                    <a:pt x="2473562" y="2711778"/>
+                  </a:lnTo>
+                  <a:lnTo>
+                    <a:pt x="2545185" y="2719486"/>
+                  </a:lnTo>
+                  <a:lnTo>
+                    <a:pt x="2616807" y="2727117"/>
+                  </a:lnTo>
+                  <a:lnTo>
+                    <a:pt x="2688430" y="2734672"/>
+                  </a:lnTo>
+                  <a:lnTo>
+                    <a:pt x="2760052" y="2742152"/>
+                  </a:lnTo>
+                  <a:lnTo>
+                    <a:pt x="2831675" y="2749556"/>
+                  </a:lnTo>
+                  <a:lnTo>
+                    <a:pt x="2903297" y="2756887"/>
+                  </a:lnTo>
+                  <a:lnTo>
+                    <a:pt x="2974920" y="2764145"/>
+                  </a:lnTo>
+                  <a:lnTo>
+                    <a:pt x="3046542" y="2771330"/>
+                  </a:lnTo>
+                  <a:lnTo>
+                    <a:pt x="3118165" y="2778443"/>
+                  </a:lnTo>
+                  <a:lnTo>
+                    <a:pt x="3189787" y="2785486"/>
+                  </a:lnTo>
+                  <a:lnTo>
+                    <a:pt x="3261410" y="2792458"/>
+                  </a:lnTo>
+                  <a:lnTo>
+                    <a:pt x="3333032" y="2799360"/>
+                  </a:lnTo>
+                  <a:lnTo>
+                    <a:pt x="3404655" y="2806194"/>
+                  </a:lnTo>
+                  <a:lnTo>
+                    <a:pt x="3476277" y="2812959"/>
+                  </a:lnTo>
+                  <a:lnTo>
+                    <a:pt x="3547900" y="2819657"/>
+                  </a:lnTo>
+                  <a:lnTo>
+                    <a:pt x="3619522" y="2826288"/>
+                  </a:lnTo>
+                  <a:lnTo>
+                    <a:pt x="3691145" y="2832852"/>
+                  </a:lnTo>
+                  <a:lnTo>
+                    <a:pt x="3762767" y="2839351"/>
+                  </a:lnTo>
+                  <a:lnTo>
+                    <a:pt x="3834390" y="2845786"/>
+                  </a:lnTo>
+                  <a:lnTo>
+                    <a:pt x="3906013" y="2852156"/>
+                  </a:lnTo>
+                  <a:lnTo>
+                    <a:pt x="3977635" y="2858462"/>
+                  </a:lnTo>
+                  <a:lnTo>
+                    <a:pt x="4049258" y="2864705"/>
+                  </a:lnTo>
+                  <a:lnTo>
+                    <a:pt x="4120880" y="2870886"/>
+                  </a:lnTo>
+                  <a:lnTo>
+                    <a:pt x="4192503" y="2877006"/>
+                  </a:lnTo>
+                  <a:lnTo>
+                    <a:pt x="4264125" y="2883064"/>
+                  </a:lnTo>
+                  <a:lnTo>
+                    <a:pt x="4335748" y="2889062"/>
+                  </a:lnTo>
+                  <a:lnTo>
+                    <a:pt x="4407370" y="2895000"/>
+                  </a:lnTo>
+                  <a:lnTo>
+                    <a:pt x="4478993" y="2900878"/>
+                  </a:lnTo>
+                  <a:lnTo>
+                    <a:pt x="4550615" y="2906698"/>
+                  </a:lnTo>
+                  <a:lnTo>
+                    <a:pt x="4622238" y="2912460"/>
+                  </a:lnTo>
+                  <a:lnTo>
+                    <a:pt x="4693860" y="2918164"/>
+                  </a:lnTo>
+                  <a:lnTo>
+                    <a:pt x="4765483" y="2923811"/>
+                  </a:lnTo>
+                  <a:lnTo>
+                    <a:pt x="4837105" y="2929402"/>
+                  </a:lnTo>
+                  <a:lnTo>
+                    <a:pt x="4908728" y="2934937"/>
+                  </a:lnTo>
+                  <a:lnTo>
+                    <a:pt x="4980350" y="2940417"/>
+                  </a:lnTo>
+                  <a:lnTo>
+                    <a:pt x="5051973" y="2945842"/>
+                  </a:lnTo>
+                  <a:lnTo>
+                    <a:pt x="5123595" y="2951213"/>
+                  </a:lnTo>
+                  <a:lnTo>
+                    <a:pt x="5195218" y="2956530"/>
+                  </a:lnTo>
+                  <a:lnTo>
+                    <a:pt x="5266841" y="2961795"/>
+                  </a:lnTo>
+                  <a:lnTo>
+                    <a:pt x="5338463" y="2967006"/>
+                  </a:lnTo>
+                  <a:lnTo>
+                    <a:pt x="5410086" y="2972166"/>
+                  </a:lnTo>
+                  <a:lnTo>
+                    <a:pt x="5481708" y="2977274"/>
+                  </a:lnTo>
+                  <a:lnTo>
+                    <a:pt x="5553331" y="2982331"/>
+                  </a:lnTo>
+                  <a:lnTo>
+                    <a:pt x="5624953" y="2987337"/>
+                  </a:lnTo>
+                  <a:lnTo>
+                    <a:pt x="5696576" y="2992294"/>
+                  </a:lnTo>
+                </a:path>
+              </a:pathLst>
+            </a:custGeom>
+          </p:spPr>
+          <p:txBody>
+            <a:bodyPr/>
+            <a:lstStyle/>
+            <a:p/>
+          </p:txBody>
+        </p:sp>
+        <p:sp>
+          <p:nvSpPr>
             <p:cNvPr id="22" name="pl22"/>
             <p:cNvSpPr/>
             <p:nvPr/>
           </p:nvSpPr>
           <p:spPr>
             <a:xfrm>
-              <a:off x="2126247" y="2073503"/>
-              <a:ext cx="6095053" cy="2992294"/>
+              <a:off x="1172049" y="4230036"/>
+              <a:ext cx="7090630" cy="1273300"/>
             </a:xfrm>
             <a:custGeom>
               <a:avLst/>
               <a:pathLst>
-                <a:path w="6095053" h="2992294">
+                <a:path w="7090630" h="1273300">
                   <a:moveTo>
+                    <a:pt x="7090630" y="1273300"/>
+                  </a:moveTo>
+                  <a:lnTo>
+                    <a:pt x="7019007" y="1270399"/>
+                  </a:lnTo>
+                  <a:lnTo>
+                    <a:pt x="6947385" y="1267342"/>
+                  </a:lnTo>
+                  <a:lnTo>
+                    <a:pt x="6875762" y="1264121"/>
+                  </a:lnTo>
+                  <a:lnTo>
+                    <a:pt x="6804139" y="1260726"/>
+                  </a:lnTo>
+                  <a:lnTo>
+                    <a:pt x="6732517" y="1257149"/>
+                  </a:lnTo>
+                  <a:lnTo>
+                    <a:pt x="6660894" y="1253380"/>
+                  </a:lnTo>
+                  <a:lnTo>
+                    <a:pt x="6589272" y="1249407"/>
+                  </a:lnTo>
+                  <a:lnTo>
+                    <a:pt x="6517649" y="1245221"/>
+                  </a:lnTo>
+                  <a:lnTo>
+                    <a:pt x="6446027" y="1240810"/>
+                  </a:lnTo>
+                  <a:lnTo>
+                    <a:pt x="6374404" y="1236161"/>
+                  </a:lnTo>
+                  <a:lnTo>
+                    <a:pt x="6302782" y="1231262"/>
+                  </a:lnTo>
+                  <a:lnTo>
+                    <a:pt x="6231159" y="1226099"/>
+                  </a:lnTo>
+                  <a:lnTo>
+                    <a:pt x="6159537" y="1220659"/>
+                  </a:lnTo>
+                  <a:lnTo>
+                    <a:pt x="6087914" y="1214926"/>
+                  </a:lnTo>
+                  <a:lnTo>
+                    <a:pt x="6016292" y="1208885"/>
+                  </a:lnTo>
+                  <a:lnTo>
+                    <a:pt x="5944669" y="1202518"/>
+                  </a:lnTo>
+                  <a:lnTo>
+                    <a:pt x="5873047" y="1195810"/>
+                  </a:lnTo>
+                  <a:lnTo>
+                    <a:pt x="5801424" y="1188740"/>
+                  </a:lnTo>
+                  <a:lnTo>
+                    <a:pt x="5729802" y="1181289"/>
+                  </a:lnTo>
+                  <a:lnTo>
+                    <a:pt x="5658179" y="1173438"/>
+                  </a:lnTo>
+                  <a:lnTo>
+                    <a:pt x="5586557" y="1165165"/>
+                  </a:lnTo>
+                  <a:lnTo>
+                    <a:pt x="5514934" y="1156446"/>
+                  </a:lnTo>
+                  <a:lnTo>
+                    <a:pt x="5443311" y="1147258"/>
+                  </a:lnTo>
+                  <a:lnTo>
+                    <a:pt x="5371689" y="1137576"/>
+                  </a:lnTo>
+                  <a:lnTo>
+                    <a:pt x="5300066" y="1127373"/>
+                  </a:lnTo>
+                  <a:lnTo>
+                    <a:pt x="5228444" y="1116621"/>
+                  </a:lnTo>
+                  <a:lnTo>
+                    <a:pt x="5156821" y="1105290"/>
+                  </a:lnTo>
+                  <a:lnTo>
+                    <a:pt x="5085199" y="1093350"/>
+                  </a:lnTo>
+                  <a:lnTo>
+                    <a:pt x="5013576" y="1080768"/>
+                  </a:lnTo>
+                  <a:lnTo>
+                    <a:pt x="4941954" y="1067508"/>
+                  </a:lnTo>
+                  <a:lnTo>
+                    <a:pt x="4870331" y="1053535"/>
+                  </a:lnTo>
+                  <a:lnTo>
+                    <a:pt x="4798709" y="1038810"/>
+                  </a:lnTo>
+                  <a:lnTo>
+                    <a:pt x="4727086" y="1023293"/>
+                  </a:lnTo>
+                  <a:lnTo>
+                    <a:pt x="4655464" y="1006941"/>
+                  </a:lnTo>
+                  <a:lnTo>
+                    <a:pt x="4583841" y="989710"/>
+                  </a:lnTo>
+                  <a:lnTo>
+                    <a:pt x="4512219" y="971551"/>
+                  </a:lnTo>
+                  <a:lnTo>
+                    <a:pt x="4440596" y="952415"/>
+                  </a:lnTo>
+                  <a:lnTo>
+                    <a:pt x="4368974" y="932250"/>
+                  </a:lnTo>
+                  <a:lnTo>
+                    <a:pt x="4297351" y="911000"/>
+                  </a:lnTo>
+                  <a:lnTo>
+                    <a:pt x="4225729" y="888606"/>
+                  </a:lnTo>
+                  <a:lnTo>
+                    <a:pt x="4154106" y="865007"/>
+                  </a:lnTo>
+                  <a:lnTo>
+                    <a:pt x="4082483" y="840139"/>
+                  </a:lnTo>
+                  <a:lnTo>
+                    <a:pt x="4010861" y="813933"/>
+                  </a:lnTo>
+                  <a:lnTo>
+                    <a:pt x="3939238" y="786317"/>
+                  </a:lnTo>
+                  <a:lnTo>
+                    <a:pt x="3867616" y="757215"/>
+                  </a:lnTo>
+                  <a:lnTo>
+                    <a:pt x="3795993" y="726547"/>
+                  </a:lnTo>
+                  <a:lnTo>
+                    <a:pt x="3724371" y="694230"/>
+                  </a:lnTo>
+                  <a:lnTo>
+                    <a:pt x="3652748" y="660173"/>
+                  </a:lnTo>
+                  <a:lnTo>
+                    <a:pt x="3581126" y="624284"/>
+                  </a:lnTo>
+                  <a:lnTo>
+                    <a:pt x="3509503" y="586464"/>
+                  </a:lnTo>
+                  <a:lnTo>
+                    <a:pt x="3437881" y="546610"/>
+                  </a:lnTo>
+                  <a:lnTo>
+                    <a:pt x="3366258" y="504611"/>
+                  </a:lnTo>
+                  <a:lnTo>
+                    <a:pt x="3294636" y="490715"/>
+                  </a:lnTo>
+                  <a:lnTo>
+                    <a:pt x="3223013" y="482279"/>
+                  </a:lnTo>
+                  <a:lnTo>
+                    <a:pt x="3151391" y="473757"/>
+                  </a:lnTo>
+                  <a:lnTo>
+                    <a:pt x="3079768" y="465149"/>
+                  </a:lnTo>
+                  <a:lnTo>
+                    <a:pt x="3008146" y="456455"/>
+                  </a:lnTo>
+                  <a:lnTo>
+                    <a:pt x="2936523" y="447673"/>
+                  </a:lnTo>
+                  <a:lnTo>
+                    <a:pt x="2864901" y="438802"/>
+                  </a:lnTo>
+                  <a:lnTo>
+                    <a:pt x="2793278" y="429842"/>
+                  </a:lnTo>
+                  <a:lnTo>
+                    <a:pt x="2721655" y="420792"/>
+                  </a:lnTo>
+                  <a:lnTo>
+                    <a:pt x="2650033" y="411650"/>
+                  </a:lnTo>
+                  <a:lnTo>
+                    <a:pt x="2578410" y="402416"/>
+                  </a:lnTo>
+                  <a:lnTo>
+                    <a:pt x="2506788" y="393089"/>
+                  </a:lnTo>
+                  <a:lnTo>
+                    <a:pt x="2435165" y="383667"/>
+                  </a:lnTo>
+                  <a:lnTo>
+                    <a:pt x="2363543" y="374151"/>
+                  </a:lnTo>
+                  <a:lnTo>
+                    <a:pt x="2291920" y="364539"/>
+                  </a:lnTo>
+                  <a:lnTo>
+                    <a:pt x="2220298" y="354830"/>
+                  </a:lnTo>
+                  <a:lnTo>
+                    <a:pt x="2148675" y="345023"/>
+                  </a:lnTo>
+                  <a:lnTo>
+                    <a:pt x="2077053" y="335117"/>
+                  </a:lnTo>
+                  <a:lnTo>
+                    <a:pt x="2005430" y="325111"/>
+                  </a:lnTo>
+                  <a:lnTo>
+                    <a:pt x="1933808" y="315004"/>
+                  </a:lnTo>
+                  <a:lnTo>
+                    <a:pt x="1862185" y="304796"/>
+                  </a:lnTo>
+                  <a:lnTo>
+                    <a:pt x="1790563" y="294484"/>
+                  </a:lnTo>
+                  <a:lnTo>
+                    <a:pt x="1718940" y="284068"/>
+                  </a:lnTo>
+                  <a:lnTo>
+                    <a:pt x="1647318" y="273547"/>
+                  </a:lnTo>
+                  <a:lnTo>
+                    <a:pt x="1575695" y="262921"/>
+                  </a:lnTo>
+                  <a:lnTo>
+                    <a:pt x="1504073" y="252187"/>
+                  </a:lnTo>
+                  <a:lnTo>
+                    <a:pt x="1432450" y="241344"/>
+                  </a:lnTo>
+                  <a:lnTo>
+                    <a:pt x="1360827" y="230393"/>
+                  </a:lnTo>
+                  <a:lnTo>
+                    <a:pt x="1289205" y="219331"/>
+                  </a:lnTo>
+                  <a:lnTo>
+                    <a:pt x="1217582" y="208157"/>
+                  </a:lnTo>
+                  <a:lnTo>
+                    <a:pt x="1145960" y="196871"/>
+                  </a:lnTo>
+                  <a:lnTo>
+                    <a:pt x="1074337" y="185470"/>
+                  </a:lnTo>
+                  <a:lnTo>
+                    <a:pt x="1002715" y="173955"/>
+                  </a:lnTo>
+                  <a:lnTo>
+                    <a:pt x="931092" y="162324"/>
+                  </a:lnTo>
+                  <a:lnTo>
+                    <a:pt x="859470" y="150575"/>
+                  </a:lnTo>
+                  <a:lnTo>
+                    <a:pt x="787847" y="138708"/>
+                  </a:lnTo>
+                  <a:lnTo>
+                    <a:pt x="716225" y="126722"/>
+                  </a:lnTo>
+                  <a:lnTo>
+                    <a:pt x="644602" y="114614"/>
+                  </a:lnTo>
+                  <a:lnTo>
+                    <a:pt x="572980" y="102384"/>
+                  </a:lnTo>
+                  <a:lnTo>
+                    <a:pt x="501357" y="90031"/>
+                  </a:lnTo>
+                  <a:lnTo>
+                    <a:pt x="429735" y="77553"/>
+                  </a:lnTo>
+                  <a:lnTo>
+                    <a:pt x="358112" y="64950"/>
+                  </a:lnTo>
+                  <a:lnTo>
+                    <a:pt x="286490" y="52219"/>
+                  </a:lnTo>
+                  <a:lnTo>
+                    <a:pt x="214867" y="39360"/>
+                  </a:lnTo>
+                  <a:lnTo>
+                    <a:pt x="143245" y="26371"/>
+                  </a:lnTo>
+                  <a:lnTo>
+                    <a:pt x="71622" y="13252"/>
+                  </a:lnTo>
+                  <a:lnTo>
                     <a:pt x="0" y="0"/>
-                  </a:moveTo>
-                  <a:lnTo>
-                    <a:pt x="41082" y="97667"/>
-                  </a:lnTo>
-                  <a:lnTo>
-                    <a:pt x="117715" y="270547"/>
-                  </a:lnTo>
-                  <a:lnTo>
-                    <a:pt x="194347" y="434601"/>
-                  </a:lnTo>
-                  <a:lnTo>
-                    <a:pt x="270980" y="590279"/>
-                  </a:lnTo>
-                  <a:lnTo>
-                    <a:pt x="347612" y="738009"/>
-                  </a:lnTo>
-                  <a:lnTo>
-                    <a:pt x="424245" y="878196"/>
-                  </a:lnTo>
-                  <a:lnTo>
-                    <a:pt x="500877" y="1011225"/>
-                  </a:lnTo>
-                  <a:lnTo>
-                    <a:pt x="577510" y="1137463"/>
-                  </a:lnTo>
-                  <a:lnTo>
-                    <a:pt x="654142" y="1257256"/>
-                  </a:lnTo>
-                  <a:lnTo>
-                    <a:pt x="730775" y="1370932"/>
-                  </a:lnTo>
-                  <a:lnTo>
-                    <a:pt x="807407" y="1478804"/>
-                  </a:lnTo>
-                  <a:lnTo>
-                    <a:pt x="884040" y="1581169"/>
-                  </a:lnTo>
-                  <a:lnTo>
-                    <a:pt x="960673" y="1678308"/>
-                  </a:lnTo>
-                  <a:lnTo>
-                    <a:pt x="1037305" y="1770487"/>
-                  </a:lnTo>
-                  <a:lnTo>
-                    <a:pt x="1113938" y="1857959"/>
-                  </a:lnTo>
-                  <a:lnTo>
-                    <a:pt x="1190570" y="1940966"/>
-                  </a:lnTo>
-                  <a:lnTo>
-                    <a:pt x="1267203" y="2019734"/>
-                  </a:lnTo>
-                  <a:lnTo>
-                    <a:pt x="1343835" y="2094481"/>
-                  </a:lnTo>
-                  <a:lnTo>
-                    <a:pt x="1420468" y="2165412"/>
-                  </a:lnTo>
-                  <a:lnTo>
-                    <a:pt x="1497100" y="2232721"/>
-                  </a:lnTo>
-                  <a:lnTo>
-                    <a:pt x="1573733" y="2296594"/>
-                  </a:lnTo>
-                  <a:lnTo>
-                    <a:pt x="1650366" y="2357205"/>
-                  </a:lnTo>
-                  <a:lnTo>
-                    <a:pt x="1726998" y="2414722"/>
-                  </a:lnTo>
-                  <a:lnTo>
-                    <a:pt x="1803631" y="2469303"/>
-                  </a:lnTo>
-                  <a:lnTo>
-                    <a:pt x="1880263" y="2521096"/>
-                  </a:lnTo>
-                  <a:lnTo>
-                    <a:pt x="1956896" y="2570246"/>
-                  </a:lnTo>
-                  <a:lnTo>
-                    <a:pt x="2033528" y="2616886"/>
-                  </a:lnTo>
-                  <a:lnTo>
-                    <a:pt x="2110161" y="2655601"/>
-                  </a:lnTo>
-                  <a:lnTo>
-                    <a:pt x="2186793" y="2663870"/>
-                  </a:lnTo>
-                  <a:lnTo>
-                    <a:pt x="2263426" y="2672056"/>
-                  </a:lnTo>
-                  <a:lnTo>
-                    <a:pt x="2340058" y="2680161"/>
-                  </a:lnTo>
-                  <a:lnTo>
-                    <a:pt x="2416691" y="2688185"/>
-                  </a:lnTo>
-                  <a:lnTo>
-                    <a:pt x="2493324" y="2696128"/>
-                  </a:lnTo>
-                  <a:lnTo>
-                    <a:pt x="2569956" y="2703993"/>
-                  </a:lnTo>
-                  <a:lnTo>
-                    <a:pt x="2646589" y="2711778"/>
-                  </a:lnTo>
-                  <a:lnTo>
-                    <a:pt x="2723221" y="2719486"/>
-                  </a:lnTo>
-                  <a:lnTo>
-                    <a:pt x="2799854" y="2727117"/>
-                  </a:lnTo>
-                  <a:lnTo>
-                    <a:pt x="2876486" y="2734672"/>
-                  </a:lnTo>
-                  <a:lnTo>
-                    <a:pt x="2953119" y="2742152"/>
-                  </a:lnTo>
-                  <a:lnTo>
-                    <a:pt x="3029751" y="2749556"/>
-                  </a:lnTo>
-                  <a:lnTo>
-                    <a:pt x="3106384" y="2756887"/>
-                  </a:lnTo>
-                  <a:lnTo>
-                    <a:pt x="3183016" y="2764145"/>
-                  </a:lnTo>
-                  <a:lnTo>
-                    <a:pt x="3259649" y="2771330"/>
-                  </a:lnTo>
-                  <a:lnTo>
-                    <a:pt x="3336282" y="2778443"/>
-                  </a:lnTo>
-                  <a:lnTo>
-                    <a:pt x="3412914" y="2785486"/>
-                  </a:lnTo>
-                  <a:lnTo>
-                    <a:pt x="3489547" y="2792458"/>
-                  </a:lnTo>
-                  <a:lnTo>
-                    <a:pt x="3566179" y="2799360"/>
-                  </a:lnTo>
-                  <a:lnTo>
-                    <a:pt x="3642812" y="2806194"/>
-                  </a:lnTo>
-                  <a:lnTo>
-                    <a:pt x="3719444" y="2812959"/>
-                  </a:lnTo>
-                  <a:lnTo>
-                    <a:pt x="3796077" y="2819657"/>
-                  </a:lnTo>
-                  <a:lnTo>
-                    <a:pt x="3872709" y="2826288"/>
-                  </a:lnTo>
-                  <a:lnTo>
-                    <a:pt x="3949342" y="2832852"/>
-                  </a:lnTo>
-                  <a:lnTo>
-                    <a:pt x="4025975" y="2839351"/>
-                  </a:lnTo>
-                  <a:lnTo>
-                    <a:pt x="4102607" y="2845786"/>
-                  </a:lnTo>
-                  <a:lnTo>
-                    <a:pt x="4179240" y="2852156"/>
-                  </a:lnTo>
-                  <a:lnTo>
-                    <a:pt x="4255872" y="2858462"/>
-                  </a:lnTo>
-                  <a:lnTo>
-                    <a:pt x="4332505" y="2864705"/>
-                  </a:lnTo>
-                  <a:lnTo>
-                    <a:pt x="4409137" y="2870886"/>
-                  </a:lnTo>
-                  <a:lnTo>
-                    <a:pt x="4485770" y="2877006"/>
-                  </a:lnTo>
-                  <a:lnTo>
-                    <a:pt x="4562402" y="2883064"/>
-                  </a:lnTo>
-                  <a:lnTo>
-                    <a:pt x="4639035" y="2889062"/>
-                  </a:lnTo>
-                  <a:lnTo>
-                    <a:pt x="4715667" y="2895000"/>
-                  </a:lnTo>
-                  <a:lnTo>
-                    <a:pt x="4792300" y="2900878"/>
-                  </a:lnTo>
-                  <a:lnTo>
-                    <a:pt x="4868933" y="2906698"/>
-                  </a:lnTo>
-                  <a:lnTo>
-                    <a:pt x="4945565" y="2912460"/>
-                  </a:lnTo>
-                  <a:lnTo>
-                    <a:pt x="5022198" y="2918164"/>
-                  </a:lnTo>
-                  <a:lnTo>
-                    <a:pt x="5098830" y="2923811"/>
-                  </a:lnTo>
-                  <a:lnTo>
-                    <a:pt x="5175463" y="2929402"/>
-                  </a:lnTo>
-                  <a:lnTo>
-                    <a:pt x="5252095" y="2934937"/>
-                  </a:lnTo>
-                  <a:lnTo>
-                    <a:pt x="5328728" y="2940417"/>
-                  </a:lnTo>
-                  <a:lnTo>
-                    <a:pt x="5405360" y="2945842"/>
-                  </a:lnTo>
-                  <a:lnTo>
-                    <a:pt x="5481993" y="2951213"/>
-                  </a:lnTo>
-                  <a:lnTo>
-                    <a:pt x="5558626" y="2956530"/>
-                  </a:lnTo>
-                  <a:lnTo>
-                    <a:pt x="5635258" y="2961795"/>
-                  </a:lnTo>
-                  <a:lnTo>
-                    <a:pt x="5711891" y="2967006"/>
-                  </a:lnTo>
-                  <a:lnTo>
-                    <a:pt x="5788523" y="2972166"/>
-                  </a:lnTo>
-                  <a:lnTo>
-                    <a:pt x="5865156" y="2977274"/>
-                  </a:lnTo>
-                  <a:lnTo>
-                    <a:pt x="5941788" y="2982331"/>
-                  </a:lnTo>
-                  <a:lnTo>
-                    <a:pt x="6018421" y="2987337"/>
-                  </a:lnTo>
-                  <a:lnTo>
-                    <a:pt x="6095053" y="2992294"/>
                   </a:lnTo>
                 </a:path>
               </a:pathLst>
@@ -3838,625 +4126,312 @@
           </p:nvSpPr>
           <p:spPr>
             <a:xfrm>
-              <a:off x="817517" y="4261421"/>
-              <a:ext cx="7403783" cy="1241915"/>
+              <a:off x="1234860" y="2073503"/>
+              <a:ext cx="7027819" cy="3320971"/>
             </a:xfrm>
             <a:custGeom>
               <a:avLst/>
               <a:pathLst>
-                <a:path w="7403783" h="1241915">
-                  <a:moveTo>
-                    <a:pt x="7403783" y="1241915"/>
-                  </a:moveTo>
-                  <a:lnTo>
-                    <a:pt x="7327150" y="1239015"/>
-                  </a:lnTo>
-                  <a:lnTo>
-                    <a:pt x="7250518" y="1235958"/>
-                  </a:lnTo>
-                  <a:lnTo>
-                    <a:pt x="7173885" y="1232737"/>
-                  </a:lnTo>
-                  <a:lnTo>
-                    <a:pt x="7097253" y="1229342"/>
-                  </a:lnTo>
-                  <a:lnTo>
-                    <a:pt x="7020620" y="1225765"/>
-                  </a:lnTo>
-                  <a:lnTo>
-                    <a:pt x="6943987" y="1221995"/>
-                  </a:lnTo>
-                  <a:lnTo>
-                    <a:pt x="6867355" y="1218023"/>
-                  </a:lnTo>
-                  <a:lnTo>
-                    <a:pt x="6790722" y="1213837"/>
-                  </a:lnTo>
-                  <a:lnTo>
-                    <a:pt x="6714090" y="1209425"/>
-                  </a:lnTo>
-                  <a:lnTo>
-                    <a:pt x="6637457" y="1204776"/>
-                  </a:lnTo>
-                  <a:lnTo>
-                    <a:pt x="6560825" y="1199877"/>
-                  </a:lnTo>
-                  <a:lnTo>
-                    <a:pt x="6484192" y="1194715"/>
-                  </a:lnTo>
-                  <a:lnTo>
-                    <a:pt x="6407560" y="1189275"/>
-                  </a:lnTo>
-                  <a:lnTo>
-                    <a:pt x="6330927" y="1183542"/>
-                  </a:lnTo>
-                  <a:lnTo>
-                    <a:pt x="6254294" y="1177500"/>
-                  </a:lnTo>
-                  <a:lnTo>
-                    <a:pt x="6177662" y="1171134"/>
-                  </a:lnTo>
-                  <a:lnTo>
-                    <a:pt x="6101029" y="1164425"/>
-                  </a:lnTo>
-                  <a:lnTo>
-                    <a:pt x="6024397" y="1157355"/>
-                  </a:lnTo>
-                  <a:lnTo>
-                    <a:pt x="5947764" y="1149905"/>
-                  </a:lnTo>
-                  <a:lnTo>
-                    <a:pt x="5871132" y="1142054"/>
-                  </a:lnTo>
-                  <a:lnTo>
-                    <a:pt x="5794499" y="1133780"/>
-                  </a:lnTo>
-                  <a:lnTo>
-                    <a:pt x="5717867" y="1125061"/>
-                  </a:lnTo>
-                  <a:lnTo>
-                    <a:pt x="5641234" y="1115874"/>
-                  </a:lnTo>
-                  <a:lnTo>
-                    <a:pt x="5564602" y="1106191"/>
-                  </a:lnTo>
-                  <a:lnTo>
-                    <a:pt x="5487969" y="1095988"/>
-                  </a:lnTo>
-                  <a:lnTo>
-                    <a:pt x="5411336" y="1085236"/>
-                  </a:lnTo>
-                  <a:lnTo>
-                    <a:pt x="5334704" y="1073906"/>
-                  </a:lnTo>
-                  <a:lnTo>
-                    <a:pt x="5258071" y="1061966"/>
-                  </a:lnTo>
-                  <a:lnTo>
-                    <a:pt x="5181439" y="1049383"/>
-                  </a:lnTo>
-                  <a:lnTo>
-                    <a:pt x="5104806" y="1036124"/>
-                  </a:lnTo>
-                  <a:lnTo>
-                    <a:pt x="5028174" y="1022151"/>
-                  </a:lnTo>
-                  <a:lnTo>
-                    <a:pt x="4951541" y="1007426"/>
-                  </a:lnTo>
-                  <a:lnTo>
-                    <a:pt x="4874909" y="991909"/>
-                  </a:lnTo>
-                  <a:lnTo>
-                    <a:pt x="4798276" y="975557"/>
-                  </a:lnTo>
-                  <a:lnTo>
-                    <a:pt x="4721644" y="958325"/>
-                  </a:lnTo>
-                  <a:lnTo>
-                    <a:pt x="4645011" y="940167"/>
-                  </a:lnTo>
-                  <a:lnTo>
-                    <a:pt x="4568378" y="921031"/>
-                  </a:lnTo>
-                  <a:lnTo>
-                    <a:pt x="4491746" y="900865"/>
-                  </a:lnTo>
-                  <a:lnTo>
-                    <a:pt x="4415113" y="879615"/>
-                  </a:lnTo>
-                  <a:lnTo>
-                    <a:pt x="4338481" y="857222"/>
-                  </a:lnTo>
-                  <a:lnTo>
-                    <a:pt x="4261848" y="833623"/>
-                  </a:lnTo>
-                  <a:lnTo>
-                    <a:pt x="4185216" y="808755"/>
-                  </a:lnTo>
-                  <a:lnTo>
-                    <a:pt x="4108583" y="782549"/>
-                  </a:lnTo>
-                  <a:lnTo>
-                    <a:pt x="4031951" y="754933"/>
-                  </a:lnTo>
-                  <a:lnTo>
-                    <a:pt x="3955318" y="725831"/>
-                  </a:lnTo>
-                  <a:lnTo>
-                    <a:pt x="3878685" y="695163"/>
-                  </a:lnTo>
-                  <a:lnTo>
-                    <a:pt x="3802053" y="662845"/>
-                  </a:lnTo>
-                  <a:lnTo>
-                    <a:pt x="3725420" y="628789"/>
-                  </a:lnTo>
-                  <a:lnTo>
-                    <a:pt x="3648788" y="592900"/>
-                  </a:lnTo>
-                  <a:lnTo>
-                    <a:pt x="3572155" y="555080"/>
-                  </a:lnTo>
-                  <a:lnTo>
-                    <a:pt x="3495523" y="515225"/>
-                  </a:lnTo>
-                  <a:lnTo>
-                    <a:pt x="3418890" y="473226"/>
-                  </a:lnTo>
-                  <a:lnTo>
-                    <a:pt x="3342258" y="459331"/>
-                  </a:lnTo>
-                  <a:lnTo>
-                    <a:pt x="3265625" y="450894"/>
-                  </a:lnTo>
-                  <a:lnTo>
-                    <a:pt x="3188993" y="442373"/>
-                  </a:lnTo>
-                  <a:lnTo>
-                    <a:pt x="3112360" y="433765"/>
-                  </a:lnTo>
-                  <a:lnTo>
-                    <a:pt x="3035727" y="425071"/>
-                  </a:lnTo>
-                  <a:lnTo>
-                    <a:pt x="2959095" y="416288"/>
-                  </a:lnTo>
-                  <a:lnTo>
-                    <a:pt x="2882462" y="407418"/>
-                  </a:lnTo>
-                  <a:lnTo>
-                    <a:pt x="2805830" y="398458"/>
-                  </a:lnTo>
-                  <a:lnTo>
-                    <a:pt x="2729197" y="389407"/>
-                  </a:lnTo>
-                  <a:lnTo>
-                    <a:pt x="2652565" y="380265"/>
-                  </a:lnTo>
-                  <a:lnTo>
-                    <a:pt x="2575932" y="371031"/>
-                  </a:lnTo>
-                  <a:lnTo>
-                    <a:pt x="2499300" y="361704"/>
-                  </a:lnTo>
-                  <a:lnTo>
-                    <a:pt x="2422667" y="352283"/>
-                  </a:lnTo>
-                  <a:lnTo>
-                    <a:pt x="2346034" y="342767"/>
-                  </a:lnTo>
-                  <a:lnTo>
-                    <a:pt x="2269402" y="333155"/>
-                  </a:lnTo>
-                  <a:lnTo>
-                    <a:pt x="2192769" y="323445"/>
-                  </a:lnTo>
-                  <a:lnTo>
-                    <a:pt x="2116137" y="313638"/>
-                  </a:lnTo>
-                  <a:lnTo>
-                    <a:pt x="2039504" y="303732"/>
-                  </a:lnTo>
-                  <a:lnTo>
-                    <a:pt x="1962872" y="293727"/>
-                  </a:lnTo>
-                  <a:lnTo>
-                    <a:pt x="1886239" y="283620"/>
-                  </a:lnTo>
-                  <a:lnTo>
-                    <a:pt x="1809607" y="273411"/>
-                  </a:lnTo>
-                  <a:lnTo>
-                    <a:pt x="1732974" y="263099"/>
-                  </a:lnTo>
-                  <a:lnTo>
-                    <a:pt x="1656342" y="252684"/>
-                  </a:lnTo>
-                  <a:lnTo>
-                    <a:pt x="1579709" y="242163"/>
-                  </a:lnTo>
-                  <a:lnTo>
-                    <a:pt x="1503076" y="231536"/>
-                  </a:lnTo>
-                  <a:lnTo>
-                    <a:pt x="1426444" y="220802"/>
-                  </a:lnTo>
-                  <a:lnTo>
-                    <a:pt x="1349811" y="209960"/>
-                  </a:lnTo>
-                  <a:lnTo>
-                    <a:pt x="1273179" y="199008"/>
-                  </a:lnTo>
-                  <a:lnTo>
-                    <a:pt x="1196546" y="187946"/>
-                  </a:lnTo>
-                  <a:lnTo>
-                    <a:pt x="1119914" y="176773"/>
-                  </a:lnTo>
-                  <a:lnTo>
-                    <a:pt x="1043281" y="165486"/>
-                  </a:lnTo>
-                  <a:lnTo>
-                    <a:pt x="966649" y="154086"/>
-                  </a:lnTo>
-                  <a:lnTo>
-                    <a:pt x="890016" y="142571"/>
-                  </a:lnTo>
-                  <a:lnTo>
-                    <a:pt x="813384" y="130940"/>
-                  </a:lnTo>
-                  <a:lnTo>
-                    <a:pt x="736751" y="119191"/>
-                  </a:lnTo>
-                  <a:lnTo>
-                    <a:pt x="660118" y="107324"/>
-                  </a:lnTo>
-                  <a:lnTo>
-                    <a:pt x="583486" y="95337"/>
-                  </a:lnTo>
-                  <a:lnTo>
-                    <a:pt x="506853" y="83230"/>
-                  </a:lnTo>
-                  <a:lnTo>
-                    <a:pt x="430221" y="71000"/>
-                  </a:lnTo>
-                  <a:lnTo>
-                    <a:pt x="353588" y="58647"/>
-                  </a:lnTo>
-                  <a:lnTo>
-                    <a:pt x="276956" y="46169"/>
-                  </a:lnTo>
-                  <a:lnTo>
-                    <a:pt x="200323" y="33565"/>
-                  </a:lnTo>
-                  <a:lnTo>
-                    <a:pt x="123691" y="20835"/>
-                  </a:lnTo>
-                  <a:lnTo>
-                    <a:pt x="47058" y="7976"/>
-                  </a:lnTo>
-                  <a:lnTo>
-                    <a:pt x="0" y="0"/>
-                  </a:lnTo>
-                </a:path>
-              </a:pathLst>
-            </a:custGeom>
-          </p:spPr>
-          <p:txBody>
-            <a:bodyPr/>
-            <a:lstStyle/>
-            <a:p/>
-          </p:txBody>
-        </p:sp>
-        <p:sp>
-          <p:nvSpPr>
-            <p:cNvPr id="24" name="pl24"/>
-            <p:cNvSpPr/>
-            <p:nvPr/>
-          </p:nvSpPr>
-          <p:spPr>
-            <a:xfrm>
-              <a:off x="817517" y="2233609"/>
-              <a:ext cx="7403783" cy="3160864"/>
-            </a:xfrm>
-            <a:custGeom>
-              <a:avLst/>
-              <a:pathLst>
-                <a:path w="7403783" h="3160864">
+                <a:path w="7027819" h="3320971">
                   <a:moveTo>
                     <a:pt x="0" y="0"/>
                   </a:moveTo>
                   <a:lnTo>
-                    <a:pt x="47058" y="63488"/>
-                  </a:lnTo>
-                  <a:lnTo>
-                    <a:pt x="123691" y="163699"/>
-                  </a:lnTo>
-                  <a:lnTo>
-                    <a:pt x="200323" y="260830"/>
-                  </a:lnTo>
-                  <a:lnTo>
-                    <a:pt x="276956" y="354975"/>
-                  </a:lnTo>
-                  <a:lnTo>
-                    <a:pt x="353588" y="446226"/>
-                  </a:lnTo>
-                  <a:lnTo>
-                    <a:pt x="430221" y="534672"/>
-                  </a:lnTo>
-                  <a:lnTo>
-                    <a:pt x="506853" y="620400"/>
-                  </a:lnTo>
-                  <a:lnTo>
-                    <a:pt x="583486" y="703492"/>
-                  </a:lnTo>
-                  <a:lnTo>
-                    <a:pt x="660118" y="784030"/>
-                  </a:lnTo>
-                  <a:lnTo>
-                    <a:pt x="736751" y="862093"/>
-                  </a:lnTo>
-                  <a:lnTo>
-                    <a:pt x="813384" y="937756"/>
-                  </a:lnTo>
-                  <a:lnTo>
-                    <a:pt x="890016" y="1011094"/>
-                  </a:lnTo>
-                  <a:lnTo>
-                    <a:pt x="966649" y="1082177"/>
-                  </a:lnTo>
-                  <a:lnTo>
-                    <a:pt x="1043281" y="1151075"/>
-                  </a:lnTo>
-                  <a:lnTo>
-                    <a:pt x="1119914" y="1217856"/>
-                  </a:lnTo>
-                  <a:lnTo>
-                    <a:pt x="1196546" y="1282584"/>
-                  </a:lnTo>
-                  <a:lnTo>
-                    <a:pt x="1273179" y="1345322"/>
-                  </a:lnTo>
-                  <a:lnTo>
-                    <a:pt x="1349811" y="1406131"/>
-                  </a:lnTo>
-                  <a:lnTo>
-                    <a:pt x="1426444" y="1465072"/>
-                  </a:lnTo>
-                  <a:lnTo>
-                    <a:pt x="1503076" y="1522201"/>
-                  </a:lnTo>
-                  <a:lnTo>
-                    <a:pt x="1579709" y="1577574"/>
-                  </a:lnTo>
-                  <a:lnTo>
-                    <a:pt x="1656342" y="1631244"/>
-                  </a:lnTo>
-                  <a:lnTo>
-                    <a:pt x="1732974" y="1683265"/>
-                  </a:lnTo>
-                  <a:lnTo>
-                    <a:pt x="1809607" y="1733687"/>
-                  </a:lnTo>
-                  <a:lnTo>
-                    <a:pt x="1886239" y="1782559"/>
-                  </a:lnTo>
-                  <a:lnTo>
-                    <a:pt x="1962872" y="1829929"/>
-                  </a:lnTo>
-                  <a:lnTo>
-                    <a:pt x="2039504" y="1875843"/>
-                  </a:lnTo>
-                  <a:lnTo>
-                    <a:pt x="2116137" y="1920345"/>
-                  </a:lnTo>
-                  <a:lnTo>
-                    <a:pt x="2192769" y="1963480"/>
-                  </a:lnTo>
-                  <a:lnTo>
-                    <a:pt x="2269402" y="2005289"/>
-                  </a:lnTo>
-                  <a:lnTo>
-                    <a:pt x="2346034" y="2045812"/>
-                  </a:lnTo>
-                  <a:lnTo>
-                    <a:pt x="2422667" y="2085090"/>
-                  </a:lnTo>
-                  <a:lnTo>
-                    <a:pt x="2499300" y="2123161"/>
-                  </a:lnTo>
-                  <a:lnTo>
-                    <a:pt x="2575932" y="2160061"/>
-                  </a:lnTo>
-                  <a:lnTo>
-                    <a:pt x="2652565" y="2195828"/>
-                  </a:lnTo>
-                  <a:lnTo>
-                    <a:pt x="2729197" y="2230494"/>
-                  </a:lnTo>
-                  <a:lnTo>
-                    <a:pt x="2805830" y="2264096"/>
-                  </a:lnTo>
-                  <a:lnTo>
-                    <a:pt x="2882462" y="2296664"/>
-                  </a:lnTo>
-                  <a:lnTo>
-                    <a:pt x="2959095" y="2328231"/>
-                  </a:lnTo>
-                  <a:lnTo>
-                    <a:pt x="3035727" y="2358828"/>
-                  </a:lnTo>
-                  <a:lnTo>
-                    <a:pt x="3112360" y="2388485"/>
-                  </a:lnTo>
-                  <a:lnTo>
-                    <a:pt x="3188993" y="2417229"/>
-                  </a:lnTo>
-                  <a:lnTo>
-                    <a:pt x="3265625" y="2445091"/>
-                  </a:lnTo>
-                  <a:lnTo>
-                    <a:pt x="3342258" y="2472096"/>
-                  </a:lnTo>
-                  <a:lnTo>
-                    <a:pt x="3418890" y="2498270"/>
-                  </a:lnTo>
-                  <a:lnTo>
-                    <a:pt x="3495523" y="2523641"/>
-                  </a:lnTo>
-                  <a:lnTo>
-                    <a:pt x="3572155" y="2548231"/>
-                  </a:lnTo>
-                  <a:lnTo>
-                    <a:pt x="3648788" y="2572066"/>
-                  </a:lnTo>
-                  <a:lnTo>
-                    <a:pt x="3725420" y="2595168"/>
-                  </a:lnTo>
-                  <a:lnTo>
-                    <a:pt x="3802053" y="2617560"/>
-                  </a:lnTo>
-                  <a:lnTo>
-                    <a:pt x="3878685" y="2639263"/>
-                  </a:lnTo>
-                  <a:lnTo>
-                    <a:pt x="3955318" y="2660299"/>
-                  </a:lnTo>
-                  <a:lnTo>
-                    <a:pt x="4031951" y="2680689"/>
-                  </a:lnTo>
-                  <a:lnTo>
-                    <a:pt x="4108583" y="2700452"/>
-                  </a:lnTo>
-                  <a:lnTo>
-                    <a:pt x="4185216" y="2719608"/>
-                  </a:lnTo>
-                  <a:lnTo>
-                    <a:pt x="4261848" y="2738175"/>
-                  </a:lnTo>
-                  <a:lnTo>
-                    <a:pt x="4338481" y="2756171"/>
-                  </a:lnTo>
-                  <a:lnTo>
-                    <a:pt x="4415113" y="2773614"/>
-                  </a:lnTo>
-                  <a:lnTo>
-                    <a:pt x="4491746" y="2790520"/>
-                  </a:lnTo>
-                  <a:lnTo>
-                    <a:pt x="4568378" y="2806907"/>
-                  </a:lnTo>
-                  <a:lnTo>
-                    <a:pt x="4645011" y="2822791"/>
-                  </a:lnTo>
-                  <a:lnTo>
-                    <a:pt x="4721644" y="2838186"/>
-                  </a:lnTo>
-                  <a:lnTo>
-                    <a:pt x="4798276" y="2853108"/>
-                  </a:lnTo>
-                  <a:lnTo>
-                    <a:pt x="4874909" y="2867571"/>
-                  </a:lnTo>
-                  <a:lnTo>
-                    <a:pt x="4951541" y="2881590"/>
-                  </a:lnTo>
-                  <a:lnTo>
-                    <a:pt x="5028174" y="2895178"/>
-                  </a:lnTo>
-                  <a:lnTo>
-                    <a:pt x="5104806" y="2908348"/>
-                  </a:lnTo>
-                  <a:lnTo>
-                    <a:pt x="5181439" y="2921113"/>
-                  </a:lnTo>
-                  <a:lnTo>
-                    <a:pt x="5258071" y="2933486"/>
-                  </a:lnTo>
-                  <a:lnTo>
-                    <a:pt x="5334704" y="2945478"/>
-                  </a:lnTo>
-                  <a:lnTo>
-                    <a:pt x="5411336" y="2957102"/>
-                  </a:lnTo>
-                  <a:lnTo>
-                    <a:pt x="5487969" y="2968369"/>
-                  </a:lnTo>
-                  <a:lnTo>
-                    <a:pt x="5564602" y="2979289"/>
-                  </a:lnTo>
-                  <a:lnTo>
-                    <a:pt x="5641234" y="2989874"/>
-                  </a:lnTo>
-                  <a:lnTo>
-                    <a:pt x="5717867" y="3000133"/>
-                  </a:lnTo>
-                  <a:lnTo>
-                    <a:pt x="5794499" y="3010077"/>
-                  </a:lnTo>
-                  <a:lnTo>
-                    <a:pt x="5871132" y="3019716"/>
-                  </a:lnTo>
-                  <a:lnTo>
-                    <a:pt x="5947764" y="3029058"/>
-                  </a:lnTo>
-                  <a:lnTo>
-                    <a:pt x="6024397" y="3038112"/>
-                  </a:lnTo>
-                  <a:lnTo>
-                    <a:pt x="6101029" y="3046889"/>
-                  </a:lnTo>
-                  <a:lnTo>
-                    <a:pt x="6177662" y="3055396"/>
-                  </a:lnTo>
-                  <a:lnTo>
-                    <a:pt x="6254294" y="3063641"/>
-                  </a:lnTo>
-                  <a:lnTo>
-                    <a:pt x="6330927" y="3071633"/>
-                  </a:lnTo>
-                  <a:lnTo>
-                    <a:pt x="6407560" y="3079379"/>
-                  </a:lnTo>
-                  <a:lnTo>
-                    <a:pt x="6484192" y="3086887"/>
-                  </a:lnTo>
-                  <a:lnTo>
-                    <a:pt x="6560825" y="3094165"/>
-                  </a:lnTo>
-                  <a:lnTo>
-                    <a:pt x="6637457" y="3101218"/>
-                  </a:lnTo>
-                  <a:lnTo>
-                    <a:pt x="6714090" y="3108055"/>
-                  </a:lnTo>
-                  <a:lnTo>
-                    <a:pt x="6790722" y="3114682"/>
-                  </a:lnTo>
-                  <a:lnTo>
-                    <a:pt x="6867355" y="3121105"/>
-                  </a:lnTo>
-                  <a:lnTo>
-                    <a:pt x="6943987" y="3127330"/>
-                  </a:lnTo>
-                  <a:lnTo>
-                    <a:pt x="7020620" y="3133364"/>
-                  </a:lnTo>
-                  <a:lnTo>
-                    <a:pt x="7097253" y="3139213"/>
-                  </a:lnTo>
-                  <a:lnTo>
-                    <a:pt x="7173885" y="3144882"/>
-                  </a:lnTo>
-                  <a:lnTo>
-                    <a:pt x="7250518" y="3150377"/>
-                  </a:lnTo>
-                  <a:lnTo>
-                    <a:pt x="7327150" y="3155702"/>
-                  </a:lnTo>
-                  <a:lnTo>
-                    <a:pt x="7403783" y="3160864"/>
+                    <a:pt x="8811" y="13539"/>
+                  </a:lnTo>
+                  <a:lnTo>
+                    <a:pt x="80434" y="120207"/>
+                  </a:lnTo>
+                  <a:lnTo>
+                    <a:pt x="152056" y="223595"/>
+                  </a:lnTo>
+                  <a:lnTo>
+                    <a:pt x="223679" y="323806"/>
+                  </a:lnTo>
+                  <a:lnTo>
+                    <a:pt x="295301" y="420937"/>
+                  </a:lnTo>
+                  <a:lnTo>
+                    <a:pt x="366924" y="515082"/>
+                  </a:lnTo>
+                  <a:lnTo>
+                    <a:pt x="438546" y="606333"/>
+                  </a:lnTo>
+                  <a:lnTo>
+                    <a:pt x="510169" y="694779"/>
+                  </a:lnTo>
+                  <a:lnTo>
+                    <a:pt x="581792" y="780507"/>
+                  </a:lnTo>
+                  <a:lnTo>
+                    <a:pt x="653414" y="863599"/>
+                  </a:lnTo>
+                  <a:lnTo>
+                    <a:pt x="725037" y="944137"/>
+                  </a:lnTo>
+                  <a:lnTo>
+                    <a:pt x="796659" y="1022200"/>
+                  </a:lnTo>
+                  <a:lnTo>
+                    <a:pt x="868282" y="1097863"/>
+                  </a:lnTo>
+                  <a:lnTo>
+                    <a:pt x="939904" y="1171201"/>
+                  </a:lnTo>
+                  <a:lnTo>
+                    <a:pt x="1011527" y="1242284"/>
+                  </a:lnTo>
+                  <a:lnTo>
+                    <a:pt x="1083149" y="1311182"/>
+                  </a:lnTo>
+                  <a:lnTo>
+                    <a:pt x="1154772" y="1377963"/>
+                  </a:lnTo>
+                  <a:lnTo>
+                    <a:pt x="1226394" y="1442690"/>
+                  </a:lnTo>
+                  <a:lnTo>
+                    <a:pt x="1298017" y="1505429"/>
+                  </a:lnTo>
+                  <a:lnTo>
+                    <a:pt x="1369639" y="1566238"/>
+                  </a:lnTo>
+                  <a:lnTo>
+                    <a:pt x="1441262" y="1625179"/>
+                  </a:lnTo>
+                  <a:lnTo>
+                    <a:pt x="1512884" y="1682308"/>
+                  </a:lnTo>
+                  <a:lnTo>
+                    <a:pt x="1584507" y="1737680"/>
+                  </a:lnTo>
+                  <a:lnTo>
+                    <a:pt x="1656129" y="1791351"/>
+                  </a:lnTo>
+                  <a:lnTo>
+                    <a:pt x="1727752" y="1843372"/>
+                  </a:lnTo>
+                  <a:lnTo>
+                    <a:pt x="1799374" y="1893794"/>
+                  </a:lnTo>
+                  <a:lnTo>
+                    <a:pt x="1870997" y="1942666"/>
+                  </a:lnTo>
+                  <a:lnTo>
+                    <a:pt x="1942620" y="1990036"/>
+                  </a:lnTo>
+                  <a:lnTo>
+                    <a:pt x="2014242" y="2035950"/>
+                  </a:lnTo>
+                  <a:lnTo>
+                    <a:pt x="2085865" y="2080452"/>
+                  </a:lnTo>
+                  <a:lnTo>
+                    <a:pt x="2157487" y="2123587"/>
+                  </a:lnTo>
+                  <a:lnTo>
+                    <a:pt x="2229110" y="2165396"/>
+                  </a:lnTo>
+                  <a:lnTo>
+                    <a:pt x="2300732" y="2205919"/>
+                  </a:lnTo>
+                  <a:lnTo>
+                    <a:pt x="2372355" y="2245197"/>
+                  </a:lnTo>
+                  <a:lnTo>
+                    <a:pt x="2443977" y="2283268"/>
+                  </a:lnTo>
+                  <a:lnTo>
+                    <a:pt x="2515600" y="2320168"/>
+                  </a:lnTo>
+                  <a:lnTo>
+                    <a:pt x="2587222" y="2355934"/>
+                  </a:lnTo>
+                  <a:lnTo>
+                    <a:pt x="2658845" y="2390601"/>
+                  </a:lnTo>
+                  <a:lnTo>
+                    <a:pt x="2730467" y="2424202"/>
+                  </a:lnTo>
+                  <a:lnTo>
+                    <a:pt x="2802090" y="2456771"/>
+                  </a:lnTo>
+                  <a:lnTo>
+                    <a:pt x="2873712" y="2488338"/>
+                  </a:lnTo>
+                  <a:lnTo>
+                    <a:pt x="2945335" y="2518935"/>
+                  </a:lnTo>
+                  <a:lnTo>
+                    <a:pt x="3016957" y="2548591"/>
+                  </a:lnTo>
+                  <a:lnTo>
+                    <a:pt x="3088580" y="2577336"/>
+                  </a:lnTo>
+                  <a:lnTo>
+                    <a:pt x="3160202" y="2605198"/>
+                  </a:lnTo>
+                  <a:lnTo>
+                    <a:pt x="3231825" y="2632203"/>
+                  </a:lnTo>
+                  <a:lnTo>
+                    <a:pt x="3303448" y="2658377"/>
+                  </a:lnTo>
+                  <a:lnTo>
+                    <a:pt x="3375070" y="2683748"/>
+                  </a:lnTo>
+                  <a:lnTo>
+                    <a:pt x="3446693" y="2708338"/>
+                  </a:lnTo>
+                  <a:lnTo>
+                    <a:pt x="3518315" y="2732173"/>
+                  </a:lnTo>
+                  <a:lnTo>
+                    <a:pt x="3589938" y="2755275"/>
+                  </a:lnTo>
+                  <a:lnTo>
+                    <a:pt x="3661560" y="2777666"/>
+                  </a:lnTo>
+                  <a:lnTo>
+                    <a:pt x="3733183" y="2799370"/>
+                  </a:lnTo>
+                  <a:lnTo>
+                    <a:pt x="3804805" y="2820406"/>
+                  </a:lnTo>
+                  <a:lnTo>
+                    <a:pt x="3876428" y="2840796"/>
+                  </a:lnTo>
+                  <a:lnTo>
+                    <a:pt x="3948050" y="2860559"/>
+                  </a:lnTo>
+                  <a:lnTo>
+                    <a:pt x="4019673" y="2879715"/>
+                  </a:lnTo>
+                  <a:lnTo>
+                    <a:pt x="4091295" y="2898282"/>
+                  </a:lnTo>
+                  <a:lnTo>
+                    <a:pt x="4162918" y="2916278"/>
+                  </a:lnTo>
+                  <a:lnTo>
+                    <a:pt x="4234540" y="2933721"/>
+                  </a:lnTo>
+                  <a:lnTo>
+                    <a:pt x="4306163" y="2950627"/>
+                  </a:lnTo>
+                  <a:lnTo>
+                    <a:pt x="4377785" y="2967014"/>
+                  </a:lnTo>
+                  <a:lnTo>
+                    <a:pt x="4449408" y="2982898"/>
+                  </a:lnTo>
+                  <a:lnTo>
+                    <a:pt x="4521030" y="2998293"/>
+                  </a:lnTo>
+                  <a:lnTo>
+                    <a:pt x="4592653" y="3013215"/>
+                  </a:lnTo>
+                  <a:lnTo>
+                    <a:pt x="4664275" y="3027678"/>
+                  </a:lnTo>
+                  <a:lnTo>
+                    <a:pt x="4735898" y="3041697"/>
+                  </a:lnTo>
+                  <a:lnTo>
+                    <a:pt x="4807521" y="3055284"/>
+                  </a:lnTo>
+                  <a:lnTo>
+                    <a:pt x="4879143" y="3068455"/>
+                  </a:lnTo>
+                  <a:lnTo>
+                    <a:pt x="4950766" y="3081220"/>
+                  </a:lnTo>
+                  <a:lnTo>
+                    <a:pt x="5022388" y="3093593"/>
+                  </a:lnTo>
+                  <a:lnTo>
+                    <a:pt x="5094011" y="3105585"/>
+                  </a:lnTo>
+                  <a:lnTo>
+                    <a:pt x="5165633" y="3117209"/>
+                  </a:lnTo>
+                  <a:lnTo>
+                    <a:pt x="5237256" y="3128476"/>
+                  </a:lnTo>
+                  <a:lnTo>
+                    <a:pt x="5308878" y="3139396"/>
+                  </a:lnTo>
+                  <a:lnTo>
+                    <a:pt x="5380501" y="3149981"/>
+                  </a:lnTo>
+                  <a:lnTo>
+                    <a:pt x="5452123" y="3160240"/>
+                  </a:lnTo>
+                  <a:lnTo>
+                    <a:pt x="5523746" y="3170184"/>
+                  </a:lnTo>
+                  <a:lnTo>
+                    <a:pt x="5595368" y="3179823"/>
+                  </a:lnTo>
+                  <a:lnTo>
+                    <a:pt x="5666991" y="3189165"/>
+                  </a:lnTo>
+                  <a:lnTo>
+                    <a:pt x="5738613" y="3198219"/>
+                  </a:lnTo>
+                  <a:lnTo>
+                    <a:pt x="5810236" y="3206996"/>
+                  </a:lnTo>
+                  <a:lnTo>
+                    <a:pt x="5881858" y="3215503"/>
+                  </a:lnTo>
+                  <a:lnTo>
+                    <a:pt x="5953481" y="3223748"/>
+                  </a:lnTo>
+                  <a:lnTo>
+                    <a:pt x="6025103" y="3231740"/>
+                  </a:lnTo>
+                  <a:lnTo>
+                    <a:pt x="6096726" y="3239486"/>
+                  </a:lnTo>
+                  <a:lnTo>
+                    <a:pt x="6168349" y="3246994"/>
+                  </a:lnTo>
+                  <a:lnTo>
+                    <a:pt x="6239971" y="3254272"/>
+                  </a:lnTo>
+                  <a:lnTo>
+                    <a:pt x="6311594" y="3261325"/>
+                  </a:lnTo>
+                  <a:lnTo>
+                    <a:pt x="6383216" y="3268162"/>
+                  </a:lnTo>
+                  <a:lnTo>
+                    <a:pt x="6454839" y="3274789"/>
+                  </a:lnTo>
+                  <a:lnTo>
+                    <a:pt x="6526461" y="3281212"/>
+                  </a:lnTo>
+                  <a:lnTo>
+                    <a:pt x="6598084" y="3287437"/>
+                  </a:lnTo>
+                  <a:lnTo>
+                    <a:pt x="6669706" y="3293471"/>
+                  </a:lnTo>
+                  <a:lnTo>
+                    <a:pt x="6741329" y="3299320"/>
+                  </a:lnTo>
+                  <a:lnTo>
+                    <a:pt x="6812951" y="3304989"/>
+                  </a:lnTo>
+                  <a:lnTo>
+                    <a:pt x="6884574" y="3310484"/>
+                  </a:lnTo>
+                  <a:lnTo>
+                    <a:pt x="6956196" y="3315809"/>
+                  </a:lnTo>
+                  <a:lnTo>
+                    <a:pt x="7027819" y="3320971"/>
                   </a:lnTo>
                 </a:path>
               </a:pathLst>
@@ -4479,7 +4454,7 @@
         </p:sp>
         <p:sp>
           <p:nvSpPr>
-            <p:cNvPr id="25" name="pl25"/>
+            <p:cNvPr id="24" name="pl24"/>
             <p:cNvSpPr/>
             <p:nvPr/>
           </p:nvSpPr>
@@ -4522,13 +4497,13 @@
         </p:sp>
         <p:sp>
           <p:nvSpPr>
-            <p:cNvPr id="26" name="pl26"/>
+            <p:cNvPr id="25" name="pl25"/>
             <p:cNvSpPr/>
             <p:nvPr/>
           </p:nvSpPr>
           <p:spPr>
             <a:xfrm>
-              <a:off x="4224261" y="2073503"/>
+              <a:off x="4526955" y="2073503"/>
               <a:ext cx="0" cy="3649639"/>
             </a:xfrm>
             <a:custGeom>
@@ -4565,7 +4540,7 @@
         </p:sp>
         <p:sp>
           <p:nvSpPr>
-            <p:cNvPr id="27" name="tx27"/>
+            <p:cNvPr id="26" name="tx26"/>
             <p:cNvSpPr/>
             <p:nvPr/>
           </p:nvSpPr>
@@ -4611,7 +4586,7 @@
         </p:sp>
         <p:sp>
           <p:nvSpPr>
-            <p:cNvPr id="28" name="tx28"/>
+            <p:cNvPr id="27" name="tx27"/>
             <p:cNvSpPr/>
             <p:nvPr/>
           </p:nvSpPr>
@@ -4657,7 +4632,7 @@
         </p:sp>
         <p:sp>
           <p:nvSpPr>
-            <p:cNvPr id="29" name="tx29"/>
+            <p:cNvPr id="28" name="tx28"/>
             <p:cNvSpPr/>
             <p:nvPr/>
           </p:nvSpPr>
@@ -4703,7 +4678,7 @@
         </p:sp>
         <p:sp>
           <p:nvSpPr>
-            <p:cNvPr id="30" name="tx30"/>
+            <p:cNvPr id="29" name="tx29"/>
             <p:cNvSpPr/>
             <p:nvPr/>
           </p:nvSpPr>
@@ -4749,7 +4724,7 @@
         </p:sp>
         <p:sp>
           <p:nvSpPr>
-            <p:cNvPr id="31" name="tx31"/>
+            <p:cNvPr id="30" name="tx30"/>
             <p:cNvSpPr/>
             <p:nvPr/>
           </p:nvSpPr>
@@ -4795,14 +4770,14 @@
         </p:sp>
         <p:sp>
           <p:nvSpPr>
-            <p:cNvPr id="32" name="tx32"/>
+            <p:cNvPr id="31" name="tx31"/>
             <p:cNvSpPr/>
             <p:nvPr/>
           </p:nvSpPr>
           <p:spPr>
             <a:xfrm>
-              <a:off x="2423864" y="5785772"/>
-              <a:ext cx="155356" cy="80101"/>
+              <a:off x="2421884" y="5785772"/>
+              <a:ext cx="161574" cy="80101"/>
             </a:xfrm>
             <a:prstGeom prst="rect">
               <a:avLst/>
@@ -4834,21 +4809,21 @@
                   <a:latin typeface="Helvetica"/>
                   <a:cs typeface="Helvetica"/>
                 </a:rPr>
-                <a:t>0.8</a:t>
+                <a:t>-25</a:t>
               </a:r>
             </a:p>
           </p:txBody>
         </p:sp>
         <p:sp>
           <p:nvSpPr>
-            <p:cNvPr id="33" name="tx33"/>
+            <p:cNvPr id="32" name="tx32"/>
             <p:cNvSpPr/>
             <p:nvPr/>
           </p:nvSpPr>
           <p:spPr>
             <a:xfrm>
-              <a:off x="4196521" y="5785772"/>
-              <a:ext cx="155356" cy="80101"/>
+              <a:off x="4542539" y="5785772"/>
+              <a:ext cx="62179" cy="80101"/>
             </a:xfrm>
             <a:prstGeom prst="rect">
               <a:avLst/>
@@ -4880,21 +4855,21 @@
                   <a:latin typeface="Helvetica"/>
                   <a:cs typeface="Helvetica"/>
                 </a:rPr>
-                <a:t>1.0</a:t>
+                <a:t>0</a:t>
               </a:r>
             </a:p>
           </p:txBody>
         </p:sp>
         <p:sp>
           <p:nvSpPr>
-            <p:cNvPr id="34" name="tx34"/>
+            <p:cNvPr id="33" name="tx33"/>
             <p:cNvSpPr/>
             <p:nvPr/>
           </p:nvSpPr>
           <p:spPr>
             <a:xfrm>
-              <a:off x="5969179" y="5785772"/>
-              <a:ext cx="155356" cy="80101"/>
+              <a:off x="6582407" y="5785772"/>
+              <a:ext cx="124358" cy="80101"/>
             </a:xfrm>
             <a:prstGeom prst="rect">
               <a:avLst/>
@@ -4926,67 +4901,21 @@
                   <a:latin typeface="Helvetica"/>
                   <a:cs typeface="Helvetica"/>
                 </a:rPr>
-                <a:t>1.2</a:t>
+                <a:t>25</a:t>
               </a:r>
             </a:p>
           </p:txBody>
         </p:sp>
         <p:sp>
           <p:nvSpPr>
-            <p:cNvPr id="35" name="tx35"/>
+            <p:cNvPr id="34" name="tx34"/>
             <p:cNvSpPr/>
             <p:nvPr/>
           </p:nvSpPr>
           <p:spPr>
             <a:xfrm>
-              <a:off x="7741836" y="5785772"/>
-              <a:ext cx="155356" cy="80101"/>
-            </a:xfrm>
-            <a:prstGeom prst="rect">
-              <a:avLst/>
-            </a:prstGeom>
-            <a:noFill/>
-          </p:spPr>
-          <p:txBody>
-            <a:bodyPr lIns="0" rIns="0" tIns="0" bIns="0" anchorCtr="1" anchor="ctr" wrap="none"/>
-            <a:lstStyle/>
-            <a:p>
-              <a:pPr algn="l" marL="0" marR="0" indent="0">
-                <a:lnSpc>
-                  <a:spcPts val="880"/>
-                </a:lnSpc>
-                <a:spcBef>
-                  <a:spcPts val="0"/>
-                </a:spcBef>
-                <a:spcAft>
-                  <a:spcPts val="0"/>
-                </a:spcAft>
-              </a:pPr>
-              <a:r>
-                <a:rPr sz="880">
-                  <a:solidFill>
-                    <a:srgbClr val="4D4D4D">
-                      <a:alpha val="100000"/>
-                    </a:srgbClr>
-                  </a:solidFill>
-                  <a:latin typeface="Helvetica"/>
-                  <a:cs typeface="Helvetica"/>
-                </a:rPr>
-                <a:t>1.4</a:t>
-              </a:r>
-            </a:p>
-          </p:txBody>
-        </p:sp>
-        <p:sp>
-          <p:nvSpPr>
-            <p:cNvPr id="36" name="tx36"/>
-            <p:cNvSpPr/>
-            <p:nvPr/>
-          </p:nvSpPr>
-          <p:spPr>
-            <a:xfrm>
-              <a:off x="3879271" y="5925448"/>
-              <a:ext cx="1676186" cy="100218"/>
+              <a:off x="2928340" y="5925448"/>
+              <a:ext cx="3578047" cy="100218"/>
             </a:xfrm>
             <a:prstGeom prst="rect">
               <a:avLst/>
@@ -5018,14 +4947,14 @@
                   <a:latin typeface="Helvetica"/>
                   <a:cs typeface="Helvetica"/>
                 </a:rPr>
-                <a:t>CKD-EPI Cr-Cys / CG ratio</a:t>
+                <a:t>eGFR difference (%): 100 × (CKD-EPI Cr-Cys − CG) / CG</a:t>
               </a:r>
             </a:p>
           </p:txBody>
         </p:sp>
         <p:sp>
           <p:nvSpPr>
-            <p:cNvPr id="37" name="tx37"/>
+            <p:cNvPr id="35" name="tx35"/>
             <p:cNvSpPr/>
             <p:nvPr/>
           </p:nvSpPr>
@@ -5071,14 +5000,14 @@
         </p:sp>
         <p:sp>
           <p:nvSpPr>
-            <p:cNvPr id="38" name="tx38"/>
+            <p:cNvPr id="36" name="tx36"/>
             <p:cNvSpPr/>
             <p:nvPr/>
           </p:nvSpPr>
           <p:spPr>
             <a:xfrm>
               <a:off x="817517" y="1896563"/>
-              <a:ext cx="6169365" cy="82021"/>
+              <a:ext cx="6321612" cy="82021"/>
             </a:xfrm>
             <a:prstGeom prst="rect">
               <a:avLst/>
@@ -5110,14 +5039,14 @@
                   <a:latin typeface="Helvetica"/>
                   <a:cs typeface="Helvetica"/>
                 </a:rPr>
-                <a:t>subHR per 0.1 ratio decline: 1.43 (1.12-1.83), p = 0.004  |  per IQR decline (Δ = 0.30): 2.95 (1.42-6.13)  |  IQR: [0.85, 1.15]</a:t>
+                <a:t>subHR per 10 % decline: 1.43 (1.12-1.83), p = 0.004  |  per IQR decline (Δ = 29.9 %): 2.95 (1.42-6.13)  |  IQR: [-15.0, 14.9] %</a:t>
               </a:r>
             </a:p>
           </p:txBody>
         </p:sp>
         <p:sp>
           <p:nvSpPr>
-            <p:cNvPr id="39" name="tx39"/>
+            <p:cNvPr id="37" name="tx37"/>
             <p:cNvSpPr/>
             <p:nvPr/>
           </p:nvSpPr>

--- a/docs/pptx/carbo/jx-carbo-linsubhr-ratio-hosp2.pptx
+++ b/docs/pptx/carbo/jx-carbo-linsubhr-ratio-hosp2.pptx
@@ -2265,34 +2265,26 @@
         </p:sp>
         <p:sp>
           <p:nvSpPr>
-            <p:cNvPr id="4" name="pl4"/>
+            <p:cNvPr id="4" name="rc4"/>
             <p:cNvSpPr/>
             <p:nvPr/>
           </p:nvSpPr>
           <p:spPr>
             <a:xfrm>
-              <a:off x="817517" y="5142518"/>
-              <a:ext cx="7799693" cy="0"/>
+              <a:off x="457200" y="1600200"/>
+              <a:ext cx="8229600" cy="4525962"/>
             </a:xfrm>
-            <a:custGeom>
+            <a:prstGeom prst="rect">
               <a:avLst/>
-              <a:pathLst>
-                <a:path w="7799693" h="0">
-                  <a:moveTo>
-                    <a:pt x="0" y="0"/>
-                  </a:moveTo>
-                  <a:lnTo>
-                    <a:pt x="7799693" y="0"/>
-                  </a:lnTo>
-                  <a:lnTo>
-                    <a:pt x="7799693" y="0"/>
-                  </a:lnTo>
-                </a:path>
-              </a:pathLst>
-            </a:custGeom>
-            <a:ln w="6775" cap="flat">
+            </a:prstGeom>
+            <a:solidFill>
+              <a:srgbClr val="FFFFFF">
+                <a:alpha val="100000"/>
+              </a:srgbClr>
+            </a:solidFill>
+            <a:ln w="13550" cap="rnd">
               <a:solidFill>
-                <a:srgbClr val="EBEBEB">
+                <a:srgbClr val="FFFFFF">
                   <a:alpha val="100000"/>
                 </a:srgbClr>
               </a:solidFill>
@@ -2314,21 +2306,21 @@
           </p:nvSpPr>
           <p:spPr>
             <a:xfrm>
-              <a:off x="817517" y="4313054"/>
-              <a:ext cx="7799693" cy="0"/>
+              <a:off x="887106" y="3250627"/>
+              <a:ext cx="7660515" cy="0"/>
             </a:xfrm>
             <a:custGeom>
               <a:avLst/>
               <a:pathLst>
-                <a:path w="7799693" h="0">
+                <a:path w="7660515" h="0">
                   <a:moveTo>
                     <a:pt x="0" y="0"/>
                   </a:moveTo>
                   <a:lnTo>
-                    <a:pt x="7799693" y="0"/>
-                  </a:lnTo>
-                  <a:lnTo>
-                    <a:pt x="7799693" y="0"/>
+                    <a:pt x="7660515" y="0"/>
+                  </a:lnTo>
+                  <a:lnTo>
+                    <a:pt x="7660515" y="0"/>
                   </a:lnTo>
                 </a:path>
               </a:pathLst>
@@ -2357,21 +2349,21 @@
           </p:nvSpPr>
           <p:spPr>
             <a:xfrm>
-              <a:off x="817517" y="3483591"/>
-              <a:ext cx="7799693" cy="0"/>
+              <a:off x="887106" y="2951293"/>
+              <a:ext cx="7660515" cy="0"/>
             </a:xfrm>
             <a:custGeom>
               <a:avLst/>
               <a:pathLst>
-                <a:path w="7799693" h="0">
+                <a:path w="7660515" h="0">
                   <a:moveTo>
                     <a:pt x="0" y="0"/>
                   </a:moveTo>
                   <a:lnTo>
-                    <a:pt x="7799693" y="0"/>
-                  </a:lnTo>
-                  <a:lnTo>
-                    <a:pt x="7799693" y="0"/>
+                    <a:pt x="7660515" y="0"/>
+                  </a:lnTo>
+                  <a:lnTo>
+                    <a:pt x="7660515" y="0"/>
                   </a:lnTo>
                 </a:path>
               </a:pathLst>
@@ -2400,21 +2392,21 @@
           </p:nvSpPr>
           <p:spPr>
             <a:xfrm>
-              <a:off x="817517" y="2654127"/>
-              <a:ext cx="7799693" cy="0"/>
+              <a:off x="887106" y="2651959"/>
+              <a:ext cx="7660515" cy="0"/>
             </a:xfrm>
             <a:custGeom>
               <a:avLst/>
               <a:pathLst>
-                <a:path w="7799693" h="0">
+                <a:path w="7660515" h="0">
                   <a:moveTo>
                     <a:pt x="0" y="0"/>
                   </a:moveTo>
                   <a:lnTo>
-                    <a:pt x="7799693" y="0"/>
-                  </a:lnTo>
-                  <a:lnTo>
-                    <a:pt x="7799693" y="0"/>
+                    <a:pt x="7660515" y="0"/>
+                  </a:lnTo>
+                  <a:lnTo>
+                    <a:pt x="7660515" y="0"/>
                   </a:lnTo>
                 </a:path>
               </a:pathLst>
@@ -2443,21 +2435,21 @@
           </p:nvSpPr>
           <p:spPr>
             <a:xfrm>
-              <a:off x="1467192" y="2073503"/>
-              <a:ext cx="0" cy="3649639"/>
+              <a:off x="887106" y="2352625"/>
+              <a:ext cx="7660515" cy="0"/>
             </a:xfrm>
             <a:custGeom>
               <a:avLst/>
               <a:pathLst>
-                <a:path w="0" h="3649639">
+                <a:path w="7660515" h="0">
                   <a:moveTo>
-                    <a:pt x="0" y="3649639"/>
+                    <a:pt x="0" y="0"/>
                   </a:moveTo>
                   <a:lnTo>
-                    <a:pt x="0" y="0"/>
-                  </a:lnTo>
-                  <a:lnTo>
-                    <a:pt x="0" y="0"/>
+                    <a:pt x="7660515" y="0"/>
+                  </a:lnTo>
+                  <a:lnTo>
+                    <a:pt x="7660515" y="0"/>
                   </a:lnTo>
                 </a:path>
               </a:pathLst>
@@ -2486,15 +2478,15 @@
           </p:nvSpPr>
           <p:spPr>
             <a:xfrm>
-              <a:off x="3538150" y="2073503"/>
-              <a:ext cx="0" cy="3649639"/>
+              <a:off x="1525188" y="2143092"/>
+              <a:ext cx="0" cy="1317069"/>
             </a:xfrm>
             <a:custGeom>
               <a:avLst/>
               <a:pathLst>
-                <a:path w="0" h="3649639">
+                <a:path w="0" h="1317069">
                   <a:moveTo>
-                    <a:pt x="0" y="3649639"/>
+                    <a:pt x="0" y="1317069"/>
                   </a:moveTo>
                   <a:lnTo>
                     <a:pt x="0" y="0"/>
@@ -2529,15 +2521,15 @@
           </p:nvSpPr>
           <p:spPr>
             <a:xfrm>
-              <a:off x="5609107" y="2073503"/>
-              <a:ext cx="0" cy="3649639"/>
+              <a:off x="3559192" y="2143092"/>
+              <a:ext cx="0" cy="1317069"/>
             </a:xfrm>
             <a:custGeom>
               <a:avLst/>
               <a:pathLst>
-                <a:path w="0" h="3649639">
+                <a:path w="0" h="1317069">
                   <a:moveTo>
-                    <a:pt x="0" y="3649639"/>
+                    <a:pt x="0" y="1317069"/>
                   </a:moveTo>
                   <a:lnTo>
                     <a:pt x="0" y="0"/>
@@ -2572,15 +2564,15 @@
           </p:nvSpPr>
           <p:spPr>
             <a:xfrm>
-              <a:off x="7680065" y="2073503"/>
-              <a:ext cx="0" cy="3649639"/>
+              <a:off x="5593195" y="2143092"/>
+              <a:ext cx="0" cy="1317069"/>
             </a:xfrm>
             <a:custGeom>
               <a:avLst/>
               <a:pathLst>
-                <a:path w="0" h="3649639">
+                <a:path w="0" h="1317069">
                   <a:moveTo>
-                    <a:pt x="0" y="3649639"/>
+                    <a:pt x="0" y="1317069"/>
                   </a:moveTo>
                   <a:lnTo>
                     <a:pt x="0" y="0"/>
@@ -2615,26 +2607,26 @@
           </p:nvSpPr>
           <p:spPr>
             <a:xfrm>
-              <a:off x="817517" y="5557249"/>
-              <a:ext cx="7799693" cy="0"/>
+              <a:off x="7627198" y="2143092"/>
+              <a:ext cx="0" cy="1317069"/>
             </a:xfrm>
             <a:custGeom>
               <a:avLst/>
               <a:pathLst>
-                <a:path w="7799693" h="0">
+                <a:path w="0" h="1317069">
                   <a:moveTo>
+                    <a:pt x="0" y="1317069"/>
+                  </a:moveTo>
+                  <a:lnTo>
                     <a:pt x="0" y="0"/>
-                  </a:moveTo>
-                  <a:lnTo>
-                    <a:pt x="7799693" y="0"/>
-                  </a:lnTo>
-                  <a:lnTo>
-                    <a:pt x="7799693" y="0"/>
+                  </a:lnTo>
+                  <a:lnTo>
+                    <a:pt x="0" y="0"/>
                   </a:lnTo>
                 </a:path>
               </a:pathLst>
             </a:custGeom>
-            <a:ln w="13550" cap="flat">
+            <a:ln w="6775" cap="flat">
               <a:solidFill>
                 <a:srgbClr val="EBEBEB">
                   <a:alpha val="100000"/>
@@ -2658,21 +2650,21 @@
           </p:nvSpPr>
           <p:spPr>
             <a:xfrm>
-              <a:off x="817517" y="4727786"/>
-              <a:ext cx="7799693" cy="0"/>
+              <a:off x="887106" y="3400294"/>
+              <a:ext cx="7660515" cy="0"/>
             </a:xfrm>
             <a:custGeom>
               <a:avLst/>
               <a:pathLst>
-                <a:path w="7799693" h="0">
+                <a:path w="7660515" h="0">
                   <a:moveTo>
                     <a:pt x="0" y="0"/>
                   </a:moveTo>
                   <a:lnTo>
-                    <a:pt x="7799693" y="0"/>
-                  </a:lnTo>
-                  <a:lnTo>
-                    <a:pt x="7799693" y="0"/>
+                    <a:pt x="7660515" y="0"/>
+                  </a:lnTo>
+                  <a:lnTo>
+                    <a:pt x="7660515" y="0"/>
                   </a:lnTo>
                 </a:path>
               </a:pathLst>
@@ -2701,21 +2693,21 @@
           </p:nvSpPr>
           <p:spPr>
             <a:xfrm>
-              <a:off x="817517" y="3898322"/>
-              <a:ext cx="7799693" cy="0"/>
+              <a:off x="887106" y="3100960"/>
+              <a:ext cx="7660515" cy="0"/>
             </a:xfrm>
             <a:custGeom>
               <a:avLst/>
               <a:pathLst>
-                <a:path w="7799693" h="0">
+                <a:path w="7660515" h="0">
                   <a:moveTo>
                     <a:pt x="0" y="0"/>
                   </a:moveTo>
                   <a:lnTo>
-                    <a:pt x="7799693" y="0"/>
-                  </a:lnTo>
-                  <a:lnTo>
-                    <a:pt x="7799693" y="0"/>
+                    <a:pt x="7660515" y="0"/>
+                  </a:lnTo>
+                  <a:lnTo>
+                    <a:pt x="7660515" y="0"/>
                   </a:lnTo>
                 </a:path>
               </a:pathLst>
@@ -2744,21 +2736,21 @@
           </p:nvSpPr>
           <p:spPr>
             <a:xfrm>
-              <a:off x="817517" y="3068859"/>
-              <a:ext cx="7799693" cy="0"/>
+              <a:off x="887106" y="2801626"/>
+              <a:ext cx="7660515" cy="0"/>
             </a:xfrm>
             <a:custGeom>
               <a:avLst/>
               <a:pathLst>
-                <a:path w="7799693" h="0">
+                <a:path w="7660515" h="0">
                   <a:moveTo>
                     <a:pt x="0" y="0"/>
                   </a:moveTo>
                   <a:lnTo>
-                    <a:pt x="7799693" y="0"/>
-                  </a:lnTo>
-                  <a:lnTo>
-                    <a:pt x="7799693" y="0"/>
+                    <a:pt x="7660515" y="0"/>
+                  </a:lnTo>
+                  <a:lnTo>
+                    <a:pt x="7660515" y="0"/>
                   </a:lnTo>
                 </a:path>
               </a:pathLst>
@@ -2787,21 +2779,21 @@
           </p:nvSpPr>
           <p:spPr>
             <a:xfrm>
-              <a:off x="817517" y="2239395"/>
-              <a:ext cx="7799693" cy="0"/>
+              <a:off x="887106" y="2502292"/>
+              <a:ext cx="7660515" cy="0"/>
             </a:xfrm>
             <a:custGeom>
               <a:avLst/>
               <a:pathLst>
-                <a:path w="7799693" h="0">
+                <a:path w="7660515" h="0">
                   <a:moveTo>
                     <a:pt x="0" y="0"/>
                   </a:moveTo>
                   <a:lnTo>
-                    <a:pt x="7799693" y="0"/>
-                  </a:lnTo>
-                  <a:lnTo>
-                    <a:pt x="7799693" y="0"/>
+                    <a:pt x="7660515" y="0"/>
+                  </a:lnTo>
+                  <a:lnTo>
+                    <a:pt x="7660515" y="0"/>
                   </a:lnTo>
                 </a:path>
               </a:pathLst>
@@ -2830,21 +2822,21 @@
           </p:nvSpPr>
           <p:spPr>
             <a:xfrm>
-              <a:off x="2502671" y="2073503"/>
-              <a:ext cx="0" cy="3649639"/>
+              <a:off x="887106" y="2202958"/>
+              <a:ext cx="7660515" cy="0"/>
             </a:xfrm>
             <a:custGeom>
               <a:avLst/>
               <a:pathLst>
-                <a:path w="0" h="3649639">
+                <a:path w="7660515" h="0">
                   <a:moveTo>
-                    <a:pt x="0" y="3649639"/>
+                    <a:pt x="0" y="0"/>
                   </a:moveTo>
                   <a:lnTo>
-                    <a:pt x="0" y="0"/>
-                  </a:lnTo>
-                  <a:lnTo>
-                    <a:pt x="0" y="0"/>
+                    <a:pt x="7660515" y="0"/>
+                  </a:lnTo>
+                  <a:lnTo>
+                    <a:pt x="7660515" y="0"/>
                   </a:lnTo>
                 </a:path>
               </a:pathLst>
@@ -2873,15 +2865,15 @@
           </p:nvSpPr>
           <p:spPr>
             <a:xfrm>
-              <a:off x="4573628" y="2073503"/>
-              <a:ext cx="0" cy="3649639"/>
+              <a:off x="2542190" y="2143092"/>
+              <a:ext cx="0" cy="1317069"/>
             </a:xfrm>
             <a:custGeom>
               <a:avLst/>
               <a:pathLst>
-                <a:path w="0" h="3649639">
+                <a:path w="0" h="1317069">
                   <a:moveTo>
-                    <a:pt x="0" y="3649639"/>
+                    <a:pt x="0" y="1317069"/>
                   </a:moveTo>
                   <a:lnTo>
                     <a:pt x="0" y="0"/>
@@ -2916,15 +2908,15 @@
           </p:nvSpPr>
           <p:spPr>
             <a:xfrm>
-              <a:off x="6644586" y="2073503"/>
-              <a:ext cx="0" cy="3649639"/>
+              <a:off x="4576193" y="2143092"/>
+              <a:ext cx="0" cy="1317069"/>
             </a:xfrm>
             <a:custGeom>
               <a:avLst/>
               <a:pathLst>
-                <a:path w="0" h="3649639">
+                <a:path w="0" h="1317069">
                   <a:moveTo>
-                    <a:pt x="0" y="3649639"/>
+                    <a:pt x="0" y="1317069"/>
                   </a:moveTo>
                   <a:lnTo>
                     <a:pt x="0" y="0"/>
@@ -2953,561 +2945,604 @@
         </p:sp>
         <p:sp>
           <p:nvSpPr>
-            <p:cNvPr id="20" name="pg20"/>
+            <p:cNvPr id="20" name="pl20"/>
             <p:cNvSpPr/>
             <p:nvPr/>
           </p:nvSpPr>
           <p:spPr>
             <a:xfrm>
-              <a:off x="1172049" y="2073503"/>
-              <a:ext cx="7090630" cy="3429833"/>
+              <a:off x="6610197" y="2143092"/>
+              <a:ext cx="0" cy="1317069"/>
             </a:xfrm>
             <a:custGeom>
               <a:avLst/>
               <a:pathLst>
-                <a:path w="7090630" h="3429833">
+                <a:path w="0" h="1317069">
                   <a:moveTo>
-                    <a:pt x="1394053" y="0"/>
+                    <a:pt x="0" y="1317069"/>
                   </a:moveTo>
                   <a:lnTo>
-                    <a:pt x="1432450" y="97667"/>
-                  </a:lnTo>
-                  <a:lnTo>
-                    <a:pt x="1504073" y="270547"/>
-                  </a:lnTo>
-                  <a:lnTo>
-                    <a:pt x="1575695" y="434601"/>
-                  </a:lnTo>
-                  <a:lnTo>
-                    <a:pt x="1647318" y="590279"/>
-                  </a:lnTo>
-                  <a:lnTo>
-                    <a:pt x="1718940" y="738009"/>
-                  </a:lnTo>
-                  <a:lnTo>
-                    <a:pt x="1790563" y="878196"/>
-                  </a:lnTo>
-                  <a:lnTo>
-                    <a:pt x="1862185" y="1011225"/>
-                  </a:lnTo>
-                  <a:lnTo>
-                    <a:pt x="1933808" y="1137463"/>
-                  </a:lnTo>
-                  <a:lnTo>
-                    <a:pt x="2005430" y="1257256"/>
-                  </a:lnTo>
-                  <a:lnTo>
-                    <a:pt x="2077053" y="1370932"/>
-                  </a:lnTo>
-                  <a:lnTo>
-                    <a:pt x="2148675" y="1478804"/>
-                  </a:lnTo>
-                  <a:lnTo>
-                    <a:pt x="2220298" y="1581169"/>
-                  </a:lnTo>
-                  <a:lnTo>
-                    <a:pt x="2291920" y="1678308"/>
-                  </a:lnTo>
-                  <a:lnTo>
-                    <a:pt x="2363543" y="1770487"/>
-                  </a:lnTo>
-                  <a:lnTo>
-                    <a:pt x="2435165" y="1857959"/>
-                  </a:lnTo>
-                  <a:lnTo>
-                    <a:pt x="2506788" y="1940966"/>
-                  </a:lnTo>
-                  <a:lnTo>
-                    <a:pt x="2578410" y="2019734"/>
-                  </a:lnTo>
-                  <a:lnTo>
-                    <a:pt x="2650033" y="2094481"/>
-                  </a:lnTo>
-                  <a:lnTo>
-                    <a:pt x="2721655" y="2165412"/>
-                  </a:lnTo>
-                  <a:lnTo>
-                    <a:pt x="2793278" y="2232721"/>
-                  </a:lnTo>
-                  <a:lnTo>
-                    <a:pt x="2864901" y="2296594"/>
-                  </a:lnTo>
-                  <a:lnTo>
-                    <a:pt x="2936523" y="2357205"/>
-                  </a:lnTo>
-                  <a:lnTo>
-                    <a:pt x="3008146" y="2414722"/>
-                  </a:lnTo>
-                  <a:lnTo>
-                    <a:pt x="3079768" y="2469303"/>
-                  </a:lnTo>
-                  <a:lnTo>
-                    <a:pt x="3151391" y="2521096"/>
-                  </a:lnTo>
-                  <a:lnTo>
-                    <a:pt x="3223013" y="2570246"/>
-                  </a:lnTo>
-                  <a:lnTo>
-                    <a:pt x="3294636" y="2616886"/>
-                  </a:lnTo>
-                  <a:lnTo>
-                    <a:pt x="3366258" y="2655601"/>
-                  </a:lnTo>
-                  <a:lnTo>
-                    <a:pt x="3437881" y="2663870"/>
-                  </a:lnTo>
-                  <a:lnTo>
-                    <a:pt x="3509503" y="2672056"/>
-                  </a:lnTo>
-                  <a:lnTo>
-                    <a:pt x="3581126" y="2680161"/>
-                  </a:lnTo>
-                  <a:lnTo>
-                    <a:pt x="3652748" y="2688185"/>
-                  </a:lnTo>
-                  <a:lnTo>
-                    <a:pt x="3724371" y="2696128"/>
-                  </a:lnTo>
-                  <a:lnTo>
-                    <a:pt x="3795993" y="2703993"/>
-                  </a:lnTo>
-                  <a:lnTo>
-                    <a:pt x="3867616" y="2711778"/>
-                  </a:lnTo>
-                  <a:lnTo>
-                    <a:pt x="3939238" y="2719486"/>
-                  </a:lnTo>
-                  <a:lnTo>
-                    <a:pt x="4010861" y="2727117"/>
-                  </a:lnTo>
-                  <a:lnTo>
-                    <a:pt x="4082483" y="2734672"/>
-                  </a:lnTo>
-                  <a:lnTo>
-                    <a:pt x="4154106" y="2742152"/>
-                  </a:lnTo>
-                  <a:lnTo>
-                    <a:pt x="4225729" y="2749556"/>
-                  </a:lnTo>
-                  <a:lnTo>
-                    <a:pt x="4297351" y="2756887"/>
-                  </a:lnTo>
-                  <a:lnTo>
-                    <a:pt x="4368974" y="2764145"/>
-                  </a:lnTo>
-                  <a:lnTo>
-                    <a:pt x="4440596" y="2771330"/>
-                  </a:lnTo>
-                  <a:lnTo>
-                    <a:pt x="4512219" y="2778443"/>
-                  </a:lnTo>
-                  <a:lnTo>
-                    <a:pt x="4583841" y="2785486"/>
-                  </a:lnTo>
-                  <a:lnTo>
-                    <a:pt x="4655464" y="2792458"/>
-                  </a:lnTo>
-                  <a:lnTo>
-                    <a:pt x="4727086" y="2799360"/>
-                  </a:lnTo>
-                  <a:lnTo>
-                    <a:pt x="4798709" y="2806194"/>
-                  </a:lnTo>
-                  <a:lnTo>
-                    <a:pt x="4870331" y="2812959"/>
-                  </a:lnTo>
-                  <a:lnTo>
-                    <a:pt x="4941954" y="2819657"/>
-                  </a:lnTo>
-                  <a:lnTo>
-                    <a:pt x="5013576" y="2826288"/>
-                  </a:lnTo>
-                  <a:lnTo>
-                    <a:pt x="5085199" y="2832852"/>
-                  </a:lnTo>
-                  <a:lnTo>
-                    <a:pt x="5156821" y="2839351"/>
-                  </a:lnTo>
-                  <a:lnTo>
-                    <a:pt x="5228444" y="2845786"/>
-                  </a:lnTo>
-                  <a:lnTo>
-                    <a:pt x="5300066" y="2852156"/>
-                  </a:lnTo>
-                  <a:lnTo>
-                    <a:pt x="5371689" y="2858462"/>
-                  </a:lnTo>
-                  <a:lnTo>
-                    <a:pt x="5443311" y="2864705"/>
-                  </a:lnTo>
-                  <a:lnTo>
-                    <a:pt x="5514934" y="2870886"/>
-                  </a:lnTo>
-                  <a:lnTo>
-                    <a:pt x="5586557" y="2877006"/>
-                  </a:lnTo>
-                  <a:lnTo>
-                    <a:pt x="5658179" y="2883064"/>
-                  </a:lnTo>
-                  <a:lnTo>
-                    <a:pt x="5729802" y="2889062"/>
-                  </a:lnTo>
-                  <a:lnTo>
-                    <a:pt x="5801424" y="2895000"/>
-                  </a:lnTo>
-                  <a:lnTo>
-                    <a:pt x="5873047" y="2900878"/>
-                  </a:lnTo>
-                  <a:lnTo>
-                    <a:pt x="5944669" y="2906698"/>
-                  </a:lnTo>
-                  <a:lnTo>
-                    <a:pt x="6016292" y="2912460"/>
-                  </a:lnTo>
-                  <a:lnTo>
-                    <a:pt x="6087914" y="2918164"/>
-                  </a:lnTo>
-                  <a:lnTo>
-                    <a:pt x="6159537" y="2923811"/>
-                  </a:lnTo>
-                  <a:lnTo>
-                    <a:pt x="6231159" y="2929402"/>
-                  </a:lnTo>
-                  <a:lnTo>
-                    <a:pt x="6302782" y="2934937"/>
-                  </a:lnTo>
-                  <a:lnTo>
-                    <a:pt x="6374404" y="2940417"/>
-                  </a:lnTo>
-                  <a:lnTo>
-                    <a:pt x="6446027" y="2945842"/>
-                  </a:lnTo>
-                  <a:lnTo>
-                    <a:pt x="6517649" y="2951213"/>
-                  </a:lnTo>
-                  <a:lnTo>
-                    <a:pt x="6589272" y="2956530"/>
-                  </a:lnTo>
-                  <a:lnTo>
-                    <a:pt x="6660894" y="2961795"/>
-                  </a:lnTo>
-                  <a:lnTo>
-                    <a:pt x="6732517" y="2967006"/>
-                  </a:lnTo>
-                  <a:lnTo>
-                    <a:pt x="6804139" y="2972166"/>
-                  </a:lnTo>
-                  <a:lnTo>
-                    <a:pt x="6875762" y="2977274"/>
-                  </a:lnTo>
-                  <a:lnTo>
-                    <a:pt x="6947385" y="2982331"/>
-                  </a:lnTo>
-                  <a:lnTo>
-                    <a:pt x="7019007" y="2987337"/>
-                  </a:lnTo>
-                  <a:lnTo>
-                    <a:pt x="7090630" y="2992294"/>
-                  </a:lnTo>
-                  <a:lnTo>
-                    <a:pt x="7090630" y="3429833"/>
-                  </a:lnTo>
-                  <a:lnTo>
-                    <a:pt x="7019007" y="3426933"/>
-                  </a:lnTo>
-                  <a:lnTo>
-                    <a:pt x="6947385" y="3423876"/>
-                  </a:lnTo>
-                  <a:lnTo>
-                    <a:pt x="6875762" y="3420655"/>
-                  </a:lnTo>
-                  <a:lnTo>
-                    <a:pt x="6804139" y="3417260"/>
-                  </a:lnTo>
-                  <a:lnTo>
-                    <a:pt x="6732517" y="3413683"/>
-                  </a:lnTo>
-                  <a:lnTo>
-                    <a:pt x="6660894" y="3409913"/>
-                  </a:lnTo>
-                  <a:lnTo>
-                    <a:pt x="6589272" y="3405941"/>
-                  </a:lnTo>
-                  <a:lnTo>
-                    <a:pt x="6517649" y="3401755"/>
-                  </a:lnTo>
-                  <a:lnTo>
-                    <a:pt x="6446027" y="3397343"/>
-                  </a:lnTo>
-                  <a:lnTo>
-                    <a:pt x="6374404" y="3392694"/>
-                  </a:lnTo>
-                  <a:lnTo>
-                    <a:pt x="6302782" y="3387796"/>
-                  </a:lnTo>
-                  <a:lnTo>
-                    <a:pt x="6231159" y="3382633"/>
-                  </a:lnTo>
-                  <a:lnTo>
-                    <a:pt x="6159537" y="3377193"/>
-                  </a:lnTo>
-                  <a:lnTo>
-                    <a:pt x="6087914" y="3371460"/>
-                  </a:lnTo>
-                  <a:lnTo>
-                    <a:pt x="6016292" y="3365419"/>
-                  </a:lnTo>
-                  <a:lnTo>
-                    <a:pt x="5944669" y="3359052"/>
-                  </a:lnTo>
-                  <a:lnTo>
-                    <a:pt x="5873047" y="3352343"/>
-                  </a:lnTo>
-                  <a:lnTo>
-                    <a:pt x="5801424" y="3345273"/>
-                  </a:lnTo>
-                  <a:lnTo>
-                    <a:pt x="5729802" y="3337823"/>
-                  </a:lnTo>
-                  <a:lnTo>
-                    <a:pt x="5658179" y="3329972"/>
-                  </a:lnTo>
-                  <a:lnTo>
-                    <a:pt x="5586557" y="3321698"/>
-                  </a:lnTo>
-                  <a:lnTo>
-                    <a:pt x="5514934" y="3312979"/>
-                  </a:lnTo>
-                  <a:lnTo>
-                    <a:pt x="5443311" y="3303792"/>
-                  </a:lnTo>
-                  <a:lnTo>
-                    <a:pt x="5371689" y="3294109"/>
-                  </a:lnTo>
-                  <a:lnTo>
-                    <a:pt x="5300066" y="3283906"/>
-                  </a:lnTo>
-                  <a:lnTo>
-                    <a:pt x="5228444" y="3273154"/>
-                  </a:lnTo>
-                  <a:lnTo>
-                    <a:pt x="5156821" y="3261824"/>
-                  </a:lnTo>
-                  <a:lnTo>
-                    <a:pt x="5085199" y="3249884"/>
-                  </a:lnTo>
-                  <a:lnTo>
-                    <a:pt x="5013576" y="3237301"/>
-                  </a:lnTo>
-                  <a:lnTo>
-                    <a:pt x="4941954" y="3224042"/>
-                  </a:lnTo>
-                  <a:lnTo>
-                    <a:pt x="4870331" y="3210069"/>
-                  </a:lnTo>
-                  <a:lnTo>
-                    <a:pt x="4798709" y="3195344"/>
-                  </a:lnTo>
-                  <a:lnTo>
-                    <a:pt x="4727086" y="3179827"/>
-                  </a:lnTo>
-                  <a:lnTo>
-                    <a:pt x="4655464" y="3163475"/>
-                  </a:lnTo>
-                  <a:lnTo>
-                    <a:pt x="4583841" y="3146243"/>
-                  </a:lnTo>
-                  <a:lnTo>
-                    <a:pt x="4512219" y="3128085"/>
-                  </a:lnTo>
-                  <a:lnTo>
-                    <a:pt x="4440596" y="3108949"/>
-                  </a:lnTo>
-                  <a:lnTo>
-                    <a:pt x="4368974" y="3088783"/>
-                  </a:lnTo>
-                  <a:lnTo>
-                    <a:pt x="4297351" y="3067533"/>
-                  </a:lnTo>
-                  <a:lnTo>
-                    <a:pt x="4225729" y="3045140"/>
-                  </a:lnTo>
-                  <a:lnTo>
-                    <a:pt x="4154106" y="3021541"/>
-                  </a:lnTo>
-                  <a:lnTo>
-                    <a:pt x="4082483" y="2996673"/>
-                  </a:lnTo>
-                  <a:lnTo>
-                    <a:pt x="4010861" y="2970467"/>
-                  </a:lnTo>
-                  <a:lnTo>
-                    <a:pt x="3939238" y="2942851"/>
-                  </a:lnTo>
-                  <a:lnTo>
-                    <a:pt x="3867616" y="2913749"/>
-                  </a:lnTo>
-                  <a:lnTo>
-                    <a:pt x="3795993" y="2883081"/>
-                  </a:lnTo>
-                  <a:lnTo>
-                    <a:pt x="3724371" y="2850763"/>
-                  </a:lnTo>
-                  <a:lnTo>
-                    <a:pt x="3652748" y="2816707"/>
-                  </a:lnTo>
-                  <a:lnTo>
-                    <a:pt x="3581126" y="2780818"/>
-                  </a:lnTo>
-                  <a:lnTo>
-                    <a:pt x="3509503" y="2742998"/>
-                  </a:lnTo>
-                  <a:lnTo>
-                    <a:pt x="3437881" y="2703143"/>
-                  </a:lnTo>
-                  <a:lnTo>
-                    <a:pt x="3366258" y="2661144"/>
-                  </a:lnTo>
-                  <a:lnTo>
-                    <a:pt x="3294636" y="2647249"/>
-                  </a:lnTo>
-                  <a:lnTo>
-                    <a:pt x="3223013" y="2638812"/>
-                  </a:lnTo>
-                  <a:lnTo>
-                    <a:pt x="3151391" y="2630291"/>
-                  </a:lnTo>
-                  <a:lnTo>
-                    <a:pt x="3079768" y="2621683"/>
-                  </a:lnTo>
-                  <a:lnTo>
-                    <a:pt x="3008146" y="2612989"/>
-                  </a:lnTo>
-                  <a:lnTo>
-                    <a:pt x="2936523" y="2604206"/>
-                  </a:lnTo>
-                  <a:lnTo>
-                    <a:pt x="2864901" y="2595336"/>
-                  </a:lnTo>
-                  <a:lnTo>
-                    <a:pt x="2793278" y="2586376"/>
-                  </a:lnTo>
-                  <a:lnTo>
-                    <a:pt x="2721655" y="2577325"/>
-                  </a:lnTo>
-                  <a:lnTo>
-                    <a:pt x="2650033" y="2568183"/>
-                  </a:lnTo>
-                  <a:lnTo>
-                    <a:pt x="2578410" y="2558949"/>
-                  </a:lnTo>
-                  <a:lnTo>
-                    <a:pt x="2506788" y="2549622"/>
-                  </a:lnTo>
-                  <a:lnTo>
-                    <a:pt x="2435165" y="2540201"/>
-                  </a:lnTo>
-                  <a:lnTo>
-                    <a:pt x="2363543" y="2530685"/>
-                  </a:lnTo>
-                  <a:lnTo>
-                    <a:pt x="2291920" y="2521073"/>
-                  </a:lnTo>
-                  <a:lnTo>
-                    <a:pt x="2220298" y="2511364"/>
-                  </a:lnTo>
-                  <a:lnTo>
-                    <a:pt x="2148675" y="2501556"/>
-                  </a:lnTo>
-                  <a:lnTo>
-                    <a:pt x="2077053" y="2491651"/>
-                  </a:lnTo>
-                  <a:lnTo>
-                    <a:pt x="2005430" y="2481645"/>
-                  </a:lnTo>
-                  <a:lnTo>
-                    <a:pt x="1933808" y="2471538"/>
-                  </a:lnTo>
-                  <a:lnTo>
-                    <a:pt x="1862185" y="2461329"/>
-                  </a:lnTo>
-                  <a:lnTo>
-                    <a:pt x="1790563" y="2451017"/>
-                  </a:lnTo>
-                  <a:lnTo>
-                    <a:pt x="1718940" y="2440602"/>
-                  </a:lnTo>
-                  <a:lnTo>
-                    <a:pt x="1647318" y="2430081"/>
-                  </a:lnTo>
-                  <a:lnTo>
-                    <a:pt x="1575695" y="2419454"/>
-                  </a:lnTo>
-                  <a:lnTo>
-                    <a:pt x="1504073" y="2408720"/>
-                  </a:lnTo>
-                  <a:lnTo>
-                    <a:pt x="1432450" y="2397878"/>
-                  </a:lnTo>
-                  <a:lnTo>
-                    <a:pt x="1360827" y="2386926"/>
-                  </a:lnTo>
-                  <a:lnTo>
-                    <a:pt x="1289205" y="2375864"/>
-                  </a:lnTo>
-                  <a:lnTo>
-                    <a:pt x="1217582" y="2364691"/>
-                  </a:lnTo>
-                  <a:lnTo>
-                    <a:pt x="1145960" y="2353404"/>
-                  </a:lnTo>
-                  <a:lnTo>
-                    <a:pt x="1074337" y="2342004"/>
-                  </a:lnTo>
-                  <a:lnTo>
-                    <a:pt x="1002715" y="2330489"/>
-                  </a:lnTo>
-                  <a:lnTo>
-                    <a:pt x="931092" y="2318858"/>
-                  </a:lnTo>
-                  <a:lnTo>
-                    <a:pt x="859470" y="2307109"/>
-                  </a:lnTo>
-                  <a:lnTo>
-                    <a:pt x="787847" y="2295242"/>
-                  </a:lnTo>
-                  <a:lnTo>
-                    <a:pt x="716225" y="2283255"/>
-                  </a:lnTo>
-                  <a:lnTo>
-                    <a:pt x="644602" y="2271148"/>
-                  </a:lnTo>
-                  <a:lnTo>
-                    <a:pt x="572980" y="2258918"/>
-                  </a:lnTo>
-                  <a:lnTo>
-                    <a:pt x="501357" y="2246565"/>
-                  </a:lnTo>
-                  <a:lnTo>
-                    <a:pt x="429735" y="2234087"/>
-                  </a:lnTo>
-                  <a:lnTo>
-                    <a:pt x="358112" y="2221483"/>
-                  </a:lnTo>
-                  <a:lnTo>
-                    <a:pt x="286490" y="2208753"/>
-                  </a:lnTo>
-                  <a:lnTo>
-                    <a:pt x="214867" y="2195894"/>
-                  </a:lnTo>
-                  <a:lnTo>
-                    <a:pt x="143245" y="2182905"/>
-                  </a:lnTo>
-                  <a:lnTo>
-                    <a:pt x="71622" y="2169785"/>
-                  </a:lnTo>
-                  <a:lnTo>
-                    <a:pt x="0" y="2156533"/>
+                    <a:pt x="0" y="0"/>
+                  </a:lnTo>
+                  <a:lnTo>
+                    <a:pt x="0" y="0"/>
+                  </a:lnTo>
+                </a:path>
+              </a:pathLst>
+            </a:custGeom>
+            <a:ln w="13550" cap="flat">
+              <a:solidFill>
+                <a:srgbClr val="EBEBEB">
+                  <a:alpha val="100000"/>
+                </a:srgbClr>
+              </a:solidFill>
+              <a:prstDash val="solid"/>
+              <a:round/>
+            </a:ln>
+          </p:spPr>
+          <p:txBody>
+            <a:bodyPr/>
+            <a:lstStyle/>
+            <a:p/>
+          </p:txBody>
+        </p:sp>
+        <p:sp>
+          <p:nvSpPr>
+            <p:cNvPr id="21" name="pg21"/>
+            <p:cNvSpPr/>
+            <p:nvPr/>
+          </p:nvSpPr>
+          <p:spPr>
+            <a:xfrm>
+              <a:off x="1235312" y="2143092"/>
+              <a:ext cx="6964104" cy="1237746"/>
+            </a:xfrm>
+            <a:custGeom>
+              <a:avLst/>
+              <a:pathLst>
+                <a:path w="6964104" h="1237746">
+                  <a:moveTo>
+                    <a:pt x="1369178" y="0"/>
+                  </a:moveTo>
+                  <a:lnTo>
+                    <a:pt x="1406889" y="35245"/>
+                  </a:lnTo>
+                  <a:lnTo>
+                    <a:pt x="1477234" y="97634"/>
+                  </a:lnTo>
+                  <a:lnTo>
+                    <a:pt x="1547578" y="156837"/>
+                  </a:lnTo>
+                  <a:lnTo>
+                    <a:pt x="1617923" y="213018"/>
+                  </a:lnTo>
+                  <a:lnTo>
+                    <a:pt x="1688267" y="266330"/>
+                  </a:lnTo>
+                  <a:lnTo>
+                    <a:pt x="1758612" y="316920"/>
+                  </a:lnTo>
+                  <a:lnTo>
+                    <a:pt x="1828956" y="364927"/>
+                  </a:lnTo>
+                  <a:lnTo>
+                    <a:pt x="1899301" y="410483"/>
+                  </a:lnTo>
+                  <a:lnTo>
+                    <a:pt x="1969645" y="453714"/>
+                  </a:lnTo>
+                  <a:lnTo>
+                    <a:pt x="2039990" y="494737"/>
+                  </a:lnTo>
+                  <a:lnTo>
+                    <a:pt x="2110334" y="533665"/>
+                  </a:lnTo>
+                  <a:lnTo>
+                    <a:pt x="2180679" y="570606"/>
+                  </a:lnTo>
+                  <a:lnTo>
+                    <a:pt x="2251023" y="605661"/>
+                  </a:lnTo>
+                  <a:lnTo>
+                    <a:pt x="2321368" y="638927"/>
+                  </a:lnTo>
+                  <a:lnTo>
+                    <a:pt x="2391712" y="670493"/>
+                  </a:lnTo>
+                  <a:lnTo>
+                    <a:pt x="2462057" y="700449"/>
+                  </a:lnTo>
+                  <a:lnTo>
+                    <a:pt x="2532401" y="728874"/>
+                  </a:lnTo>
+                  <a:lnTo>
+                    <a:pt x="2602746" y="755849"/>
+                  </a:lnTo>
+                  <a:lnTo>
+                    <a:pt x="2673090" y="781446"/>
+                  </a:lnTo>
+                  <a:lnTo>
+                    <a:pt x="2743435" y="805736"/>
+                  </a:lnTo>
+                  <a:lnTo>
+                    <a:pt x="2813779" y="828786"/>
+                  </a:lnTo>
+                  <a:lnTo>
+                    <a:pt x="2884124" y="850660"/>
+                  </a:lnTo>
+                  <a:lnTo>
+                    <a:pt x="2954468" y="871416"/>
+                  </a:lnTo>
+                  <a:lnTo>
+                    <a:pt x="3024813" y="891113"/>
+                  </a:lnTo>
+                  <a:lnTo>
+                    <a:pt x="3095157" y="909804"/>
+                  </a:lnTo>
+                  <a:lnTo>
+                    <a:pt x="3165502" y="927541"/>
+                  </a:lnTo>
+                  <a:lnTo>
+                    <a:pt x="3235846" y="944372"/>
+                  </a:lnTo>
+                  <a:lnTo>
+                    <a:pt x="3306191" y="958344"/>
+                  </a:lnTo>
+                  <a:lnTo>
+                    <a:pt x="3376535" y="961328"/>
+                  </a:lnTo>
+                  <a:lnTo>
+                    <a:pt x="3446880" y="964282"/>
+                  </a:lnTo>
+                  <a:lnTo>
+                    <a:pt x="3517224" y="967207"/>
+                  </a:lnTo>
+                  <a:lnTo>
+                    <a:pt x="3587569" y="970102"/>
+                  </a:lnTo>
+                  <a:lnTo>
+                    <a:pt x="3657913" y="972969"/>
+                  </a:lnTo>
+                  <a:lnTo>
+                    <a:pt x="3728257" y="975807"/>
+                  </a:lnTo>
+                  <a:lnTo>
+                    <a:pt x="3798602" y="978617"/>
+                  </a:lnTo>
+                  <a:lnTo>
+                    <a:pt x="3868946" y="981398"/>
+                  </a:lnTo>
+                  <a:lnTo>
+                    <a:pt x="3939291" y="984152"/>
+                  </a:lnTo>
+                  <a:lnTo>
+                    <a:pt x="4009635" y="986879"/>
+                  </a:lnTo>
+                  <a:lnTo>
+                    <a:pt x="4079980" y="989578"/>
+                  </a:lnTo>
+                  <a:lnTo>
+                    <a:pt x="4150324" y="992250"/>
+                  </a:lnTo>
+                  <a:lnTo>
+                    <a:pt x="4220669" y="994895"/>
+                  </a:lnTo>
+                  <a:lnTo>
+                    <a:pt x="4291013" y="997515"/>
+                  </a:lnTo>
+                  <a:lnTo>
+                    <a:pt x="4361358" y="1000107"/>
+                  </a:lnTo>
+                  <a:lnTo>
+                    <a:pt x="4431702" y="1002675"/>
+                  </a:lnTo>
+                  <a:lnTo>
+                    <a:pt x="4502047" y="1005216"/>
+                  </a:lnTo>
+                  <a:lnTo>
+                    <a:pt x="4572391" y="1007732"/>
+                  </a:lnTo>
+                  <a:lnTo>
+                    <a:pt x="4642736" y="1010223"/>
+                  </a:lnTo>
+                  <a:lnTo>
+                    <a:pt x="4713080" y="1012689"/>
+                  </a:lnTo>
+                  <a:lnTo>
+                    <a:pt x="4783425" y="1015130"/>
+                  </a:lnTo>
+                  <a:lnTo>
+                    <a:pt x="4853769" y="1017547"/>
+                  </a:lnTo>
+                  <a:lnTo>
+                    <a:pt x="4924114" y="1019940"/>
+                  </a:lnTo>
+                  <a:lnTo>
+                    <a:pt x="4994458" y="1022309"/>
+                  </a:lnTo>
+                  <a:lnTo>
+                    <a:pt x="5064803" y="1024655"/>
+                  </a:lnTo>
+                  <a:lnTo>
+                    <a:pt x="5135147" y="1026977"/>
+                  </a:lnTo>
+                  <a:lnTo>
+                    <a:pt x="5205492" y="1029276"/>
+                  </a:lnTo>
+                  <a:lnTo>
+                    <a:pt x="5275836" y="1031551"/>
+                  </a:lnTo>
+                  <a:lnTo>
+                    <a:pt x="5346181" y="1033804"/>
+                  </a:lnTo>
+                  <a:lnTo>
+                    <a:pt x="5416525" y="1036035"/>
+                  </a:lnTo>
+                  <a:lnTo>
+                    <a:pt x="5486870" y="1038243"/>
+                  </a:lnTo>
+                  <a:lnTo>
+                    <a:pt x="5557214" y="1040430"/>
+                  </a:lnTo>
+                  <a:lnTo>
+                    <a:pt x="5627559" y="1042594"/>
+                  </a:lnTo>
+                  <a:lnTo>
+                    <a:pt x="5697903" y="1044737"/>
+                  </a:lnTo>
+                  <a:lnTo>
+                    <a:pt x="5768248" y="1046858"/>
+                  </a:lnTo>
+                  <a:lnTo>
+                    <a:pt x="5838592" y="1048959"/>
+                  </a:lnTo>
+                  <a:lnTo>
+                    <a:pt x="5908937" y="1051038"/>
+                  </a:lnTo>
+                  <a:lnTo>
+                    <a:pt x="5979281" y="1053096"/>
+                  </a:lnTo>
+                  <a:lnTo>
+                    <a:pt x="6049626" y="1055134"/>
+                  </a:lnTo>
+                  <a:lnTo>
+                    <a:pt x="6119970" y="1057152"/>
+                  </a:lnTo>
+                  <a:lnTo>
+                    <a:pt x="6190315" y="1059149"/>
+                  </a:lnTo>
+                  <a:lnTo>
+                    <a:pt x="6260659" y="1061127"/>
+                  </a:lnTo>
+                  <a:lnTo>
+                    <a:pt x="6331004" y="1063085"/>
+                  </a:lnTo>
+                  <a:lnTo>
+                    <a:pt x="6401348" y="1065023"/>
+                  </a:lnTo>
+                  <a:lnTo>
+                    <a:pt x="6471693" y="1066942"/>
+                  </a:lnTo>
+                  <a:lnTo>
+                    <a:pt x="6542037" y="1068842"/>
+                  </a:lnTo>
+                  <a:lnTo>
+                    <a:pt x="6612382" y="1070722"/>
+                  </a:lnTo>
+                  <a:lnTo>
+                    <a:pt x="6682726" y="1072584"/>
+                  </a:lnTo>
+                  <a:lnTo>
+                    <a:pt x="6753071" y="1074428"/>
+                  </a:lnTo>
+                  <a:lnTo>
+                    <a:pt x="6823415" y="1076253"/>
+                  </a:lnTo>
+                  <a:lnTo>
+                    <a:pt x="6893760" y="1078059"/>
+                  </a:lnTo>
+                  <a:lnTo>
+                    <a:pt x="6964104" y="1079848"/>
+                  </a:lnTo>
+                  <a:lnTo>
+                    <a:pt x="6964104" y="1237746"/>
+                  </a:lnTo>
+                  <a:lnTo>
+                    <a:pt x="6893760" y="1236699"/>
+                  </a:lnTo>
+                  <a:lnTo>
+                    <a:pt x="6823415" y="1235596"/>
+                  </a:lnTo>
+                  <a:lnTo>
+                    <a:pt x="6753071" y="1234433"/>
+                  </a:lnTo>
+                  <a:lnTo>
+                    <a:pt x="6682726" y="1233208"/>
+                  </a:lnTo>
+                  <a:lnTo>
+                    <a:pt x="6612382" y="1231918"/>
+                  </a:lnTo>
+                  <a:lnTo>
+                    <a:pt x="6542037" y="1230557"/>
+                  </a:lnTo>
+                  <a:lnTo>
+                    <a:pt x="6471693" y="1229124"/>
+                  </a:lnTo>
+                  <a:lnTo>
+                    <a:pt x="6401348" y="1227613"/>
+                  </a:lnTo>
+                  <a:lnTo>
+                    <a:pt x="6331004" y="1226021"/>
+                  </a:lnTo>
+                  <a:lnTo>
+                    <a:pt x="6260659" y="1224343"/>
+                  </a:lnTo>
+                  <a:lnTo>
+                    <a:pt x="6190315" y="1222575"/>
+                  </a:lnTo>
+                  <a:lnTo>
+                    <a:pt x="6119970" y="1220712"/>
+                  </a:lnTo>
+                  <a:lnTo>
+                    <a:pt x="6049626" y="1218749"/>
+                  </a:lnTo>
+                  <a:lnTo>
+                    <a:pt x="5979281" y="1216680"/>
+                  </a:lnTo>
+                  <a:lnTo>
+                    <a:pt x="5908937" y="1214500"/>
+                  </a:lnTo>
+                  <a:lnTo>
+                    <a:pt x="5838592" y="1212203"/>
+                  </a:lnTo>
+                  <a:lnTo>
+                    <a:pt x="5768248" y="1209781"/>
+                  </a:lnTo>
+                  <a:lnTo>
+                    <a:pt x="5697903" y="1207230"/>
+                  </a:lnTo>
+                  <a:lnTo>
+                    <a:pt x="5627559" y="1204541"/>
+                  </a:lnTo>
+                  <a:lnTo>
+                    <a:pt x="5557214" y="1201708"/>
+                  </a:lnTo>
+                  <a:lnTo>
+                    <a:pt x="5486870" y="1198722"/>
+                  </a:lnTo>
+                  <a:lnTo>
+                    <a:pt x="5416525" y="1195576"/>
+                  </a:lnTo>
+                  <a:lnTo>
+                    <a:pt x="5346181" y="1192260"/>
+                  </a:lnTo>
+                  <a:lnTo>
+                    <a:pt x="5275836" y="1188766"/>
+                  </a:lnTo>
+                  <a:lnTo>
+                    <a:pt x="5205492" y="1185084"/>
+                  </a:lnTo>
+                  <a:lnTo>
+                    <a:pt x="5135147" y="1181204"/>
+                  </a:lnTo>
+                  <a:lnTo>
+                    <a:pt x="5064803" y="1177115"/>
+                  </a:lnTo>
+                  <a:lnTo>
+                    <a:pt x="4994458" y="1172806"/>
+                  </a:lnTo>
+                  <a:lnTo>
+                    <a:pt x="4924114" y="1168265"/>
+                  </a:lnTo>
+                  <a:lnTo>
+                    <a:pt x="4853769" y="1163480"/>
+                  </a:lnTo>
+                  <a:lnTo>
+                    <a:pt x="4783425" y="1158438"/>
+                  </a:lnTo>
+                  <a:lnTo>
+                    <a:pt x="4713080" y="1153124"/>
+                  </a:lnTo>
+                  <a:lnTo>
+                    <a:pt x="4642736" y="1147524"/>
+                  </a:lnTo>
+                  <a:lnTo>
+                    <a:pt x="4572391" y="1141623"/>
+                  </a:lnTo>
+                  <a:lnTo>
+                    <a:pt x="4502047" y="1135405"/>
+                  </a:lnTo>
+                  <a:lnTo>
+                    <a:pt x="4431702" y="1128852"/>
+                  </a:lnTo>
+                  <a:lnTo>
+                    <a:pt x="4361358" y="1121946"/>
+                  </a:lnTo>
+                  <a:lnTo>
+                    <a:pt x="4291013" y="1114669"/>
+                  </a:lnTo>
+                  <a:lnTo>
+                    <a:pt x="4220669" y="1107000"/>
+                  </a:lnTo>
+                  <a:lnTo>
+                    <a:pt x="4150324" y="1098919"/>
+                  </a:lnTo>
+                  <a:lnTo>
+                    <a:pt x="4079980" y="1090403"/>
+                  </a:lnTo>
+                  <a:lnTo>
+                    <a:pt x="4009635" y="1081428"/>
+                  </a:lnTo>
+                  <a:lnTo>
+                    <a:pt x="3939291" y="1071971"/>
+                  </a:lnTo>
+                  <a:lnTo>
+                    <a:pt x="3868946" y="1062005"/>
+                  </a:lnTo>
+                  <a:lnTo>
+                    <a:pt x="3798602" y="1051503"/>
+                  </a:lnTo>
+                  <a:lnTo>
+                    <a:pt x="3728257" y="1040436"/>
+                  </a:lnTo>
+                  <a:lnTo>
+                    <a:pt x="3657913" y="1028773"/>
+                  </a:lnTo>
+                  <a:lnTo>
+                    <a:pt x="3587569" y="1016483"/>
+                  </a:lnTo>
+                  <a:lnTo>
+                    <a:pt x="3517224" y="1003531"/>
+                  </a:lnTo>
+                  <a:lnTo>
+                    <a:pt x="3446880" y="989883"/>
+                  </a:lnTo>
+                  <a:lnTo>
+                    <a:pt x="3376535" y="975501"/>
+                  </a:lnTo>
+                  <a:lnTo>
+                    <a:pt x="3306191" y="960344"/>
+                  </a:lnTo>
+                  <a:lnTo>
+                    <a:pt x="3235846" y="955330"/>
+                  </a:lnTo>
+                  <a:lnTo>
+                    <a:pt x="3165502" y="952285"/>
+                  </a:lnTo>
+                  <a:lnTo>
+                    <a:pt x="3095157" y="949210"/>
+                  </a:lnTo>
+                  <a:lnTo>
+                    <a:pt x="3024813" y="946103"/>
+                  </a:lnTo>
+                  <a:lnTo>
+                    <a:pt x="2954468" y="942966"/>
+                  </a:lnTo>
+                  <a:lnTo>
+                    <a:pt x="2884124" y="939797"/>
+                  </a:lnTo>
+                  <a:lnTo>
+                    <a:pt x="2813779" y="936595"/>
+                  </a:lnTo>
+                  <a:lnTo>
+                    <a:pt x="2743435" y="933362"/>
+                  </a:lnTo>
+                  <a:lnTo>
+                    <a:pt x="2673090" y="930096"/>
+                  </a:lnTo>
+                  <a:lnTo>
+                    <a:pt x="2602746" y="926797"/>
+                  </a:lnTo>
+                  <a:lnTo>
+                    <a:pt x="2532401" y="923464"/>
+                  </a:lnTo>
+                  <a:lnTo>
+                    <a:pt x="2462057" y="920098"/>
+                  </a:lnTo>
+                  <a:lnTo>
+                    <a:pt x="2391712" y="916698"/>
+                  </a:lnTo>
+                  <a:lnTo>
+                    <a:pt x="2321368" y="913264"/>
+                  </a:lnTo>
+                  <a:lnTo>
+                    <a:pt x="2251023" y="909795"/>
+                  </a:lnTo>
+                  <a:lnTo>
+                    <a:pt x="2180679" y="906292"/>
+                  </a:lnTo>
+                  <a:lnTo>
+                    <a:pt x="2110334" y="902753"/>
+                  </a:lnTo>
+                  <a:lnTo>
+                    <a:pt x="2039990" y="899178"/>
+                  </a:lnTo>
+                  <a:lnTo>
+                    <a:pt x="1969645" y="895567"/>
+                  </a:lnTo>
+                  <a:lnTo>
+                    <a:pt x="1899301" y="891920"/>
+                  </a:lnTo>
+                  <a:lnTo>
+                    <a:pt x="1828956" y="888235"/>
+                  </a:lnTo>
+                  <a:lnTo>
+                    <a:pt x="1758612" y="884514"/>
+                  </a:lnTo>
+                  <a:lnTo>
+                    <a:pt x="1688267" y="880755"/>
+                  </a:lnTo>
+                  <a:lnTo>
+                    <a:pt x="1617923" y="876959"/>
+                  </a:lnTo>
+                  <a:lnTo>
+                    <a:pt x="1547578" y="873124"/>
+                  </a:lnTo>
+                  <a:lnTo>
+                    <a:pt x="1477234" y="869250"/>
+                  </a:lnTo>
+                  <a:lnTo>
+                    <a:pt x="1406889" y="865337"/>
+                  </a:lnTo>
+                  <a:lnTo>
+                    <a:pt x="1336545" y="861385"/>
+                  </a:lnTo>
+                  <a:lnTo>
+                    <a:pt x="1266200" y="857393"/>
+                  </a:lnTo>
+                  <a:lnTo>
+                    <a:pt x="1195856" y="853361"/>
+                  </a:lnTo>
+                  <a:lnTo>
+                    <a:pt x="1125511" y="849288"/>
+                  </a:lnTo>
+                  <a:lnTo>
+                    <a:pt x="1055167" y="845174"/>
+                  </a:lnTo>
+                  <a:lnTo>
+                    <a:pt x="984822" y="841018"/>
+                  </a:lnTo>
+                  <a:lnTo>
+                    <a:pt x="914478" y="836821"/>
+                  </a:lnTo>
+                  <a:lnTo>
+                    <a:pt x="844133" y="832581"/>
+                  </a:lnTo>
+                  <a:lnTo>
+                    <a:pt x="773789" y="828299"/>
+                  </a:lnTo>
+                  <a:lnTo>
+                    <a:pt x="703444" y="823973"/>
+                  </a:lnTo>
+                  <a:lnTo>
+                    <a:pt x="633100" y="819603"/>
+                  </a:lnTo>
+                  <a:lnTo>
+                    <a:pt x="562755" y="815190"/>
+                  </a:lnTo>
+                  <a:lnTo>
+                    <a:pt x="492411" y="810732"/>
+                  </a:lnTo>
+                  <a:lnTo>
+                    <a:pt x="422066" y="806229"/>
+                  </a:lnTo>
+                  <a:lnTo>
+                    <a:pt x="351722" y="801681"/>
+                  </a:lnTo>
+                  <a:lnTo>
+                    <a:pt x="281377" y="797087"/>
+                  </a:lnTo>
+                  <a:lnTo>
+                    <a:pt x="211033" y="792446"/>
+                  </a:lnTo>
+                  <a:lnTo>
+                    <a:pt x="140688" y="787759"/>
+                  </a:lnTo>
+                  <a:lnTo>
+                    <a:pt x="70344" y="783024"/>
+                  </a:lnTo>
+                  <a:lnTo>
+                    <a:pt x="0" y="778242"/>
                   </a:lnTo>
                   <a:close/>
                 </a:path>
@@ -3527,586 +3562,261 @@
         </p:sp>
         <p:sp>
           <p:nvSpPr>
-            <p:cNvPr id="21" name="pl21"/>
-            <p:cNvSpPr/>
-            <p:nvPr/>
-          </p:nvSpPr>
-          <p:spPr>
-            <a:xfrm>
-              <a:off x="2566103" y="2073503"/>
-              <a:ext cx="5696576" cy="2992294"/>
-            </a:xfrm>
-            <a:custGeom>
-              <a:avLst/>
-              <a:pathLst>
-                <a:path w="5696576" h="2992294">
-                  <a:moveTo>
-                    <a:pt x="0" y="0"/>
-                  </a:moveTo>
-                  <a:lnTo>
-                    <a:pt x="38396" y="97667"/>
-                  </a:lnTo>
-                  <a:lnTo>
-                    <a:pt x="110019" y="270547"/>
-                  </a:lnTo>
-                  <a:lnTo>
-                    <a:pt x="181641" y="434601"/>
-                  </a:lnTo>
-                  <a:lnTo>
-                    <a:pt x="253264" y="590279"/>
-                  </a:lnTo>
-                  <a:lnTo>
-                    <a:pt x="324886" y="738009"/>
-                  </a:lnTo>
-                  <a:lnTo>
-                    <a:pt x="396509" y="878196"/>
-                  </a:lnTo>
-                  <a:lnTo>
-                    <a:pt x="468131" y="1011225"/>
-                  </a:lnTo>
-                  <a:lnTo>
-                    <a:pt x="539754" y="1137463"/>
-                  </a:lnTo>
-                  <a:lnTo>
-                    <a:pt x="611376" y="1257256"/>
-                  </a:lnTo>
-                  <a:lnTo>
-                    <a:pt x="682999" y="1370932"/>
-                  </a:lnTo>
-                  <a:lnTo>
-                    <a:pt x="754621" y="1478804"/>
-                  </a:lnTo>
-                  <a:lnTo>
-                    <a:pt x="826244" y="1581169"/>
-                  </a:lnTo>
-                  <a:lnTo>
-                    <a:pt x="897866" y="1678308"/>
-                  </a:lnTo>
-                  <a:lnTo>
-                    <a:pt x="969489" y="1770487"/>
-                  </a:lnTo>
-                  <a:lnTo>
-                    <a:pt x="1041111" y="1857959"/>
-                  </a:lnTo>
-                  <a:lnTo>
-                    <a:pt x="1112734" y="1940966"/>
-                  </a:lnTo>
-                  <a:lnTo>
-                    <a:pt x="1184357" y="2019734"/>
-                  </a:lnTo>
-                  <a:lnTo>
-                    <a:pt x="1255979" y="2094481"/>
-                  </a:lnTo>
-                  <a:lnTo>
-                    <a:pt x="1327602" y="2165412"/>
-                  </a:lnTo>
-                  <a:lnTo>
-                    <a:pt x="1399224" y="2232721"/>
-                  </a:lnTo>
-                  <a:lnTo>
-                    <a:pt x="1470847" y="2296594"/>
-                  </a:lnTo>
-                  <a:lnTo>
-                    <a:pt x="1542469" y="2357205"/>
-                  </a:lnTo>
-                  <a:lnTo>
-                    <a:pt x="1614092" y="2414722"/>
-                  </a:lnTo>
-                  <a:lnTo>
-                    <a:pt x="1685714" y="2469303"/>
-                  </a:lnTo>
-                  <a:lnTo>
-                    <a:pt x="1757337" y="2521096"/>
-                  </a:lnTo>
-                  <a:lnTo>
-                    <a:pt x="1828959" y="2570246"/>
-                  </a:lnTo>
-                  <a:lnTo>
-                    <a:pt x="1900582" y="2616886"/>
-                  </a:lnTo>
-                  <a:lnTo>
-                    <a:pt x="1972204" y="2655601"/>
-                  </a:lnTo>
-                  <a:lnTo>
-                    <a:pt x="2043827" y="2663870"/>
-                  </a:lnTo>
-                  <a:lnTo>
-                    <a:pt x="2115449" y="2672056"/>
-                  </a:lnTo>
-                  <a:lnTo>
-                    <a:pt x="2187072" y="2680161"/>
-                  </a:lnTo>
-                  <a:lnTo>
-                    <a:pt x="2258694" y="2688185"/>
-                  </a:lnTo>
-                  <a:lnTo>
-                    <a:pt x="2330317" y="2696128"/>
-                  </a:lnTo>
-                  <a:lnTo>
-                    <a:pt x="2401939" y="2703993"/>
-                  </a:lnTo>
-                  <a:lnTo>
-                    <a:pt x="2473562" y="2711778"/>
-                  </a:lnTo>
-                  <a:lnTo>
-                    <a:pt x="2545185" y="2719486"/>
-                  </a:lnTo>
-                  <a:lnTo>
-                    <a:pt x="2616807" y="2727117"/>
-                  </a:lnTo>
-                  <a:lnTo>
-                    <a:pt x="2688430" y="2734672"/>
-                  </a:lnTo>
-                  <a:lnTo>
-                    <a:pt x="2760052" y="2742152"/>
-                  </a:lnTo>
-                  <a:lnTo>
-                    <a:pt x="2831675" y="2749556"/>
-                  </a:lnTo>
-                  <a:lnTo>
-                    <a:pt x="2903297" y="2756887"/>
-                  </a:lnTo>
-                  <a:lnTo>
-                    <a:pt x="2974920" y="2764145"/>
-                  </a:lnTo>
-                  <a:lnTo>
-                    <a:pt x="3046542" y="2771330"/>
-                  </a:lnTo>
-                  <a:lnTo>
-                    <a:pt x="3118165" y="2778443"/>
-                  </a:lnTo>
-                  <a:lnTo>
-                    <a:pt x="3189787" y="2785486"/>
-                  </a:lnTo>
-                  <a:lnTo>
-                    <a:pt x="3261410" y="2792458"/>
-                  </a:lnTo>
-                  <a:lnTo>
-                    <a:pt x="3333032" y="2799360"/>
-                  </a:lnTo>
-                  <a:lnTo>
-                    <a:pt x="3404655" y="2806194"/>
-                  </a:lnTo>
-                  <a:lnTo>
-                    <a:pt x="3476277" y="2812959"/>
-                  </a:lnTo>
-                  <a:lnTo>
-                    <a:pt x="3547900" y="2819657"/>
-                  </a:lnTo>
-                  <a:lnTo>
-                    <a:pt x="3619522" y="2826288"/>
-                  </a:lnTo>
-                  <a:lnTo>
-                    <a:pt x="3691145" y="2832852"/>
-                  </a:lnTo>
-                  <a:lnTo>
-                    <a:pt x="3762767" y="2839351"/>
-                  </a:lnTo>
-                  <a:lnTo>
-                    <a:pt x="3834390" y="2845786"/>
-                  </a:lnTo>
-                  <a:lnTo>
-                    <a:pt x="3906013" y="2852156"/>
-                  </a:lnTo>
-                  <a:lnTo>
-                    <a:pt x="3977635" y="2858462"/>
-                  </a:lnTo>
-                  <a:lnTo>
-                    <a:pt x="4049258" y="2864705"/>
-                  </a:lnTo>
-                  <a:lnTo>
-                    <a:pt x="4120880" y="2870886"/>
-                  </a:lnTo>
-                  <a:lnTo>
-                    <a:pt x="4192503" y="2877006"/>
-                  </a:lnTo>
-                  <a:lnTo>
-                    <a:pt x="4264125" y="2883064"/>
-                  </a:lnTo>
-                  <a:lnTo>
-                    <a:pt x="4335748" y="2889062"/>
-                  </a:lnTo>
-                  <a:lnTo>
-                    <a:pt x="4407370" y="2895000"/>
-                  </a:lnTo>
-                  <a:lnTo>
-                    <a:pt x="4478993" y="2900878"/>
-                  </a:lnTo>
-                  <a:lnTo>
-                    <a:pt x="4550615" y="2906698"/>
-                  </a:lnTo>
-                  <a:lnTo>
-                    <a:pt x="4622238" y="2912460"/>
-                  </a:lnTo>
-                  <a:lnTo>
-                    <a:pt x="4693860" y="2918164"/>
-                  </a:lnTo>
-                  <a:lnTo>
-                    <a:pt x="4765483" y="2923811"/>
-                  </a:lnTo>
-                  <a:lnTo>
-                    <a:pt x="4837105" y="2929402"/>
-                  </a:lnTo>
-                  <a:lnTo>
-                    <a:pt x="4908728" y="2934937"/>
-                  </a:lnTo>
-                  <a:lnTo>
-                    <a:pt x="4980350" y="2940417"/>
-                  </a:lnTo>
-                  <a:lnTo>
-                    <a:pt x="5051973" y="2945842"/>
-                  </a:lnTo>
-                  <a:lnTo>
-                    <a:pt x="5123595" y="2951213"/>
-                  </a:lnTo>
-                  <a:lnTo>
-                    <a:pt x="5195218" y="2956530"/>
-                  </a:lnTo>
-                  <a:lnTo>
-                    <a:pt x="5266841" y="2961795"/>
-                  </a:lnTo>
-                  <a:lnTo>
-                    <a:pt x="5338463" y="2967006"/>
-                  </a:lnTo>
-                  <a:lnTo>
-                    <a:pt x="5410086" y="2972166"/>
-                  </a:lnTo>
-                  <a:lnTo>
-                    <a:pt x="5481708" y="2977274"/>
-                  </a:lnTo>
-                  <a:lnTo>
-                    <a:pt x="5553331" y="2982331"/>
-                  </a:lnTo>
-                  <a:lnTo>
-                    <a:pt x="5624953" y="2987337"/>
-                  </a:lnTo>
-                  <a:lnTo>
-                    <a:pt x="5696576" y="2992294"/>
-                  </a:lnTo>
-                </a:path>
-              </a:pathLst>
-            </a:custGeom>
-          </p:spPr>
-          <p:txBody>
-            <a:bodyPr/>
-            <a:lstStyle/>
-            <a:p/>
-          </p:txBody>
-        </p:sp>
-        <p:sp>
-          <p:nvSpPr>
             <p:cNvPr id="22" name="pl22"/>
             <p:cNvSpPr/>
             <p:nvPr/>
           </p:nvSpPr>
           <p:spPr>
             <a:xfrm>
-              <a:off x="1172049" y="4230036"/>
-              <a:ext cx="7090630" cy="1273300"/>
+              <a:off x="2604490" y="2143092"/>
+              <a:ext cx="5594926" cy="1079848"/>
             </a:xfrm>
             <a:custGeom>
               <a:avLst/>
               <a:pathLst>
-                <a:path w="7090630" h="1273300">
+                <a:path w="5594926" h="1079848">
                   <a:moveTo>
-                    <a:pt x="7090630" y="1273300"/>
+                    <a:pt x="0" y="0"/>
                   </a:moveTo>
                   <a:lnTo>
-                    <a:pt x="7019007" y="1270399"/>
-                  </a:lnTo>
-                  <a:lnTo>
-                    <a:pt x="6947385" y="1267342"/>
-                  </a:lnTo>
-                  <a:lnTo>
-                    <a:pt x="6875762" y="1264121"/>
-                  </a:lnTo>
-                  <a:lnTo>
-                    <a:pt x="6804139" y="1260726"/>
-                  </a:lnTo>
-                  <a:lnTo>
-                    <a:pt x="6732517" y="1257149"/>
-                  </a:lnTo>
-                  <a:lnTo>
-                    <a:pt x="6660894" y="1253380"/>
-                  </a:lnTo>
-                  <a:lnTo>
-                    <a:pt x="6589272" y="1249407"/>
-                  </a:lnTo>
-                  <a:lnTo>
-                    <a:pt x="6517649" y="1245221"/>
-                  </a:lnTo>
-                  <a:lnTo>
-                    <a:pt x="6446027" y="1240810"/>
-                  </a:lnTo>
-                  <a:lnTo>
-                    <a:pt x="6374404" y="1236161"/>
-                  </a:lnTo>
-                  <a:lnTo>
-                    <a:pt x="6302782" y="1231262"/>
-                  </a:lnTo>
-                  <a:lnTo>
-                    <a:pt x="6231159" y="1226099"/>
-                  </a:lnTo>
-                  <a:lnTo>
-                    <a:pt x="6159537" y="1220659"/>
-                  </a:lnTo>
-                  <a:lnTo>
-                    <a:pt x="6087914" y="1214926"/>
-                  </a:lnTo>
-                  <a:lnTo>
-                    <a:pt x="6016292" y="1208885"/>
-                  </a:lnTo>
-                  <a:lnTo>
-                    <a:pt x="5944669" y="1202518"/>
-                  </a:lnTo>
-                  <a:lnTo>
-                    <a:pt x="5873047" y="1195810"/>
-                  </a:lnTo>
-                  <a:lnTo>
-                    <a:pt x="5801424" y="1188740"/>
-                  </a:lnTo>
-                  <a:lnTo>
-                    <a:pt x="5729802" y="1181289"/>
-                  </a:lnTo>
-                  <a:lnTo>
-                    <a:pt x="5658179" y="1173438"/>
-                  </a:lnTo>
-                  <a:lnTo>
-                    <a:pt x="5586557" y="1165165"/>
-                  </a:lnTo>
-                  <a:lnTo>
-                    <a:pt x="5514934" y="1156446"/>
-                  </a:lnTo>
-                  <a:lnTo>
-                    <a:pt x="5443311" y="1147258"/>
-                  </a:lnTo>
-                  <a:lnTo>
-                    <a:pt x="5371689" y="1137576"/>
-                  </a:lnTo>
-                  <a:lnTo>
-                    <a:pt x="5300066" y="1127373"/>
-                  </a:lnTo>
-                  <a:lnTo>
-                    <a:pt x="5228444" y="1116621"/>
-                  </a:lnTo>
-                  <a:lnTo>
-                    <a:pt x="5156821" y="1105290"/>
-                  </a:lnTo>
-                  <a:lnTo>
-                    <a:pt x="5085199" y="1093350"/>
-                  </a:lnTo>
-                  <a:lnTo>
-                    <a:pt x="5013576" y="1080768"/>
-                  </a:lnTo>
-                  <a:lnTo>
-                    <a:pt x="4941954" y="1067508"/>
-                  </a:lnTo>
-                  <a:lnTo>
-                    <a:pt x="4870331" y="1053535"/>
-                  </a:lnTo>
-                  <a:lnTo>
-                    <a:pt x="4798709" y="1038810"/>
-                  </a:lnTo>
-                  <a:lnTo>
-                    <a:pt x="4727086" y="1023293"/>
-                  </a:lnTo>
-                  <a:lnTo>
-                    <a:pt x="4655464" y="1006941"/>
-                  </a:lnTo>
-                  <a:lnTo>
-                    <a:pt x="4583841" y="989710"/>
-                  </a:lnTo>
-                  <a:lnTo>
-                    <a:pt x="4512219" y="971551"/>
-                  </a:lnTo>
-                  <a:lnTo>
-                    <a:pt x="4440596" y="952415"/>
-                  </a:lnTo>
-                  <a:lnTo>
-                    <a:pt x="4368974" y="932250"/>
-                  </a:lnTo>
-                  <a:lnTo>
-                    <a:pt x="4297351" y="911000"/>
-                  </a:lnTo>
-                  <a:lnTo>
-                    <a:pt x="4225729" y="888606"/>
-                  </a:lnTo>
-                  <a:lnTo>
-                    <a:pt x="4154106" y="865007"/>
-                  </a:lnTo>
-                  <a:lnTo>
-                    <a:pt x="4082483" y="840139"/>
-                  </a:lnTo>
-                  <a:lnTo>
-                    <a:pt x="4010861" y="813933"/>
-                  </a:lnTo>
-                  <a:lnTo>
-                    <a:pt x="3939238" y="786317"/>
-                  </a:lnTo>
-                  <a:lnTo>
-                    <a:pt x="3867616" y="757215"/>
-                  </a:lnTo>
-                  <a:lnTo>
-                    <a:pt x="3795993" y="726547"/>
-                  </a:lnTo>
-                  <a:lnTo>
-                    <a:pt x="3724371" y="694230"/>
-                  </a:lnTo>
-                  <a:lnTo>
-                    <a:pt x="3652748" y="660173"/>
-                  </a:lnTo>
-                  <a:lnTo>
-                    <a:pt x="3581126" y="624284"/>
-                  </a:lnTo>
-                  <a:lnTo>
-                    <a:pt x="3509503" y="586464"/>
-                  </a:lnTo>
-                  <a:lnTo>
-                    <a:pt x="3437881" y="546610"/>
-                  </a:lnTo>
-                  <a:lnTo>
-                    <a:pt x="3366258" y="504611"/>
-                  </a:lnTo>
-                  <a:lnTo>
-                    <a:pt x="3294636" y="490715"/>
-                  </a:lnTo>
-                  <a:lnTo>
-                    <a:pt x="3223013" y="482279"/>
-                  </a:lnTo>
-                  <a:lnTo>
-                    <a:pt x="3151391" y="473757"/>
-                  </a:lnTo>
-                  <a:lnTo>
-                    <a:pt x="3079768" y="465149"/>
-                  </a:lnTo>
-                  <a:lnTo>
-                    <a:pt x="3008146" y="456455"/>
-                  </a:lnTo>
-                  <a:lnTo>
-                    <a:pt x="2936523" y="447673"/>
-                  </a:lnTo>
-                  <a:lnTo>
-                    <a:pt x="2864901" y="438802"/>
-                  </a:lnTo>
-                  <a:lnTo>
-                    <a:pt x="2793278" y="429842"/>
-                  </a:lnTo>
-                  <a:lnTo>
-                    <a:pt x="2721655" y="420792"/>
-                  </a:lnTo>
-                  <a:lnTo>
-                    <a:pt x="2650033" y="411650"/>
-                  </a:lnTo>
-                  <a:lnTo>
-                    <a:pt x="2578410" y="402416"/>
-                  </a:lnTo>
-                  <a:lnTo>
-                    <a:pt x="2506788" y="393089"/>
-                  </a:lnTo>
-                  <a:lnTo>
-                    <a:pt x="2435165" y="383667"/>
-                  </a:lnTo>
-                  <a:lnTo>
-                    <a:pt x="2363543" y="374151"/>
-                  </a:lnTo>
-                  <a:lnTo>
-                    <a:pt x="2291920" y="364539"/>
-                  </a:lnTo>
-                  <a:lnTo>
-                    <a:pt x="2220298" y="354830"/>
-                  </a:lnTo>
-                  <a:lnTo>
-                    <a:pt x="2148675" y="345023"/>
-                  </a:lnTo>
-                  <a:lnTo>
-                    <a:pt x="2077053" y="335117"/>
-                  </a:lnTo>
-                  <a:lnTo>
-                    <a:pt x="2005430" y="325111"/>
-                  </a:lnTo>
-                  <a:lnTo>
-                    <a:pt x="1933808" y="315004"/>
-                  </a:lnTo>
-                  <a:lnTo>
-                    <a:pt x="1862185" y="304796"/>
-                  </a:lnTo>
-                  <a:lnTo>
-                    <a:pt x="1790563" y="294484"/>
-                  </a:lnTo>
-                  <a:lnTo>
-                    <a:pt x="1718940" y="284068"/>
-                  </a:lnTo>
-                  <a:lnTo>
-                    <a:pt x="1647318" y="273547"/>
-                  </a:lnTo>
-                  <a:lnTo>
-                    <a:pt x="1575695" y="262921"/>
-                  </a:lnTo>
-                  <a:lnTo>
-                    <a:pt x="1504073" y="252187"/>
-                  </a:lnTo>
-                  <a:lnTo>
-                    <a:pt x="1432450" y="241344"/>
-                  </a:lnTo>
-                  <a:lnTo>
-                    <a:pt x="1360827" y="230393"/>
-                  </a:lnTo>
-                  <a:lnTo>
-                    <a:pt x="1289205" y="219331"/>
-                  </a:lnTo>
-                  <a:lnTo>
-                    <a:pt x="1217582" y="208157"/>
-                  </a:lnTo>
-                  <a:lnTo>
-                    <a:pt x="1145960" y="196871"/>
-                  </a:lnTo>
-                  <a:lnTo>
-                    <a:pt x="1074337" y="185470"/>
-                  </a:lnTo>
-                  <a:lnTo>
-                    <a:pt x="1002715" y="173955"/>
-                  </a:lnTo>
-                  <a:lnTo>
-                    <a:pt x="931092" y="162324"/>
-                  </a:lnTo>
-                  <a:lnTo>
-                    <a:pt x="859470" y="150575"/>
-                  </a:lnTo>
-                  <a:lnTo>
-                    <a:pt x="787847" y="138708"/>
-                  </a:lnTo>
-                  <a:lnTo>
-                    <a:pt x="716225" y="126722"/>
-                  </a:lnTo>
-                  <a:lnTo>
-                    <a:pt x="644602" y="114614"/>
-                  </a:lnTo>
-                  <a:lnTo>
-                    <a:pt x="572980" y="102384"/>
-                  </a:lnTo>
-                  <a:lnTo>
-                    <a:pt x="501357" y="90031"/>
-                  </a:lnTo>
-                  <a:lnTo>
-                    <a:pt x="429735" y="77553"/>
-                  </a:lnTo>
-                  <a:lnTo>
-                    <a:pt x="358112" y="64950"/>
-                  </a:lnTo>
-                  <a:lnTo>
-                    <a:pt x="286490" y="52219"/>
-                  </a:lnTo>
-                  <a:lnTo>
-                    <a:pt x="214867" y="39360"/>
-                  </a:lnTo>
-                  <a:lnTo>
-                    <a:pt x="143245" y="26371"/>
-                  </a:lnTo>
-                  <a:lnTo>
-                    <a:pt x="71622" y="13252"/>
-                  </a:lnTo>
-                  <a:lnTo>
-                    <a:pt x="0" y="0"/>
+                    <a:pt x="37711" y="35245"/>
+                  </a:lnTo>
+                  <a:lnTo>
+                    <a:pt x="108055" y="97634"/>
+                  </a:lnTo>
+                  <a:lnTo>
+                    <a:pt x="178400" y="156837"/>
+                  </a:lnTo>
+                  <a:lnTo>
+                    <a:pt x="248744" y="213018"/>
+                  </a:lnTo>
+                  <a:lnTo>
+                    <a:pt x="319089" y="266330"/>
+                  </a:lnTo>
+                  <a:lnTo>
+                    <a:pt x="389433" y="316920"/>
+                  </a:lnTo>
+                  <a:lnTo>
+                    <a:pt x="459778" y="364927"/>
+                  </a:lnTo>
+                  <a:lnTo>
+                    <a:pt x="530122" y="410483"/>
+                  </a:lnTo>
+                  <a:lnTo>
+                    <a:pt x="600467" y="453714"/>
+                  </a:lnTo>
+                  <a:lnTo>
+                    <a:pt x="670811" y="494737"/>
+                  </a:lnTo>
+                  <a:lnTo>
+                    <a:pt x="741156" y="533665"/>
+                  </a:lnTo>
+                  <a:lnTo>
+                    <a:pt x="811500" y="570606"/>
+                  </a:lnTo>
+                  <a:lnTo>
+                    <a:pt x="881845" y="605661"/>
+                  </a:lnTo>
+                  <a:lnTo>
+                    <a:pt x="952189" y="638927"/>
+                  </a:lnTo>
+                  <a:lnTo>
+                    <a:pt x="1022534" y="670493"/>
+                  </a:lnTo>
+                  <a:lnTo>
+                    <a:pt x="1092878" y="700449"/>
+                  </a:lnTo>
+                  <a:lnTo>
+                    <a:pt x="1163223" y="728874"/>
+                  </a:lnTo>
+                  <a:lnTo>
+                    <a:pt x="1233567" y="755849"/>
+                  </a:lnTo>
+                  <a:lnTo>
+                    <a:pt x="1303912" y="781446"/>
+                  </a:lnTo>
+                  <a:lnTo>
+                    <a:pt x="1374256" y="805736"/>
+                  </a:lnTo>
+                  <a:lnTo>
+                    <a:pt x="1444601" y="828786"/>
+                  </a:lnTo>
+                  <a:lnTo>
+                    <a:pt x="1514945" y="850660"/>
+                  </a:lnTo>
+                  <a:lnTo>
+                    <a:pt x="1585290" y="871416"/>
+                  </a:lnTo>
+                  <a:lnTo>
+                    <a:pt x="1655634" y="891113"/>
+                  </a:lnTo>
+                  <a:lnTo>
+                    <a:pt x="1725979" y="909804"/>
+                  </a:lnTo>
+                  <a:lnTo>
+                    <a:pt x="1796323" y="927541"/>
+                  </a:lnTo>
+                  <a:lnTo>
+                    <a:pt x="1866668" y="944372"/>
+                  </a:lnTo>
+                  <a:lnTo>
+                    <a:pt x="1937012" y="958344"/>
+                  </a:lnTo>
+                  <a:lnTo>
+                    <a:pt x="2007357" y="961328"/>
+                  </a:lnTo>
+                  <a:lnTo>
+                    <a:pt x="2077701" y="964282"/>
+                  </a:lnTo>
+                  <a:lnTo>
+                    <a:pt x="2148046" y="967207"/>
+                  </a:lnTo>
+                  <a:lnTo>
+                    <a:pt x="2218390" y="970102"/>
+                  </a:lnTo>
+                  <a:lnTo>
+                    <a:pt x="2288735" y="972969"/>
+                  </a:lnTo>
+                  <a:lnTo>
+                    <a:pt x="2359079" y="975807"/>
+                  </a:lnTo>
+                  <a:lnTo>
+                    <a:pt x="2429424" y="978617"/>
+                  </a:lnTo>
+                  <a:lnTo>
+                    <a:pt x="2499768" y="981398"/>
+                  </a:lnTo>
+                  <a:lnTo>
+                    <a:pt x="2570113" y="984152"/>
+                  </a:lnTo>
+                  <a:lnTo>
+                    <a:pt x="2640457" y="986879"/>
+                  </a:lnTo>
+                  <a:lnTo>
+                    <a:pt x="2710802" y="989578"/>
+                  </a:lnTo>
+                  <a:lnTo>
+                    <a:pt x="2781146" y="992250"/>
+                  </a:lnTo>
+                  <a:lnTo>
+                    <a:pt x="2851491" y="994895"/>
+                  </a:lnTo>
+                  <a:lnTo>
+                    <a:pt x="2921835" y="997515"/>
+                  </a:lnTo>
+                  <a:lnTo>
+                    <a:pt x="2992180" y="1000107"/>
+                  </a:lnTo>
+                  <a:lnTo>
+                    <a:pt x="3062524" y="1002675"/>
+                  </a:lnTo>
+                  <a:lnTo>
+                    <a:pt x="3132869" y="1005216"/>
+                  </a:lnTo>
+                  <a:lnTo>
+                    <a:pt x="3203213" y="1007732"/>
+                  </a:lnTo>
+                  <a:lnTo>
+                    <a:pt x="3273558" y="1010223"/>
+                  </a:lnTo>
+                  <a:lnTo>
+                    <a:pt x="3343902" y="1012689"/>
+                  </a:lnTo>
+                  <a:lnTo>
+                    <a:pt x="3414247" y="1015130"/>
+                  </a:lnTo>
+                  <a:lnTo>
+                    <a:pt x="3484591" y="1017547"/>
+                  </a:lnTo>
+                  <a:lnTo>
+                    <a:pt x="3554935" y="1019940"/>
+                  </a:lnTo>
+                  <a:lnTo>
+                    <a:pt x="3625280" y="1022309"/>
+                  </a:lnTo>
+                  <a:lnTo>
+                    <a:pt x="3695624" y="1024655"/>
+                  </a:lnTo>
+                  <a:lnTo>
+                    <a:pt x="3765969" y="1026977"/>
+                  </a:lnTo>
+                  <a:lnTo>
+                    <a:pt x="3836313" y="1029276"/>
+                  </a:lnTo>
+                  <a:lnTo>
+                    <a:pt x="3906658" y="1031551"/>
+                  </a:lnTo>
+                  <a:lnTo>
+                    <a:pt x="3977002" y="1033804"/>
+                  </a:lnTo>
+                  <a:lnTo>
+                    <a:pt x="4047347" y="1036035"/>
+                  </a:lnTo>
+                  <a:lnTo>
+                    <a:pt x="4117691" y="1038243"/>
+                  </a:lnTo>
+                  <a:lnTo>
+                    <a:pt x="4188036" y="1040430"/>
+                  </a:lnTo>
+                  <a:lnTo>
+                    <a:pt x="4258380" y="1042594"/>
+                  </a:lnTo>
+                  <a:lnTo>
+                    <a:pt x="4328725" y="1044737"/>
+                  </a:lnTo>
+                  <a:lnTo>
+                    <a:pt x="4399069" y="1046858"/>
+                  </a:lnTo>
+                  <a:lnTo>
+                    <a:pt x="4469414" y="1048959"/>
+                  </a:lnTo>
+                  <a:lnTo>
+                    <a:pt x="4539758" y="1051038"/>
+                  </a:lnTo>
+                  <a:lnTo>
+                    <a:pt x="4610103" y="1053096"/>
+                  </a:lnTo>
+                  <a:lnTo>
+                    <a:pt x="4680447" y="1055134"/>
+                  </a:lnTo>
+                  <a:lnTo>
+                    <a:pt x="4750792" y="1057152"/>
+                  </a:lnTo>
+                  <a:lnTo>
+                    <a:pt x="4821136" y="1059149"/>
+                  </a:lnTo>
+                  <a:lnTo>
+                    <a:pt x="4891481" y="1061127"/>
+                  </a:lnTo>
+                  <a:lnTo>
+                    <a:pt x="4961825" y="1063085"/>
+                  </a:lnTo>
+                  <a:lnTo>
+                    <a:pt x="5032170" y="1065023"/>
+                  </a:lnTo>
+                  <a:lnTo>
+                    <a:pt x="5102514" y="1066942"/>
+                  </a:lnTo>
+                  <a:lnTo>
+                    <a:pt x="5172859" y="1068842"/>
+                  </a:lnTo>
+                  <a:lnTo>
+                    <a:pt x="5243203" y="1070722"/>
+                  </a:lnTo>
+                  <a:lnTo>
+                    <a:pt x="5313548" y="1072584"/>
+                  </a:lnTo>
+                  <a:lnTo>
+                    <a:pt x="5383892" y="1074428"/>
+                  </a:lnTo>
+                  <a:lnTo>
+                    <a:pt x="5454237" y="1076253"/>
+                  </a:lnTo>
+                  <a:lnTo>
+                    <a:pt x="5524581" y="1078059"/>
+                  </a:lnTo>
+                  <a:lnTo>
+                    <a:pt x="5594926" y="1079848"/>
                   </a:lnTo>
                 </a:path>
               </a:pathLst>
@@ -4126,312 +3836,637 @@
           </p:nvSpPr>
           <p:spPr>
             <a:xfrm>
-              <a:off x="1234860" y="2073503"/>
-              <a:ext cx="7027819" cy="3320971"/>
+              <a:off x="1235312" y="2921334"/>
+              <a:ext cx="6964104" cy="459504"/>
             </a:xfrm>
             <a:custGeom>
               <a:avLst/>
               <a:pathLst>
-                <a:path w="7027819" h="3320971">
+                <a:path w="6964104" h="459504">
+                  <a:moveTo>
+                    <a:pt x="6964104" y="459504"/>
+                  </a:moveTo>
+                  <a:lnTo>
+                    <a:pt x="6893760" y="458457"/>
+                  </a:lnTo>
+                  <a:lnTo>
+                    <a:pt x="6823415" y="457354"/>
+                  </a:lnTo>
+                  <a:lnTo>
+                    <a:pt x="6753071" y="456191"/>
+                  </a:lnTo>
+                  <a:lnTo>
+                    <a:pt x="6682726" y="454966"/>
+                  </a:lnTo>
+                  <a:lnTo>
+                    <a:pt x="6612382" y="453675"/>
+                  </a:lnTo>
+                  <a:lnTo>
+                    <a:pt x="6542037" y="452315"/>
+                  </a:lnTo>
+                  <a:lnTo>
+                    <a:pt x="6471693" y="450881"/>
+                  </a:lnTo>
+                  <a:lnTo>
+                    <a:pt x="6401348" y="449371"/>
+                  </a:lnTo>
+                  <a:lnTo>
+                    <a:pt x="6331004" y="447779"/>
+                  </a:lnTo>
+                  <a:lnTo>
+                    <a:pt x="6260659" y="446101"/>
+                  </a:lnTo>
+                  <a:lnTo>
+                    <a:pt x="6190315" y="444333"/>
+                  </a:lnTo>
+                  <a:lnTo>
+                    <a:pt x="6119970" y="442470"/>
+                  </a:lnTo>
+                  <a:lnTo>
+                    <a:pt x="6049626" y="440507"/>
+                  </a:lnTo>
+                  <a:lnTo>
+                    <a:pt x="5979281" y="438438"/>
+                  </a:lnTo>
+                  <a:lnTo>
+                    <a:pt x="5908937" y="436258"/>
+                  </a:lnTo>
+                  <a:lnTo>
+                    <a:pt x="5838592" y="433960"/>
+                  </a:lnTo>
+                  <a:lnTo>
+                    <a:pt x="5768248" y="431539"/>
+                  </a:lnTo>
+                  <a:lnTo>
+                    <a:pt x="5697903" y="428988"/>
+                  </a:lnTo>
+                  <a:lnTo>
+                    <a:pt x="5627559" y="426299"/>
+                  </a:lnTo>
+                  <a:lnTo>
+                    <a:pt x="5557214" y="423466"/>
+                  </a:lnTo>
+                  <a:lnTo>
+                    <a:pt x="5486870" y="420480"/>
+                  </a:lnTo>
+                  <a:lnTo>
+                    <a:pt x="5416525" y="417334"/>
+                  </a:lnTo>
+                  <a:lnTo>
+                    <a:pt x="5346181" y="414018"/>
+                  </a:lnTo>
+                  <a:lnTo>
+                    <a:pt x="5275836" y="410524"/>
+                  </a:lnTo>
+                  <a:lnTo>
+                    <a:pt x="5205492" y="406842"/>
+                  </a:lnTo>
+                  <a:lnTo>
+                    <a:pt x="5135147" y="402962"/>
+                  </a:lnTo>
+                  <a:lnTo>
+                    <a:pt x="5064803" y="398873"/>
+                  </a:lnTo>
+                  <a:lnTo>
+                    <a:pt x="4994458" y="394564"/>
+                  </a:lnTo>
+                  <a:lnTo>
+                    <a:pt x="4924114" y="390023"/>
+                  </a:lnTo>
+                  <a:lnTo>
+                    <a:pt x="4853769" y="385238"/>
+                  </a:lnTo>
+                  <a:lnTo>
+                    <a:pt x="4783425" y="380196"/>
+                  </a:lnTo>
+                  <a:lnTo>
+                    <a:pt x="4713080" y="374882"/>
+                  </a:lnTo>
+                  <a:lnTo>
+                    <a:pt x="4642736" y="369282"/>
+                  </a:lnTo>
+                  <a:lnTo>
+                    <a:pt x="4572391" y="363381"/>
+                  </a:lnTo>
+                  <a:lnTo>
+                    <a:pt x="4502047" y="357163"/>
+                  </a:lnTo>
+                  <a:lnTo>
+                    <a:pt x="4431702" y="350610"/>
+                  </a:lnTo>
+                  <a:lnTo>
+                    <a:pt x="4361358" y="343704"/>
+                  </a:lnTo>
+                  <a:lnTo>
+                    <a:pt x="4291013" y="336427"/>
+                  </a:lnTo>
+                  <a:lnTo>
+                    <a:pt x="4220669" y="328758"/>
+                  </a:lnTo>
+                  <a:lnTo>
+                    <a:pt x="4150324" y="320677"/>
+                  </a:lnTo>
+                  <a:lnTo>
+                    <a:pt x="4079980" y="312161"/>
+                  </a:lnTo>
+                  <a:lnTo>
+                    <a:pt x="4009635" y="303186"/>
+                  </a:lnTo>
+                  <a:lnTo>
+                    <a:pt x="3939291" y="293729"/>
+                  </a:lnTo>
+                  <a:lnTo>
+                    <a:pt x="3868946" y="283763"/>
+                  </a:lnTo>
+                  <a:lnTo>
+                    <a:pt x="3798602" y="273261"/>
+                  </a:lnTo>
+                  <a:lnTo>
+                    <a:pt x="3728257" y="262194"/>
+                  </a:lnTo>
+                  <a:lnTo>
+                    <a:pt x="3657913" y="250531"/>
+                  </a:lnTo>
+                  <a:lnTo>
+                    <a:pt x="3587569" y="238241"/>
+                  </a:lnTo>
+                  <a:lnTo>
+                    <a:pt x="3517224" y="225289"/>
+                  </a:lnTo>
+                  <a:lnTo>
+                    <a:pt x="3446880" y="211641"/>
+                  </a:lnTo>
+                  <a:lnTo>
+                    <a:pt x="3376535" y="197258"/>
+                  </a:lnTo>
+                  <a:lnTo>
+                    <a:pt x="3306191" y="182102"/>
+                  </a:lnTo>
+                  <a:lnTo>
+                    <a:pt x="3235846" y="177087"/>
+                  </a:lnTo>
+                  <a:lnTo>
+                    <a:pt x="3165502" y="174043"/>
+                  </a:lnTo>
+                  <a:lnTo>
+                    <a:pt x="3095157" y="170967"/>
+                  </a:lnTo>
+                  <a:lnTo>
+                    <a:pt x="3024813" y="167861"/>
+                  </a:lnTo>
+                  <a:lnTo>
+                    <a:pt x="2954468" y="164724"/>
+                  </a:lnTo>
+                  <a:lnTo>
+                    <a:pt x="2884124" y="161554"/>
+                  </a:lnTo>
+                  <a:lnTo>
+                    <a:pt x="2813779" y="158353"/>
+                  </a:lnTo>
+                  <a:lnTo>
+                    <a:pt x="2743435" y="155120"/>
+                  </a:lnTo>
+                  <a:lnTo>
+                    <a:pt x="2673090" y="151853"/>
+                  </a:lnTo>
+                  <a:lnTo>
+                    <a:pt x="2602746" y="148554"/>
+                  </a:lnTo>
+                  <a:lnTo>
+                    <a:pt x="2532401" y="145222"/>
+                  </a:lnTo>
+                  <a:lnTo>
+                    <a:pt x="2462057" y="141856"/>
+                  </a:lnTo>
+                  <a:lnTo>
+                    <a:pt x="2391712" y="138456"/>
+                  </a:lnTo>
+                  <a:lnTo>
+                    <a:pt x="2321368" y="135022"/>
+                  </a:lnTo>
+                  <a:lnTo>
+                    <a:pt x="2251023" y="131553"/>
+                  </a:lnTo>
+                  <a:lnTo>
+                    <a:pt x="2180679" y="128049"/>
+                  </a:lnTo>
+                  <a:lnTo>
+                    <a:pt x="2110334" y="124510"/>
+                  </a:lnTo>
+                  <a:lnTo>
+                    <a:pt x="2039990" y="120935"/>
+                  </a:lnTo>
+                  <a:lnTo>
+                    <a:pt x="1969645" y="117325"/>
+                  </a:lnTo>
+                  <a:lnTo>
+                    <a:pt x="1899301" y="113677"/>
+                  </a:lnTo>
+                  <a:lnTo>
+                    <a:pt x="1828956" y="109993"/>
+                  </a:lnTo>
+                  <a:lnTo>
+                    <a:pt x="1758612" y="106272"/>
+                  </a:lnTo>
+                  <a:lnTo>
+                    <a:pt x="1688267" y="102513"/>
+                  </a:lnTo>
+                  <a:lnTo>
+                    <a:pt x="1617923" y="98717"/>
+                  </a:lnTo>
+                  <a:lnTo>
+                    <a:pt x="1547578" y="94882"/>
+                  </a:lnTo>
+                  <a:lnTo>
+                    <a:pt x="1477234" y="91008"/>
+                  </a:lnTo>
+                  <a:lnTo>
+                    <a:pt x="1406889" y="87095"/>
+                  </a:lnTo>
+                  <a:lnTo>
+                    <a:pt x="1336545" y="83143"/>
+                  </a:lnTo>
+                  <a:lnTo>
+                    <a:pt x="1266200" y="79151"/>
+                  </a:lnTo>
+                  <a:lnTo>
+                    <a:pt x="1195856" y="75119"/>
+                  </a:lnTo>
+                  <a:lnTo>
+                    <a:pt x="1125511" y="71046"/>
+                  </a:lnTo>
+                  <a:lnTo>
+                    <a:pt x="1055167" y="66932"/>
+                  </a:lnTo>
+                  <a:lnTo>
+                    <a:pt x="984822" y="62776"/>
+                  </a:lnTo>
+                  <a:lnTo>
+                    <a:pt x="914478" y="58579"/>
+                  </a:lnTo>
+                  <a:lnTo>
+                    <a:pt x="844133" y="54339"/>
+                  </a:lnTo>
+                  <a:lnTo>
+                    <a:pt x="773789" y="50056"/>
+                  </a:lnTo>
+                  <a:lnTo>
+                    <a:pt x="703444" y="45731"/>
+                  </a:lnTo>
+                  <a:lnTo>
+                    <a:pt x="633100" y="41361"/>
+                  </a:lnTo>
+                  <a:lnTo>
+                    <a:pt x="562755" y="36948"/>
+                  </a:lnTo>
+                  <a:lnTo>
+                    <a:pt x="492411" y="32490"/>
+                  </a:lnTo>
+                  <a:lnTo>
+                    <a:pt x="422066" y="27987"/>
+                  </a:lnTo>
+                  <a:lnTo>
+                    <a:pt x="351722" y="23439"/>
+                  </a:lnTo>
+                  <a:lnTo>
+                    <a:pt x="281377" y="18844"/>
+                  </a:lnTo>
+                  <a:lnTo>
+                    <a:pt x="211033" y="14204"/>
+                  </a:lnTo>
+                  <a:lnTo>
+                    <a:pt x="140688" y="9516"/>
+                  </a:lnTo>
+                  <a:lnTo>
+                    <a:pt x="70344" y="4782"/>
+                  </a:lnTo>
+                  <a:lnTo>
+                    <a:pt x="0" y="0"/>
+                  </a:lnTo>
+                </a:path>
+              </a:pathLst>
+            </a:custGeom>
+          </p:spPr>
+          <p:txBody>
+            <a:bodyPr/>
+            <a:lstStyle/>
+            <a:p/>
+          </p:txBody>
+        </p:sp>
+        <p:sp>
+          <p:nvSpPr>
+            <p:cNvPr id="24" name="pl24"/>
+            <p:cNvSpPr/>
+            <p:nvPr/>
+          </p:nvSpPr>
+          <p:spPr>
+            <a:xfrm>
+              <a:off x="1297002" y="2143092"/>
+              <a:ext cx="6902414" cy="1198460"/>
+            </a:xfrm>
+            <a:custGeom>
+              <a:avLst/>
+              <a:pathLst>
+                <a:path w="6902414" h="1198460">
                   <a:moveTo>
                     <a:pt x="0" y="0"/>
                   </a:moveTo>
                   <a:lnTo>
-                    <a:pt x="8811" y="13539"/>
-                  </a:lnTo>
-                  <a:lnTo>
-                    <a:pt x="80434" y="120207"/>
-                  </a:lnTo>
-                  <a:lnTo>
-                    <a:pt x="152056" y="223595"/>
-                  </a:lnTo>
-                  <a:lnTo>
-                    <a:pt x="223679" y="323806"/>
-                  </a:lnTo>
-                  <a:lnTo>
-                    <a:pt x="295301" y="420937"/>
-                  </a:lnTo>
-                  <a:lnTo>
-                    <a:pt x="366924" y="515082"/>
-                  </a:lnTo>
-                  <a:lnTo>
-                    <a:pt x="438546" y="606333"/>
-                  </a:lnTo>
-                  <a:lnTo>
-                    <a:pt x="510169" y="694779"/>
-                  </a:lnTo>
-                  <a:lnTo>
-                    <a:pt x="581792" y="780507"/>
-                  </a:lnTo>
-                  <a:lnTo>
-                    <a:pt x="653414" y="863599"/>
-                  </a:lnTo>
-                  <a:lnTo>
-                    <a:pt x="725037" y="944137"/>
-                  </a:lnTo>
-                  <a:lnTo>
-                    <a:pt x="796659" y="1022200"/>
-                  </a:lnTo>
-                  <a:lnTo>
-                    <a:pt x="868282" y="1097863"/>
-                  </a:lnTo>
-                  <a:lnTo>
-                    <a:pt x="939904" y="1171201"/>
-                  </a:lnTo>
-                  <a:lnTo>
-                    <a:pt x="1011527" y="1242284"/>
-                  </a:lnTo>
-                  <a:lnTo>
-                    <a:pt x="1083149" y="1311182"/>
-                  </a:lnTo>
-                  <a:lnTo>
-                    <a:pt x="1154772" y="1377963"/>
-                  </a:lnTo>
-                  <a:lnTo>
-                    <a:pt x="1226394" y="1442690"/>
-                  </a:lnTo>
-                  <a:lnTo>
-                    <a:pt x="1298017" y="1505429"/>
-                  </a:lnTo>
-                  <a:lnTo>
-                    <a:pt x="1369639" y="1566238"/>
-                  </a:lnTo>
-                  <a:lnTo>
-                    <a:pt x="1441262" y="1625179"/>
-                  </a:lnTo>
-                  <a:lnTo>
-                    <a:pt x="1512884" y="1682308"/>
-                  </a:lnTo>
-                  <a:lnTo>
-                    <a:pt x="1584507" y="1737680"/>
-                  </a:lnTo>
-                  <a:lnTo>
-                    <a:pt x="1656129" y="1791351"/>
-                  </a:lnTo>
-                  <a:lnTo>
-                    <a:pt x="1727752" y="1843372"/>
-                  </a:lnTo>
-                  <a:lnTo>
-                    <a:pt x="1799374" y="1893794"/>
-                  </a:lnTo>
-                  <a:lnTo>
-                    <a:pt x="1870997" y="1942666"/>
-                  </a:lnTo>
-                  <a:lnTo>
-                    <a:pt x="1942620" y="1990036"/>
-                  </a:lnTo>
-                  <a:lnTo>
-                    <a:pt x="2014242" y="2035950"/>
-                  </a:lnTo>
-                  <a:lnTo>
-                    <a:pt x="2085865" y="2080452"/>
-                  </a:lnTo>
-                  <a:lnTo>
-                    <a:pt x="2157487" y="2123587"/>
-                  </a:lnTo>
-                  <a:lnTo>
-                    <a:pt x="2229110" y="2165396"/>
-                  </a:lnTo>
-                  <a:lnTo>
-                    <a:pt x="2300732" y="2205919"/>
-                  </a:lnTo>
-                  <a:lnTo>
-                    <a:pt x="2372355" y="2245197"/>
-                  </a:lnTo>
-                  <a:lnTo>
-                    <a:pt x="2443977" y="2283268"/>
-                  </a:lnTo>
-                  <a:lnTo>
-                    <a:pt x="2515600" y="2320168"/>
-                  </a:lnTo>
-                  <a:lnTo>
-                    <a:pt x="2587222" y="2355934"/>
-                  </a:lnTo>
-                  <a:lnTo>
-                    <a:pt x="2658845" y="2390601"/>
-                  </a:lnTo>
-                  <a:lnTo>
-                    <a:pt x="2730467" y="2424202"/>
-                  </a:lnTo>
-                  <a:lnTo>
-                    <a:pt x="2802090" y="2456771"/>
-                  </a:lnTo>
-                  <a:lnTo>
-                    <a:pt x="2873712" y="2488338"/>
-                  </a:lnTo>
-                  <a:lnTo>
-                    <a:pt x="2945335" y="2518935"/>
-                  </a:lnTo>
-                  <a:lnTo>
-                    <a:pt x="3016957" y="2548591"/>
-                  </a:lnTo>
-                  <a:lnTo>
-                    <a:pt x="3088580" y="2577336"/>
-                  </a:lnTo>
-                  <a:lnTo>
-                    <a:pt x="3160202" y="2605198"/>
-                  </a:lnTo>
-                  <a:lnTo>
-                    <a:pt x="3231825" y="2632203"/>
-                  </a:lnTo>
-                  <a:lnTo>
-                    <a:pt x="3303448" y="2658377"/>
-                  </a:lnTo>
-                  <a:lnTo>
-                    <a:pt x="3375070" y="2683748"/>
-                  </a:lnTo>
-                  <a:lnTo>
-                    <a:pt x="3446693" y="2708338"/>
-                  </a:lnTo>
-                  <a:lnTo>
-                    <a:pt x="3518315" y="2732173"/>
-                  </a:lnTo>
-                  <a:lnTo>
-                    <a:pt x="3589938" y="2755275"/>
-                  </a:lnTo>
-                  <a:lnTo>
-                    <a:pt x="3661560" y="2777666"/>
-                  </a:lnTo>
-                  <a:lnTo>
-                    <a:pt x="3733183" y="2799370"/>
-                  </a:lnTo>
-                  <a:lnTo>
-                    <a:pt x="3804805" y="2820406"/>
-                  </a:lnTo>
-                  <a:lnTo>
-                    <a:pt x="3876428" y="2840796"/>
-                  </a:lnTo>
-                  <a:lnTo>
-                    <a:pt x="3948050" y="2860559"/>
-                  </a:lnTo>
-                  <a:lnTo>
-                    <a:pt x="4019673" y="2879715"/>
-                  </a:lnTo>
-                  <a:lnTo>
-                    <a:pt x="4091295" y="2898282"/>
-                  </a:lnTo>
-                  <a:lnTo>
-                    <a:pt x="4162918" y="2916278"/>
-                  </a:lnTo>
-                  <a:lnTo>
-                    <a:pt x="4234540" y="2933721"/>
-                  </a:lnTo>
-                  <a:lnTo>
-                    <a:pt x="4306163" y="2950627"/>
-                  </a:lnTo>
-                  <a:lnTo>
-                    <a:pt x="4377785" y="2967014"/>
-                  </a:lnTo>
-                  <a:lnTo>
-                    <a:pt x="4449408" y="2982898"/>
-                  </a:lnTo>
-                  <a:lnTo>
-                    <a:pt x="4521030" y="2998293"/>
-                  </a:lnTo>
-                  <a:lnTo>
-                    <a:pt x="4592653" y="3013215"/>
-                  </a:lnTo>
-                  <a:lnTo>
-                    <a:pt x="4664275" y="3027678"/>
-                  </a:lnTo>
-                  <a:lnTo>
-                    <a:pt x="4735898" y="3041697"/>
-                  </a:lnTo>
-                  <a:lnTo>
-                    <a:pt x="4807521" y="3055284"/>
-                  </a:lnTo>
-                  <a:lnTo>
-                    <a:pt x="4879143" y="3068455"/>
-                  </a:lnTo>
-                  <a:lnTo>
-                    <a:pt x="4950766" y="3081220"/>
-                  </a:lnTo>
-                  <a:lnTo>
-                    <a:pt x="5022388" y="3093593"/>
-                  </a:lnTo>
-                  <a:lnTo>
-                    <a:pt x="5094011" y="3105585"/>
-                  </a:lnTo>
-                  <a:lnTo>
-                    <a:pt x="5165633" y="3117209"/>
-                  </a:lnTo>
-                  <a:lnTo>
-                    <a:pt x="5237256" y="3128476"/>
-                  </a:lnTo>
-                  <a:lnTo>
-                    <a:pt x="5308878" y="3139396"/>
-                  </a:lnTo>
-                  <a:lnTo>
-                    <a:pt x="5380501" y="3149981"/>
-                  </a:lnTo>
-                  <a:lnTo>
-                    <a:pt x="5452123" y="3160240"/>
-                  </a:lnTo>
-                  <a:lnTo>
-                    <a:pt x="5523746" y="3170184"/>
-                  </a:lnTo>
-                  <a:lnTo>
-                    <a:pt x="5595368" y="3179823"/>
-                  </a:lnTo>
-                  <a:lnTo>
-                    <a:pt x="5666991" y="3189165"/>
-                  </a:lnTo>
-                  <a:lnTo>
-                    <a:pt x="5738613" y="3198219"/>
-                  </a:lnTo>
-                  <a:lnTo>
-                    <a:pt x="5810236" y="3206996"/>
-                  </a:lnTo>
-                  <a:lnTo>
-                    <a:pt x="5881858" y="3215503"/>
-                  </a:lnTo>
-                  <a:lnTo>
-                    <a:pt x="5953481" y="3223748"/>
-                  </a:lnTo>
-                  <a:lnTo>
-                    <a:pt x="6025103" y="3231740"/>
-                  </a:lnTo>
-                  <a:lnTo>
-                    <a:pt x="6096726" y="3239486"/>
-                  </a:lnTo>
-                  <a:lnTo>
-                    <a:pt x="6168349" y="3246994"/>
-                  </a:lnTo>
-                  <a:lnTo>
-                    <a:pt x="6239971" y="3254272"/>
-                  </a:lnTo>
-                  <a:lnTo>
-                    <a:pt x="6311594" y="3261325"/>
-                  </a:lnTo>
-                  <a:lnTo>
-                    <a:pt x="6383216" y="3268162"/>
-                  </a:lnTo>
-                  <a:lnTo>
-                    <a:pt x="6454839" y="3274789"/>
-                  </a:lnTo>
-                  <a:lnTo>
-                    <a:pt x="6526461" y="3281212"/>
-                  </a:lnTo>
-                  <a:lnTo>
-                    <a:pt x="6598084" y="3287437"/>
-                  </a:lnTo>
-                  <a:lnTo>
-                    <a:pt x="6669706" y="3293471"/>
-                  </a:lnTo>
-                  <a:lnTo>
-                    <a:pt x="6741329" y="3299320"/>
-                  </a:lnTo>
-                  <a:lnTo>
-                    <a:pt x="6812951" y="3304989"/>
-                  </a:lnTo>
-                  <a:lnTo>
-                    <a:pt x="6884574" y="3310484"/>
-                  </a:lnTo>
-                  <a:lnTo>
-                    <a:pt x="6956196" y="3315809"/>
-                  </a:lnTo>
-                  <a:lnTo>
-                    <a:pt x="7027819" y="3320971"/>
+                    <a:pt x="8654" y="4886"/>
+                  </a:lnTo>
+                  <a:lnTo>
+                    <a:pt x="78999" y="43379"/>
+                  </a:lnTo>
+                  <a:lnTo>
+                    <a:pt x="149343" y="80690"/>
+                  </a:lnTo>
+                  <a:lnTo>
+                    <a:pt x="219688" y="116854"/>
+                  </a:lnTo>
+                  <a:lnTo>
+                    <a:pt x="290032" y="151906"/>
+                  </a:lnTo>
+                  <a:lnTo>
+                    <a:pt x="360377" y="185881"/>
+                  </a:lnTo>
+                  <a:lnTo>
+                    <a:pt x="430721" y="218811"/>
+                  </a:lnTo>
+                  <a:lnTo>
+                    <a:pt x="501065" y="250729"/>
+                  </a:lnTo>
+                  <a:lnTo>
+                    <a:pt x="571410" y="281666"/>
+                  </a:lnTo>
+                  <a:lnTo>
+                    <a:pt x="641754" y="311652"/>
+                  </a:lnTo>
+                  <a:lnTo>
+                    <a:pt x="712099" y="340717"/>
+                  </a:lnTo>
+                  <a:lnTo>
+                    <a:pt x="782443" y="368888"/>
+                  </a:lnTo>
+                  <a:lnTo>
+                    <a:pt x="852788" y="396193"/>
+                  </a:lnTo>
+                  <a:lnTo>
+                    <a:pt x="923132" y="422658"/>
+                  </a:lnTo>
+                  <a:lnTo>
+                    <a:pt x="993477" y="448311"/>
+                  </a:lnTo>
+                  <a:lnTo>
+                    <a:pt x="1063821" y="473175"/>
+                  </a:lnTo>
+                  <a:lnTo>
+                    <a:pt x="1134166" y="497274"/>
+                  </a:lnTo>
+                  <a:lnTo>
+                    <a:pt x="1204510" y="520633"/>
+                  </a:lnTo>
+                  <a:lnTo>
+                    <a:pt x="1274855" y="543273"/>
+                  </a:lnTo>
+                  <a:lnTo>
+                    <a:pt x="1345199" y="565218"/>
+                  </a:lnTo>
+                  <a:lnTo>
+                    <a:pt x="1415544" y="586489"/>
+                  </a:lnTo>
+                  <a:lnTo>
+                    <a:pt x="1485888" y="607105"/>
+                  </a:lnTo>
+                  <a:lnTo>
+                    <a:pt x="1556233" y="627088"/>
+                  </a:lnTo>
+                  <a:lnTo>
+                    <a:pt x="1626577" y="646456"/>
+                  </a:lnTo>
+                  <a:lnTo>
+                    <a:pt x="1696922" y="665229"/>
+                  </a:lnTo>
+                  <a:lnTo>
+                    <a:pt x="1767266" y="683425"/>
+                  </a:lnTo>
+                  <a:lnTo>
+                    <a:pt x="1837611" y="701062"/>
+                  </a:lnTo>
+                  <a:lnTo>
+                    <a:pt x="1907955" y="718157"/>
+                  </a:lnTo>
+                  <a:lnTo>
+                    <a:pt x="1978300" y="734726"/>
+                  </a:lnTo>
+                  <a:lnTo>
+                    <a:pt x="2048644" y="750786"/>
+                  </a:lnTo>
+                  <a:lnTo>
+                    <a:pt x="2118989" y="766352"/>
+                  </a:lnTo>
+                  <a:lnTo>
+                    <a:pt x="2189333" y="781440"/>
+                  </a:lnTo>
+                  <a:lnTo>
+                    <a:pt x="2259678" y="796064"/>
+                  </a:lnTo>
+                  <a:lnTo>
+                    <a:pt x="2330022" y="810239"/>
+                  </a:lnTo>
+                  <a:lnTo>
+                    <a:pt x="2400367" y="823977"/>
+                  </a:lnTo>
+                  <a:lnTo>
+                    <a:pt x="2470711" y="837294"/>
+                  </a:lnTo>
+                  <a:lnTo>
+                    <a:pt x="2541056" y="850201"/>
+                  </a:lnTo>
+                  <a:lnTo>
+                    <a:pt x="2611400" y="862711"/>
+                  </a:lnTo>
+                  <a:lnTo>
+                    <a:pt x="2681745" y="874837"/>
+                  </a:lnTo>
+                  <a:lnTo>
+                    <a:pt x="2752089" y="886590"/>
+                  </a:lnTo>
+                  <a:lnTo>
+                    <a:pt x="2822434" y="897982"/>
+                  </a:lnTo>
+                  <a:lnTo>
+                    <a:pt x="2892778" y="909024"/>
+                  </a:lnTo>
+                  <a:lnTo>
+                    <a:pt x="2963123" y="919726"/>
+                  </a:lnTo>
+                  <a:lnTo>
+                    <a:pt x="3033467" y="930100"/>
+                  </a:lnTo>
+                  <a:lnTo>
+                    <a:pt x="3103812" y="940154"/>
+                  </a:lnTo>
+                  <a:lnTo>
+                    <a:pt x="3174156" y="949900"/>
+                  </a:lnTo>
+                  <a:lnTo>
+                    <a:pt x="3244501" y="959346"/>
+                  </a:lnTo>
+                  <a:lnTo>
+                    <a:pt x="3314845" y="968501"/>
+                  </a:lnTo>
+                  <a:lnTo>
+                    <a:pt x="3385190" y="977375"/>
+                  </a:lnTo>
+                  <a:lnTo>
+                    <a:pt x="3455534" y="985977"/>
+                  </a:lnTo>
+                  <a:lnTo>
+                    <a:pt x="3525879" y="994313"/>
+                  </a:lnTo>
+                  <a:lnTo>
+                    <a:pt x="3596223" y="1002394"/>
+                  </a:lnTo>
+                  <a:lnTo>
+                    <a:pt x="3666568" y="1010226"/>
+                  </a:lnTo>
+                  <a:lnTo>
+                    <a:pt x="3736912" y="1017818"/>
+                  </a:lnTo>
+                  <a:lnTo>
+                    <a:pt x="3807257" y="1025176"/>
+                  </a:lnTo>
+                  <a:lnTo>
+                    <a:pt x="3877601" y="1032308"/>
+                  </a:lnTo>
+                  <a:lnTo>
+                    <a:pt x="3947946" y="1039221"/>
+                  </a:lnTo>
+                  <a:lnTo>
+                    <a:pt x="4018290" y="1045921"/>
+                  </a:lnTo>
+                  <a:lnTo>
+                    <a:pt x="4088635" y="1052416"/>
+                  </a:lnTo>
+                  <a:lnTo>
+                    <a:pt x="4158979" y="1058710"/>
+                  </a:lnTo>
+                  <a:lnTo>
+                    <a:pt x="4229323" y="1064812"/>
+                  </a:lnTo>
+                  <a:lnTo>
+                    <a:pt x="4299668" y="1070725"/>
+                  </a:lnTo>
+                  <a:lnTo>
+                    <a:pt x="4370012" y="1076457"/>
+                  </a:lnTo>
+                  <a:lnTo>
+                    <a:pt x="4440357" y="1082013"/>
+                  </a:lnTo>
+                  <a:lnTo>
+                    <a:pt x="4510701" y="1087398"/>
+                  </a:lnTo>
+                  <a:lnTo>
+                    <a:pt x="4581046" y="1092617"/>
+                  </a:lnTo>
+                  <a:lnTo>
+                    <a:pt x="4651390" y="1097676"/>
+                  </a:lnTo>
+                  <a:lnTo>
+                    <a:pt x="4721735" y="1102580"/>
+                  </a:lnTo>
+                  <a:lnTo>
+                    <a:pt x="4792079" y="1107333"/>
+                  </a:lnTo>
+                  <a:lnTo>
+                    <a:pt x="4862424" y="1111939"/>
+                  </a:lnTo>
+                  <a:lnTo>
+                    <a:pt x="4932768" y="1116405"/>
+                  </a:lnTo>
+                  <a:lnTo>
+                    <a:pt x="5003113" y="1120732"/>
+                  </a:lnTo>
+                  <a:lnTo>
+                    <a:pt x="5073457" y="1124927"/>
+                  </a:lnTo>
+                  <a:lnTo>
+                    <a:pt x="5143802" y="1128993"/>
+                  </a:lnTo>
+                  <a:lnTo>
+                    <a:pt x="5214146" y="1132934"/>
+                  </a:lnTo>
+                  <a:lnTo>
+                    <a:pt x="5284491" y="1136754"/>
+                  </a:lnTo>
+                  <a:lnTo>
+                    <a:pt x="5354835" y="1140456"/>
+                  </a:lnTo>
+                  <a:lnTo>
+                    <a:pt x="5425180" y="1144045"/>
+                  </a:lnTo>
+                  <a:lnTo>
+                    <a:pt x="5495524" y="1147523"/>
+                  </a:lnTo>
+                  <a:lnTo>
+                    <a:pt x="5565869" y="1150894"/>
+                  </a:lnTo>
+                  <a:lnTo>
+                    <a:pt x="5636213" y="1154162"/>
+                  </a:lnTo>
+                  <a:lnTo>
+                    <a:pt x="5706558" y="1157329"/>
+                  </a:lnTo>
+                  <a:lnTo>
+                    <a:pt x="5776902" y="1160399"/>
+                  </a:lnTo>
+                  <a:lnTo>
+                    <a:pt x="5847247" y="1163375"/>
+                  </a:lnTo>
+                  <a:lnTo>
+                    <a:pt x="5917591" y="1166259"/>
+                  </a:lnTo>
+                  <a:lnTo>
+                    <a:pt x="5987936" y="1169054"/>
+                  </a:lnTo>
+                  <a:lnTo>
+                    <a:pt x="6058280" y="1171764"/>
+                  </a:lnTo>
+                  <a:lnTo>
+                    <a:pt x="6128625" y="1174390"/>
+                  </a:lnTo>
+                  <a:lnTo>
+                    <a:pt x="6198969" y="1176935"/>
+                  </a:lnTo>
+                  <a:lnTo>
+                    <a:pt x="6269314" y="1179402"/>
+                  </a:lnTo>
+                  <a:lnTo>
+                    <a:pt x="6339658" y="1181794"/>
+                  </a:lnTo>
+                  <a:lnTo>
+                    <a:pt x="6410003" y="1184112"/>
+                  </a:lnTo>
+                  <a:lnTo>
+                    <a:pt x="6480347" y="1186358"/>
+                  </a:lnTo>
+                  <a:lnTo>
+                    <a:pt x="6550692" y="1188536"/>
+                  </a:lnTo>
+                  <a:lnTo>
+                    <a:pt x="6621036" y="1190647"/>
+                  </a:lnTo>
+                  <a:lnTo>
+                    <a:pt x="6691381" y="1192692"/>
+                  </a:lnTo>
+                  <a:lnTo>
+                    <a:pt x="6761725" y="1194675"/>
+                  </a:lnTo>
+                  <a:lnTo>
+                    <a:pt x="6832070" y="1196597"/>
+                  </a:lnTo>
+                  <a:lnTo>
+                    <a:pt x="6902414" y="1198460"/>
                   </a:lnTo>
                 </a:path>
               </a:pathLst>
@@ -4454,27 +4489,27 @@
         </p:sp>
         <p:sp>
           <p:nvSpPr>
-            <p:cNvPr id="24" name="pl24"/>
+            <p:cNvPr id="25" name="pl25"/>
             <p:cNvSpPr/>
             <p:nvPr/>
           </p:nvSpPr>
           <p:spPr>
             <a:xfrm>
-              <a:off x="817517" y="4727786"/>
-              <a:ext cx="7799693" cy="0"/>
+              <a:off x="887106" y="3100960"/>
+              <a:ext cx="7660515" cy="0"/>
             </a:xfrm>
             <a:custGeom>
               <a:avLst/>
               <a:pathLst>
-                <a:path w="7799693" h="0">
+                <a:path w="7660515" h="0">
                   <a:moveTo>
                     <a:pt x="0" y="0"/>
                   </a:moveTo>
                   <a:lnTo>
-                    <a:pt x="7799693" y="0"/>
-                  </a:lnTo>
-                  <a:lnTo>
-                    <a:pt x="7799693" y="0"/>
+                    <a:pt x="7660515" y="0"/>
+                  </a:lnTo>
+                  <a:lnTo>
+                    <a:pt x="7660515" y="0"/>
                   </a:lnTo>
                 </a:path>
               </a:pathLst>
@@ -4497,21 +4532,21 @@
         </p:sp>
         <p:sp>
           <p:nvSpPr>
-            <p:cNvPr id="25" name="pl25"/>
+            <p:cNvPr id="26" name="pl26"/>
             <p:cNvSpPr/>
             <p:nvPr/>
           </p:nvSpPr>
           <p:spPr>
             <a:xfrm>
-              <a:off x="4526955" y="2073503"/>
-              <a:ext cx="0" cy="3649639"/>
+              <a:off x="4530353" y="2143092"/>
+              <a:ext cx="0" cy="1317069"/>
             </a:xfrm>
             <a:custGeom>
               <a:avLst/>
               <a:pathLst>
-                <a:path w="0" h="3649639">
+                <a:path w="0" h="1317069">
                   <a:moveTo>
-                    <a:pt x="0" y="3649639"/>
+                    <a:pt x="0" y="1317069"/>
                   </a:moveTo>
                   <a:lnTo>
                     <a:pt x="0" y="0"/>
@@ -4540,13 +4575,13 @@
         </p:sp>
         <p:sp>
           <p:nvSpPr>
-            <p:cNvPr id="26" name="tx26"/>
+            <p:cNvPr id="27" name="tx27"/>
             <p:cNvSpPr/>
             <p:nvPr/>
           </p:nvSpPr>
           <p:spPr>
             <a:xfrm>
-              <a:off x="692708" y="5517199"/>
+              <a:off x="762297" y="3360243"/>
               <a:ext cx="62179" cy="80101"/>
             </a:xfrm>
             <a:prstGeom prst="rect">
@@ -4586,13 +4621,13 @@
         </p:sp>
         <p:sp>
           <p:nvSpPr>
-            <p:cNvPr id="27" name="tx27"/>
+            <p:cNvPr id="28" name="tx28"/>
             <p:cNvSpPr/>
             <p:nvPr/>
           </p:nvSpPr>
           <p:spPr>
             <a:xfrm>
-              <a:off x="692708" y="4687735"/>
+              <a:off x="762297" y="3060909"/>
               <a:ext cx="62179" cy="80101"/>
             </a:xfrm>
             <a:prstGeom prst="rect">
@@ -4632,13 +4667,13 @@
         </p:sp>
         <p:sp>
           <p:nvSpPr>
-            <p:cNvPr id="28" name="tx28"/>
+            <p:cNvPr id="29" name="tx29"/>
             <p:cNvSpPr/>
             <p:nvPr/>
           </p:nvSpPr>
           <p:spPr>
             <a:xfrm>
-              <a:off x="692708" y="3858272"/>
+              <a:off x="762297" y="2761575"/>
               <a:ext cx="62179" cy="80101"/>
             </a:xfrm>
             <a:prstGeom prst="rect">
@@ -4678,13 +4713,13 @@
         </p:sp>
         <p:sp>
           <p:nvSpPr>
-            <p:cNvPr id="29" name="tx29"/>
+            <p:cNvPr id="30" name="tx30"/>
             <p:cNvSpPr/>
             <p:nvPr/>
           </p:nvSpPr>
           <p:spPr>
             <a:xfrm>
-              <a:off x="692708" y="3028808"/>
+              <a:off x="762297" y="2462242"/>
               <a:ext cx="62179" cy="80101"/>
             </a:xfrm>
             <a:prstGeom prst="rect">
@@ -4724,13 +4759,13 @@
         </p:sp>
         <p:sp>
           <p:nvSpPr>
-            <p:cNvPr id="30" name="tx30"/>
+            <p:cNvPr id="31" name="tx31"/>
             <p:cNvSpPr/>
             <p:nvPr/>
           </p:nvSpPr>
           <p:spPr>
             <a:xfrm>
-              <a:off x="692708" y="2199345"/>
+              <a:off x="762297" y="2162908"/>
               <a:ext cx="62179" cy="80101"/>
             </a:xfrm>
             <a:prstGeom prst="rect">
@@ -4770,13 +4805,13 @@
         </p:sp>
         <p:sp>
           <p:nvSpPr>
-            <p:cNvPr id="31" name="tx31"/>
+            <p:cNvPr id="32" name="tx32"/>
             <p:cNvSpPr/>
             <p:nvPr/>
           </p:nvSpPr>
           <p:spPr>
             <a:xfrm>
-              <a:off x="2421884" y="5785772"/>
+              <a:off x="2461403" y="3522791"/>
               <a:ext cx="161574" cy="80101"/>
             </a:xfrm>
             <a:prstGeom prst="rect">
@@ -4816,13 +4851,13 @@
         </p:sp>
         <p:sp>
           <p:nvSpPr>
-            <p:cNvPr id="32" name="tx32"/>
+            <p:cNvPr id="33" name="tx33"/>
             <p:cNvSpPr/>
             <p:nvPr/>
           </p:nvSpPr>
           <p:spPr>
             <a:xfrm>
-              <a:off x="4542539" y="5785772"/>
+              <a:off x="4545104" y="3522791"/>
               <a:ext cx="62179" cy="80101"/>
             </a:xfrm>
             <a:prstGeom prst="rect">
@@ -4862,13 +4897,13 @@
         </p:sp>
         <p:sp>
           <p:nvSpPr>
-            <p:cNvPr id="33" name="tx33"/>
+            <p:cNvPr id="34" name="tx34"/>
             <p:cNvSpPr/>
             <p:nvPr/>
           </p:nvSpPr>
           <p:spPr>
             <a:xfrm>
-              <a:off x="6582407" y="5785772"/>
+              <a:off x="6548017" y="3522791"/>
               <a:ext cx="124358" cy="80101"/>
             </a:xfrm>
             <a:prstGeom prst="rect">
@@ -4908,13 +4943,13 @@
         </p:sp>
         <p:sp>
           <p:nvSpPr>
-            <p:cNvPr id="34" name="tx34"/>
+            <p:cNvPr id="35" name="tx35"/>
             <p:cNvSpPr/>
             <p:nvPr/>
           </p:nvSpPr>
           <p:spPr>
             <a:xfrm>
-              <a:off x="2928340" y="5925448"/>
+              <a:off x="2928340" y="3662467"/>
               <a:ext cx="3578047" cy="100218"/>
             </a:xfrm>
             <a:prstGeom prst="rect">
@@ -4954,13 +4989,13 @@
         </p:sp>
         <p:sp>
           <p:nvSpPr>
-            <p:cNvPr id="35" name="tx35"/>
+            <p:cNvPr id="36" name="tx36"/>
             <p:cNvSpPr/>
             <p:nvPr/>
           </p:nvSpPr>
           <p:spPr>
             <a:xfrm rot="-5400000">
-              <a:off x="68446" y="3848213"/>
+              <a:off x="138035" y="2751517"/>
               <a:ext cx="1016904" cy="100218"/>
             </a:xfrm>
             <a:prstGeom prst="rect">
@@ -5000,13 +5035,13 @@
         </p:sp>
         <p:sp>
           <p:nvSpPr>
-            <p:cNvPr id="36" name="tx36"/>
+            <p:cNvPr id="37" name="tx37"/>
             <p:cNvSpPr/>
             <p:nvPr/>
           </p:nvSpPr>
           <p:spPr>
             <a:xfrm>
-              <a:off x="817517" y="1896563"/>
+              <a:off x="887106" y="1966152"/>
               <a:ext cx="6321612" cy="82021"/>
             </a:xfrm>
             <a:prstGeom prst="rect">
@@ -5046,13 +5081,3632 @@
         </p:sp>
         <p:sp>
           <p:nvSpPr>
-            <p:cNvPr id="37" name="tx37"/>
+            <p:cNvPr id="38" name="tx38"/>
             <p:cNvSpPr/>
             <p:nvPr/>
           </p:nvSpPr>
           <p:spPr>
             <a:xfrm>
-              <a:off x="817517" y="1669789"/>
+              <a:off x="887106" y="1739378"/>
+              <a:ext cx="3780403" cy="120152"/>
+            </a:xfrm>
+            <a:prstGeom prst="rect">
+              <a:avLst/>
+            </a:prstGeom>
+            <a:noFill/>
+          </p:spPr>
+          <p:txBody>
+            <a:bodyPr lIns="0" rIns="0" tIns="0" bIns="0" anchorCtr="1" anchor="ctr" wrap="none"/>
+            <a:lstStyle/>
+            <a:p>
+              <a:pPr algn="l" marL="0" marR="0" indent="0">
+                <a:lnSpc>
+                  <a:spcPts val="1320"/>
+                </a:lnSpc>
+                <a:spcBef>
+                  <a:spcPts val="0"/>
+                </a:spcBef>
+                <a:spcAft>
+                  <a:spcPts val="0"/>
+                </a:spcAft>
+              </a:pPr>
+              <a:r>
+                <a:rPr sz="1320">
+                  <a:solidFill>
+                    <a:srgbClr val="000000">
+                      <a:alpha val="100000"/>
+                    </a:srgbClr>
+                  </a:solidFill>
+                  <a:latin typeface="Helvetica"/>
+                  <a:cs typeface="Helvetica"/>
+                </a:rPr>
+                <a:t>Failure to Thrive/Fatigue/Dehydration (Carboplatin)</a:t>
+              </a:r>
+            </a:p>
+          </p:txBody>
+        </p:sp>
+        <p:sp>
+          <p:nvSpPr>
+            <p:cNvPr id="39" name="pl39"/>
+            <p:cNvSpPr/>
+            <p:nvPr/>
+          </p:nvSpPr>
+          <p:spPr>
+            <a:xfrm>
+              <a:off x="887106" y="5444019"/>
+              <a:ext cx="7660515" cy="0"/>
+            </a:xfrm>
+            <a:custGeom>
+              <a:avLst/>
+              <a:pathLst>
+                <a:path w="7660515" h="0">
+                  <a:moveTo>
+                    <a:pt x="0" y="0"/>
+                  </a:moveTo>
+                  <a:lnTo>
+                    <a:pt x="7660515" y="0"/>
+                  </a:lnTo>
+                  <a:lnTo>
+                    <a:pt x="7660515" y="0"/>
+                  </a:lnTo>
+                </a:path>
+              </a:pathLst>
+            </a:custGeom>
+            <a:ln w="6775" cap="flat">
+              <a:solidFill>
+                <a:srgbClr val="EBEBEB">
+                  <a:alpha val="100000"/>
+                </a:srgbClr>
+              </a:solidFill>
+              <a:prstDash val="solid"/>
+              <a:round/>
+            </a:ln>
+          </p:spPr>
+          <p:txBody>
+            <a:bodyPr/>
+            <a:lstStyle/>
+            <a:p/>
+          </p:txBody>
+        </p:sp>
+        <p:sp>
+          <p:nvSpPr>
+            <p:cNvPr id="40" name="pl40"/>
+            <p:cNvSpPr/>
+            <p:nvPr/>
+          </p:nvSpPr>
+          <p:spPr>
+            <a:xfrm>
+              <a:off x="887106" y="5144686"/>
+              <a:ext cx="7660515" cy="0"/>
+            </a:xfrm>
+            <a:custGeom>
+              <a:avLst/>
+              <a:pathLst>
+                <a:path w="7660515" h="0">
+                  <a:moveTo>
+                    <a:pt x="0" y="0"/>
+                  </a:moveTo>
+                  <a:lnTo>
+                    <a:pt x="7660515" y="0"/>
+                  </a:lnTo>
+                  <a:lnTo>
+                    <a:pt x="7660515" y="0"/>
+                  </a:lnTo>
+                </a:path>
+              </a:pathLst>
+            </a:custGeom>
+            <a:ln w="6775" cap="flat">
+              <a:solidFill>
+                <a:srgbClr val="EBEBEB">
+                  <a:alpha val="100000"/>
+                </a:srgbClr>
+              </a:solidFill>
+              <a:prstDash val="solid"/>
+              <a:round/>
+            </a:ln>
+          </p:spPr>
+          <p:txBody>
+            <a:bodyPr/>
+            <a:lstStyle/>
+            <a:p/>
+          </p:txBody>
+        </p:sp>
+        <p:sp>
+          <p:nvSpPr>
+            <p:cNvPr id="41" name="pl41"/>
+            <p:cNvSpPr/>
+            <p:nvPr/>
+          </p:nvSpPr>
+          <p:spPr>
+            <a:xfrm>
+              <a:off x="887106" y="4845352"/>
+              <a:ext cx="7660515" cy="0"/>
+            </a:xfrm>
+            <a:custGeom>
+              <a:avLst/>
+              <a:pathLst>
+                <a:path w="7660515" h="0">
+                  <a:moveTo>
+                    <a:pt x="0" y="0"/>
+                  </a:moveTo>
+                  <a:lnTo>
+                    <a:pt x="7660515" y="0"/>
+                  </a:lnTo>
+                  <a:lnTo>
+                    <a:pt x="7660515" y="0"/>
+                  </a:lnTo>
+                </a:path>
+              </a:pathLst>
+            </a:custGeom>
+            <a:ln w="6775" cap="flat">
+              <a:solidFill>
+                <a:srgbClr val="EBEBEB">
+                  <a:alpha val="100000"/>
+                </a:srgbClr>
+              </a:solidFill>
+              <a:prstDash val="solid"/>
+              <a:round/>
+            </a:ln>
+          </p:spPr>
+          <p:txBody>
+            <a:bodyPr/>
+            <a:lstStyle/>
+            <a:p/>
+          </p:txBody>
+        </p:sp>
+        <p:sp>
+          <p:nvSpPr>
+            <p:cNvPr id="42" name="pl42"/>
+            <p:cNvSpPr/>
+            <p:nvPr/>
+          </p:nvSpPr>
+          <p:spPr>
+            <a:xfrm>
+              <a:off x="887106" y="4546018"/>
+              <a:ext cx="7660515" cy="0"/>
+            </a:xfrm>
+            <a:custGeom>
+              <a:avLst/>
+              <a:pathLst>
+                <a:path w="7660515" h="0">
+                  <a:moveTo>
+                    <a:pt x="0" y="0"/>
+                  </a:moveTo>
+                  <a:lnTo>
+                    <a:pt x="7660515" y="0"/>
+                  </a:lnTo>
+                  <a:lnTo>
+                    <a:pt x="7660515" y="0"/>
+                  </a:lnTo>
+                </a:path>
+              </a:pathLst>
+            </a:custGeom>
+            <a:ln w="6775" cap="flat">
+              <a:solidFill>
+                <a:srgbClr val="EBEBEB">
+                  <a:alpha val="100000"/>
+                </a:srgbClr>
+              </a:solidFill>
+              <a:prstDash val="solid"/>
+              <a:round/>
+            </a:ln>
+          </p:spPr>
+          <p:txBody>
+            <a:bodyPr/>
+            <a:lstStyle/>
+            <a:p/>
+          </p:txBody>
+        </p:sp>
+        <p:sp>
+          <p:nvSpPr>
+            <p:cNvPr id="43" name="pl43"/>
+            <p:cNvSpPr/>
+            <p:nvPr/>
+          </p:nvSpPr>
+          <p:spPr>
+            <a:xfrm>
+              <a:off x="914987" y="4336484"/>
+              <a:ext cx="0" cy="1317069"/>
+            </a:xfrm>
+            <a:custGeom>
+              <a:avLst/>
+              <a:pathLst>
+                <a:path w="0" h="1317069">
+                  <a:moveTo>
+                    <a:pt x="0" y="1317069"/>
+                  </a:moveTo>
+                  <a:lnTo>
+                    <a:pt x="0" y="0"/>
+                  </a:lnTo>
+                  <a:lnTo>
+                    <a:pt x="0" y="0"/>
+                  </a:lnTo>
+                </a:path>
+              </a:pathLst>
+            </a:custGeom>
+            <a:ln w="6775" cap="flat">
+              <a:solidFill>
+                <a:srgbClr val="EBEBEB">
+                  <a:alpha val="100000"/>
+                </a:srgbClr>
+              </a:solidFill>
+              <a:prstDash val="solid"/>
+              <a:round/>
+            </a:ln>
+          </p:spPr>
+          <p:txBody>
+            <a:bodyPr/>
+            <a:lstStyle/>
+            <a:p/>
+          </p:txBody>
+        </p:sp>
+        <p:sp>
+          <p:nvSpPr>
+            <p:cNvPr id="44" name="pl44"/>
+            <p:cNvSpPr/>
+            <p:nvPr/>
+          </p:nvSpPr>
+          <p:spPr>
+            <a:xfrm>
+              <a:off x="1728588" y="4336484"/>
+              <a:ext cx="0" cy="1317069"/>
+            </a:xfrm>
+            <a:custGeom>
+              <a:avLst/>
+              <a:pathLst>
+                <a:path w="0" h="1317069">
+                  <a:moveTo>
+                    <a:pt x="0" y="1317069"/>
+                  </a:moveTo>
+                  <a:lnTo>
+                    <a:pt x="0" y="0"/>
+                  </a:lnTo>
+                  <a:lnTo>
+                    <a:pt x="0" y="0"/>
+                  </a:lnTo>
+                </a:path>
+              </a:pathLst>
+            </a:custGeom>
+            <a:ln w="6775" cap="flat">
+              <a:solidFill>
+                <a:srgbClr val="EBEBEB">
+                  <a:alpha val="100000"/>
+                </a:srgbClr>
+              </a:solidFill>
+              <a:prstDash val="solid"/>
+              <a:round/>
+            </a:ln>
+          </p:spPr>
+          <p:txBody>
+            <a:bodyPr/>
+            <a:lstStyle/>
+            <a:p/>
+          </p:txBody>
+        </p:sp>
+        <p:sp>
+          <p:nvSpPr>
+            <p:cNvPr id="45" name="pl45"/>
+            <p:cNvSpPr/>
+            <p:nvPr/>
+          </p:nvSpPr>
+          <p:spPr>
+            <a:xfrm>
+              <a:off x="2542190" y="4336484"/>
+              <a:ext cx="0" cy="1317069"/>
+            </a:xfrm>
+            <a:custGeom>
+              <a:avLst/>
+              <a:pathLst>
+                <a:path w="0" h="1317069">
+                  <a:moveTo>
+                    <a:pt x="0" y="1317069"/>
+                  </a:moveTo>
+                  <a:lnTo>
+                    <a:pt x="0" y="0"/>
+                  </a:lnTo>
+                  <a:lnTo>
+                    <a:pt x="0" y="0"/>
+                  </a:lnTo>
+                </a:path>
+              </a:pathLst>
+            </a:custGeom>
+            <a:ln w="6775" cap="flat">
+              <a:solidFill>
+                <a:srgbClr val="EBEBEB">
+                  <a:alpha val="100000"/>
+                </a:srgbClr>
+              </a:solidFill>
+              <a:prstDash val="solid"/>
+              <a:round/>
+            </a:ln>
+          </p:spPr>
+          <p:txBody>
+            <a:bodyPr/>
+            <a:lstStyle/>
+            <a:p/>
+          </p:txBody>
+        </p:sp>
+        <p:sp>
+          <p:nvSpPr>
+            <p:cNvPr id="46" name="pl46"/>
+            <p:cNvSpPr/>
+            <p:nvPr/>
+          </p:nvSpPr>
+          <p:spPr>
+            <a:xfrm>
+              <a:off x="3355791" y="4336484"/>
+              <a:ext cx="0" cy="1317069"/>
+            </a:xfrm>
+            <a:custGeom>
+              <a:avLst/>
+              <a:pathLst>
+                <a:path w="0" h="1317069">
+                  <a:moveTo>
+                    <a:pt x="0" y="1317069"/>
+                  </a:moveTo>
+                  <a:lnTo>
+                    <a:pt x="0" y="0"/>
+                  </a:lnTo>
+                  <a:lnTo>
+                    <a:pt x="0" y="0"/>
+                  </a:lnTo>
+                </a:path>
+              </a:pathLst>
+            </a:custGeom>
+            <a:ln w="6775" cap="flat">
+              <a:solidFill>
+                <a:srgbClr val="EBEBEB">
+                  <a:alpha val="100000"/>
+                </a:srgbClr>
+              </a:solidFill>
+              <a:prstDash val="solid"/>
+              <a:round/>
+            </a:ln>
+          </p:spPr>
+          <p:txBody>
+            <a:bodyPr/>
+            <a:lstStyle/>
+            <a:p/>
+          </p:txBody>
+        </p:sp>
+        <p:sp>
+          <p:nvSpPr>
+            <p:cNvPr id="47" name="pl47"/>
+            <p:cNvSpPr/>
+            <p:nvPr/>
+          </p:nvSpPr>
+          <p:spPr>
+            <a:xfrm>
+              <a:off x="4169393" y="4336484"/>
+              <a:ext cx="0" cy="1317069"/>
+            </a:xfrm>
+            <a:custGeom>
+              <a:avLst/>
+              <a:pathLst>
+                <a:path w="0" h="1317069">
+                  <a:moveTo>
+                    <a:pt x="0" y="1317069"/>
+                  </a:moveTo>
+                  <a:lnTo>
+                    <a:pt x="0" y="0"/>
+                  </a:lnTo>
+                  <a:lnTo>
+                    <a:pt x="0" y="0"/>
+                  </a:lnTo>
+                </a:path>
+              </a:pathLst>
+            </a:custGeom>
+            <a:ln w="6775" cap="flat">
+              <a:solidFill>
+                <a:srgbClr val="EBEBEB">
+                  <a:alpha val="100000"/>
+                </a:srgbClr>
+              </a:solidFill>
+              <a:prstDash val="solid"/>
+              <a:round/>
+            </a:ln>
+          </p:spPr>
+          <p:txBody>
+            <a:bodyPr/>
+            <a:lstStyle/>
+            <a:p/>
+          </p:txBody>
+        </p:sp>
+        <p:sp>
+          <p:nvSpPr>
+            <p:cNvPr id="48" name="pl48"/>
+            <p:cNvSpPr/>
+            <p:nvPr/>
+          </p:nvSpPr>
+          <p:spPr>
+            <a:xfrm>
+              <a:off x="4982994" y="4336484"/>
+              <a:ext cx="0" cy="1317069"/>
+            </a:xfrm>
+            <a:custGeom>
+              <a:avLst/>
+              <a:pathLst>
+                <a:path w="0" h="1317069">
+                  <a:moveTo>
+                    <a:pt x="0" y="1317069"/>
+                  </a:moveTo>
+                  <a:lnTo>
+                    <a:pt x="0" y="0"/>
+                  </a:lnTo>
+                  <a:lnTo>
+                    <a:pt x="0" y="0"/>
+                  </a:lnTo>
+                </a:path>
+              </a:pathLst>
+            </a:custGeom>
+            <a:ln w="6775" cap="flat">
+              <a:solidFill>
+                <a:srgbClr val="EBEBEB">
+                  <a:alpha val="100000"/>
+                </a:srgbClr>
+              </a:solidFill>
+              <a:prstDash val="solid"/>
+              <a:round/>
+            </a:ln>
+          </p:spPr>
+          <p:txBody>
+            <a:bodyPr/>
+            <a:lstStyle/>
+            <a:p/>
+          </p:txBody>
+        </p:sp>
+        <p:sp>
+          <p:nvSpPr>
+            <p:cNvPr id="49" name="pl49"/>
+            <p:cNvSpPr/>
+            <p:nvPr/>
+          </p:nvSpPr>
+          <p:spPr>
+            <a:xfrm>
+              <a:off x="5796595" y="4336484"/>
+              <a:ext cx="0" cy="1317069"/>
+            </a:xfrm>
+            <a:custGeom>
+              <a:avLst/>
+              <a:pathLst>
+                <a:path w="0" h="1317069">
+                  <a:moveTo>
+                    <a:pt x="0" y="1317069"/>
+                  </a:moveTo>
+                  <a:lnTo>
+                    <a:pt x="0" y="0"/>
+                  </a:lnTo>
+                  <a:lnTo>
+                    <a:pt x="0" y="0"/>
+                  </a:lnTo>
+                </a:path>
+              </a:pathLst>
+            </a:custGeom>
+            <a:ln w="6775" cap="flat">
+              <a:solidFill>
+                <a:srgbClr val="EBEBEB">
+                  <a:alpha val="100000"/>
+                </a:srgbClr>
+              </a:solidFill>
+              <a:prstDash val="solid"/>
+              <a:round/>
+            </a:ln>
+          </p:spPr>
+          <p:txBody>
+            <a:bodyPr/>
+            <a:lstStyle/>
+            <a:p/>
+          </p:txBody>
+        </p:sp>
+        <p:sp>
+          <p:nvSpPr>
+            <p:cNvPr id="50" name="pl50"/>
+            <p:cNvSpPr/>
+            <p:nvPr/>
+          </p:nvSpPr>
+          <p:spPr>
+            <a:xfrm>
+              <a:off x="6610197" y="4336484"/>
+              <a:ext cx="0" cy="1317069"/>
+            </a:xfrm>
+            <a:custGeom>
+              <a:avLst/>
+              <a:pathLst>
+                <a:path w="0" h="1317069">
+                  <a:moveTo>
+                    <a:pt x="0" y="1317069"/>
+                  </a:moveTo>
+                  <a:lnTo>
+                    <a:pt x="0" y="0"/>
+                  </a:lnTo>
+                  <a:lnTo>
+                    <a:pt x="0" y="0"/>
+                  </a:lnTo>
+                </a:path>
+              </a:pathLst>
+            </a:custGeom>
+            <a:ln w="6775" cap="flat">
+              <a:solidFill>
+                <a:srgbClr val="EBEBEB">
+                  <a:alpha val="100000"/>
+                </a:srgbClr>
+              </a:solidFill>
+              <a:prstDash val="solid"/>
+              <a:round/>
+            </a:ln>
+          </p:spPr>
+          <p:txBody>
+            <a:bodyPr/>
+            <a:lstStyle/>
+            <a:p/>
+          </p:txBody>
+        </p:sp>
+        <p:sp>
+          <p:nvSpPr>
+            <p:cNvPr id="51" name="pl51"/>
+            <p:cNvSpPr/>
+            <p:nvPr/>
+          </p:nvSpPr>
+          <p:spPr>
+            <a:xfrm>
+              <a:off x="7423798" y="4336484"/>
+              <a:ext cx="0" cy="1317069"/>
+            </a:xfrm>
+            <a:custGeom>
+              <a:avLst/>
+              <a:pathLst>
+                <a:path w="0" h="1317069">
+                  <a:moveTo>
+                    <a:pt x="0" y="1317069"/>
+                  </a:moveTo>
+                  <a:lnTo>
+                    <a:pt x="0" y="0"/>
+                  </a:lnTo>
+                  <a:lnTo>
+                    <a:pt x="0" y="0"/>
+                  </a:lnTo>
+                </a:path>
+              </a:pathLst>
+            </a:custGeom>
+            <a:ln w="6775" cap="flat">
+              <a:solidFill>
+                <a:srgbClr val="EBEBEB">
+                  <a:alpha val="100000"/>
+                </a:srgbClr>
+              </a:solidFill>
+              <a:prstDash val="solid"/>
+              <a:round/>
+            </a:ln>
+          </p:spPr>
+          <p:txBody>
+            <a:bodyPr/>
+            <a:lstStyle/>
+            <a:p/>
+          </p:txBody>
+        </p:sp>
+        <p:sp>
+          <p:nvSpPr>
+            <p:cNvPr id="52" name="pl52"/>
+            <p:cNvSpPr/>
+            <p:nvPr/>
+          </p:nvSpPr>
+          <p:spPr>
+            <a:xfrm>
+              <a:off x="8237399" y="4336484"/>
+              <a:ext cx="0" cy="1317069"/>
+            </a:xfrm>
+            <a:custGeom>
+              <a:avLst/>
+              <a:pathLst>
+                <a:path w="0" h="1317069">
+                  <a:moveTo>
+                    <a:pt x="0" y="1317069"/>
+                  </a:moveTo>
+                  <a:lnTo>
+                    <a:pt x="0" y="0"/>
+                  </a:lnTo>
+                  <a:lnTo>
+                    <a:pt x="0" y="0"/>
+                  </a:lnTo>
+                </a:path>
+              </a:pathLst>
+            </a:custGeom>
+            <a:ln w="6775" cap="flat">
+              <a:solidFill>
+                <a:srgbClr val="EBEBEB">
+                  <a:alpha val="100000"/>
+                </a:srgbClr>
+              </a:solidFill>
+              <a:prstDash val="solid"/>
+              <a:round/>
+            </a:ln>
+          </p:spPr>
+          <p:txBody>
+            <a:bodyPr/>
+            <a:lstStyle/>
+            <a:p/>
+          </p:txBody>
+        </p:sp>
+        <p:sp>
+          <p:nvSpPr>
+            <p:cNvPr id="53" name="pl53"/>
+            <p:cNvSpPr/>
+            <p:nvPr/>
+          </p:nvSpPr>
+          <p:spPr>
+            <a:xfrm>
+              <a:off x="887106" y="5593686"/>
+              <a:ext cx="7660515" cy="0"/>
+            </a:xfrm>
+            <a:custGeom>
+              <a:avLst/>
+              <a:pathLst>
+                <a:path w="7660515" h="0">
+                  <a:moveTo>
+                    <a:pt x="0" y="0"/>
+                  </a:moveTo>
+                  <a:lnTo>
+                    <a:pt x="7660515" y="0"/>
+                  </a:lnTo>
+                  <a:lnTo>
+                    <a:pt x="7660515" y="0"/>
+                  </a:lnTo>
+                </a:path>
+              </a:pathLst>
+            </a:custGeom>
+            <a:ln w="13550" cap="flat">
+              <a:solidFill>
+                <a:srgbClr val="EBEBEB">
+                  <a:alpha val="100000"/>
+                </a:srgbClr>
+              </a:solidFill>
+              <a:prstDash val="solid"/>
+              <a:round/>
+            </a:ln>
+          </p:spPr>
+          <p:txBody>
+            <a:bodyPr/>
+            <a:lstStyle/>
+            <a:p/>
+          </p:txBody>
+        </p:sp>
+        <p:sp>
+          <p:nvSpPr>
+            <p:cNvPr id="54" name="pl54"/>
+            <p:cNvSpPr/>
+            <p:nvPr/>
+          </p:nvSpPr>
+          <p:spPr>
+            <a:xfrm>
+              <a:off x="887106" y="5294352"/>
+              <a:ext cx="7660515" cy="0"/>
+            </a:xfrm>
+            <a:custGeom>
+              <a:avLst/>
+              <a:pathLst>
+                <a:path w="7660515" h="0">
+                  <a:moveTo>
+                    <a:pt x="0" y="0"/>
+                  </a:moveTo>
+                  <a:lnTo>
+                    <a:pt x="7660515" y="0"/>
+                  </a:lnTo>
+                  <a:lnTo>
+                    <a:pt x="7660515" y="0"/>
+                  </a:lnTo>
+                </a:path>
+              </a:pathLst>
+            </a:custGeom>
+            <a:ln w="13550" cap="flat">
+              <a:solidFill>
+                <a:srgbClr val="EBEBEB">
+                  <a:alpha val="100000"/>
+                </a:srgbClr>
+              </a:solidFill>
+              <a:prstDash val="solid"/>
+              <a:round/>
+            </a:ln>
+          </p:spPr>
+          <p:txBody>
+            <a:bodyPr/>
+            <a:lstStyle/>
+            <a:p/>
+          </p:txBody>
+        </p:sp>
+        <p:sp>
+          <p:nvSpPr>
+            <p:cNvPr id="55" name="pl55"/>
+            <p:cNvSpPr/>
+            <p:nvPr/>
+          </p:nvSpPr>
+          <p:spPr>
+            <a:xfrm>
+              <a:off x="887106" y="4995019"/>
+              <a:ext cx="7660515" cy="0"/>
+            </a:xfrm>
+            <a:custGeom>
+              <a:avLst/>
+              <a:pathLst>
+                <a:path w="7660515" h="0">
+                  <a:moveTo>
+                    <a:pt x="0" y="0"/>
+                  </a:moveTo>
+                  <a:lnTo>
+                    <a:pt x="7660515" y="0"/>
+                  </a:lnTo>
+                  <a:lnTo>
+                    <a:pt x="7660515" y="0"/>
+                  </a:lnTo>
+                </a:path>
+              </a:pathLst>
+            </a:custGeom>
+            <a:ln w="13550" cap="flat">
+              <a:solidFill>
+                <a:srgbClr val="EBEBEB">
+                  <a:alpha val="100000"/>
+                </a:srgbClr>
+              </a:solidFill>
+              <a:prstDash val="solid"/>
+              <a:round/>
+            </a:ln>
+          </p:spPr>
+          <p:txBody>
+            <a:bodyPr/>
+            <a:lstStyle/>
+            <a:p/>
+          </p:txBody>
+        </p:sp>
+        <p:sp>
+          <p:nvSpPr>
+            <p:cNvPr id="56" name="pl56"/>
+            <p:cNvSpPr/>
+            <p:nvPr/>
+          </p:nvSpPr>
+          <p:spPr>
+            <a:xfrm>
+              <a:off x="887106" y="4695685"/>
+              <a:ext cx="7660515" cy="0"/>
+            </a:xfrm>
+            <a:custGeom>
+              <a:avLst/>
+              <a:pathLst>
+                <a:path w="7660515" h="0">
+                  <a:moveTo>
+                    <a:pt x="0" y="0"/>
+                  </a:moveTo>
+                  <a:lnTo>
+                    <a:pt x="7660515" y="0"/>
+                  </a:lnTo>
+                  <a:lnTo>
+                    <a:pt x="7660515" y="0"/>
+                  </a:lnTo>
+                </a:path>
+              </a:pathLst>
+            </a:custGeom>
+            <a:ln w="13550" cap="flat">
+              <a:solidFill>
+                <a:srgbClr val="EBEBEB">
+                  <a:alpha val="100000"/>
+                </a:srgbClr>
+              </a:solidFill>
+              <a:prstDash val="solid"/>
+              <a:round/>
+            </a:ln>
+          </p:spPr>
+          <p:txBody>
+            <a:bodyPr/>
+            <a:lstStyle/>
+            <a:p/>
+          </p:txBody>
+        </p:sp>
+        <p:sp>
+          <p:nvSpPr>
+            <p:cNvPr id="57" name="pl57"/>
+            <p:cNvSpPr/>
+            <p:nvPr/>
+          </p:nvSpPr>
+          <p:spPr>
+            <a:xfrm>
+              <a:off x="887106" y="4396351"/>
+              <a:ext cx="7660515" cy="0"/>
+            </a:xfrm>
+            <a:custGeom>
+              <a:avLst/>
+              <a:pathLst>
+                <a:path w="7660515" h="0">
+                  <a:moveTo>
+                    <a:pt x="0" y="0"/>
+                  </a:moveTo>
+                  <a:lnTo>
+                    <a:pt x="7660515" y="0"/>
+                  </a:lnTo>
+                  <a:lnTo>
+                    <a:pt x="7660515" y="0"/>
+                  </a:lnTo>
+                </a:path>
+              </a:pathLst>
+            </a:custGeom>
+            <a:ln w="13550" cap="flat">
+              <a:solidFill>
+                <a:srgbClr val="EBEBEB">
+                  <a:alpha val="100000"/>
+                </a:srgbClr>
+              </a:solidFill>
+              <a:prstDash val="solid"/>
+              <a:round/>
+            </a:ln>
+          </p:spPr>
+          <p:txBody>
+            <a:bodyPr/>
+            <a:lstStyle/>
+            <a:p/>
+          </p:txBody>
+        </p:sp>
+        <p:sp>
+          <p:nvSpPr>
+            <p:cNvPr id="58" name="pl58"/>
+            <p:cNvSpPr/>
+            <p:nvPr/>
+          </p:nvSpPr>
+          <p:spPr>
+            <a:xfrm>
+              <a:off x="1321788" y="4336484"/>
+              <a:ext cx="0" cy="1317069"/>
+            </a:xfrm>
+            <a:custGeom>
+              <a:avLst/>
+              <a:pathLst>
+                <a:path w="0" h="1317069">
+                  <a:moveTo>
+                    <a:pt x="0" y="1317069"/>
+                  </a:moveTo>
+                  <a:lnTo>
+                    <a:pt x="0" y="0"/>
+                  </a:lnTo>
+                  <a:lnTo>
+                    <a:pt x="0" y="0"/>
+                  </a:lnTo>
+                </a:path>
+              </a:pathLst>
+            </a:custGeom>
+            <a:ln w="13550" cap="flat">
+              <a:solidFill>
+                <a:srgbClr val="EBEBEB">
+                  <a:alpha val="100000"/>
+                </a:srgbClr>
+              </a:solidFill>
+              <a:prstDash val="solid"/>
+              <a:round/>
+            </a:ln>
+          </p:spPr>
+          <p:txBody>
+            <a:bodyPr/>
+            <a:lstStyle/>
+            <a:p/>
+          </p:txBody>
+        </p:sp>
+        <p:sp>
+          <p:nvSpPr>
+            <p:cNvPr id="59" name="pl59"/>
+            <p:cNvSpPr/>
+            <p:nvPr/>
+          </p:nvSpPr>
+          <p:spPr>
+            <a:xfrm>
+              <a:off x="2135389" y="4336484"/>
+              <a:ext cx="0" cy="1317069"/>
+            </a:xfrm>
+            <a:custGeom>
+              <a:avLst/>
+              <a:pathLst>
+                <a:path w="0" h="1317069">
+                  <a:moveTo>
+                    <a:pt x="0" y="1317069"/>
+                  </a:moveTo>
+                  <a:lnTo>
+                    <a:pt x="0" y="0"/>
+                  </a:lnTo>
+                  <a:lnTo>
+                    <a:pt x="0" y="0"/>
+                  </a:lnTo>
+                </a:path>
+              </a:pathLst>
+            </a:custGeom>
+            <a:ln w="13550" cap="flat">
+              <a:solidFill>
+                <a:srgbClr val="EBEBEB">
+                  <a:alpha val="100000"/>
+                </a:srgbClr>
+              </a:solidFill>
+              <a:prstDash val="solid"/>
+              <a:round/>
+            </a:ln>
+          </p:spPr>
+          <p:txBody>
+            <a:bodyPr/>
+            <a:lstStyle/>
+            <a:p/>
+          </p:txBody>
+        </p:sp>
+        <p:sp>
+          <p:nvSpPr>
+            <p:cNvPr id="60" name="pl60"/>
+            <p:cNvSpPr/>
+            <p:nvPr/>
+          </p:nvSpPr>
+          <p:spPr>
+            <a:xfrm>
+              <a:off x="2948991" y="4336484"/>
+              <a:ext cx="0" cy="1317069"/>
+            </a:xfrm>
+            <a:custGeom>
+              <a:avLst/>
+              <a:pathLst>
+                <a:path w="0" h="1317069">
+                  <a:moveTo>
+                    <a:pt x="0" y="1317069"/>
+                  </a:moveTo>
+                  <a:lnTo>
+                    <a:pt x="0" y="0"/>
+                  </a:lnTo>
+                  <a:lnTo>
+                    <a:pt x="0" y="0"/>
+                  </a:lnTo>
+                </a:path>
+              </a:pathLst>
+            </a:custGeom>
+            <a:ln w="13550" cap="flat">
+              <a:solidFill>
+                <a:srgbClr val="EBEBEB">
+                  <a:alpha val="100000"/>
+                </a:srgbClr>
+              </a:solidFill>
+              <a:prstDash val="solid"/>
+              <a:round/>
+            </a:ln>
+          </p:spPr>
+          <p:txBody>
+            <a:bodyPr/>
+            <a:lstStyle/>
+            <a:p/>
+          </p:txBody>
+        </p:sp>
+        <p:sp>
+          <p:nvSpPr>
+            <p:cNvPr id="61" name="pl61"/>
+            <p:cNvSpPr/>
+            <p:nvPr/>
+          </p:nvSpPr>
+          <p:spPr>
+            <a:xfrm>
+              <a:off x="3762592" y="4336484"/>
+              <a:ext cx="0" cy="1317069"/>
+            </a:xfrm>
+            <a:custGeom>
+              <a:avLst/>
+              <a:pathLst>
+                <a:path w="0" h="1317069">
+                  <a:moveTo>
+                    <a:pt x="0" y="1317069"/>
+                  </a:moveTo>
+                  <a:lnTo>
+                    <a:pt x="0" y="0"/>
+                  </a:lnTo>
+                  <a:lnTo>
+                    <a:pt x="0" y="0"/>
+                  </a:lnTo>
+                </a:path>
+              </a:pathLst>
+            </a:custGeom>
+            <a:ln w="13550" cap="flat">
+              <a:solidFill>
+                <a:srgbClr val="EBEBEB">
+                  <a:alpha val="100000"/>
+                </a:srgbClr>
+              </a:solidFill>
+              <a:prstDash val="solid"/>
+              <a:round/>
+            </a:ln>
+          </p:spPr>
+          <p:txBody>
+            <a:bodyPr/>
+            <a:lstStyle/>
+            <a:p/>
+          </p:txBody>
+        </p:sp>
+        <p:sp>
+          <p:nvSpPr>
+            <p:cNvPr id="62" name="pl62"/>
+            <p:cNvSpPr/>
+            <p:nvPr/>
+          </p:nvSpPr>
+          <p:spPr>
+            <a:xfrm>
+              <a:off x="4576193" y="4336484"/>
+              <a:ext cx="0" cy="1317069"/>
+            </a:xfrm>
+            <a:custGeom>
+              <a:avLst/>
+              <a:pathLst>
+                <a:path w="0" h="1317069">
+                  <a:moveTo>
+                    <a:pt x="0" y="1317069"/>
+                  </a:moveTo>
+                  <a:lnTo>
+                    <a:pt x="0" y="0"/>
+                  </a:lnTo>
+                  <a:lnTo>
+                    <a:pt x="0" y="0"/>
+                  </a:lnTo>
+                </a:path>
+              </a:pathLst>
+            </a:custGeom>
+            <a:ln w="13550" cap="flat">
+              <a:solidFill>
+                <a:srgbClr val="EBEBEB">
+                  <a:alpha val="100000"/>
+                </a:srgbClr>
+              </a:solidFill>
+              <a:prstDash val="solid"/>
+              <a:round/>
+            </a:ln>
+          </p:spPr>
+          <p:txBody>
+            <a:bodyPr/>
+            <a:lstStyle/>
+            <a:p/>
+          </p:txBody>
+        </p:sp>
+        <p:sp>
+          <p:nvSpPr>
+            <p:cNvPr id="63" name="pl63"/>
+            <p:cNvSpPr/>
+            <p:nvPr/>
+          </p:nvSpPr>
+          <p:spPr>
+            <a:xfrm>
+              <a:off x="5389795" y="4336484"/>
+              <a:ext cx="0" cy="1317069"/>
+            </a:xfrm>
+            <a:custGeom>
+              <a:avLst/>
+              <a:pathLst>
+                <a:path w="0" h="1317069">
+                  <a:moveTo>
+                    <a:pt x="0" y="1317069"/>
+                  </a:moveTo>
+                  <a:lnTo>
+                    <a:pt x="0" y="0"/>
+                  </a:lnTo>
+                  <a:lnTo>
+                    <a:pt x="0" y="0"/>
+                  </a:lnTo>
+                </a:path>
+              </a:pathLst>
+            </a:custGeom>
+            <a:ln w="13550" cap="flat">
+              <a:solidFill>
+                <a:srgbClr val="EBEBEB">
+                  <a:alpha val="100000"/>
+                </a:srgbClr>
+              </a:solidFill>
+              <a:prstDash val="solid"/>
+              <a:round/>
+            </a:ln>
+          </p:spPr>
+          <p:txBody>
+            <a:bodyPr/>
+            <a:lstStyle/>
+            <a:p/>
+          </p:txBody>
+        </p:sp>
+        <p:sp>
+          <p:nvSpPr>
+            <p:cNvPr id="64" name="pl64"/>
+            <p:cNvSpPr/>
+            <p:nvPr/>
+          </p:nvSpPr>
+          <p:spPr>
+            <a:xfrm>
+              <a:off x="6203396" y="4336484"/>
+              <a:ext cx="0" cy="1317069"/>
+            </a:xfrm>
+            <a:custGeom>
+              <a:avLst/>
+              <a:pathLst>
+                <a:path w="0" h="1317069">
+                  <a:moveTo>
+                    <a:pt x="0" y="1317069"/>
+                  </a:moveTo>
+                  <a:lnTo>
+                    <a:pt x="0" y="0"/>
+                  </a:lnTo>
+                  <a:lnTo>
+                    <a:pt x="0" y="0"/>
+                  </a:lnTo>
+                </a:path>
+              </a:pathLst>
+            </a:custGeom>
+            <a:ln w="13550" cap="flat">
+              <a:solidFill>
+                <a:srgbClr val="EBEBEB">
+                  <a:alpha val="100000"/>
+                </a:srgbClr>
+              </a:solidFill>
+              <a:prstDash val="solid"/>
+              <a:round/>
+            </a:ln>
+          </p:spPr>
+          <p:txBody>
+            <a:bodyPr/>
+            <a:lstStyle/>
+            <a:p/>
+          </p:txBody>
+        </p:sp>
+        <p:sp>
+          <p:nvSpPr>
+            <p:cNvPr id="65" name="pl65"/>
+            <p:cNvSpPr/>
+            <p:nvPr/>
+          </p:nvSpPr>
+          <p:spPr>
+            <a:xfrm>
+              <a:off x="7016997" y="4336484"/>
+              <a:ext cx="0" cy="1317069"/>
+            </a:xfrm>
+            <a:custGeom>
+              <a:avLst/>
+              <a:pathLst>
+                <a:path w="0" h="1317069">
+                  <a:moveTo>
+                    <a:pt x="0" y="1317069"/>
+                  </a:moveTo>
+                  <a:lnTo>
+                    <a:pt x="0" y="0"/>
+                  </a:lnTo>
+                  <a:lnTo>
+                    <a:pt x="0" y="0"/>
+                  </a:lnTo>
+                </a:path>
+              </a:pathLst>
+            </a:custGeom>
+            <a:ln w="13550" cap="flat">
+              <a:solidFill>
+                <a:srgbClr val="EBEBEB">
+                  <a:alpha val="100000"/>
+                </a:srgbClr>
+              </a:solidFill>
+              <a:prstDash val="solid"/>
+              <a:round/>
+            </a:ln>
+          </p:spPr>
+          <p:txBody>
+            <a:bodyPr/>
+            <a:lstStyle/>
+            <a:p/>
+          </p:txBody>
+        </p:sp>
+        <p:sp>
+          <p:nvSpPr>
+            <p:cNvPr id="66" name="pl66"/>
+            <p:cNvSpPr/>
+            <p:nvPr/>
+          </p:nvSpPr>
+          <p:spPr>
+            <a:xfrm>
+              <a:off x="7830599" y="4336484"/>
+              <a:ext cx="0" cy="1317069"/>
+            </a:xfrm>
+            <a:custGeom>
+              <a:avLst/>
+              <a:pathLst>
+                <a:path w="0" h="1317069">
+                  <a:moveTo>
+                    <a:pt x="0" y="1317069"/>
+                  </a:moveTo>
+                  <a:lnTo>
+                    <a:pt x="0" y="0"/>
+                  </a:lnTo>
+                  <a:lnTo>
+                    <a:pt x="0" y="0"/>
+                  </a:lnTo>
+                </a:path>
+              </a:pathLst>
+            </a:custGeom>
+            <a:ln w="13550" cap="flat">
+              <a:solidFill>
+                <a:srgbClr val="EBEBEB">
+                  <a:alpha val="100000"/>
+                </a:srgbClr>
+              </a:solidFill>
+              <a:prstDash val="solid"/>
+              <a:round/>
+            </a:ln>
+          </p:spPr>
+          <p:txBody>
+            <a:bodyPr/>
+            <a:lstStyle/>
+            <a:p/>
+          </p:txBody>
+        </p:sp>
+        <p:sp>
+          <p:nvSpPr>
+            <p:cNvPr id="67" name="pg67"/>
+            <p:cNvSpPr/>
+            <p:nvPr/>
+          </p:nvSpPr>
+          <p:spPr>
+            <a:xfrm>
+              <a:off x="1235312" y="4336484"/>
+              <a:ext cx="6964104" cy="1237746"/>
+            </a:xfrm>
+            <a:custGeom>
+              <a:avLst/>
+              <a:pathLst>
+                <a:path w="6964104" h="1237746">
+                  <a:moveTo>
+                    <a:pt x="1369178" y="0"/>
+                  </a:moveTo>
+                  <a:lnTo>
+                    <a:pt x="1406889" y="35245"/>
+                  </a:lnTo>
+                  <a:lnTo>
+                    <a:pt x="1477234" y="97634"/>
+                  </a:lnTo>
+                  <a:lnTo>
+                    <a:pt x="1547578" y="156837"/>
+                  </a:lnTo>
+                  <a:lnTo>
+                    <a:pt x="1617923" y="213018"/>
+                  </a:lnTo>
+                  <a:lnTo>
+                    <a:pt x="1688267" y="266330"/>
+                  </a:lnTo>
+                  <a:lnTo>
+                    <a:pt x="1758612" y="316920"/>
+                  </a:lnTo>
+                  <a:lnTo>
+                    <a:pt x="1828956" y="364927"/>
+                  </a:lnTo>
+                  <a:lnTo>
+                    <a:pt x="1899301" y="410483"/>
+                  </a:lnTo>
+                  <a:lnTo>
+                    <a:pt x="1969645" y="453714"/>
+                  </a:lnTo>
+                  <a:lnTo>
+                    <a:pt x="2039990" y="494737"/>
+                  </a:lnTo>
+                  <a:lnTo>
+                    <a:pt x="2110334" y="533665"/>
+                  </a:lnTo>
+                  <a:lnTo>
+                    <a:pt x="2180679" y="570606"/>
+                  </a:lnTo>
+                  <a:lnTo>
+                    <a:pt x="2251023" y="605661"/>
+                  </a:lnTo>
+                  <a:lnTo>
+                    <a:pt x="2321368" y="638927"/>
+                  </a:lnTo>
+                  <a:lnTo>
+                    <a:pt x="2391712" y="670493"/>
+                  </a:lnTo>
+                  <a:lnTo>
+                    <a:pt x="2462057" y="700449"/>
+                  </a:lnTo>
+                  <a:lnTo>
+                    <a:pt x="2532401" y="728874"/>
+                  </a:lnTo>
+                  <a:lnTo>
+                    <a:pt x="2602746" y="755849"/>
+                  </a:lnTo>
+                  <a:lnTo>
+                    <a:pt x="2673090" y="781446"/>
+                  </a:lnTo>
+                  <a:lnTo>
+                    <a:pt x="2743435" y="805736"/>
+                  </a:lnTo>
+                  <a:lnTo>
+                    <a:pt x="2813779" y="828786"/>
+                  </a:lnTo>
+                  <a:lnTo>
+                    <a:pt x="2884124" y="850660"/>
+                  </a:lnTo>
+                  <a:lnTo>
+                    <a:pt x="2954468" y="871416"/>
+                  </a:lnTo>
+                  <a:lnTo>
+                    <a:pt x="3024813" y="891113"/>
+                  </a:lnTo>
+                  <a:lnTo>
+                    <a:pt x="3095157" y="909804"/>
+                  </a:lnTo>
+                  <a:lnTo>
+                    <a:pt x="3165502" y="927541"/>
+                  </a:lnTo>
+                  <a:lnTo>
+                    <a:pt x="3235846" y="944372"/>
+                  </a:lnTo>
+                  <a:lnTo>
+                    <a:pt x="3306191" y="958344"/>
+                  </a:lnTo>
+                  <a:lnTo>
+                    <a:pt x="3376535" y="961328"/>
+                  </a:lnTo>
+                  <a:lnTo>
+                    <a:pt x="3446880" y="964282"/>
+                  </a:lnTo>
+                  <a:lnTo>
+                    <a:pt x="3517224" y="967207"/>
+                  </a:lnTo>
+                  <a:lnTo>
+                    <a:pt x="3587569" y="970102"/>
+                  </a:lnTo>
+                  <a:lnTo>
+                    <a:pt x="3657913" y="972969"/>
+                  </a:lnTo>
+                  <a:lnTo>
+                    <a:pt x="3728257" y="975807"/>
+                  </a:lnTo>
+                  <a:lnTo>
+                    <a:pt x="3798602" y="978617"/>
+                  </a:lnTo>
+                  <a:lnTo>
+                    <a:pt x="3868946" y="981398"/>
+                  </a:lnTo>
+                  <a:lnTo>
+                    <a:pt x="3939291" y="984152"/>
+                  </a:lnTo>
+                  <a:lnTo>
+                    <a:pt x="4009635" y="986879"/>
+                  </a:lnTo>
+                  <a:lnTo>
+                    <a:pt x="4079980" y="989578"/>
+                  </a:lnTo>
+                  <a:lnTo>
+                    <a:pt x="4150324" y="992250"/>
+                  </a:lnTo>
+                  <a:lnTo>
+                    <a:pt x="4220669" y="994895"/>
+                  </a:lnTo>
+                  <a:lnTo>
+                    <a:pt x="4291013" y="997515"/>
+                  </a:lnTo>
+                  <a:lnTo>
+                    <a:pt x="4361358" y="1000107"/>
+                  </a:lnTo>
+                  <a:lnTo>
+                    <a:pt x="4431702" y="1002675"/>
+                  </a:lnTo>
+                  <a:lnTo>
+                    <a:pt x="4502047" y="1005216"/>
+                  </a:lnTo>
+                  <a:lnTo>
+                    <a:pt x="4572391" y="1007732"/>
+                  </a:lnTo>
+                  <a:lnTo>
+                    <a:pt x="4642736" y="1010223"/>
+                  </a:lnTo>
+                  <a:lnTo>
+                    <a:pt x="4713080" y="1012689"/>
+                  </a:lnTo>
+                  <a:lnTo>
+                    <a:pt x="4783425" y="1015130"/>
+                  </a:lnTo>
+                  <a:lnTo>
+                    <a:pt x="4853769" y="1017547"/>
+                  </a:lnTo>
+                  <a:lnTo>
+                    <a:pt x="4924114" y="1019940"/>
+                  </a:lnTo>
+                  <a:lnTo>
+                    <a:pt x="4994458" y="1022309"/>
+                  </a:lnTo>
+                  <a:lnTo>
+                    <a:pt x="5064803" y="1024655"/>
+                  </a:lnTo>
+                  <a:lnTo>
+                    <a:pt x="5135147" y="1026977"/>
+                  </a:lnTo>
+                  <a:lnTo>
+                    <a:pt x="5205492" y="1029276"/>
+                  </a:lnTo>
+                  <a:lnTo>
+                    <a:pt x="5275836" y="1031551"/>
+                  </a:lnTo>
+                  <a:lnTo>
+                    <a:pt x="5346181" y="1033804"/>
+                  </a:lnTo>
+                  <a:lnTo>
+                    <a:pt x="5416525" y="1036035"/>
+                  </a:lnTo>
+                  <a:lnTo>
+                    <a:pt x="5486870" y="1038243"/>
+                  </a:lnTo>
+                  <a:lnTo>
+                    <a:pt x="5557214" y="1040430"/>
+                  </a:lnTo>
+                  <a:lnTo>
+                    <a:pt x="5627559" y="1042594"/>
+                  </a:lnTo>
+                  <a:lnTo>
+                    <a:pt x="5697903" y="1044737"/>
+                  </a:lnTo>
+                  <a:lnTo>
+                    <a:pt x="5768248" y="1046858"/>
+                  </a:lnTo>
+                  <a:lnTo>
+                    <a:pt x="5838592" y="1048959"/>
+                  </a:lnTo>
+                  <a:lnTo>
+                    <a:pt x="5908937" y="1051038"/>
+                  </a:lnTo>
+                  <a:lnTo>
+                    <a:pt x="5979281" y="1053096"/>
+                  </a:lnTo>
+                  <a:lnTo>
+                    <a:pt x="6049626" y="1055134"/>
+                  </a:lnTo>
+                  <a:lnTo>
+                    <a:pt x="6119970" y="1057152"/>
+                  </a:lnTo>
+                  <a:lnTo>
+                    <a:pt x="6190315" y="1059149"/>
+                  </a:lnTo>
+                  <a:lnTo>
+                    <a:pt x="6260659" y="1061127"/>
+                  </a:lnTo>
+                  <a:lnTo>
+                    <a:pt x="6331004" y="1063085"/>
+                  </a:lnTo>
+                  <a:lnTo>
+                    <a:pt x="6401348" y="1065023"/>
+                  </a:lnTo>
+                  <a:lnTo>
+                    <a:pt x="6471693" y="1066942"/>
+                  </a:lnTo>
+                  <a:lnTo>
+                    <a:pt x="6542037" y="1068842"/>
+                  </a:lnTo>
+                  <a:lnTo>
+                    <a:pt x="6612382" y="1070722"/>
+                  </a:lnTo>
+                  <a:lnTo>
+                    <a:pt x="6682726" y="1072584"/>
+                  </a:lnTo>
+                  <a:lnTo>
+                    <a:pt x="6753071" y="1074428"/>
+                  </a:lnTo>
+                  <a:lnTo>
+                    <a:pt x="6823415" y="1076253"/>
+                  </a:lnTo>
+                  <a:lnTo>
+                    <a:pt x="6893760" y="1078059"/>
+                  </a:lnTo>
+                  <a:lnTo>
+                    <a:pt x="6964104" y="1079848"/>
+                  </a:lnTo>
+                  <a:lnTo>
+                    <a:pt x="6964104" y="1237746"/>
+                  </a:lnTo>
+                  <a:lnTo>
+                    <a:pt x="6893760" y="1236699"/>
+                  </a:lnTo>
+                  <a:lnTo>
+                    <a:pt x="6823415" y="1235596"/>
+                  </a:lnTo>
+                  <a:lnTo>
+                    <a:pt x="6753071" y="1234433"/>
+                  </a:lnTo>
+                  <a:lnTo>
+                    <a:pt x="6682726" y="1233208"/>
+                  </a:lnTo>
+                  <a:lnTo>
+                    <a:pt x="6612382" y="1231918"/>
+                  </a:lnTo>
+                  <a:lnTo>
+                    <a:pt x="6542037" y="1230557"/>
+                  </a:lnTo>
+                  <a:lnTo>
+                    <a:pt x="6471693" y="1229124"/>
+                  </a:lnTo>
+                  <a:lnTo>
+                    <a:pt x="6401348" y="1227613"/>
+                  </a:lnTo>
+                  <a:lnTo>
+                    <a:pt x="6331004" y="1226021"/>
+                  </a:lnTo>
+                  <a:lnTo>
+                    <a:pt x="6260659" y="1224343"/>
+                  </a:lnTo>
+                  <a:lnTo>
+                    <a:pt x="6190315" y="1222575"/>
+                  </a:lnTo>
+                  <a:lnTo>
+                    <a:pt x="6119970" y="1220712"/>
+                  </a:lnTo>
+                  <a:lnTo>
+                    <a:pt x="6049626" y="1218749"/>
+                  </a:lnTo>
+                  <a:lnTo>
+                    <a:pt x="5979281" y="1216680"/>
+                  </a:lnTo>
+                  <a:lnTo>
+                    <a:pt x="5908937" y="1214500"/>
+                  </a:lnTo>
+                  <a:lnTo>
+                    <a:pt x="5838592" y="1212203"/>
+                  </a:lnTo>
+                  <a:lnTo>
+                    <a:pt x="5768248" y="1209781"/>
+                  </a:lnTo>
+                  <a:lnTo>
+                    <a:pt x="5697903" y="1207230"/>
+                  </a:lnTo>
+                  <a:lnTo>
+                    <a:pt x="5627559" y="1204541"/>
+                  </a:lnTo>
+                  <a:lnTo>
+                    <a:pt x="5557214" y="1201708"/>
+                  </a:lnTo>
+                  <a:lnTo>
+                    <a:pt x="5486870" y="1198722"/>
+                  </a:lnTo>
+                  <a:lnTo>
+                    <a:pt x="5416525" y="1195576"/>
+                  </a:lnTo>
+                  <a:lnTo>
+                    <a:pt x="5346181" y="1192260"/>
+                  </a:lnTo>
+                  <a:lnTo>
+                    <a:pt x="5275836" y="1188766"/>
+                  </a:lnTo>
+                  <a:lnTo>
+                    <a:pt x="5205492" y="1185084"/>
+                  </a:lnTo>
+                  <a:lnTo>
+                    <a:pt x="5135147" y="1181204"/>
+                  </a:lnTo>
+                  <a:lnTo>
+                    <a:pt x="5064803" y="1177115"/>
+                  </a:lnTo>
+                  <a:lnTo>
+                    <a:pt x="4994458" y="1172806"/>
+                  </a:lnTo>
+                  <a:lnTo>
+                    <a:pt x="4924114" y="1168265"/>
+                  </a:lnTo>
+                  <a:lnTo>
+                    <a:pt x="4853769" y="1163480"/>
+                  </a:lnTo>
+                  <a:lnTo>
+                    <a:pt x="4783425" y="1158438"/>
+                  </a:lnTo>
+                  <a:lnTo>
+                    <a:pt x="4713080" y="1153124"/>
+                  </a:lnTo>
+                  <a:lnTo>
+                    <a:pt x="4642736" y="1147524"/>
+                  </a:lnTo>
+                  <a:lnTo>
+                    <a:pt x="4572391" y="1141623"/>
+                  </a:lnTo>
+                  <a:lnTo>
+                    <a:pt x="4502047" y="1135405"/>
+                  </a:lnTo>
+                  <a:lnTo>
+                    <a:pt x="4431702" y="1128852"/>
+                  </a:lnTo>
+                  <a:lnTo>
+                    <a:pt x="4361358" y="1121946"/>
+                  </a:lnTo>
+                  <a:lnTo>
+                    <a:pt x="4291013" y="1114669"/>
+                  </a:lnTo>
+                  <a:lnTo>
+                    <a:pt x="4220669" y="1107000"/>
+                  </a:lnTo>
+                  <a:lnTo>
+                    <a:pt x="4150324" y="1098919"/>
+                  </a:lnTo>
+                  <a:lnTo>
+                    <a:pt x="4079980" y="1090403"/>
+                  </a:lnTo>
+                  <a:lnTo>
+                    <a:pt x="4009635" y="1081428"/>
+                  </a:lnTo>
+                  <a:lnTo>
+                    <a:pt x="3939291" y="1071971"/>
+                  </a:lnTo>
+                  <a:lnTo>
+                    <a:pt x="3868946" y="1062005"/>
+                  </a:lnTo>
+                  <a:lnTo>
+                    <a:pt x="3798602" y="1051503"/>
+                  </a:lnTo>
+                  <a:lnTo>
+                    <a:pt x="3728257" y="1040436"/>
+                  </a:lnTo>
+                  <a:lnTo>
+                    <a:pt x="3657913" y="1028773"/>
+                  </a:lnTo>
+                  <a:lnTo>
+                    <a:pt x="3587569" y="1016483"/>
+                  </a:lnTo>
+                  <a:lnTo>
+                    <a:pt x="3517224" y="1003531"/>
+                  </a:lnTo>
+                  <a:lnTo>
+                    <a:pt x="3446880" y="989883"/>
+                  </a:lnTo>
+                  <a:lnTo>
+                    <a:pt x="3376535" y="975501"/>
+                  </a:lnTo>
+                  <a:lnTo>
+                    <a:pt x="3306191" y="960344"/>
+                  </a:lnTo>
+                  <a:lnTo>
+                    <a:pt x="3235846" y="955330"/>
+                  </a:lnTo>
+                  <a:lnTo>
+                    <a:pt x="3165502" y="952285"/>
+                  </a:lnTo>
+                  <a:lnTo>
+                    <a:pt x="3095157" y="949210"/>
+                  </a:lnTo>
+                  <a:lnTo>
+                    <a:pt x="3024813" y="946103"/>
+                  </a:lnTo>
+                  <a:lnTo>
+                    <a:pt x="2954468" y="942966"/>
+                  </a:lnTo>
+                  <a:lnTo>
+                    <a:pt x="2884124" y="939797"/>
+                  </a:lnTo>
+                  <a:lnTo>
+                    <a:pt x="2813779" y="936595"/>
+                  </a:lnTo>
+                  <a:lnTo>
+                    <a:pt x="2743435" y="933362"/>
+                  </a:lnTo>
+                  <a:lnTo>
+                    <a:pt x="2673090" y="930096"/>
+                  </a:lnTo>
+                  <a:lnTo>
+                    <a:pt x="2602746" y="926797"/>
+                  </a:lnTo>
+                  <a:lnTo>
+                    <a:pt x="2532401" y="923464"/>
+                  </a:lnTo>
+                  <a:lnTo>
+                    <a:pt x="2462057" y="920098"/>
+                  </a:lnTo>
+                  <a:lnTo>
+                    <a:pt x="2391712" y="916698"/>
+                  </a:lnTo>
+                  <a:lnTo>
+                    <a:pt x="2321368" y="913264"/>
+                  </a:lnTo>
+                  <a:lnTo>
+                    <a:pt x="2251023" y="909795"/>
+                  </a:lnTo>
+                  <a:lnTo>
+                    <a:pt x="2180679" y="906292"/>
+                  </a:lnTo>
+                  <a:lnTo>
+                    <a:pt x="2110334" y="902753"/>
+                  </a:lnTo>
+                  <a:lnTo>
+                    <a:pt x="2039990" y="899178"/>
+                  </a:lnTo>
+                  <a:lnTo>
+                    <a:pt x="1969645" y="895567"/>
+                  </a:lnTo>
+                  <a:lnTo>
+                    <a:pt x="1899301" y="891920"/>
+                  </a:lnTo>
+                  <a:lnTo>
+                    <a:pt x="1828956" y="888235"/>
+                  </a:lnTo>
+                  <a:lnTo>
+                    <a:pt x="1758612" y="884514"/>
+                  </a:lnTo>
+                  <a:lnTo>
+                    <a:pt x="1688267" y="880755"/>
+                  </a:lnTo>
+                  <a:lnTo>
+                    <a:pt x="1617923" y="876959"/>
+                  </a:lnTo>
+                  <a:lnTo>
+                    <a:pt x="1547578" y="873124"/>
+                  </a:lnTo>
+                  <a:lnTo>
+                    <a:pt x="1477234" y="869250"/>
+                  </a:lnTo>
+                  <a:lnTo>
+                    <a:pt x="1406889" y="865337"/>
+                  </a:lnTo>
+                  <a:lnTo>
+                    <a:pt x="1336545" y="861385"/>
+                  </a:lnTo>
+                  <a:lnTo>
+                    <a:pt x="1266200" y="857393"/>
+                  </a:lnTo>
+                  <a:lnTo>
+                    <a:pt x="1195856" y="853361"/>
+                  </a:lnTo>
+                  <a:lnTo>
+                    <a:pt x="1125511" y="849288"/>
+                  </a:lnTo>
+                  <a:lnTo>
+                    <a:pt x="1055167" y="845174"/>
+                  </a:lnTo>
+                  <a:lnTo>
+                    <a:pt x="984822" y="841018"/>
+                  </a:lnTo>
+                  <a:lnTo>
+                    <a:pt x="914478" y="836821"/>
+                  </a:lnTo>
+                  <a:lnTo>
+                    <a:pt x="844133" y="832581"/>
+                  </a:lnTo>
+                  <a:lnTo>
+                    <a:pt x="773789" y="828299"/>
+                  </a:lnTo>
+                  <a:lnTo>
+                    <a:pt x="703444" y="823973"/>
+                  </a:lnTo>
+                  <a:lnTo>
+                    <a:pt x="633100" y="819603"/>
+                  </a:lnTo>
+                  <a:lnTo>
+                    <a:pt x="562755" y="815190"/>
+                  </a:lnTo>
+                  <a:lnTo>
+                    <a:pt x="492411" y="810732"/>
+                  </a:lnTo>
+                  <a:lnTo>
+                    <a:pt x="422066" y="806229"/>
+                  </a:lnTo>
+                  <a:lnTo>
+                    <a:pt x="351722" y="801681"/>
+                  </a:lnTo>
+                  <a:lnTo>
+                    <a:pt x="281377" y="797087"/>
+                  </a:lnTo>
+                  <a:lnTo>
+                    <a:pt x="211033" y="792446"/>
+                  </a:lnTo>
+                  <a:lnTo>
+                    <a:pt x="140688" y="787759"/>
+                  </a:lnTo>
+                  <a:lnTo>
+                    <a:pt x="70344" y="783024"/>
+                  </a:lnTo>
+                  <a:lnTo>
+                    <a:pt x="0" y="778242"/>
+                  </a:lnTo>
+                  <a:close/>
+                </a:path>
+              </a:pathLst>
+            </a:custGeom>
+            <a:solidFill>
+              <a:srgbClr val="FF8C00">
+                <a:alpha val="20000"/>
+              </a:srgbClr>
+            </a:solidFill>
+          </p:spPr>
+          <p:txBody>
+            <a:bodyPr/>
+            <a:lstStyle/>
+            <a:p/>
+          </p:txBody>
+        </p:sp>
+        <p:sp>
+          <p:nvSpPr>
+            <p:cNvPr id="68" name="pl68"/>
+            <p:cNvSpPr/>
+            <p:nvPr/>
+          </p:nvSpPr>
+          <p:spPr>
+            <a:xfrm>
+              <a:off x="2604490" y="4336484"/>
+              <a:ext cx="5594926" cy="1079848"/>
+            </a:xfrm>
+            <a:custGeom>
+              <a:avLst/>
+              <a:pathLst>
+                <a:path w="5594926" h="1079848">
+                  <a:moveTo>
+                    <a:pt x="0" y="0"/>
+                  </a:moveTo>
+                  <a:lnTo>
+                    <a:pt x="37711" y="35245"/>
+                  </a:lnTo>
+                  <a:lnTo>
+                    <a:pt x="108055" y="97634"/>
+                  </a:lnTo>
+                  <a:lnTo>
+                    <a:pt x="178400" y="156837"/>
+                  </a:lnTo>
+                  <a:lnTo>
+                    <a:pt x="248744" y="213018"/>
+                  </a:lnTo>
+                  <a:lnTo>
+                    <a:pt x="319089" y="266330"/>
+                  </a:lnTo>
+                  <a:lnTo>
+                    <a:pt x="389433" y="316920"/>
+                  </a:lnTo>
+                  <a:lnTo>
+                    <a:pt x="459778" y="364927"/>
+                  </a:lnTo>
+                  <a:lnTo>
+                    <a:pt x="530122" y="410483"/>
+                  </a:lnTo>
+                  <a:lnTo>
+                    <a:pt x="600467" y="453714"/>
+                  </a:lnTo>
+                  <a:lnTo>
+                    <a:pt x="670811" y="494737"/>
+                  </a:lnTo>
+                  <a:lnTo>
+                    <a:pt x="741156" y="533665"/>
+                  </a:lnTo>
+                  <a:lnTo>
+                    <a:pt x="811500" y="570606"/>
+                  </a:lnTo>
+                  <a:lnTo>
+                    <a:pt x="881845" y="605661"/>
+                  </a:lnTo>
+                  <a:lnTo>
+                    <a:pt x="952189" y="638927"/>
+                  </a:lnTo>
+                  <a:lnTo>
+                    <a:pt x="1022534" y="670493"/>
+                  </a:lnTo>
+                  <a:lnTo>
+                    <a:pt x="1092878" y="700449"/>
+                  </a:lnTo>
+                  <a:lnTo>
+                    <a:pt x="1163223" y="728874"/>
+                  </a:lnTo>
+                  <a:lnTo>
+                    <a:pt x="1233567" y="755849"/>
+                  </a:lnTo>
+                  <a:lnTo>
+                    <a:pt x="1303912" y="781446"/>
+                  </a:lnTo>
+                  <a:lnTo>
+                    <a:pt x="1374256" y="805736"/>
+                  </a:lnTo>
+                  <a:lnTo>
+                    <a:pt x="1444601" y="828786"/>
+                  </a:lnTo>
+                  <a:lnTo>
+                    <a:pt x="1514945" y="850660"/>
+                  </a:lnTo>
+                  <a:lnTo>
+                    <a:pt x="1585290" y="871416"/>
+                  </a:lnTo>
+                  <a:lnTo>
+                    <a:pt x="1655634" y="891113"/>
+                  </a:lnTo>
+                  <a:lnTo>
+                    <a:pt x="1725979" y="909804"/>
+                  </a:lnTo>
+                  <a:lnTo>
+                    <a:pt x="1796323" y="927541"/>
+                  </a:lnTo>
+                  <a:lnTo>
+                    <a:pt x="1866668" y="944372"/>
+                  </a:lnTo>
+                  <a:lnTo>
+                    <a:pt x="1937012" y="958344"/>
+                  </a:lnTo>
+                  <a:lnTo>
+                    <a:pt x="2007357" y="961328"/>
+                  </a:lnTo>
+                  <a:lnTo>
+                    <a:pt x="2077701" y="964282"/>
+                  </a:lnTo>
+                  <a:lnTo>
+                    <a:pt x="2148046" y="967207"/>
+                  </a:lnTo>
+                  <a:lnTo>
+                    <a:pt x="2218390" y="970102"/>
+                  </a:lnTo>
+                  <a:lnTo>
+                    <a:pt x="2288735" y="972969"/>
+                  </a:lnTo>
+                  <a:lnTo>
+                    <a:pt x="2359079" y="975807"/>
+                  </a:lnTo>
+                  <a:lnTo>
+                    <a:pt x="2429424" y="978617"/>
+                  </a:lnTo>
+                  <a:lnTo>
+                    <a:pt x="2499768" y="981398"/>
+                  </a:lnTo>
+                  <a:lnTo>
+                    <a:pt x="2570113" y="984152"/>
+                  </a:lnTo>
+                  <a:lnTo>
+                    <a:pt x="2640457" y="986879"/>
+                  </a:lnTo>
+                  <a:lnTo>
+                    <a:pt x="2710802" y="989578"/>
+                  </a:lnTo>
+                  <a:lnTo>
+                    <a:pt x="2781146" y="992250"/>
+                  </a:lnTo>
+                  <a:lnTo>
+                    <a:pt x="2851491" y="994895"/>
+                  </a:lnTo>
+                  <a:lnTo>
+                    <a:pt x="2921835" y="997515"/>
+                  </a:lnTo>
+                  <a:lnTo>
+                    <a:pt x="2992180" y="1000107"/>
+                  </a:lnTo>
+                  <a:lnTo>
+                    <a:pt x="3062524" y="1002675"/>
+                  </a:lnTo>
+                  <a:lnTo>
+                    <a:pt x="3132869" y="1005216"/>
+                  </a:lnTo>
+                  <a:lnTo>
+                    <a:pt x="3203213" y="1007732"/>
+                  </a:lnTo>
+                  <a:lnTo>
+                    <a:pt x="3273558" y="1010223"/>
+                  </a:lnTo>
+                  <a:lnTo>
+                    <a:pt x="3343902" y="1012689"/>
+                  </a:lnTo>
+                  <a:lnTo>
+                    <a:pt x="3414247" y="1015130"/>
+                  </a:lnTo>
+                  <a:lnTo>
+                    <a:pt x="3484591" y="1017547"/>
+                  </a:lnTo>
+                  <a:lnTo>
+                    <a:pt x="3554935" y="1019940"/>
+                  </a:lnTo>
+                  <a:lnTo>
+                    <a:pt x="3625280" y="1022309"/>
+                  </a:lnTo>
+                  <a:lnTo>
+                    <a:pt x="3695624" y="1024655"/>
+                  </a:lnTo>
+                  <a:lnTo>
+                    <a:pt x="3765969" y="1026977"/>
+                  </a:lnTo>
+                  <a:lnTo>
+                    <a:pt x="3836313" y="1029276"/>
+                  </a:lnTo>
+                  <a:lnTo>
+                    <a:pt x="3906658" y="1031551"/>
+                  </a:lnTo>
+                  <a:lnTo>
+                    <a:pt x="3977002" y="1033804"/>
+                  </a:lnTo>
+                  <a:lnTo>
+                    <a:pt x="4047347" y="1036035"/>
+                  </a:lnTo>
+                  <a:lnTo>
+                    <a:pt x="4117691" y="1038243"/>
+                  </a:lnTo>
+                  <a:lnTo>
+                    <a:pt x="4188036" y="1040430"/>
+                  </a:lnTo>
+                  <a:lnTo>
+                    <a:pt x="4258380" y="1042594"/>
+                  </a:lnTo>
+                  <a:lnTo>
+                    <a:pt x="4328725" y="1044737"/>
+                  </a:lnTo>
+                  <a:lnTo>
+                    <a:pt x="4399069" y="1046858"/>
+                  </a:lnTo>
+                  <a:lnTo>
+                    <a:pt x="4469414" y="1048959"/>
+                  </a:lnTo>
+                  <a:lnTo>
+                    <a:pt x="4539758" y="1051038"/>
+                  </a:lnTo>
+                  <a:lnTo>
+                    <a:pt x="4610103" y="1053096"/>
+                  </a:lnTo>
+                  <a:lnTo>
+                    <a:pt x="4680447" y="1055134"/>
+                  </a:lnTo>
+                  <a:lnTo>
+                    <a:pt x="4750792" y="1057152"/>
+                  </a:lnTo>
+                  <a:lnTo>
+                    <a:pt x="4821136" y="1059149"/>
+                  </a:lnTo>
+                  <a:lnTo>
+                    <a:pt x="4891481" y="1061127"/>
+                  </a:lnTo>
+                  <a:lnTo>
+                    <a:pt x="4961825" y="1063085"/>
+                  </a:lnTo>
+                  <a:lnTo>
+                    <a:pt x="5032170" y="1065023"/>
+                  </a:lnTo>
+                  <a:lnTo>
+                    <a:pt x="5102514" y="1066942"/>
+                  </a:lnTo>
+                  <a:lnTo>
+                    <a:pt x="5172859" y="1068842"/>
+                  </a:lnTo>
+                  <a:lnTo>
+                    <a:pt x="5243203" y="1070722"/>
+                  </a:lnTo>
+                  <a:lnTo>
+                    <a:pt x="5313548" y="1072584"/>
+                  </a:lnTo>
+                  <a:lnTo>
+                    <a:pt x="5383892" y="1074428"/>
+                  </a:lnTo>
+                  <a:lnTo>
+                    <a:pt x="5454237" y="1076253"/>
+                  </a:lnTo>
+                  <a:lnTo>
+                    <a:pt x="5524581" y="1078059"/>
+                  </a:lnTo>
+                  <a:lnTo>
+                    <a:pt x="5594926" y="1079848"/>
+                  </a:lnTo>
+                </a:path>
+              </a:pathLst>
+            </a:custGeom>
+          </p:spPr>
+          <p:txBody>
+            <a:bodyPr/>
+            <a:lstStyle/>
+            <a:p/>
+          </p:txBody>
+        </p:sp>
+        <p:sp>
+          <p:nvSpPr>
+            <p:cNvPr id="69" name="pl69"/>
+            <p:cNvSpPr/>
+            <p:nvPr/>
+          </p:nvSpPr>
+          <p:spPr>
+            <a:xfrm>
+              <a:off x="1235312" y="5114726"/>
+              <a:ext cx="6964104" cy="459504"/>
+            </a:xfrm>
+            <a:custGeom>
+              <a:avLst/>
+              <a:pathLst>
+                <a:path w="6964104" h="459504">
+                  <a:moveTo>
+                    <a:pt x="6964104" y="459504"/>
+                  </a:moveTo>
+                  <a:lnTo>
+                    <a:pt x="6893760" y="458457"/>
+                  </a:lnTo>
+                  <a:lnTo>
+                    <a:pt x="6823415" y="457354"/>
+                  </a:lnTo>
+                  <a:lnTo>
+                    <a:pt x="6753071" y="456191"/>
+                  </a:lnTo>
+                  <a:lnTo>
+                    <a:pt x="6682726" y="454966"/>
+                  </a:lnTo>
+                  <a:lnTo>
+                    <a:pt x="6612382" y="453675"/>
+                  </a:lnTo>
+                  <a:lnTo>
+                    <a:pt x="6542037" y="452315"/>
+                  </a:lnTo>
+                  <a:lnTo>
+                    <a:pt x="6471693" y="450881"/>
+                  </a:lnTo>
+                  <a:lnTo>
+                    <a:pt x="6401348" y="449371"/>
+                  </a:lnTo>
+                  <a:lnTo>
+                    <a:pt x="6331004" y="447779"/>
+                  </a:lnTo>
+                  <a:lnTo>
+                    <a:pt x="6260659" y="446101"/>
+                  </a:lnTo>
+                  <a:lnTo>
+                    <a:pt x="6190315" y="444333"/>
+                  </a:lnTo>
+                  <a:lnTo>
+                    <a:pt x="6119970" y="442470"/>
+                  </a:lnTo>
+                  <a:lnTo>
+                    <a:pt x="6049626" y="440507"/>
+                  </a:lnTo>
+                  <a:lnTo>
+                    <a:pt x="5979281" y="438438"/>
+                  </a:lnTo>
+                  <a:lnTo>
+                    <a:pt x="5908937" y="436258"/>
+                  </a:lnTo>
+                  <a:lnTo>
+                    <a:pt x="5838592" y="433960"/>
+                  </a:lnTo>
+                  <a:lnTo>
+                    <a:pt x="5768248" y="431539"/>
+                  </a:lnTo>
+                  <a:lnTo>
+                    <a:pt x="5697903" y="428988"/>
+                  </a:lnTo>
+                  <a:lnTo>
+                    <a:pt x="5627559" y="426299"/>
+                  </a:lnTo>
+                  <a:lnTo>
+                    <a:pt x="5557214" y="423466"/>
+                  </a:lnTo>
+                  <a:lnTo>
+                    <a:pt x="5486870" y="420480"/>
+                  </a:lnTo>
+                  <a:lnTo>
+                    <a:pt x="5416525" y="417334"/>
+                  </a:lnTo>
+                  <a:lnTo>
+                    <a:pt x="5346181" y="414018"/>
+                  </a:lnTo>
+                  <a:lnTo>
+                    <a:pt x="5275836" y="410524"/>
+                  </a:lnTo>
+                  <a:lnTo>
+                    <a:pt x="5205492" y="406842"/>
+                  </a:lnTo>
+                  <a:lnTo>
+                    <a:pt x="5135147" y="402962"/>
+                  </a:lnTo>
+                  <a:lnTo>
+                    <a:pt x="5064803" y="398873"/>
+                  </a:lnTo>
+                  <a:lnTo>
+                    <a:pt x="4994458" y="394564"/>
+                  </a:lnTo>
+                  <a:lnTo>
+                    <a:pt x="4924114" y="390023"/>
+                  </a:lnTo>
+                  <a:lnTo>
+                    <a:pt x="4853769" y="385238"/>
+                  </a:lnTo>
+                  <a:lnTo>
+                    <a:pt x="4783425" y="380196"/>
+                  </a:lnTo>
+                  <a:lnTo>
+                    <a:pt x="4713080" y="374882"/>
+                  </a:lnTo>
+                  <a:lnTo>
+                    <a:pt x="4642736" y="369282"/>
+                  </a:lnTo>
+                  <a:lnTo>
+                    <a:pt x="4572391" y="363381"/>
+                  </a:lnTo>
+                  <a:lnTo>
+                    <a:pt x="4502047" y="357163"/>
+                  </a:lnTo>
+                  <a:lnTo>
+                    <a:pt x="4431702" y="350610"/>
+                  </a:lnTo>
+                  <a:lnTo>
+                    <a:pt x="4361358" y="343704"/>
+                  </a:lnTo>
+                  <a:lnTo>
+                    <a:pt x="4291013" y="336427"/>
+                  </a:lnTo>
+                  <a:lnTo>
+                    <a:pt x="4220669" y="328758"/>
+                  </a:lnTo>
+                  <a:lnTo>
+                    <a:pt x="4150324" y="320677"/>
+                  </a:lnTo>
+                  <a:lnTo>
+                    <a:pt x="4079980" y="312161"/>
+                  </a:lnTo>
+                  <a:lnTo>
+                    <a:pt x="4009635" y="303186"/>
+                  </a:lnTo>
+                  <a:lnTo>
+                    <a:pt x="3939291" y="293729"/>
+                  </a:lnTo>
+                  <a:lnTo>
+                    <a:pt x="3868946" y="283763"/>
+                  </a:lnTo>
+                  <a:lnTo>
+                    <a:pt x="3798602" y="273261"/>
+                  </a:lnTo>
+                  <a:lnTo>
+                    <a:pt x="3728257" y="262194"/>
+                  </a:lnTo>
+                  <a:lnTo>
+                    <a:pt x="3657913" y="250531"/>
+                  </a:lnTo>
+                  <a:lnTo>
+                    <a:pt x="3587569" y="238241"/>
+                  </a:lnTo>
+                  <a:lnTo>
+                    <a:pt x="3517224" y="225289"/>
+                  </a:lnTo>
+                  <a:lnTo>
+                    <a:pt x="3446880" y="211641"/>
+                  </a:lnTo>
+                  <a:lnTo>
+                    <a:pt x="3376535" y="197258"/>
+                  </a:lnTo>
+                  <a:lnTo>
+                    <a:pt x="3306191" y="182102"/>
+                  </a:lnTo>
+                  <a:lnTo>
+                    <a:pt x="3235846" y="177087"/>
+                  </a:lnTo>
+                  <a:lnTo>
+                    <a:pt x="3165502" y="174043"/>
+                  </a:lnTo>
+                  <a:lnTo>
+                    <a:pt x="3095157" y="170967"/>
+                  </a:lnTo>
+                  <a:lnTo>
+                    <a:pt x="3024813" y="167861"/>
+                  </a:lnTo>
+                  <a:lnTo>
+                    <a:pt x="2954468" y="164724"/>
+                  </a:lnTo>
+                  <a:lnTo>
+                    <a:pt x="2884124" y="161554"/>
+                  </a:lnTo>
+                  <a:lnTo>
+                    <a:pt x="2813779" y="158353"/>
+                  </a:lnTo>
+                  <a:lnTo>
+                    <a:pt x="2743435" y="155120"/>
+                  </a:lnTo>
+                  <a:lnTo>
+                    <a:pt x="2673090" y="151853"/>
+                  </a:lnTo>
+                  <a:lnTo>
+                    <a:pt x="2602746" y="148554"/>
+                  </a:lnTo>
+                  <a:lnTo>
+                    <a:pt x="2532401" y="145222"/>
+                  </a:lnTo>
+                  <a:lnTo>
+                    <a:pt x="2462057" y="141856"/>
+                  </a:lnTo>
+                  <a:lnTo>
+                    <a:pt x="2391712" y="138456"/>
+                  </a:lnTo>
+                  <a:lnTo>
+                    <a:pt x="2321368" y="135022"/>
+                  </a:lnTo>
+                  <a:lnTo>
+                    <a:pt x="2251023" y="131553"/>
+                  </a:lnTo>
+                  <a:lnTo>
+                    <a:pt x="2180679" y="128049"/>
+                  </a:lnTo>
+                  <a:lnTo>
+                    <a:pt x="2110334" y="124510"/>
+                  </a:lnTo>
+                  <a:lnTo>
+                    <a:pt x="2039990" y="120935"/>
+                  </a:lnTo>
+                  <a:lnTo>
+                    <a:pt x="1969645" y="117325"/>
+                  </a:lnTo>
+                  <a:lnTo>
+                    <a:pt x="1899301" y="113677"/>
+                  </a:lnTo>
+                  <a:lnTo>
+                    <a:pt x="1828956" y="109993"/>
+                  </a:lnTo>
+                  <a:lnTo>
+                    <a:pt x="1758612" y="106272"/>
+                  </a:lnTo>
+                  <a:lnTo>
+                    <a:pt x="1688267" y="102513"/>
+                  </a:lnTo>
+                  <a:lnTo>
+                    <a:pt x="1617923" y="98717"/>
+                  </a:lnTo>
+                  <a:lnTo>
+                    <a:pt x="1547578" y="94882"/>
+                  </a:lnTo>
+                  <a:lnTo>
+                    <a:pt x="1477234" y="91008"/>
+                  </a:lnTo>
+                  <a:lnTo>
+                    <a:pt x="1406889" y="87095"/>
+                  </a:lnTo>
+                  <a:lnTo>
+                    <a:pt x="1336545" y="83143"/>
+                  </a:lnTo>
+                  <a:lnTo>
+                    <a:pt x="1266200" y="79151"/>
+                  </a:lnTo>
+                  <a:lnTo>
+                    <a:pt x="1195856" y="75119"/>
+                  </a:lnTo>
+                  <a:lnTo>
+                    <a:pt x="1125511" y="71046"/>
+                  </a:lnTo>
+                  <a:lnTo>
+                    <a:pt x="1055167" y="66932"/>
+                  </a:lnTo>
+                  <a:lnTo>
+                    <a:pt x="984822" y="62776"/>
+                  </a:lnTo>
+                  <a:lnTo>
+                    <a:pt x="914478" y="58579"/>
+                  </a:lnTo>
+                  <a:lnTo>
+                    <a:pt x="844133" y="54339"/>
+                  </a:lnTo>
+                  <a:lnTo>
+                    <a:pt x="773789" y="50056"/>
+                  </a:lnTo>
+                  <a:lnTo>
+                    <a:pt x="703444" y="45731"/>
+                  </a:lnTo>
+                  <a:lnTo>
+                    <a:pt x="633100" y="41361"/>
+                  </a:lnTo>
+                  <a:lnTo>
+                    <a:pt x="562755" y="36948"/>
+                  </a:lnTo>
+                  <a:lnTo>
+                    <a:pt x="492411" y="32490"/>
+                  </a:lnTo>
+                  <a:lnTo>
+                    <a:pt x="422066" y="27987"/>
+                  </a:lnTo>
+                  <a:lnTo>
+                    <a:pt x="351722" y="23439"/>
+                  </a:lnTo>
+                  <a:lnTo>
+                    <a:pt x="281377" y="18844"/>
+                  </a:lnTo>
+                  <a:lnTo>
+                    <a:pt x="211033" y="14204"/>
+                  </a:lnTo>
+                  <a:lnTo>
+                    <a:pt x="140688" y="9516"/>
+                  </a:lnTo>
+                  <a:lnTo>
+                    <a:pt x="70344" y="4782"/>
+                  </a:lnTo>
+                  <a:lnTo>
+                    <a:pt x="0" y="0"/>
+                  </a:lnTo>
+                </a:path>
+              </a:pathLst>
+            </a:custGeom>
+          </p:spPr>
+          <p:txBody>
+            <a:bodyPr/>
+            <a:lstStyle/>
+            <a:p/>
+          </p:txBody>
+        </p:sp>
+        <p:sp>
+          <p:nvSpPr>
+            <p:cNvPr id="70" name="pl70"/>
+            <p:cNvSpPr/>
+            <p:nvPr/>
+          </p:nvSpPr>
+          <p:spPr>
+            <a:xfrm>
+              <a:off x="1297002" y="4336484"/>
+              <a:ext cx="6902414" cy="1198460"/>
+            </a:xfrm>
+            <a:custGeom>
+              <a:avLst/>
+              <a:pathLst>
+                <a:path w="6902414" h="1198460">
+                  <a:moveTo>
+                    <a:pt x="0" y="0"/>
+                  </a:moveTo>
+                  <a:lnTo>
+                    <a:pt x="8654" y="4886"/>
+                  </a:lnTo>
+                  <a:lnTo>
+                    <a:pt x="78999" y="43379"/>
+                  </a:lnTo>
+                  <a:lnTo>
+                    <a:pt x="149343" y="80690"/>
+                  </a:lnTo>
+                  <a:lnTo>
+                    <a:pt x="219688" y="116854"/>
+                  </a:lnTo>
+                  <a:lnTo>
+                    <a:pt x="290032" y="151906"/>
+                  </a:lnTo>
+                  <a:lnTo>
+                    <a:pt x="360377" y="185881"/>
+                  </a:lnTo>
+                  <a:lnTo>
+                    <a:pt x="430721" y="218811"/>
+                  </a:lnTo>
+                  <a:lnTo>
+                    <a:pt x="501065" y="250729"/>
+                  </a:lnTo>
+                  <a:lnTo>
+                    <a:pt x="571410" y="281666"/>
+                  </a:lnTo>
+                  <a:lnTo>
+                    <a:pt x="641754" y="311652"/>
+                  </a:lnTo>
+                  <a:lnTo>
+                    <a:pt x="712099" y="340717"/>
+                  </a:lnTo>
+                  <a:lnTo>
+                    <a:pt x="782443" y="368888"/>
+                  </a:lnTo>
+                  <a:lnTo>
+                    <a:pt x="852788" y="396193"/>
+                  </a:lnTo>
+                  <a:lnTo>
+                    <a:pt x="923132" y="422658"/>
+                  </a:lnTo>
+                  <a:lnTo>
+                    <a:pt x="993477" y="448311"/>
+                  </a:lnTo>
+                  <a:lnTo>
+                    <a:pt x="1063821" y="473175"/>
+                  </a:lnTo>
+                  <a:lnTo>
+                    <a:pt x="1134166" y="497274"/>
+                  </a:lnTo>
+                  <a:lnTo>
+                    <a:pt x="1204510" y="520633"/>
+                  </a:lnTo>
+                  <a:lnTo>
+                    <a:pt x="1274855" y="543273"/>
+                  </a:lnTo>
+                  <a:lnTo>
+                    <a:pt x="1345199" y="565218"/>
+                  </a:lnTo>
+                  <a:lnTo>
+                    <a:pt x="1415544" y="586489"/>
+                  </a:lnTo>
+                  <a:lnTo>
+                    <a:pt x="1485888" y="607105"/>
+                  </a:lnTo>
+                  <a:lnTo>
+                    <a:pt x="1556233" y="627088"/>
+                  </a:lnTo>
+                  <a:lnTo>
+                    <a:pt x="1626577" y="646456"/>
+                  </a:lnTo>
+                  <a:lnTo>
+                    <a:pt x="1696922" y="665229"/>
+                  </a:lnTo>
+                  <a:lnTo>
+                    <a:pt x="1767266" y="683425"/>
+                  </a:lnTo>
+                  <a:lnTo>
+                    <a:pt x="1837611" y="701062"/>
+                  </a:lnTo>
+                  <a:lnTo>
+                    <a:pt x="1907955" y="718157"/>
+                  </a:lnTo>
+                  <a:lnTo>
+                    <a:pt x="1978300" y="734726"/>
+                  </a:lnTo>
+                  <a:lnTo>
+                    <a:pt x="2048644" y="750786"/>
+                  </a:lnTo>
+                  <a:lnTo>
+                    <a:pt x="2118989" y="766352"/>
+                  </a:lnTo>
+                  <a:lnTo>
+                    <a:pt x="2189333" y="781440"/>
+                  </a:lnTo>
+                  <a:lnTo>
+                    <a:pt x="2259678" y="796064"/>
+                  </a:lnTo>
+                  <a:lnTo>
+                    <a:pt x="2330022" y="810239"/>
+                  </a:lnTo>
+                  <a:lnTo>
+                    <a:pt x="2400367" y="823977"/>
+                  </a:lnTo>
+                  <a:lnTo>
+                    <a:pt x="2470711" y="837294"/>
+                  </a:lnTo>
+                  <a:lnTo>
+                    <a:pt x="2541056" y="850201"/>
+                  </a:lnTo>
+                  <a:lnTo>
+                    <a:pt x="2611400" y="862711"/>
+                  </a:lnTo>
+                  <a:lnTo>
+                    <a:pt x="2681745" y="874837"/>
+                  </a:lnTo>
+                  <a:lnTo>
+                    <a:pt x="2752089" y="886590"/>
+                  </a:lnTo>
+                  <a:lnTo>
+                    <a:pt x="2822434" y="897982"/>
+                  </a:lnTo>
+                  <a:lnTo>
+                    <a:pt x="2892778" y="909024"/>
+                  </a:lnTo>
+                  <a:lnTo>
+                    <a:pt x="2963123" y="919726"/>
+                  </a:lnTo>
+                  <a:lnTo>
+                    <a:pt x="3033467" y="930100"/>
+                  </a:lnTo>
+                  <a:lnTo>
+                    <a:pt x="3103812" y="940154"/>
+                  </a:lnTo>
+                  <a:lnTo>
+                    <a:pt x="3174156" y="949900"/>
+                  </a:lnTo>
+                  <a:lnTo>
+                    <a:pt x="3244501" y="959346"/>
+                  </a:lnTo>
+                  <a:lnTo>
+                    <a:pt x="3314845" y="968501"/>
+                  </a:lnTo>
+                  <a:lnTo>
+                    <a:pt x="3385190" y="977375"/>
+                  </a:lnTo>
+                  <a:lnTo>
+                    <a:pt x="3455534" y="985977"/>
+                  </a:lnTo>
+                  <a:lnTo>
+                    <a:pt x="3525879" y="994313"/>
+                  </a:lnTo>
+                  <a:lnTo>
+                    <a:pt x="3596223" y="1002394"/>
+                  </a:lnTo>
+                  <a:lnTo>
+                    <a:pt x="3666568" y="1010226"/>
+                  </a:lnTo>
+                  <a:lnTo>
+                    <a:pt x="3736912" y="1017818"/>
+                  </a:lnTo>
+                  <a:lnTo>
+                    <a:pt x="3807257" y="1025176"/>
+                  </a:lnTo>
+                  <a:lnTo>
+                    <a:pt x="3877601" y="1032308"/>
+                  </a:lnTo>
+                  <a:lnTo>
+                    <a:pt x="3947946" y="1039221"/>
+                  </a:lnTo>
+                  <a:lnTo>
+                    <a:pt x="4018290" y="1045921"/>
+                  </a:lnTo>
+                  <a:lnTo>
+                    <a:pt x="4088635" y="1052416"/>
+                  </a:lnTo>
+                  <a:lnTo>
+                    <a:pt x="4158979" y="1058710"/>
+                  </a:lnTo>
+                  <a:lnTo>
+                    <a:pt x="4229323" y="1064812"/>
+                  </a:lnTo>
+                  <a:lnTo>
+                    <a:pt x="4299668" y="1070725"/>
+                  </a:lnTo>
+                  <a:lnTo>
+                    <a:pt x="4370012" y="1076457"/>
+                  </a:lnTo>
+                  <a:lnTo>
+                    <a:pt x="4440357" y="1082013"/>
+                  </a:lnTo>
+                  <a:lnTo>
+                    <a:pt x="4510701" y="1087398"/>
+                  </a:lnTo>
+                  <a:lnTo>
+                    <a:pt x="4581046" y="1092617"/>
+                  </a:lnTo>
+                  <a:lnTo>
+                    <a:pt x="4651390" y="1097676"/>
+                  </a:lnTo>
+                  <a:lnTo>
+                    <a:pt x="4721735" y="1102580"/>
+                  </a:lnTo>
+                  <a:lnTo>
+                    <a:pt x="4792079" y="1107333"/>
+                  </a:lnTo>
+                  <a:lnTo>
+                    <a:pt x="4862424" y="1111939"/>
+                  </a:lnTo>
+                  <a:lnTo>
+                    <a:pt x="4932768" y="1116405"/>
+                  </a:lnTo>
+                  <a:lnTo>
+                    <a:pt x="5003113" y="1120732"/>
+                  </a:lnTo>
+                  <a:lnTo>
+                    <a:pt x="5073457" y="1124927"/>
+                  </a:lnTo>
+                  <a:lnTo>
+                    <a:pt x="5143802" y="1128993"/>
+                  </a:lnTo>
+                  <a:lnTo>
+                    <a:pt x="5214146" y="1132934"/>
+                  </a:lnTo>
+                  <a:lnTo>
+                    <a:pt x="5284491" y="1136754"/>
+                  </a:lnTo>
+                  <a:lnTo>
+                    <a:pt x="5354835" y="1140456"/>
+                  </a:lnTo>
+                  <a:lnTo>
+                    <a:pt x="5425180" y="1144045"/>
+                  </a:lnTo>
+                  <a:lnTo>
+                    <a:pt x="5495524" y="1147523"/>
+                  </a:lnTo>
+                  <a:lnTo>
+                    <a:pt x="5565869" y="1150894"/>
+                  </a:lnTo>
+                  <a:lnTo>
+                    <a:pt x="5636213" y="1154162"/>
+                  </a:lnTo>
+                  <a:lnTo>
+                    <a:pt x="5706558" y="1157329"/>
+                  </a:lnTo>
+                  <a:lnTo>
+                    <a:pt x="5776902" y="1160399"/>
+                  </a:lnTo>
+                  <a:lnTo>
+                    <a:pt x="5847247" y="1163375"/>
+                  </a:lnTo>
+                  <a:lnTo>
+                    <a:pt x="5917591" y="1166259"/>
+                  </a:lnTo>
+                  <a:lnTo>
+                    <a:pt x="5987936" y="1169054"/>
+                  </a:lnTo>
+                  <a:lnTo>
+                    <a:pt x="6058280" y="1171764"/>
+                  </a:lnTo>
+                  <a:lnTo>
+                    <a:pt x="6128625" y="1174390"/>
+                  </a:lnTo>
+                  <a:lnTo>
+                    <a:pt x="6198969" y="1176935"/>
+                  </a:lnTo>
+                  <a:lnTo>
+                    <a:pt x="6269314" y="1179402"/>
+                  </a:lnTo>
+                  <a:lnTo>
+                    <a:pt x="6339658" y="1181794"/>
+                  </a:lnTo>
+                  <a:lnTo>
+                    <a:pt x="6410003" y="1184112"/>
+                  </a:lnTo>
+                  <a:lnTo>
+                    <a:pt x="6480347" y="1186358"/>
+                  </a:lnTo>
+                  <a:lnTo>
+                    <a:pt x="6550692" y="1188536"/>
+                  </a:lnTo>
+                  <a:lnTo>
+                    <a:pt x="6621036" y="1190647"/>
+                  </a:lnTo>
+                  <a:lnTo>
+                    <a:pt x="6691381" y="1192692"/>
+                  </a:lnTo>
+                  <a:lnTo>
+                    <a:pt x="6761725" y="1194675"/>
+                  </a:lnTo>
+                  <a:lnTo>
+                    <a:pt x="6832070" y="1196597"/>
+                  </a:lnTo>
+                  <a:lnTo>
+                    <a:pt x="6902414" y="1198460"/>
+                  </a:lnTo>
+                </a:path>
+              </a:pathLst>
+            </a:custGeom>
+            <a:ln w="27101" cap="flat">
+              <a:solidFill>
+                <a:srgbClr val="FF8C00">
+                  <a:alpha val="100000"/>
+                </a:srgbClr>
+              </a:solidFill>
+              <a:prstDash val="solid"/>
+              <a:round/>
+            </a:ln>
+          </p:spPr>
+          <p:txBody>
+            <a:bodyPr/>
+            <a:lstStyle/>
+            <a:p/>
+          </p:txBody>
+        </p:sp>
+        <p:sp>
+          <p:nvSpPr>
+            <p:cNvPr id="71" name="pl71"/>
+            <p:cNvSpPr/>
+            <p:nvPr/>
+          </p:nvSpPr>
+          <p:spPr>
+            <a:xfrm>
+              <a:off x="887106" y="5294352"/>
+              <a:ext cx="7660515" cy="0"/>
+            </a:xfrm>
+            <a:custGeom>
+              <a:avLst/>
+              <a:pathLst>
+                <a:path w="7660515" h="0">
+                  <a:moveTo>
+                    <a:pt x="0" y="0"/>
+                  </a:moveTo>
+                  <a:lnTo>
+                    <a:pt x="7660515" y="0"/>
+                  </a:lnTo>
+                  <a:lnTo>
+                    <a:pt x="7660515" y="0"/>
+                  </a:lnTo>
+                </a:path>
+              </a:pathLst>
+            </a:custGeom>
+            <a:ln w="13550" cap="flat">
+              <a:solidFill>
+                <a:srgbClr val="7F7F7F">
+                  <a:alpha val="100000"/>
+                </a:srgbClr>
+              </a:solidFill>
+              <a:prstDash val="dash"/>
+              <a:round/>
+            </a:ln>
+          </p:spPr>
+          <p:txBody>
+            <a:bodyPr/>
+            <a:lstStyle/>
+            <a:p/>
+          </p:txBody>
+        </p:sp>
+        <p:sp>
+          <p:nvSpPr>
+            <p:cNvPr id="72" name="pl72"/>
+            <p:cNvSpPr/>
+            <p:nvPr/>
+          </p:nvSpPr>
+          <p:spPr>
+            <a:xfrm>
+              <a:off x="4530353" y="4336484"/>
+              <a:ext cx="0" cy="1317069"/>
+            </a:xfrm>
+            <a:custGeom>
+              <a:avLst/>
+              <a:pathLst>
+                <a:path w="0" h="1317069">
+                  <a:moveTo>
+                    <a:pt x="0" y="1317069"/>
+                  </a:moveTo>
+                  <a:lnTo>
+                    <a:pt x="0" y="0"/>
+                  </a:lnTo>
+                  <a:lnTo>
+                    <a:pt x="0" y="0"/>
+                  </a:lnTo>
+                </a:path>
+              </a:pathLst>
+            </a:custGeom>
+            <a:ln w="13550" cap="flat">
+              <a:solidFill>
+                <a:srgbClr val="666666">
+                  <a:alpha val="100000"/>
+                </a:srgbClr>
+              </a:solidFill>
+              <a:prstDash val="dot"/>
+              <a:round/>
+            </a:ln>
+          </p:spPr>
+          <p:txBody>
+            <a:bodyPr/>
+            <a:lstStyle/>
+            <a:p/>
+          </p:txBody>
+        </p:sp>
+        <p:sp>
+          <p:nvSpPr>
+            <p:cNvPr id="73" name="tx73"/>
+            <p:cNvSpPr/>
+            <p:nvPr/>
+          </p:nvSpPr>
+          <p:spPr>
+            <a:xfrm>
+              <a:off x="762297" y="5553636"/>
+              <a:ext cx="62179" cy="80101"/>
+            </a:xfrm>
+            <a:prstGeom prst="rect">
+              <a:avLst/>
+            </a:prstGeom>
+            <a:noFill/>
+          </p:spPr>
+          <p:txBody>
+            <a:bodyPr lIns="0" rIns="0" tIns="0" bIns="0" anchorCtr="1" anchor="ctr" wrap="none"/>
+            <a:lstStyle/>
+            <a:p>
+              <a:pPr algn="l" marL="0" marR="0" indent="0">
+                <a:lnSpc>
+                  <a:spcPts val="880"/>
+                </a:lnSpc>
+                <a:spcBef>
+                  <a:spcPts val="0"/>
+                </a:spcBef>
+                <a:spcAft>
+                  <a:spcPts val="0"/>
+                </a:spcAft>
+              </a:pPr>
+              <a:r>
+                <a:rPr sz="880">
+                  <a:solidFill>
+                    <a:srgbClr val="4D4D4D">
+                      <a:alpha val="100000"/>
+                    </a:srgbClr>
+                  </a:solidFill>
+                  <a:latin typeface="Helvetica"/>
+                  <a:cs typeface="Helvetica"/>
+                </a:rPr>
+                <a:t>0</a:t>
+              </a:r>
+            </a:p>
+          </p:txBody>
+        </p:sp>
+        <p:sp>
+          <p:nvSpPr>
+            <p:cNvPr id="74" name="tx74"/>
+            <p:cNvSpPr/>
+            <p:nvPr/>
+          </p:nvSpPr>
+          <p:spPr>
+            <a:xfrm>
+              <a:off x="762297" y="5254302"/>
+              <a:ext cx="62179" cy="80101"/>
+            </a:xfrm>
+            <a:prstGeom prst="rect">
+              <a:avLst/>
+            </a:prstGeom>
+            <a:noFill/>
+          </p:spPr>
+          <p:txBody>
+            <a:bodyPr lIns="0" rIns="0" tIns="0" bIns="0" anchorCtr="1" anchor="ctr" wrap="none"/>
+            <a:lstStyle/>
+            <a:p>
+              <a:pPr algn="l" marL="0" marR="0" indent="0">
+                <a:lnSpc>
+                  <a:spcPts val="880"/>
+                </a:lnSpc>
+                <a:spcBef>
+                  <a:spcPts val="0"/>
+                </a:spcBef>
+                <a:spcAft>
+                  <a:spcPts val="0"/>
+                </a:spcAft>
+              </a:pPr>
+              <a:r>
+                <a:rPr sz="880">
+                  <a:solidFill>
+                    <a:srgbClr val="4D4D4D">
+                      <a:alpha val="100000"/>
+                    </a:srgbClr>
+                  </a:solidFill>
+                  <a:latin typeface="Helvetica"/>
+                  <a:cs typeface="Helvetica"/>
+                </a:rPr>
+                <a:t>1</a:t>
+              </a:r>
+            </a:p>
+          </p:txBody>
+        </p:sp>
+        <p:sp>
+          <p:nvSpPr>
+            <p:cNvPr id="75" name="tx75"/>
+            <p:cNvSpPr/>
+            <p:nvPr/>
+          </p:nvSpPr>
+          <p:spPr>
+            <a:xfrm>
+              <a:off x="762297" y="4954968"/>
+              <a:ext cx="62179" cy="80101"/>
+            </a:xfrm>
+            <a:prstGeom prst="rect">
+              <a:avLst/>
+            </a:prstGeom>
+            <a:noFill/>
+          </p:spPr>
+          <p:txBody>
+            <a:bodyPr lIns="0" rIns="0" tIns="0" bIns="0" anchorCtr="1" anchor="ctr" wrap="none"/>
+            <a:lstStyle/>
+            <a:p>
+              <a:pPr algn="l" marL="0" marR="0" indent="0">
+                <a:lnSpc>
+                  <a:spcPts val="880"/>
+                </a:lnSpc>
+                <a:spcBef>
+                  <a:spcPts val="0"/>
+                </a:spcBef>
+                <a:spcAft>
+                  <a:spcPts val="0"/>
+                </a:spcAft>
+              </a:pPr>
+              <a:r>
+                <a:rPr sz="880">
+                  <a:solidFill>
+                    <a:srgbClr val="4D4D4D">
+                      <a:alpha val="100000"/>
+                    </a:srgbClr>
+                  </a:solidFill>
+                  <a:latin typeface="Helvetica"/>
+                  <a:cs typeface="Helvetica"/>
+                </a:rPr>
+                <a:t>2</a:t>
+              </a:r>
+            </a:p>
+          </p:txBody>
+        </p:sp>
+        <p:sp>
+          <p:nvSpPr>
+            <p:cNvPr id="76" name="tx76"/>
+            <p:cNvSpPr/>
+            <p:nvPr/>
+          </p:nvSpPr>
+          <p:spPr>
+            <a:xfrm>
+              <a:off x="762297" y="4655634"/>
+              <a:ext cx="62179" cy="80101"/>
+            </a:xfrm>
+            <a:prstGeom prst="rect">
+              <a:avLst/>
+            </a:prstGeom>
+            <a:noFill/>
+          </p:spPr>
+          <p:txBody>
+            <a:bodyPr lIns="0" rIns="0" tIns="0" bIns="0" anchorCtr="1" anchor="ctr" wrap="none"/>
+            <a:lstStyle/>
+            <a:p>
+              <a:pPr algn="l" marL="0" marR="0" indent="0">
+                <a:lnSpc>
+                  <a:spcPts val="880"/>
+                </a:lnSpc>
+                <a:spcBef>
+                  <a:spcPts val="0"/>
+                </a:spcBef>
+                <a:spcAft>
+                  <a:spcPts val="0"/>
+                </a:spcAft>
+              </a:pPr>
+              <a:r>
+                <a:rPr sz="880">
+                  <a:solidFill>
+                    <a:srgbClr val="4D4D4D">
+                      <a:alpha val="100000"/>
+                    </a:srgbClr>
+                  </a:solidFill>
+                  <a:latin typeface="Helvetica"/>
+                  <a:cs typeface="Helvetica"/>
+                </a:rPr>
+                <a:t>3</a:t>
+              </a:r>
+            </a:p>
+          </p:txBody>
+        </p:sp>
+        <p:sp>
+          <p:nvSpPr>
+            <p:cNvPr id="77" name="tx77"/>
+            <p:cNvSpPr/>
+            <p:nvPr/>
+          </p:nvSpPr>
+          <p:spPr>
+            <a:xfrm>
+              <a:off x="762297" y="4356300"/>
+              <a:ext cx="62179" cy="80101"/>
+            </a:xfrm>
+            <a:prstGeom prst="rect">
+              <a:avLst/>
+            </a:prstGeom>
+            <a:noFill/>
+          </p:spPr>
+          <p:txBody>
+            <a:bodyPr lIns="0" rIns="0" tIns="0" bIns="0" anchorCtr="1" anchor="ctr" wrap="none"/>
+            <a:lstStyle/>
+            <a:p>
+              <a:pPr algn="l" marL="0" marR="0" indent="0">
+                <a:lnSpc>
+                  <a:spcPts val="880"/>
+                </a:lnSpc>
+                <a:spcBef>
+                  <a:spcPts val="0"/>
+                </a:spcBef>
+                <a:spcAft>
+                  <a:spcPts val="0"/>
+                </a:spcAft>
+              </a:pPr>
+              <a:r>
+                <a:rPr sz="880">
+                  <a:solidFill>
+                    <a:srgbClr val="4D4D4D">
+                      <a:alpha val="100000"/>
+                    </a:srgbClr>
+                  </a:solidFill>
+                  <a:latin typeface="Helvetica"/>
+                  <a:cs typeface="Helvetica"/>
+                </a:rPr>
+                <a:t>4</a:t>
+              </a:r>
+            </a:p>
+          </p:txBody>
+        </p:sp>
+        <p:sp>
+          <p:nvSpPr>
+            <p:cNvPr id="78" name="tx78"/>
+            <p:cNvSpPr/>
+            <p:nvPr/>
+          </p:nvSpPr>
+          <p:spPr>
+            <a:xfrm>
+              <a:off x="1241001" y="5716183"/>
+              <a:ext cx="161574" cy="80101"/>
+            </a:xfrm>
+            <a:prstGeom prst="rect">
+              <a:avLst/>
+            </a:prstGeom>
+            <a:noFill/>
+          </p:spPr>
+          <p:txBody>
+            <a:bodyPr lIns="0" rIns="0" tIns="0" bIns="0" anchorCtr="1" anchor="ctr" wrap="none"/>
+            <a:lstStyle/>
+            <a:p>
+              <a:pPr algn="l" marL="0" marR="0" indent="0">
+                <a:lnSpc>
+                  <a:spcPts val="880"/>
+                </a:lnSpc>
+                <a:spcBef>
+                  <a:spcPts val="0"/>
+                </a:spcBef>
+                <a:spcAft>
+                  <a:spcPts val="0"/>
+                </a:spcAft>
+              </a:pPr>
+              <a:r>
+                <a:rPr sz="880">
+                  <a:solidFill>
+                    <a:srgbClr val="4D4D4D">
+                      <a:alpha val="100000"/>
+                    </a:srgbClr>
+                  </a:solidFill>
+                  <a:latin typeface="Helvetica"/>
+                  <a:cs typeface="Helvetica"/>
+                </a:rPr>
+                <a:t>-40</a:t>
+              </a:r>
+            </a:p>
+          </p:txBody>
+        </p:sp>
+        <p:sp>
+          <p:nvSpPr>
+            <p:cNvPr id="79" name="tx79"/>
+            <p:cNvSpPr/>
+            <p:nvPr/>
+          </p:nvSpPr>
+          <p:spPr>
+            <a:xfrm>
+              <a:off x="2054602" y="5716183"/>
+              <a:ext cx="161574" cy="80101"/>
+            </a:xfrm>
+            <a:prstGeom prst="rect">
+              <a:avLst/>
+            </a:prstGeom>
+            <a:noFill/>
+          </p:spPr>
+          <p:txBody>
+            <a:bodyPr lIns="0" rIns="0" tIns="0" bIns="0" anchorCtr="1" anchor="ctr" wrap="none"/>
+            <a:lstStyle/>
+            <a:p>
+              <a:pPr algn="l" marL="0" marR="0" indent="0">
+                <a:lnSpc>
+                  <a:spcPts val="880"/>
+                </a:lnSpc>
+                <a:spcBef>
+                  <a:spcPts val="0"/>
+                </a:spcBef>
+                <a:spcAft>
+                  <a:spcPts val="0"/>
+                </a:spcAft>
+              </a:pPr>
+              <a:r>
+                <a:rPr sz="880">
+                  <a:solidFill>
+                    <a:srgbClr val="4D4D4D">
+                      <a:alpha val="100000"/>
+                    </a:srgbClr>
+                  </a:solidFill>
+                  <a:latin typeface="Helvetica"/>
+                  <a:cs typeface="Helvetica"/>
+                </a:rPr>
+                <a:t>-30</a:t>
+              </a:r>
+            </a:p>
+          </p:txBody>
+        </p:sp>
+        <p:sp>
+          <p:nvSpPr>
+            <p:cNvPr id="80" name="tx80"/>
+            <p:cNvSpPr/>
+            <p:nvPr/>
+          </p:nvSpPr>
+          <p:spPr>
+            <a:xfrm>
+              <a:off x="2868203" y="5716183"/>
+              <a:ext cx="161574" cy="80101"/>
+            </a:xfrm>
+            <a:prstGeom prst="rect">
+              <a:avLst/>
+            </a:prstGeom>
+            <a:noFill/>
+          </p:spPr>
+          <p:txBody>
+            <a:bodyPr lIns="0" rIns="0" tIns="0" bIns="0" anchorCtr="1" anchor="ctr" wrap="none"/>
+            <a:lstStyle/>
+            <a:p>
+              <a:pPr algn="l" marL="0" marR="0" indent="0">
+                <a:lnSpc>
+                  <a:spcPts val="880"/>
+                </a:lnSpc>
+                <a:spcBef>
+                  <a:spcPts val="0"/>
+                </a:spcBef>
+                <a:spcAft>
+                  <a:spcPts val="0"/>
+                </a:spcAft>
+              </a:pPr>
+              <a:r>
+                <a:rPr sz="880">
+                  <a:solidFill>
+                    <a:srgbClr val="4D4D4D">
+                      <a:alpha val="100000"/>
+                    </a:srgbClr>
+                  </a:solidFill>
+                  <a:latin typeface="Helvetica"/>
+                  <a:cs typeface="Helvetica"/>
+                </a:rPr>
+                <a:t>-20</a:t>
+              </a:r>
+            </a:p>
+          </p:txBody>
+        </p:sp>
+        <p:sp>
+          <p:nvSpPr>
+            <p:cNvPr id="81" name="tx81"/>
+            <p:cNvSpPr/>
+            <p:nvPr/>
+          </p:nvSpPr>
+          <p:spPr>
+            <a:xfrm>
+              <a:off x="3681805" y="5716183"/>
+              <a:ext cx="161574" cy="80101"/>
+            </a:xfrm>
+            <a:prstGeom prst="rect">
+              <a:avLst/>
+            </a:prstGeom>
+            <a:noFill/>
+          </p:spPr>
+          <p:txBody>
+            <a:bodyPr lIns="0" rIns="0" tIns="0" bIns="0" anchorCtr="1" anchor="ctr" wrap="none"/>
+            <a:lstStyle/>
+            <a:p>
+              <a:pPr algn="l" marL="0" marR="0" indent="0">
+                <a:lnSpc>
+                  <a:spcPts val="880"/>
+                </a:lnSpc>
+                <a:spcBef>
+                  <a:spcPts val="0"/>
+                </a:spcBef>
+                <a:spcAft>
+                  <a:spcPts val="0"/>
+                </a:spcAft>
+              </a:pPr>
+              <a:r>
+                <a:rPr sz="880">
+                  <a:solidFill>
+                    <a:srgbClr val="4D4D4D">
+                      <a:alpha val="100000"/>
+                    </a:srgbClr>
+                  </a:solidFill>
+                  <a:latin typeface="Helvetica"/>
+                  <a:cs typeface="Helvetica"/>
+                </a:rPr>
+                <a:t>-10</a:t>
+              </a:r>
+            </a:p>
+          </p:txBody>
+        </p:sp>
+        <p:sp>
+          <p:nvSpPr>
+            <p:cNvPr id="82" name="tx82"/>
+            <p:cNvSpPr/>
+            <p:nvPr/>
+          </p:nvSpPr>
+          <p:spPr>
+            <a:xfrm>
+              <a:off x="4545104" y="5716183"/>
+              <a:ext cx="62179" cy="80101"/>
+            </a:xfrm>
+            <a:prstGeom prst="rect">
+              <a:avLst/>
+            </a:prstGeom>
+            <a:noFill/>
+          </p:spPr>
+          <p:txBody>
+            <a:bodyPr lIns="0" rIns="0" tIns="0" bIns="0" anchorCtr="1" anchor="ctr" wrap="none"/>
+            <a:lstStyle/>
+            <a:p>
+              <a:pPr algn="l" marL="0" marR="0" indent="0">
+                <a:lnSpc>
+                  <a:spcPts val="880"/>
+                </a:lnSpc>
+                <a:spcBef>
+                  <a:spcPts val="0"/>
+                </a:spcBef>
+                <a:spcAft>
+                  <a:spcPts val="0"/>
+                </a:spcAft>
+              </a:pPr>
+              <a:r>
+                <a:rPr sz="880">
+                  <a:solidFill>
+                    <a:srgbClr val="4D4D4D">
+                      <a:alpha val="100000"/>
+                    </a:srgbClr>
+                  </a:solidFill>
+                  <a:latin typeface="Helvetica"/>
+                  <a:cs typeface="Helvetica"/>
+                </a:rPr>
+                <a:t>0</a:t>
+              </a:r>
+            </a:p>
+          </p:txBody>
+        </p:sp>
+        <p:sp>
+          <p:nvSpPr>
+            <p:cNvPr id="83" name="tx83"/>
+            <p:cNvSpPr/>
+            <p:nvPr/>
+          </p:nvSpPr>
+          <p:spPr>
+            <a:xfrm>
+              <a:off x="5327615" y="5716183"/>
+              <a:ext cx="124358" cy="80101"/>
+            </a:xfrm>
+            <a:prstGeom prst="rect">
+              <a:avLst/>
+            </a:prstGeom>
+            <a:noFill/>
+          </p:spPr>
+          <p:txBody>
+            <a:bodyPr lIns="0" rIns="0" tIns="0" bIns="0" anchorCtr="1" anchor="ctr" wrap="none"/>
+            <a:lstStyle/>
+            <a:p>
+              <a:pPr algn="l" marL="0" marR="0" indent="0">
+                <a:lnSpc>
+                  <a:spcPts val="880"/>
+                </a:lnSpc>
+                <a:spcBef>
+                  <a:spcPts val="0"/>
+                </a:spcBef>
+                <a:spcAft>
+                  <a:spcPts val="0"/>
+                </a:spcAft>
+              </a:pPr>
+              <a:r>
+                <a:rPr sz="880">
+                  <a:solidFill>
+                    <a:srgbClr val="4D4D4D">
+                      <a:alpha val="100000"/>
+                    </a:srgbClr>
+                  </a:solidFill>
+                  <a:latin typeface="Helvetica"/>
+                  <a:cs typeface="Helvetica"/>
+                </a:rPr>
+                <a:t>10</a:t>
+              </a:r>
+            </a:p>
+          </p:txBody>
+        </p:sp>
+        <p:sp>
+          <p:nvSpPr>
+            <p:cNvPr id="84" name="tx84"/>
+            <p:cNvSpPr/>
+            <p:nvPr/>
+          </p:nvSpPr>
+          <p:spPr>
+            <a:xfrm>
+              <a:off x="6141217" y="5716183"/>
+              <a:ext cx="124358" cy="80101"/>
+            </a:xfrm>
+            <a:prstGeom prst="rect">
+              <a:avLst/>
+            </a:prstGeom>
+            <a:noFill/>
+          </p:spPr>
+          <p:txBody>
+            <a:bodyPr lIns="0" rIns="0" tIns="0" bIns="0" anchorCtr="1" anchor="ctr" wrap="none"/>
+            <a:lstStyle/>
+            <a:p>
+              <a:pPr algn="l" marL="0" marR="0" indent="0">
+                <a:lnSpc>
+                  <a:spcPts val="880"/>
+                </a:lnSpc>
+                <a:spcBef>
+                  <a:spcPts val="0"/>
+                </a:spcBef>
+                <a:spcAft>
+                  <a:spcPts val="0"/>
+                </a:spcAft>
+              </a:pPr>
+              <a:r>
+                <a:rPr sz="880">
+                  <a:solidFill>
+                    <a:srgbClr val="4D4D4D">
+                      <a:alpha val="100000"/>
+                    </a:srgbClr>
+                  </a:solidFill>
+                  <a:latin typeface="Helvetica"/>
+                  <a:cs typeface="Helvetica"/>
+                </a:rPr>
+                <a:t>20</a:t>
+              </a:r>
+            </a:p>
+          </p:txBody>
+        </p:sp>
+        <p:sp>
+          <p:nvSpPr>
+            <p:cNvPr id="85" name="tx85"/>
+            <p:cNvSpPr/>
+            <p:nvPr/>
+          </p:nvSpPr>
+          <p:spPr>
+            <a:xfrm>
+              <a:off x="6954818" y="5716183"/>
+              <a:ext cx="124358" cy="80101"/>
+            </a:xfrm>
+            <a:prstGeom prst="rect">
+              <a:avLst/>
+            </a:prstGeom>
+            <a:noFill/>
+          </p:spPr>
+          <p:txBody>
+            <a:bodyPr lIns="0" rIns="0" tIns="0" bIns="0" anchorCtr="1" anchor="ctr" wrap="none"/>
+            <a:lstStyle/>
+            <a:p>
+              <a:pPr algn="l" marL="0" marR="0" indent="0">
+                <a:lnSpc>
+                  <a:spcPts val="880"/>
+                </a:lnSpc>
+                <a:spcBef>
+                  <a:spcPts val="0"/>
+                </a:spcBef>
+                <a:spcAft>
+                  <a:spcPts val="0"/>
+                </a:spcAft>
+              </a:pPr>
+              <a:r>
+                <a:rPr sz="880">
+                  <a:solidFill>
+                    <a:srgbClr val="4D4D4D">
+                      <a:alpha val="100000"/>
+                    </a:srgbClr>
+                  </a:solidFill>
+                  <a:latin typeface="Helvetica"/>
+                  <a:cs typeface="Helvetica"/>
+                </a:rPr>
+                <a:t>30</a:t>
+              </a:r>
+            </a:p>
+          </p:txBody>
+        </p:sp>
+        <p:sp>
+          <p:nvSpPr>
+            <p:cNvPr id="86" name="tx86"/>
+            <p:cNvSpPr/>
+            <p:nvPr/>
+          </p:nvSpPr>
+          <p:spPr>
+            <a:xfrm>
+              <a:off x="7768419" y="5716183"/>
+              <a:ext cx="124358" cy="80101"/>
+            </a:xfrm>
+            <a:prstGeom prst="rect">
+              <a:avLst/>
+            </a:prstGeom>
+            <a:noFill/>
+          </p:spPr>
+          <p:txBody>
+            <a:bodyPr lIns="0" rIns="0" tIns="0" bIns="0" anchorCtr="1" anchor="ctr" wrap="none"/>
+            <a:lstStyle/>
+            <a:p>
+              <a:pPr algn="l" marL="0" marR="0" indent="0">
+                <a:lnSpc>
+                  <a:spcPts val="880"/>
+                </a:lnSpc>
+                <a:spcBef>
+                  <a:spcPts val="0"/>
+                </a:spcBef>
+                <a:spcAft>
+                  <a:spcPts val="0"/>
+                </a:spcAft>
+              </a:pPr>
+              <a:r>
+                <a:rPr sz="880">
+                  <a:solidFill>
+                    <a:srgbClr val="4D4D4D">
+                      <a:alpha val="100000"/>
+                    </a:srgbClr>
+                  </a:solidFill>
+                  <a:latin typeface="Helvetica"/>
+                  <a:cs typeface="Helvetica"/>
+                </a:rPr>
+                <a:t>40</a:t>
+              </a:r>
+            </a:p>
+          </p:txBody>
+        </p:sp>
+        <p:sp>
+          <p:nvSpPr>
+            <p:cNvPr id="87" name="tx87"/>
+            <p:cNvSpPr/>
+            <p:nvPr/>
+          </p:nvSpPr>
+          <p:spPr>
+            <a:xfrm>
+              <a:off x="2928340" y="5855859"/>
+              <a:ext cx="3578047" cy="100218"/>
+            </a:xfrm>
+            <a:prstGeom prst="rect">
+              <a:avLst/>
+            </a:prstGeom>
+            <a:noFill/>
+          </p:spPr>
+          <p:txBody>
+            <a:bodyPr lIns="0" rIns="0" tIns="0" bIns="0" anchorCtr="1" anchor="ctr" wrap="none"/>
+            <a:lstStyle/>
+            <a:p>
+              <a:pPr algn="l" marL="0" marR="0" indent="0">
+                <a:lnSpc>
+                  <a:spcPts val="1100"/>
+                </a:lnSpc>
+                <a:spcBef>
+                  <a:spcPts val="0"/>
+                </a:spcBef>
+                <a:spcAft>
+                  <a:spcPts val="0"/>
+                </a:spcAft>
+              </a:pPr>
+              <a:r>
+                <a:rPr sz="1100">
+                  <a:solidFill>
+                    <a:srgbClr val="000000">
+                      <a:alpha val="100000"/>
+                    </a:srgbClr>
+                  </a:solidFill>
+                  <a:latin typeface="Helvetica"/>
+                  <a:cs typeface="Helvetica"/>
+                </a:rPr>
+                <a:t>eGFR difference (%): 100 × (CKD-EPI Cr-Cys − CG) / CG</a:t>
+              </a:r>
+            </a:p>
+          </p:txBody>
+        </p:sp>
+        <p:sp>
+          <p:nvSpPr>
+            <p:cNvPr id="88" name="tx88"/>
+            <p:cNvSpPr/>
+            <p:nvPr/>
+          </p:nvSpPr>
+          <p:spPr>
+            <a:xfrm rot="-5400000">
+              <a:off x="138035" y="4944909"/>
+              <a:ext cx="1016904" cy="100218"/>
+            </a:xfrm>
+            <a:prstGeom prst="rect">
+              <a:avLst/>
+            </a:prstGeom>
+            <a:noFill/>
+          </p:spPr>
+          <p:txBody>
+            <a:bodyPr lIns="0" rIns="0" tIns="0" bIns="0" anchorCtr="1" anchor="ctr" wrap="none"/>
+            <a:lstStyle/>
+            <a:p>
+              <a:pPr algn="l" marL="0" marR="0" indent="0">
+                <a:lnSpc>
+                  <a:spcPts val="1100"/>
+                </a:lnSpc>
+                <a:spcBef>
+                  <a:spcPts val="0"/>
+                </a:spcBef>
+                <a:spcAft>
+                  <a:spcPts val="0"/>
+                </a:spcAft>
+              </a:pPr>
+              <a:r>
+                <a:rPr sz="1100">
+                  <a:solidFill>
+                    <a:srgbClr val="000000">
+                      <a:alpha val="100000"/>
+                    </a:srgbClr>
+                  </a:solidFill>
+                  <a:latin typeface="Helvetica"/>
+                  <a:cs typeface="Helvetica"/>
+                </a:rPr>
+                <a:t>subHR (95% CI)</a:t>
+              </a:r>
+            </a:p>
+          </p:txBody>
+        </p:sp>
+        <p:sp>
+          <p:nvSpPr>
+            <p:cNvPr id="89" name="tx89"/>
+            <p:cNvSpPr/>
+            <p:nvPr/>
+          </p:nvSpPr>
+          <p:spPr>
+            <a:xfrm>
+              <a:off x="887106" y="4159544"/>
+              <a:ext cx="6321612" cy="82021"/>
+            </a:xfrm>
+            <a:prstGeom prst="rect">
+              <a:avLst/>
+            </a:prstGeom>
+            <a:noFill/>
+          </p:spPr>
+          <p:txBody>
+            <a:bodyPr lIns="0" rIns="0" tIns="0" bIns="0" anchorCtr="1" anchor="ctr" wrap="none"/>
+            <a:lstStyle/>
+            <a:p>
+              <a:pPr algn="l" marL="0" marR="0" indent="0">
+                <a:lnSpc>
+                  <a:spcPts val="900"/>
+                </a:lnSpc>
+                <a:spcBef>
+                  <a:spcPts val="0"/>
+                </a:spcBef>
+                <a:spcAft>
+                  <a:spcPts val="0"/>
+                </a:spcAft>
+              </a:pPr>
+              <a:r>
+                <a:rPr sz="900">
+                  <a:solidFill>
+                    <a:srgbClr val="404040">
+                      <a:alpha val="100000"/>
+                    </a:srgbClr>
+                  </a:solidFill>
+                  <a:latin typeface="Helvetica"/>
+                  <a:cs typeface="Helvetica"/>
+                </a:rPr>
+                <a:t>subHR per 10 % decline: 1.43 (1.12-1.83), p = 0.004  |  per IQR decline (Δ = 29.9 %): 2.95 (1.42-6.13)  |  IQR: [-15.0, 14.9] %</a:t>
+              </a:r>
+            </a:p>
+          </p:txBody>
+        </p:sp>
+        <p:sp>
+          <p:nvSpPr>
+            <p:cNvPr id="90" name="tx90"/>
+            <p:cNvSpPr/>
+            <p:nvPr/>
+          </p:nvSpPr>
+          <p:spPr>
+            <a:xfrm>
+              <a:off x="887106" y="3932770"/>
               <a:ext cx="3780403" cy="120152"/>
             </a:xfrm>
             <a:prstGeom prst="rect">
